--- a/projects/drug-information-practical/slides/ch01-drug-information-centre.pptx
+++ b/projects/drug-information-practical/slides/ch01-drug-information-centre.pptx
@@ -28,6 +28,7 @@
     <p:sldId id="276" r:id="rId28"/>
     <p:sldId id="277" r:id="rId29"/>
     <p:sldId id="278" r:id="rId30"/>
+    <p:sldId id="279" r:id="rId31"/>
   </p:sldIdLst>
   <p:sldSz cx="12191695" cy="6858000" type="screen4x3"/>
   <p:notesSz cx="6858000" cy="9144000"/>
@@ -594,7 +595,7 @@
           <a:lstStyle/>
           <a:p>
             <a:r>
-              <a:t>Answer B: This is the definition; it includes answers to the public. A, C and D are other activities.</a:t>
+              <a:t>Discuss with the class: what would you ask, check and say?</a:t>
             </a:r>
           </a:p>
         </p:txBody>
@@ -664,7 +665,7 @@
           <a:lstStyle/>
           <a:p>
             <a:r>
-              <a:t>Answer C: A DIC gives information; it does not make medicines. A, B and D are core DIC work.</a:t>
+              <a:t>Answer B: This is the definition; it includes answers to the public. A, C and D are other activities.</a:t>
             </a:r>
           </a:p>
         </p:txBody>
@@ -734,7 +735,7 @@
           <a:lstStyle/>
           <a:p>
             <a:r>
-              <a:t>Answer A: Companies promote their own products, so their information may be biased. B, C and D are not always true.</a:t>
+              <a:t>Answer C: A DIC gives information; it does not make medicines. A, B and D are core DIC work.</a:t>
             </a:r>
           </a:p>
         </p:txBody>
@@ -804,7 +805,7 @@
           <a:lstStyle/>
           <a:p>
             <a:r>
-              <a:t>Answer C: Asking why reveals the real problem, such as swallowing difficulty or a feeding tube. A, B and D come later.</a:t>
+              <a:t>Answer A: Companies promote their own products, so their information may be biased. B, C and D are not always true.</a:t>
             </a:r>
           </a:p>
         </p:txBody>
@@ -874,7 +875,7 @@
           <a:lstStyle/>
           <a:p>
             <a:r>
-              <a:t>Answer D: The request ends with follow-up and documentation. A, B and C come earlier.</a:t>
+              <a:t>Answer C: Asking why reveals the real problem, such as swallowing difficulty or a feeding tube. A, B and D come later.</a:t>
             </a:r>
           </a:p>
         </p:txBody>
@@ -944,6 +945,76 @@
           <a:lstStyle/>
           <a:p>
             <a:r>
+              <a:t>Answer D: The request ends with follow-up and documentation. A, B and C come earlier.</a:t>
+            </a:r>
+          </a:p>
+        </p:txBody>
+      </p:sp>
+      <p:sp>
+        <p:nvSpPr>
+          <p:cNvPr id="4" name="Slide Number Placeholder 3"/>
+          <p:cNvSpPr>
+            <a:spLocks noGrp="1"/>
+          </p:cNvSpPr>
+          <p:nvPr>
+            <p:ph type="sldNum" idx="5" sz="quarter"/>
+          </p:nvPr>
+        </p:nvSpPr>
+        <p:spPr/>
+      </p:sp>
+    </p:spTree>
+  </p:cSld>
+  <p:clrMapOvr>
+    <a:masterClrMapping/>
+  </p:clrMapOvr>
+</p:notes>
+</file>
+
+<file path=ppt/notesSlides/notesSlide16.xml><?xml version="1.0" encoding="utf-8"?>
+<p:notes xmlns:a="http://schemas.openxmlformats.org/drawingml/2006/main" xmlns:p="http://schemas.openxmlformats.org/presentationml/2006/main" xmlns:r="http://schemas.openxmlformats.org/officeDocument/2006/relationships">
+  <p:cSld>
+    <p:spTree>
+      <p:nvGrpSpPr>
+        <p:cNvPr id="1" name=""/>
+        <p:cNvGrpSpPr/>
+        <p:nvPr/>
+      </p:nvGrpSpPr>
+      <p:grpSpPr>
+        <a:xfrm>
+          <a:off x="0" y="0"/>
+          <a:ext cx="0" cy="0"/>
+          <a:chOff x="0" y="0"/>
+          <a:chExt cx="0" cy="0"/>
+        </a:xfrm>
+      </p:grpSpPr>
+      <p:sp>
+        <p:nvSpPr>
+          <p:cNvPr id="2" name="Slide Image Placeholder 1"/>
+          <p:cNvSpPr>
+            <a:spLocks noGrp="1"/>
+          </p:cNvSpPr>
+          <p:nvPr>
+            <p:ph type="sldImg" idx="2"/>
+          </p:nvPr>
+        </p:nvSpPr>
+        <p:spPr/>
+      </p:sp>
+      <p:sp>
+        <p:nvSpPr>
+          <p:cNvPr id="3" name="Notes Placeholder 2"/>
+          <p:cNvSpPr>
+            <a:spLocks noGrp="1"/>
+          </p:cNvSpPr>
+          <p:nvPr>
+            <p:ph type="body" idx="3" sz="quarter"/>
+          </p:nvPr>
+        </p:nvSpPr>
+        <p:spPr/>
+        <p:txBody>
+          <a:bodyPr/>
+          <a:lstStyle/>
+          <a:p>
+            <a:r>
               <a:t>Model answer: (a) Age, kidney function (eGFR), liver function, heart failure or other illness, planned contrast scans or surgery, and other drugs. (b) Often the real question is whether metformin is safe with reduced kidney function or before an iodinated contrast scan. (c) Give a clear answer with its source, check that the doctor received it, and record the request.</a:t>
             </a:r>
           </a:p>
@@ -1294,7 +1365,7 @@
           <a:lstStyle/>
           <a:p>
             <a:r>
-              <a:t>A good answer follows seven steps. Step 3 is the one most often skipped. A person may ask "Is drug X available as a liquid?" when the real problem is that the patient cannot swallow tablets. The right answer may then be a different drug.</a:t>
+              <a:t>Health teams face three problems when they look for drug information: So the demand for fast, reliable and accurate drug information keeps growing. A pharmacist who answers well prevents errors and saves time for the whole team.</a:t>
             </a:r>
           </a:p>
         </p:txBody>
@@ -1504,7 +1575,7 @@
           <a:lstStyle/>
           <a:p>
             <a:r>
-              <a:t>Discuss with the class: what would you ask, check and say?</a:t>
+              <a:t>A good answer follows seven steps. Step 3 is the one most often skipped. A person may ask "Is drug X available as a liquid?" when the real problem is that the patient cannot swallow tablets. The right answer may then be a different drug.</a:t>
             </a:r>
           </a:p>
         </p:txBody>
@@ -4544,7 +4615,7 @@
             <a:r>
               <a:rPr sz="28000" i="0" b="1">
                 <a:solidFill>
-                  <a:srgbClr val="8C3A22"/>
+                  <a:srgbClr val="8B3C25"/>
                 </a:solidFill>
                 <a:latin typeface="Cambria"/>
               </a:rPr>
@@ -4637,7 +4708,7 @@
             <a:r>
               <a:rPr sz="1200" i="0" b="1" spc="200">
                 <a:solidFill>
-                  <a:srgbClr val="F3E6D8"/>
+                  <a:srgbClr val="F2E5E1"/>
                 </a:solidFill>
                 <a:latin typeface="Calibri"/>
               </a:rPr>
@@ -4671,7 +4742,7 @@
             <a:r>
               <a:rPr sz="1400" i="0" b="1" spc="200">
                 <a:solidFill>
-                  <a:srgbClr val="F3E6D8"/>
+                  <a:srgbClr val="F2E5E1"/>
                 </a:solidFill>
                 <a:latin typeface="Calibri"/>
               </a:rPr>
@@ -4703,7 +4774,7 @@
             <a:r>
               <a:rPr sz="2000" i="1" b="0">
                 <a:solidFill>
-                  <a:srgbClr val="F3E6D8"/>
+                  <a:srgbClr val="F2E5E1"/>
                 </a:solidFill>
                 <a:latin typeface="Cambria"/>
               </a:rPr>
@@ -4737,11 +4808,11 @@
             <a:r>
               <a:rPr sz="1300" i="0" b="0">
                 <a:solidFill>
-                  <a:srgbClr val="F3E6D8"/>
-                </a:solidFill>
-                <a:latin typeface="Calibri"/>
-              </a:rPr>
-              <a:t>45-minute practical section  ·  5 questions  ·  1 practice case</a:t>
+                  <a:srgbClr val="F2E5E1"/>
+                </a:solidFill>
+                <a:latin typeface="Calibri"/>
+              </a:rPr>
+              <a:t>45 minutes  ·  5 questions  ·  1 practice case</a:t>
             </a:r>
           </a:p>
         </p:txBody>
@@ -4809,7 +4880,7 @@
           </a:fontRef>
         </p:style>
         <p:txBody>
-          <a:bodyPr rtlCol="0" anchor="ctr" lIns="0" rIns="0"/>
+          <a:bodyPr rtlCol="0" anchor="ctr" lIns="0" rIns="0" tIns="0" bIns="0"/>
           <a:lstStyle/>
           <a:p>
             <a:pPr algn="ctr"/>
@@ -4988,115 +5059,14 @@
       </p:pic>
       <p:sp>
         <p:nvSpPr>
-          <p:cNvPr id="8" name="Rounded Rectangle 7"/>
-          <p:cNvSpPr/>
-          <p:nvPr/>
-        </p:nvSpPr>
-        <p:spPr>
-          <a:xfrm>
-            <a:off x="1645919" y="2103120"/>
-            <a:ext cx="8899855" cy="2377440"/>
-          </a:xfrm>
-          <a:prstGeom prst="roundRect">
-            <a:avLst>
-              <a:gd name="adj" fmla="val 6000"/>
-            </a:avLst>
-          </a:prstGeom>
-          <a:solidFill>
-            <a:srgbClr val="FBF3EE"/>
-          </a:solidFill>
-          <a:ln>
-            <a:noFill/>
-          </a:ln>
-          <a:effectLst/>
-        </p:spPr>
-        <p:style>
-          <a:lnRef idx="1">
-            <a:schemeClr val="accent1"/>
-          </a:lnRef>
-          <a:fillRef idx="3">
-            <a:schemeClr val="accent1"/>
-          </a:fillRef>
-          <a:effectRef idx="2">
-            <a:schemeClr val="accent1"/>
-          </a:effectRef>
-          <a:fontRef idx="minor">
-            <a:schemeClr val="lt1"/>
-          </a:fontRef>
-        </p:style>
-        <p:txBody>
-          <a:bodyPr rtlCol="0" anchor="ctr"/>
-          <a:lstStyle/>
-          <a:p>
-            <a:pPr algn="ctr"/>
-          </a:p>
-        </p:txBody>
-      </p:sp>
-      <p:sp>
-        <p:nvSpPr>
-          <p:cNvPr id="9" name="Rounded Rectangle 8"/>
-          <p:cNvSpPr/>
-          <p:nvPr/>
-        </p:nvSpPr>
-        <p:spPr>
-          <a:xfrm>
-            <a:off x="1920239" y="2331720"/>
-            <a:ext cx="996695" cy="310896"/>
-          </a:xfrm>
-          <a:prstGeom prst="roundRect">
-            <a:avLst>
-              <a:gd name="adj" fmla="val 50000"/>
-            </a:avLst>
-          </a:prstGeom>
-          <a:solidFill>
-            <a:srgbClr val="A4472B"/>
-          </a:solidFill>
-          <a:ln>
-            <a:noFill/>
-          </a:ln>
-          <a:effectLst/>
-        </p:spPr>
-        <p:style>
-          <a:lnRef idx="1">
-            <a:schemeClr val="accent1"/>
-          </a:lnRef>
-          <a:fillRef idx="3">
-            <a:schemeClr val="accent1"/>
-          </a:fillRef>
-          <a:effectRef idx="2">
-            <a:schemeClr val="accent1"/>
-          </a:effectRef>
-          <a:fontRef idx="minor">
-            <a:schemeClr val="lt1"/>
-          </a:fontRef>
-        </p:style>
-        <p:txBody>
-          <a:bodyPr rtlCol="0" anchor="ctr" lIns="0" rIns="0" tIns="0" bIns="0"/>
-          <a:lstStyle/>
-          <a:p>
-            <a:pPr algn="ctr"/>
-            <a:r>
-              <a:rPr sz="1050" i="0" b="1" spc="100">
-                <a:solidFill>
-                  <a:srgbClr val="FFFFFF"/>
-                </a:solidFill>
-                <a:latin typeface="Calibri"/>
-              </a:rPr>
-              <a:t>EXAM TIP</a:t>
-            </a:r>
-          </a:p>
-        </p:txBody>
-      </p:sp>
-      <p:sp>
-        <p:nvSpPr>
-          <p:cNvPr id="10" name="TextBox 9"/>
+          <p:cNvPr id="8" name="TextBox 7"/>
           <p:cNvSpPr txBox="1"/>
           <p:nvPr/>
         </p:nvSpPr>
         <p:spPr>
           <a:xfrm>
-            <a:off x="1920239" y="2788920"/>
-            <a:ext cx="8351215" cy="1508760"/>
+            <a:off x="548640" y="1554480"/>
+            <a:ext cx="11094415" cy="1092708"/>
           </a:xfrm>
           <a:prstGeom prst="rect">
             <a:avLst/>
@@ -5109,18 +5079,594 @@
           </a:bodyPr>
           <a:lstStyle/>
           <a:p>
-            <a:r>
-              <a:rPr sz="2600" i="0" b="0">
+            <a:pPr>
+              <a:spcAft>
+                <a:spcPts val="800"/>
+              </a:spcAft>
+            </a:pPr>
+            <a:r>
+              <a:rPr sz="1800" i="0" b="0">
                 <a:solidFill>
                   <a:srgbClr val="2B211C"/>
                 </a:solidFill>
                 <a:latin typeface="Calibri"/>
               </a:rPr>
-              <a:t>Learn the seven steps in order: requester, background, real question, classify, search, answer, follow up.</a:t>
-            </a:r>
-          </a:p>
-        </p:txBody>
-      </p:sp>
+              <a:t>Step 3 is the one most often skipped. A person may ask "Is drug X available as a liquid?" when the real problem is that the patient cannot swallow tablets. The right answer may then be a different drug.</a:t>
+            </a:r>
+          </a:p>
+        </p:txBody>
+      </p:sp>
+      <p:graphicFrame>
+        <p:nvGraphicFramePr>
+          <p:cNvPr id="9" name="Table 8"/>
+          <p:cNvGraphicFramePr>
+            <a:graphicFrameLocks noGrp="1"/>
+          </p:cNvGraphicFramePr>
+          <p:nvPr/>
+        </p:nvGraphicFramePr>
+        <p:xfrm>
+          <a:off x="548640" y="2830068"/>
+          <a:ext cx="11094413" cy="3342128"/>
+        </p:xfrm>
+        <a:graphic>
+          <a:graphicData uri="http://schemas.openxmlformats.org/drawingml/2006/table">
+            <a:tbl>
+              <a:tblPr firstRow="0" bandRow="0">
+                <a:tableStyleId>{5C22544A-7EE6-4342-B048-85BDC9FD1C3A}</a:tableStyleId>
+              </a:tblPr>
+              <a:tblGrid>
+                <a:gridCol w="2596565"/>
+                <a:gridCol w="3855505"/>
+                <a:gridCol w="4642343"/>
+              </a:tblGrid>
+              <a:tr h="417766">
+                <a:tc>
+                  <a:txBody>
+                    <a:bodyPr/>
+                    <a:lstStyle/>
+                    <a:p>
+                      <a:r>
+                        <a:rPr sz="1100" i="0" b="1">
+                          <a:solidFill>
+                            <a:srgbClr val="FFFFFF"/>
+                          </a:solidFill>
+                          <a:latin typeface="Calibri"/>
+                        </a:rPr>
+                        <a:t>Step</a:t>
+                      </a:r>
+                    </a:p>
+                  </a:txBody>
+                  <a:tcPr marL="109728" marR="109728" marT="45720" marB="45720" anchor="ctr">
+                    <a:solidFill>
+                      <a:srgbClr val="A4472B"/>
+                    </a:solidFill>
+                  </a:tcPr>
+                </a:tc>
+                <a:tc>
+                  <a:txBody>
+                    <a:bodyPr/>
+                    <a:lstStyle/>
+                    <a:p>
+                      <a:r>
+                        <a:rPr sz="1100" i="0" b="1">
+                          <a:solidFill>
+                            <a:srgbClr val="FFFFFF"/>
+                          </a:solidFill>
+                          <a:latin typeface="Calibri"/>
+                        </a:rPr>
+                        <a:t>What you do</a:t>
+                      </a:r>
+                    </a:p>
+                  </a:txBody>
+                  <a:tcPr marL="109728" marR="109728" marT="45720" marB="45720" anchor="ctr">
+                    <a:solidFill>
+                      <a:srgbClr val="A4472B"/>
+                    </a:solidFill>
+                  </a:tcPr>
+                </a:tc>
+                <a:tc>
+                  <a:txBody>
+                    <a:bodyPr/>
+                    <a:lstStyle/>
+                    <a:p>
+                      <a:r>
+                        <a:rPr sz="1100" i="0" b="1">
+                          <a:solidFill>
+                            <a:srgbClr val="FFFFFF"/>
+                          </a:solidFill>
+                          <a:latin typeface="Calibri"/>
+                        </a:rPr>
+                        <a:t>Ask yourself</a:t>
+                      </a:r>
+                    </a:p>
+                  </a:txBody>
+                  <a:tcPr marL="109728" marR="109728" marT="45720" marB="45720" anchor="ctr">
+                    <a:solidFill>
+                      <a:srgbClr val="A4472B"/>
+                    </a:solidFill>
+                  </a:tcPr>
+                </a:tc>
+              </a:tr>
+              <a:tr h="417766">
+                <a:tc>
+                  <a:txBody>
+                    <a:bodyPr/>
+                    <a:lstStyle/>
+                    <a:p>
+                      <a:r>
+                        <a:rPr sz="1200" i="0" b="1">
+                          <a:solidFill>
+                            <a:srgbClr val="2B211C"/>
+                          </a:solidFill>
+                          <a:latin typeface="Calibri"/>
+                        </a:rPr>
+                        <a:t>1. Requester</a:t>
+                      </a:r>
+                    </a:p>
+                  </a:txBody>
+                  <a:tcPr marL="109728" marR="109728" marT="45720" marB="45720" anchor="ctr">
+                    <a:solidFill>
+                      <a:srgbClr val="FFFFFF"/>
+                    </a:solidFill>
+                  </a:tcPr>
+                </a:tc>
+                <a:tc>
+                  <a:txBody>
+                    <a:bodyPr/>
+                    <a:lstStyle/>
+                    <a:p>
+                      <a:r>
+                        <a:rPr sz="1200" i="0" b="0">
+                          <a:solidFill>
+                            <a:srgbClr val="2B211C"/>
+                          </a:solidFill>
+                          <a:latin typeface="Calibri"/>
+                        </a:rPr>
+                        <a:t>Note who is asking and how to reach them</a:t>
+                      </a:r>
+                    </a:p>
+                  </a:txBody>
+                  <a:tcPr marL="109728" marR="109728" marT="45720" marB="45720" anchor="ctr">
+                    <a:solidFill>
+                      <a:srgbClr val="FFFFFF"/>
+                    </a:solidFill>
+                  </a:tcPr>
+                </a:tc>
+                <a:tc>
+                  <a:txBody>
+                    <a:bodyPr/>
+                    <a:lstStyle/>
+                    <a:p>
+                      <a:r>
+                        <a:rPr sz="1200" i="0" b="0">
+                          <a:solidFill>
+                            <a:srgbClr val="2B211C"/>
+                          </a:solidFill>
+                          <a:latin typeface="Calibri"/>
+                        </a:rPr>
+                        <a:t>Doctor, nurse, patient? How urgent?</a:t>
+                      </a:r>
+                    </a:p>
+                  </a:txBody>
+                  <a:tcPr marL="109728" marR="109728" marT="45720" marB="45720" anchor="ctr">
+                    <a:solidFill>
+                      <a:srgbClr val="FFFFFF"/>
+                    </a:solidFill>
+                  </a:tcPr>
+                </a:tc>
+              </a:tr>
+              <a:tr h="417766">
+                <a:tc>
+                  <a:txBody>
+                    <a:bodyPr/>
+                    <a:lstStyle/>
+                    <a:p>
+                      <a:r>
+                        <a:rPr sz="1200" i="0" b="1">
+                          <a:solidFill>
+                            <a:srgbClr val="2B211C"/>
+                          </a:solidFill>
+                          <a:latin typeface="Calibri"/>
+                        </a:rPr>
+                        <a:t>2. Background</a:t>
+                      </a:r>
+                    </a:p>
+                  </a:txBody>
+                  <a:tcPr marL="109728" marR="109728" marT="45720" marB="45720" anchor="ctr">
+                    <a:solidFill>
+                      <a:srgbClr val="FAF4F2"/>
+                    </a:solidFill>
+                  </a:tcPr>
+                </a:tc>
+                <a:tc>
+                  <a:txBody>
+                    <a:bodyPr/>
+                    <a:lstStyle/>
+                    <a:p>
+                      <a:r>
+                        <a:rPr sz="1200" i="0" b="0">
+                          <a:solidFill>
+                            <a:srgbClr val="2B211C"/>
+                          </a:solidFill>
+                          <a:latin typeface="Calibri"/>
+                        </a:rPr>
+                        <a:t>Collect patient and drug details</a:t>
+                      </a:r>
+                    </a:p>
+                  </a:txBody>
+                  <a:tcPr marL="109728" marR="109728" marT="45720" marB="45720" anchor="ctr">
+                    <a:solidFill>
+                      <a:srgbClr val="FAF4F2"/>
+                    </a:solidFill>
+                  </a:tcPr>
+                </a:tc>
+                <a:tc>
+                  <a:txBody>
+                    <a:bodyPr/>
+                    <a:lstStyle/>
+                    <a:p>
+                      <a:r>
+                        <a:rPr sz="1200" i="0" b="0">
+                          <a:solidFill>
+                            <a:srgbClr val="2B211C"/>
+                          </a:solidFill>
+                          <a:latin typeface="Calibri"/>
+                        </a:rPr>
+                        <a:t>Age, weight, kidney and liver function, other drugs</a:t>
+                      </a:r>
+                    </a:p>
+                  </a:txBody>
+                  <a:tcPr marL="109728" marR="109728" marT="45720" marB="45720" anchor="ctr">
+                    <a:solidFill>
+                      <a:srgbClr val="FAF4F2"/>
+                    </a:solidFill>
+                  </a:tcPr>
+                </a:tc>
+              </a:tr>
+              <a:tr h="417766">
+                <a:tc>
+                  <a:txBody>
+                    <a:bodyPr/>
+                    <a:lstStyle/>
+                    <a:p>
+                      <a:r>
+                        <a:rPr sz="1200" i="0" b="1">
+                          <a:solidFill>
+                            <a:srgbClr val="2B211C"/>
+                          </a:solidFill>
+                          <a:latin typeface="Calibri"/>
+                        </a:rPr>
+                        <a:t>3. Real question</a:t>
+                      </a:r>
+                    </a:p>
+                  </a:txBody>
+                  <a:tcPr marL="109728" marR="109728" marT="45720" marB="45720" anchor="ctr">
+                    <a:solidFill>
+                      <a:srgbClr val="FFFFFF"/>
+                    </a:solidFill>
+                  </a:tcPr>
+                </a:tc>
+                <a:tc>
+                  <a:txBody>
+                    <a:bodyPr/>
+                    <a:lstStyle/>
+                    <a:p>
+                      <a:r>
+                        <a:rPr sz="1200" i="0" b="0">
+                          <a:solidFill>
+                            <a:srgbClr val="2B211C"/>
+                          </a:solidFill>
+                          <a:latin typeface="Calibri"/>
+                        </a:rPr>
+                        <a:t>Find the true need behind the question</a:t>
+                      </a:r>
+                    </a:p>
+                  </a:txBody>
+                  <a:tcPr marL="109728" marR="109728" marT="45720" marB="45720" anchor="ctr">
+                    <a:solidFill>
+                      <a:srgbClr val="FFFFFF"/>
+                    </a:solidFill>
+                  </a:tcPr>
+                </a:tc>
+                <a:tc>
+                  <a:txBody>
+                    <a:bodyPr/>
+                    <a:lstStyle/>
+                    <a:p>
+                      <a:r>
+                        <a:rPr sz="1200" i="0" b="0">
+                          <a:solidFill>
+                            <a:srgbClr val="2B211C"/>
+                          </a:solidFill>
+                          <a:latin typeface="Calibri"/>
+                        </a:rPr>
+                        <a:t>What will the person do with my answer?</a:t>
+                      </a:r>
+                    </a:p>
+                  </a:txBody>
+                  <a:tcPr marL="109728" marR="109728" marT="45720" marB="45720" anchor="ctr">
+                    <a:solidFill>
+                      <a:srgbClr val="FFFFFF"/>
+                    </a:solidFill>
+                  </a:tcPr>
+                </a:tc>
+              </a:tr>
+              <a:tr h="417766">
+                <a:tc>
+                  <a:txBody>
+                    <a:bodyPr/>
+                    <a:lstStyle/>
+                    <a:p>
+                      <a:r>
+                        <a:rPr sz="1200" i="0" b="1">
+                          <a:solidFill>
+                            <a:srgbClr val="2B211C"/>
+                          </a:solidFill>
+                          <a:latin typeface="Calibri"/>
+                        </a:rPr>
+                        <a:t>4. Classify</a:t>
+                      </a:r>
+                    </a:p>
+                  </a:txBody>
+                  <a:tcPr marL="109728" marR="109728" marT="45720" marB="45720" anchor="ctr">
+                    <a:solidFill>
+                      <a:srgbClr val="FAF4F2"/>
+                    </a:solidFill>
+                  </a:tcPr>
+                </a:tc>
+                <a:tc>
+                  <a:txBody>
+                    <a:bodyPr/>
+                    <a:lstStyle/>
+                    <a:p>
+                      <a:r>
+                        <a:rPr sz="1200" i="0" b="0">
+                          <a:solidFill>
+                            <a:srgbClr val="2B211C"/>
+                          </a:solidFill>
+                          <a:latin typeface="Calibri"/>
+                        </a:rPr>
+                        <a:t>Name the type of question</a:t>
+                      </a:r>
+                    </a:p>
+                  </a:txBody>
+                  <a:tcPr marL="109728" marR="109728" marT="45720" marB="45720" anchor="ctr">
+                    <a:solidFill>
+                      <a:srgbClr val="FAF4F2"/>
+                    </a:solidFill>
+                  </a:tcPr>
+                </a:tc>
+                <a:tc>
+                  <a:txBody>
+                    <a:bodyPr/>
+                    <a:lstStyle/>
+                    <a:p>
+                      <a:r>
+                        <a:rPr sz="1200" i="0" b="0">
+                          <a:solidFill>
+                            <a:srgbClr val="2B211C"/>
+                          </a:solidFill>
+                          <a:latin typeface="Calibri"/>
+                        </a:rPr>
+                        <a:t>Dose, interaction, ADR, pregnancy, availability?</a:t>
+                      </a:r>
+                    </a:p>
+                  </a:txBody>
+                  <a:tcPr marL="109728" marR="109728" marT="45720" marB="45720" anchor="ctr">
+                    <a:solidFill>
+                      <a:srgbClr val="FAF4F2"/>
+                    </a:solidFill>
+                  </a:tcPr>
+                </a:tc>
+              </a:tr>
+              <a:tr h="417766">
+                <a:tc>
+                  <a:txBody>
+                    <a:bodyPr/>
+                    <a:lstStyle/>
+                    <a:p>
+                      <a:r>
+                        <a:rPr sz="1200" i="0" b="1">
+                          <a:solidFill>
+                            <a:srgbClr val="2B211C"/>
+                          </a:solidFill>
+                          <a:latin typeface="Calibri"/>
+                        </a:rPr>
+                        <a:t>5. Search</a:t>
+                      </a:r>
+                    </a:p>
+                  </a:txBody>
+                  <a:tcPr marL="109728" marR="109728" marT="45720" marB="45720" anchor="ctr">
+                    <a:solidFill>
+                      <a:srgbClr val="FFFFFF"/>
+                    </a:solidFill>
+                  </a:tcPr>
+                </a:tc>
+                <a:tc>
+                  <a:txBody>
+                    <a:bodyPr/>
+                    <a:lstStyle/>
+                    <a:p>
+                      <a:r>
+                        <a:rPr sz="1200" i="0" b="0">
+                          <a:solidFill>
+                            <a:srgbClr val="2B211C"/>
+                          </a:solidFill>
+                          <a:latin typeface="Calibri"/>
+                        </a:rPr>
+                        <a:t>Look in the right sources, tertiary first</a:t>
+                      </a:r>
+                    </a:p>
+                  </a:txBody>
+                  <a:tcPr marL="109728" marR="109728" marT="45720" marB="45720" anchor="ctr">
+                    <a:solidFill>
+                      <a:srgbClr val="FFFFFF"/>
+                    </a:solidFill>
+                  </a:tcPr>
+                </a:tc>
+                <a:tc>
+                  <a:txBody>
+                    <a:bodyPr/>
+                    <a:lstStyle/>
+                    <a:p>
+                      <a:r>
+                        <a:rPr sz="1200" i="0" b="0">
+                          <a:solidFill>
+                            <a:srgbClr val="2B211C"/>
+                          </a:solidFill>
+                          <a:latin typeface="Calibri"/>
+                        </a:rPr>
+                        <a:t>Is the evidence current and complete?</a:t>
+                      </a:r>
+                    </a:p>
+                  </a:txBody>
+                  <a:tcPr marL="109728" marR="109728" marT="45720" marB="45720" anchor="ctr">
+                    <a:solidFill>
+                      <a:srgbClr val="FFFFFF"/>
+                    </a:solidFill>
+                  </a:tcPr>
+                </a:tc>
+              </a:tr>
+              <a:tr h="417766">
+                <a:tc>
+                  <a:txBody>
+                    <a:bodyPr/>
+                    <a:lstStyle/>
+                    <a:p>
+                      <a:r>
+                        <a:rPr sz="1200" i="0" b="1">
+                          <a:solidFill>
+                            <a:srgbClr val="2B211C"/>
+                          </a:solidFill>
+                          <a:latin typeface="Calibri"/>
+                        </a:rPr>
+                        <a:t>6. Answer</a:t>
+                      </a:r>
+                    </a:p>
+                  </a:txBody>
+                  <a:tcPr marL="109728" marR="109728" marT="45720" marB="45720" anchor="ctr">
+                    <a:solidFill>
+                      <a:srgbClr val="FAF4F2"/>
+                    </a:solidFill>
+                  </a:tcPr>
+                </a:tc>
+                <a:tc>
+                  <a:txBody>
+                    <a:bodyPr/>
+                    <a:lstStyle/>
+                    <a:p>
+                      <a:r>
+                        <a:rPr sz="1200" i="0" b="0">
+                          <a:solidFill>
+                            <a:srgbClr val="2B211C"/>
+                          </a:solidFill>
+                          <a:latin typeface="Calibri"/>
+                        </a:rPr>
+                        <a:t>Give a clear, specific, referenced reply</a:t>
+                      </a:r>
+                    </a:p>
+                  </a:txBody>
+                  <a:tcPr marL="109728" marR="109728" marT="45720" marB="45720" anchor="ctr">
+                    <a:solidFill>
+                      <a:srgbClr val="FAF4F2"/>
+                    </a:solidFill>
+                  </a:tcPr>
+                </a:tc>
+                <a:tc>
+                  <a:txBody>
+                    <a:bodyPr/>
+                    <a:lstStyle/>
+                    <a:p>
+                      <a:r>
+                        <a:rPr sz="1200" i="0" b="0">
+                          <a:solidFill>
+                            <a:srgbClr val="2B211C"/>
+                          </a:solidFill>
+                          <a:latin typeface="Calibri"/>
+                        </a:rPr>
+                        <a:t>Is it right for this patient?</a:t>
+                      </a:r>
+                    </a:p>
+                  </a:txBody>
+                  <a:tcPr marL="109728" marR="109728" marT="45720" marB="45720" anchor="ctr">
+                    <a:solidFill>
+                      <a:srgbClr val="FAF4F2"/>
+                    </a:solidFill>
+                  </a:tcPr>
+                </a:tc>
+              </a:tr>
+              <a:tr h="417766">
+                <a:tc>
+                  <a:txBody>
+                    <a:bodyPr/>
+                    <a:lstStyle/>
+                    <a:p>
+                      <a:r>
+                        <a:rPr sz="1200" i="0" b="1">
+                          <a:solidFill>
+                            <a:srgbClr val="2B211C"/>
+                          </a:solidFill>
+                          <a:latin typeface="Calibri"/>
+                        </a:rPr>
+                        <a:t>7. Follow up and document</a:t>
+                      </a:r>
+                    </a:p>
+                  </a:txBody>
+                  <a:tcPr marL="109728" marR="109728" marT="45720" marB="45720" anchor="ctr">
+                    <a:solidFill>
+                      <a:srgbClr val="FFFFFF"/>
+                    </a:solidFill>
+                  </a:tcPr>
+                </a:tc>
+                <a:tc>
+                  <a:txBody>
+                    <a:bodyPr/>
+                    <a:lstStyle/>
+                    <a:p>
+                      <a:r>
+                        <a:rPr sz="1200" i="0" b="0">
+                          <a:solidFill>
+                            <a:srgbClr val="2B211C"/>
+                          </a:solidFill>
+                          <a:latin typeface="Calibri"/>
+                        </a:rPr>
+                        <a:t>Check the outcome; record the request</a:t>
+                      </a:r>
+                    </a:p>
+                  </a:txBody>
+                  <a:tcPr marL="109728" marR="109728" marT="45720" marB="45720" anchor="ctr">
+                    <a:solidFill>
+                      <a:srgbClr val="FFFFFF"/>
+                    </a:solidFill>
+                  </a:tcPr>
+                </a:tc>
+                <a:tc>
+                  <a:txBody>
+                    <a:bodyPr/>
+                    <a:lstStyle/>
+                    <a:p>
+                      <a:r>
+                        <a:rPr sz="1200" i="0" b="0">
+                          <a:solidFill>
+                            <a:srgbClr val="2B211C"/>
+                          </a:solidFill>
+                          <a:latin typeface="Calibri"/>
+                        </a:rPr>
+                        <a:t>Did it work? Can others learn from it?</a:t>
+                      </a:r>
+                    </a:p>
+                  </a:txBody>
+                  <a:tcPr marL="109728" marR="109728" marT="45720" marB="45720" anchor="ctr">
+                    <a:solidFill>
+                      <a:srgbClr val="FFFFFF"/>
+                    </a:solidFill>
+                  </a:tcPr>
+                </a:tc>
+              </a:tr>
+            </a:tbl>
+          </a:graphicData>
+        </a:graphic>
+      </p:graphicFrame>
     </p:spTree>
   </p:cSld>
   <p:clrMapOvr>
@@ -5149,16 +5695,16 @@
       <p:grpSpPr/>
       <p:sp>
         <p:nvSpPr>
-          <p:cNvPr id="2" name="Rectangle 1"/>
+          <p:cNvPr id="2" name="Oval 1"/>
           <p:cNvSpPr/>
           <p:nvPr/>
         </p:nvSpPr>
         <p:spPr>
           <a:xfrm>
-            <a:off x="0" y="0"/>
-            <a:ext cx="3931920" cy="6858000"/>
-          </a:xfrm>
-          <a:prstGeom prst="rect">
+            <a:off x="548640" y="475488"/>
+            <a:ext cx="658368" cy="658368"/>
+          </a:xfrm>
+          <a:prstGeom prst="ellipse">
             <a:avLst/>
           </a:prstGeom>
           <a:solidFill>
@@ -5184,10 +5730,19 @@
           </a:fontRef>
         </p:style>
         <p:txBody>
-          <a:bodyPr rtlCol="0" anchor="ctr"/>
+          <a:bodyPr rtlCol="0" anchor="ctr" lIns="0" rIns="0" tIns="0" bIns="0"/>
           <a:lstStyle/>
           <a:p>
             <a:pPr algn="ctr"/>
+            <a:r>
+              <a:rPr sz="1800" i="0" b="1">
+                <a:solidFill>
+                  <a:srgbClr val="FFFFFF"/>
+                </a:solidFill>
+                <a:latin typeface="Cambria"/>
+              </a:rPr>
+              <a:t>01</a:t>
+            </a:r>
           </a:p>
         </p:txBody>
       </p:sp>
@@ -5199,8 +5754,8 @@
         </p:nvSpPr>
         <p:spPr>
           <a:xfrm>
-            <a:off x="548640" y="1188720"/>
-            <a:ext cx="2926080" cy="2377440"/>
+            <a:off x="1417319" y="438912"/>
+            <a:ext cx="10180015" cy="292608"/>
           </a:xfrm>
           <a:prstGeom prst="rect">
             <a:avLst/>
@@ -5213,15 +5768,14 @@
           </a:bodyPr>
           <a:lstStyle/>
           <a:p>
-            <a:pPr algn="l"/>
-            <a:r>
-              <a:rPr sz="13000" i="0" b="1">
-                <a:solidFill>
-                  <a:srgbClr val="E0EEF0"/>
-                </a:solidFill>
-                <a:latin typeface="Cambria"/>
-              </a:rPr>
-              <a:t>℞</a:t>
+            <a:r>
+              <a:rPr sz="1200" i="0" b="1" spc="150">
+                <a:solidFill>
+                  <a:srgbClr val="2F6F7A"/>
+                </a:solidFill>
+                <a:latin typeface="Calibri"/>
+              </a:rPr>
+              <a:t>SECTION 1</a:t>
             </a:r>
           </a:p>
         </p:txBody>
@@ -5234,8 +5788,8 @@
         </p:nvSpPr>
         <p:spPr>
           <a:xfrm>
-            <a:off x="548640" y="3977639"/>
-            <a:ext cx="3017520" cy="1280160"/>
+            <a:off x="1417319" y="676656"/>
+            <a:ext cx="10180015" cy="640080"/>
           </a:xfrm>
           <a:prstGeom prst="rect">
             <a:avLst/>
@@ -5249,24 +5803,13 @@
           <a:lstStyle/>
           <a:p>
             <a:r>
-              <a:rPr sz="3000" i="0" b="1">
-                <a:solidFill>
-                  <a:srgbClr val="FFFFFF"/>
+              <a:rPr sz="2700" i="0" b="1">
+                <a:solidFill>
+                  <a:srgbClr val="2B211C"/>
                 </a:solidFill>
                 <a:latin typeface="Cambria"/>
               </a:rPr>
-              <a:t>At the Pharmacy</a:t>
-            </a:r>
-          </a:p>
-          <a:p>
-            <a:r>
-              <a:rPr sz="1400" i="0" b="1" spc="150">
-                <a:solidFill>
-                  <a:srgbClr val="E0EEF0"/>
-                </a:solidFill>
-                <a:latin typeface="Calibri"/>
-              </a:rPr>
-              <a:t>Section 1</a:t>
+              <a:t>Answering a Request: The Systematic Approach</a:t>
             </a:r>
           </a:p>
         </p:txBody>
@@ -5279,114 +5822,8 @@
         </p:nvSpPr>
         <p:spPr>
           <a:xfrm>
-            <a:off x="4526280" y="822960"/>
-            <a:ext cx="7132320" cy="5120640"/>
-          </a:xfrm>
-          <a:prstGeom prst="rect">
-            <a:avLst/>
-          </a:prstGeom>
-          <a:noFill/>
-        </p:spPr>
-        <p:txBody>
-          <a:bodyPr wrap="square" anchor="ctr" lIns="0" rIns="0" tIns="0" bIns="0">
-            <a:spAutoFit/>
-          </a:bodyPr>
-          <a:lstStyle/>
-          <a:p>
-            <a:r>
-              <a:rPr sz="2000" i="0" b="0">
-                <a:solidFill>
-                  <a:srgbClr val="2B211C"/>
-                </a:solidFill>
-                <a:latin typeface="Calibri"/>
-              </a:rPr>
-              <a:t>A mother asks whether she can give her 4-year-old child paracetamol and ibuprofen together. </a:t>
-            </a:r>
-            <a:r>
-              <a:rPr sz="2000" i="0" b="1">
-                <a:solidFill>
-                  <a:srgbClr val="2B211C"/>
-                </a:solidFill>
-                <a:latin typeface="Calibri"/>
-              </a:rPr>
-              <a:t>Background:</a:t>
-            </a:r>
-            <a:r>
-              <a:rPr sz="2000" i="0" b="0">
-                <a:solidFill>
-                  <a:srgbClr val="2B211C"/>
-                </a:solidFill>
-                <a:latin typeface="Calibri"/>
-              </a:rPr>
-              <a:t> the child weighs 16 kg, has a fever of 39 °C and takes no other drugs. </a:t>
-            </a:r>
-            <a:r>
-              <a:rPr sz="2000" i="0" b="1">
-                <a:solidFill>
-                  <a:srgbClr val="2B211C"/>
-                </a:solidFill>
-                <a:latin typeface="Calibri"/>
-              </a:rPr>
-              <a:t>Real question:</a:t>
-            </a:r>
-            <a:r>
-              <a:rPr sz="2000" i="0" b="0">
-                <a:solidFill>
-                  <a:srgbClr val="2B211C"/>
-                </a:solidFill>
-                <a:latin typeface="Calibri"/>
-              </a:rPr>
-              <a:t> how to control fever safely. </a:t>
-            </a:r>
-            <a:r>
-              <a:rPr sz="2000" i="0" b="1">
-                <a:solidFill>
-                  <a:srgbClr val="2B211C"/>
-                </a:solidFill>
-                <a:latin typeface="Calibri"/>
-              </a:rPr>
-              <a:t>Answer:</a:t>
-            </a:r>
-            <a:r>
-              <a:rPr sz="2000" i="0" b="0">
-                <a:solidFill>
-                  <a:srgbClr val="2B211C"/>
-                </a:solidFill>
-                <a:latin typeface="Calibri"/>
-              </a:rPr>
-              <a:t> use one drug at the correct weight-based dose first. Paracetamol is 15 mg/kg every 4-6 hours (maximum four doses a day). Switch or alternate only if the fever does not respond, and keep a written dose record. Advise a doctor's review if the fever lasts more than three days. </a:t>
-            </a:r>
-            <a:r>
-              <a:rPr sz="2000" i="0" b="1">
-                <a:solidFill>
-                  <a:srgbClr val="2B211C"/>
-                </a:solidFill>
-                <a:latin typeface="Calibri"/>
-              </a:rPr>
-              <a:t>Document</a:t>
-            </a:r>
-            <a:r>
-              <a:rPr sz="2000" i="0" b="0">
-                <a:solidFill>
-                  <a:srgbClr val="2B211C"/>
-                </a:solidFill>
-                <a:latin typeface="Calibri"/>
-              </a:rPr>
-              <a:t> the request.</a:t>
-            </a:r>
-          </a:p>
-        </p:txBody>
-      </p:sp>
-      <p:sp>
-        <p:nvSpPr>
-          <p:cNvPr id="6" name="TextBox 5"/>
-          <p:cNvSpPr txBox="1"/>
-          <p:nvPr/>
-        </p:nvSpPr>
-        <p:spPr>
-          <a:xfrm>
-            <a:off x="4526280" y="6419088"/>
-            <a:ext cx="5486400" cy="274320"/>
+            <a:off x="548640" y="6419088"/>
+            <a:ext cx="8229600" cy="274320"/>
           </a:xfrm>
           <a:prstGeom prst="rect">
             <a:avLst/>
@@ -5406,14 +5843,14 @@
                 </a:solidFill>
                 <a:latin typeface="Calibri"/>
               </a:rPr>
-              <a:t>Drug Information  ·  The Drug Information Centre</a:t>
-            </a:r>
-          </a:p>
-        </p:txBody>
-      </p:sp>
-      <p:sp>
-        <p:nvSpPr>
-          <p:cNvPr id="7" name="TextBox 6"/>
+              <a:t>Drug Information  ·  Section 1  ·  The Drug Information Centre</a:t>
+            </a:r>
+          </a:p>
+        </p:txBody>
+      </p:sp>
+      <p:sp>
+        <p:nvSpPr>
+          <p:cNvPr id="6" name="TextBox 5"/>
           <p:cNvSpPr txBox="1"/>
           <p:nvPr/>
         </p:nvSpPr>
@@ -5448,7 +5885,7 @@
       </p:sp>
       <p:pic>
         <p:nvPicPr>
-          <p:cNvPr id="8" name="Picture 7" descr="faculty-of-pharmacy.png"/>
+          <p:cNvPr id="7" name="Picture 6" descr="faculty-of-pharmacy.png"/>
           <p:cNvPicPr>
             <a:picLocks noChangeAspect="1"/>
           </p:cNvPicPr>
@@ -5470,6 +5907,141 @@
           </a:prstGeom>
         </p:spPr>
       </p:pic>
+      <p:sp>
+        <p:nvSpPr>
+          <p:cNvPr id="8" name="Rounded Rectangle 7"/>
+          <p:cNvSpPr/>
+          <p:nvPr/>
+        </p:nvSpPr>
+        <p:spPr>
+          <a:xfrm>
+            <a:off x="1645919" y="2103120"/>
+            <a:ext cx="8899855" cy="2377440"/>
+          </a:xfrm>
+          <a:prstGeom prst="roundRect">
+            <a:avLst>
+              <a:gd name="adj" fmla="val 6000"/>
+            </a:avLst>
+          </a:prstGeom>
+          <a:solidFill>
+            <a:srgbClr val="F6E5DE"/>
+          </a:solidFill>
+          <a:ln>
+            <a:noFill/>
+          </a:ln>
+          <a:effectLst/>
+        </p:spPr>
+        <p:style>
+          <a:lnRef idx="1">
+            <a:schemeClr val="accent1"/>
+          </a:lnRef>
+          <a:fillRef idx="3">
+            <a:schemeClr val="accent1"/>
+          </a:fillRef>
+          <a:effectRef idx="2">
+            <a:schemeClr val="accent1"/>
+          </a:effectRef>
+          <a:fontRef idx="minor">
+            <a:schemeClr val="lt1"/>
+          </a:fontRef>
+        </p:style>
+        <p:txBody>
+          <a:bodyPr rtlCol="0" anchor="ctr"/>
+          <a:lstStyle/>
+          <a:p>
+            <a:pPr algn="ctr"/>
+          </a:p>
+        </p:txBody>
+      </p:sp>
+      <p:sp>
+        <p:nvSpPr>
+          <p:cNvPr id="9" name="Rounded Rectangle 8"/>
+          <p:cNvSpPr/>
+          <p:nvPr/>
+        </p:nvSpPr>
+        <p:spPr>
+          <a:xfrm>
+            <a:off x="1920239" y="2331720"/>
+            <a:ext cx="996695" cy="310896"/>
+          </a:xfrm>
+          <a:prstGeom prst="roundRect">
+            <a:avLst>
+              <a:gd name="adj" fmla="val 50000"/>
+            </a:avLst>
+          </a:prstGeom>
+          <a:solidFill>
+            <a:srgbClr val="A4472B"/>
+          </a:solidFill>
+          <a:ln>
+            <a:noFill/>
+          </a:ln>
+          <a:effectLst/>
+        </p:spPr>
+        <p:style>
+          <a:lnRef idx="1">
+            <a:schemeClr val="accent1"/>
+          </a:lnRef>
+          <a:fillRef idx="3">
+            <a:schemeClr val="accent1"/>
+          </a:fillRef>
+          <a:effectRef idx="2">
+            <a:schemeClr val="accent1"/>
+          </a:effectRef>
+          <a:fontRef idx="minor">
+            <a:schemeClr val="lt1"/>
+          </a:fontRef>
+        </p:style>
+        <p:txBody>
+          <a:bodyPr rtlCol="0" anchor="ctr" lIns="0" rIns="0" tIns="0" bIns="0"/>
+          <a:lstStyle/>
+          <a:p>
+            <a:pPr algn="ctr"/>
+            <a:r>
+              <a:rPr sz="1050" i="0" b="1">
+                <a:solidFill>
+                  <a:srgbClr val="FFFFFF"/>
+                </a:solidFill>
+                <a:latin typeface="Calibri"/>
+              </a:rPr>
+              <a:t>EXAM TIP</a:t>
+            </a:r>
+          </a:p>
+        </p:txBody>
+      </p:sp>
+      <p:sp>
+        <p:nvSpPr>
+          <p:cNvPr id="10" name="TextBox 9"/>
+          <p:cNvSpPr txBox="1"/>
+          <p:nvPr/>
+        </p:nvSpPr>
+        <p:spPr>
+          <a:xfrm>
+            <a:off x="1920239" y="2788920"/>
+            <a:ext cx="8351215" cy="1508760"/>
+          </a:xfrm>
+          <a:prstGeom prst="rect">
+            <a:avLst/>
+          </a:prstGeom>
+          <a:noFill/>
+        </p:spPr>
+        <p:txBody>
+          <a:bodyPr wrap="square" anchor="t" lIns="0" rIns="0" tIns="0" bIns="0">
+            <a:spAutoFit/>
+          </a:bodyPr>
+          <a:lstStyle/>
+          <a:p>
+            <a:r>
+              <a:rPr sz="2600" i="0" b="0">
+                <a:solidFill>
+                  <a:srgbClr val="2B211C"/>
+                </a:solidFill>
+                <a:latin typeface="Calibri"/>
+              </a:rPr>
+              <a:t>Learn the seven steps in order: requester, background, real question, classify, search, answer, follow up.</a:t>
+            </a:r>
+          </a:p>
+        </p:txBody>
+      </p:sp>
     </p:spTree>
   </p:cSld>
   <p:clrMapOvr>
@@ -5498,16 +6070,16 @@
       <p:grpSpPr/>
       <p:sp>
         <p:nvSpPr>
-          <p:cNvPr id="2" name="Oval 1"/>
+          <p:cNvPr id="2" name="Rectangle 1"/>
           <p:cNvSpPr/>
           <p:nvPr/>
         </p:nvSpPr>
         <p:spPr>
           <a:xfrm>
-            <a:off x="548640" y="475488"/>
-            <a:ext cx="658368" cy="658368"/>
-          </a:xfrm>
-          <a:prstGeom prst="ellipse">
+            <a:off x="0" y="0"/>
+            <a:ext cx="3931920" cy="6858000"/>
+          </a:xfrm>
+          <a:prstGeom prst="rect">
             <a:avLst/>
           </a:prstGeom>
           <a:solidFill>
@@ -5533,19 +6105,10 @@
           </a:fontRef>
         </p:style>
         <p:txBody>
-          <a:bodyPr rtlCol="0" anchor="ctr" lIns="0" rIns="0"/>
+          <a:bodyPr rtlCol="0" anchor="ctr"/>
           <a:lstStyle/>
           <a:p>
             <a:pPr algn="ctr"/>
-            <a:r>
-              <a:rPr sz="1800" i="0" b="1">
-                <a:solidFill>
-                  <a:srgbClr val="FFFFFF"/>
-                </a:solidFill>
-                <a:latin typeface="Cambria"/>
-              </a:rPr>
-              <a:t>01</a:t>
-            </a:r>
           </a:p>
         </p:txBody>
       </p:sp>
@@ -5557,8 +6120,8 @@
         </p:nvSpPr>
         <p:spPr>
           <a:xfrm>
-            <a:off x="1417319" y="438912"/>
-            <a:ext cx="10180015" cy="292608"/>
+            <a:off x="548640" y="1188720"/>
+            <a:ext cx="2926080" cy="2377440"/>
           </a:xfrm>
           <a:prstGeom prst="rect">
             <a:avLst/>
@@ -5572,13 +6135,13 @@
           <a:lstStyle/>
           <a:p>
             <a:r>
-              <a:rPr sz="1200" i="0" b="1" spc="150">
-                <a:solidFill>
-                  <a:srgbClr val="2F6F7A"/>
-                </a:solidFill>
-                <a:latin typeface="Calibri"/>
-              </a:rPr>
-              <a:t>SELF-ASSESSMENT  ·  QUESTION 1 OF 5</a:t>
+              <a:rPr sz="13000" i="0" b="1">
+                <a:solidFill>
+                  <a:srgbClr val="E6EEEF"/>
+                </a:solidFill>
+                <a:latin typeface="Cambria"/>
+              </a:rPr>
+              <a:t>℞</a:t>
             </a:r>
           </a:p>
         </p:txBody>
@@ -5591,8 +6154,8 @@
         </p:nvSpPr>
         <p:spPr>
           <a:xfrm>
-            <a:off x="1417319" y="676656"/>
-            <a:ext cx="10180015" cy="640080"/>
+            <a:off x="548640" y="3977639"/>
+            <a:ext cx="3017520" cy="1280160"/>
           </a:xfrm>
           <a:prstGeom prst="rect">
             <a:avLst/>
@@ -5606,13 +6169,24 @@
           <a:lstStyle/>
           <a:p>
             <a:r>
-              <a:rPr sz="3200" i="0" b="1">
-                <a:solidFill>
-                  <a:srgbClr val="2B211C"/>
+              <a:rPr sz="3000" i="0" b="1">
+                <a:solidFill>
+                  <a:srgbClr val="FFFFFF"/>
                 </a:solidFill>
                 <a:latin typeface="Cambria"/>
               </a:rPr>
-              <a:t>Your turn</a:t>
+              <a:t>At the Pharmacy</a:t>
+            </a:r>
+          </a:p>
+          <a:p>
+            <a:r>
+              <a:rPr sz="1400" i="0" b="1" spc="150">
+                <a:solidFill>
+                  <a:srgbClr val="E6EEEF"/>
+                </a:solidFill>
+                <a:latin typeface="Calibri"/>
+              </a:rPr>
+              <a:t>Section 1</a:t>
             </a:r>
           </a:p>
         </p:txBody>
@@ -5625,7 +6199,113 @@
         </p:nvSpPr>
         <p:spPr>
           <a:xfrm>
-            <a:off x="548640" y="6419088"/>
+            <a:off x="4526280" y="822960"/>
+            <a:ext cx="7132320" cy="5120640"/>
+          </a:xfrm>
+          <a:prstGeom prst="rect">
+            <a:avLst/>
+          </a:prstGeom>
+          <a:noFill/>
+        </p:spPr>
+        <p:txBody>
+          <a:bodyPr wrap="square" anchor="ctr" lIns="0" rIns="0" tIns="0" bIns="0">
+            <a:spAutoFit/>
+          </a:bodyPr>
+          <a:lstStyle/>
+          <a:p>
+            <a:r>
+              <a:rPr sz="2000" i="0" b="0">
+                <a:solidFill>
+                  <a:srgbClr val="2B211C"/>
+                </a:solidFill>
+                <a:latin typeface="Calibri"/>
+              </a:rPr>
+              <a:t>A mother asks whether she can give her 4-year-old child paracetamol and ibuprofen together. </a:t>
+            </a:r>
+            <a:r>
+              <a:rPr sz="2000" i="0" b="1">
+                <a:solidFill>
+                  <a:srgbClr val="2B211C"/>
+                </a:solidFill>
+                <a:latin typeface="Calibri"/>
+              </a:rPr>
+              <a:t>Background:</a:t>
+            </a:r>
+            <a:r>
+              <a:rPr sz="2000" i="0" b="0">
+                <a:solidFill>
+                  <a:srgbClr val="2B211C"/>
+                </a:solidFill>
+                <a:latin typeface="Calibri"/>
+              </a:rPr>
+              <a:t> the child weighs 16 kg, has a fever of 39 °C and takes no other drugs. </a:t>
+            </a:r>
+            <a:r>
+              <a:rPr sz="2000" i="0" b="1">
+                <a:solidFill>
+                  <a:srgbClr val="2B211C"/>
+                </a:solidFill>
+                <a:latin typeface="Calibri"/>
+              </a:rPr>
+              <a:t>Real question:</a:t>
+            </a:r>
+            <a:r>
+              <a:rPr sz="2000" i="0" b="0">
+                <a:solidFill>
+                  <a:srgbClr val="2B211C"/>
+                </a:solidFill>
+                <a:latin typeface="Calibri"/>
+              </a:rPr>
+              <a:t> how to control fever safely. </a:t>
+            </a:r>
+            <a:r>
+              <a:rPr sz="2000" i="0" b="1">
+                <a:solidFill>
+                  <a:srgbClr val="2B211C"/>
+                </a:solidFill>
+                <a:latin typeface="Calibri"/>
+              </a:rPr>
+              <a:t>Answer:</a:t>
+            </a:r>
+            <a:r>
+              <a:rPr sz="2000" i="0" b="0">
+                <a:solidFill>
+                  <a:srgbClr val="2B211C"/>
+                </a:solidFill>
+                <a:latin typeface="Calibri"/>
+              </a:rPr>
+              <a:t> use one drug at the correct weight-based dose first. Paracetamol is 15 mg/kg every 4-6 hours (maximum four doses a day). Switch or alternate only if the fever does not respond, and keep a written dose record. Advise a doctor's review if the fever lasts more than three days. </a:t>
+            </a:r>
+            <a:r>
+              <a:rPr sz="2000" i="0" b="1">
+                <a:solidFill>
+                  <a:srgbClr val="2B211C"/>
+                </a:solidFill>
+                <a:latin typeface="Calibri"/>
+              </a:rPr>
+              <a:t>Document</a:t>
+            </a:r>
+            <a:r>
+              <a:rPr sz="2000" i="0" b="0">
+                <a:solidFill>
+                  <a:srgbClr val="2B211C"/>
+                </a:solidFill>
+                <a:latin typeface="Calibri"/>
+              </a:rPr>
+              <a:t> the request.</a:t>
+            </a:r>
+          </a:p>
+        </p:txBody>
+      </p:sp>
+      <p:sp>
+        <p:nvSpPr>
+          <p:cNvPr id="6" name="TextBox 5"/>
+          <p:cNvSpPr txBox="1"/>
+          <p:nvPr/>
+        </p:nvSpPr>
+        <p:spPr>
+          <a:xfrm>
+            <a:off x="4526280" y="6419088"/>
             <a:ext cx="8229600" cy="274320"/>
           </a:xfrm>
           <a:prstGeom prst="rect">
@@ -5646,14 +6326,14 @@
                 </a:solidFill>
                 <a:latin typeface="Calibri"/>
               </a:rPr>
-              <a:t>Drug Information  ·  Section 1  ·  The Drug Information Centre</a:t>
-            </a:r>
-          </a:p>
-        </p:txBody>
-      </p:sp>
-      <p:sp>
-        <p:nvSpPr>
-          <p:cNvPr id="6" name="TextBox 5"/>
+              <a:t>Drug Information  ·  The Drug Information Centre</a:t>
+            </a:r>
+          </a:p>
+        </p:txBody>
+      </p:sp>
+      <p:sp>
+        <p:nvSpPr>
+          <p:cNvPr id="7" name="TextBox 6"/>
           <p:cNvSpPr txBox="1"/>
           <p:nvPr/>
         </p:nvSpPr>
@@ -5688,7 +6368,7 @@
       </p:sp>
       <p:pic>
         <p:nvPicPr>
-          <p:cNvPr id="7" name="Picture 6" descr="faculty-of-pharmacy.png"/>
+          <p:cNvPr id="8" name="Picture 7" descr="faculty-of-pharmacy.png"/>
           <p:cNvPicPr>
             <a:picLocks noChangeAspect="1"/>
           </p:cNvPicPr>
@@ -5710,572 +6390,6 @@
           </a:prstGeom>
         </p:spPr>
       </p:pic>
-      <p:sp>
-        <p:nvSpPr>
-          <p:cNvPr id="8" name="TextBox 7"/>
-          <p:cNvSpPr txBox="1"/>
-          <p:nvPr/>
-        </p:nvSpPr>
-        <p:spPr>
-          <a:xfrm>
-            <a:off x="548640" y="1554480"/>
-            <a:ext cx="11094415" cy="1005840"/>
-          </a:xfrm>
-          <a:prstGeom prst="rect">
-            <a:avLst/>
-          </a:prstGeom>
-          <a:noFill/>
-        </p:spPr>
-        <p:txBody>
-          <a:bodyPr wrap="square" anchor="t" lIns="0" rIns="0" tIns="0" bIns="0">
-            <a:spAutoFit/>
-          </a:bodyPr>
-          <a:lstStyle/>
-          <a:p>
-            <a:r>
-              <a:rPr sz="2400" i="0" b="1">
-                <a:solidFill>
-                  <a:srgbClr val="2B211C"/>
-                </a:solidFill>
-                <a:latin typeface="Calibri"/>
-              </a:rPr>
-              <a:t>Which is the best definition of a drug information service?</a:t>
-            </a:r>
-          </a:p>
-        </p:txBody>
-      </p:sp>
-      <p:sp>
-        <p:nvSpPr>
-          <p:cNvPr id="9" name="Rounded Rectangle 8"/>
-          <p:cNvSpPr/>
-          <p:nvPr/>
-        </p:nvSpPr>
-        <p:spPr>
-          <a:xfrm>
-            <a:off x="548640" y="2697480"/>
-            <a:ext cx="11094415" cy="640080"/>
-          </a:xfrm>
-          <a:prstGeom prst="roundRect">
-            <a:avLst>
-              <a:gd name="adj" fmla="val 18000"/>
-            </a:avLst>
-          </a:prstGeom>
-          <a:solidFill>
-            <a:srgbClr val="FBF3EE"/>
-          </a:solidFill>
-          <a:ln>
-            <a:noFill/>
-          </a:ln>
-          <a:effectLst/>
-        </p:spPr>
-        <p:style>
-          <a:lnRef idx="1">
-            <a:schemeClr val="accent1"/>
-          </a:lnRef>
-          <a:fillRef idx="3">
-            <a:schemeClr val="accent1"/>
-          </a:fillRef>
-          <a:effectRef idx="2">
-            <a:schemeClr val="accent1"/>
-          </a:effectRef>
-          <a:fontRef idx="minor">
-            <a:schemeClr val="lt1"/>
-          </a:fontRef>
-        </p:style>
-        <p:txBody>
-          <a:bodyPr rtlCol="0" anchor="ctr"/>
-          <a:lstStyle/>
-          <a:p>
-            <a:pPr algn="ctr"/>
-          </a:p>
-        </p:txBody>
-      </p:sp>
-      <p:sp>
-        <p:nvSpPr>
-          <p:cNvPr id="10" name="Oval 9"/>
-          <p:cNvSpPr/>
-          <p:nvPr/>
-        </p:nvSpPr>
-        <p:spPr>
-          <a:xfrm>
-            <a:off x="713232" y="2807208"/>
-            <a:ext cx="420624" cy="420624"/>
-          </a:xfrm>
-          <a:prstGeom prst="ellipse">
-            <a:avLst/>
-          </a:prstGeom>
-          <a:solidFill>
-            <a:srgbClr val="A4472B"/>
-          </a:solidFill>
-          <a:ln>
-            <a:noFill/>
-          </a:ln>
-          <a:effectLst/>
-        </p:spPr>
-        <p:style>
-          <a:lnRef idx="1">
-            <a:schemeClr val="accent1"/>
-          </a:lnRef>
-          <a:fillRef idx="3">
-            <a:schemeClr val="accent1"/>
-          </a:fillRef>
-          <a:effectRef idx="2">
-            <a:schemeClr val="accent1"/>
-          </a:effectRef>
-          <a:fontRef idx="minor">
-            <a:schemeClr val="lt1"/>
-          </a:fontRef>
-        </p:style>
-        <p:txBody>
-          <a:bodyPr rtlCol="0" anchor="ctr" lIns="0" rIns="0"/>
-          <a:lstStyle/>
-          <a:p>
-            <a:pPr algn="ctr"/>
-            <a:r>
-              <a:rPr sz="1500" i="0" b="1">
-                <a:solidFill>
-                  <a:srgbClr val="FFFFFF"/>
-                </a:solidFill>
-                <a:latin typeface="Calibri"/>
-              </a:rPr>
-              <a:t>A</a:t>
-            </a:r>
-          </a:p>
-        </p:txBody>
-      </p:sp>
-      <p:sp>
-        <p:nvSpPr>
-          <p:cNvPr id="11" name="TextBox 10"/>
-          <p:cNvSpPr txBox="1"/>
-          <p:nvPr/>
-        </p:nvSpPr>
-        <p:spPr>
-          <a:xfrm>
-            <a:off x="1371600" y="2697480"/>
-            <a:ext cx="10088575" cy="640080"/>
-          </a:xfrm>
-          <a:prstGeom prst="rect">
-            <a:avLst/>
-          </a:prstGeom>
-          <a:noFill/>
-        </p:spPr>
-        <p:txBody>
-          <a:bodyPr wrap="square" anchor="ctr" lIns="0" rIns="0" tIns="0" bIns="0">
-            <a:spAutoFit/>
-          </a:bodyPr>
-          <a:lstStyle/>
-          <a:p>
-            <a:r>
-              <a:rPr sz="1900" i="0" b="0">
-                <a:solidFill>
-                  <a:srgbClr val="2B211C"/>
-                </a:solidFill>
-                <a:latin typeface="Calibri"/>
-              </a:rPr>
-              <a:t>Selling medicines with written leaflets</a:t>
-            </a:r>
-          </a:p>
-        </p:txBody>
-      </p:sp>
-      <p:sp>
-        <p:nvSpPr>
-          <p:cNvPr id="12" name="Rounded Rectangle 11"/>
-          <p:cNvSpPr/>
-          <p:nvPr/>
-        </p:nvSpPr>
-        <p:spPr>
-          <a:xfrm>
-            <a:off x="548640" y="3465576"/>
-            <a:ext cx="11094415" cy="640080"/>
-          </a:xfrm>
-          <a:prstGeom prst="roundRect">
-            <a:avLst>
-              <a:gd name="adj" fmla="val 18000"/>
-            </a:avLst>
-          </a:prstGeom>
-          <a:solidFill>
-            <a:srgbClr val="FBF3EE"/>
-          </a:solidFill>
-          <a:ln>
-            <a:noFill/>
-          </a:ln>
-          <a:effectLst/>
-        </p:spPr>
-        <p:style>
-          <a:lnRef idx="1">
-            <a:schemeClr val="accent1"/>
-          </a:lnRef>
-          <a:fillRef idx="3">
-            <a:schemeClr val="accent1"/>
-          </a:fillRef>
-          <a:effectRef idx="2">
-            <a:schemeClr val="accent1"/>
-          </a:effectRef>
-          <a:fontRef idx="minor">
-            <a:schemeClr val="lt1"/>
-          </a:fontRef>
-        </p:style>
-        <p:txBody>
-          <a:bodyPr rtlCol="0" anchor="ctr"/>
-          <a:lstStyle/>
-          <a:p>
-            <a:pPr algn="ctr"/>
-          </a:p>
-        </p:txBody>
-      </p:sp>
-      <p:sp>
-        <p:nvSpPr>
-          <p:cNvPr id="13" name="Oval 12"/>
-          <p:cNvSpPr/>
-          <p:nvPr/>
-        </p:nvSpPr>
-        <p:spPr>
-          <a:xfrm>
-            <a:off x="713232" y="3575304"/>
-            <a:ext cx="420624" cy="420624"/>
-          </a:xfrm>
-          <a:prstGeom prst="ellipse">
-            <a:avLst/>
-          </a:prstGeom>
-          <a:solidFill>
-            <a:srgbClr val="A4472B"/>
-          </a:solidFill>
-          <a:ln>
-            <a:noFill/>
-          </a:ln>
-          <a:effectLst/>
-        </p:spPr>
-        <p:style>
-          <a:lnRef idx="1">
-            <a:schemeClr val="accent1"/>
-          </a:lnRef>
-          <a:fillRef idx="3">
-            <a:schemeClr val="accent1"/>
-          </a:fillRef>
-          <a:effectRef idx="2">
-            <a:schemeClr val="accent1"/>
-          </a:effectRef>
-          <a:fontRef idx="minor">
-            <a:schemeClr val="lt1"/>
-          </a:fontRef>
-        </p:style>
-        <p:txBody>
-          <a:bodyPr rtlCol="0" anchor="ctr" lIns="0" rIns="0"/>
-          <a:lstStyle/>
-          <a:p>
-            <a:pPr algn="ctr"/>
-            <a:r>
-              <a:rPr sz="1500" i="0" b="1">
-                <a:solidFill>
-                  <a:srgbClr val="FFFFFF"/>
-                </a:solidFill>
-                <a:latin typeface="Calibri"/>
-              </a:rPr>
-              <a:t>B</a:t>
-            </a:r>
-          </a:p>
-        </p:txBody>
-      </p:sp>
-      <p:sp>
-        <p:nvSpPr>
-          <p:cNvPr id="14" name="TextBox 13"/>
-          <p:cNvSpPr txBox="1"/>
-          <p:nvPr/>
-        </p:nvSpPr>
-        <p:spPr>
-          <a:xfrm>
-            <a:off x="1371600" y="3465576"/>
-            <a:ext cx="10088575" cy="640080"/>
-          </a:xfrm>
-          <a:prstGeom prst="rect">
-            <a:avLst/>
-          </a:prstGeom>
-          <a:noFill/>
-        </p:spPr>
-        <p:txBody>
-          <a:bodyPr wrap="square" anchor="ctr" lIns="0" rIns="0" tIns="0" bIns="0">
-            <a:spAutoFit/>
-          </a:bodyPr>
-          <a:lstStyle/>
-          <a:p>
-            <a:r>
-              <a:rPr sz="1900" i="0" b="0">
-                <a:solidFill>
-                  <a:srgbClr val="2B211C"/>
-                </a:solidFill>
-                <a:latin typeface="Calibri"/>
-              </a:rPr>
-              <a:t>Giving accurate, unbiased answers about medicines to health professionals and the public</a:t>
-            </a:r>
-          </a:p>
-        </p:txBody>
-      </p:sp>
-      <p:sp>
-        <p:nvSpPr>
-          <p:cNvPr id="15" name="Rounded Rectangle 14"/>
-          <p:cNvSpPr/>
-          <p:nvPr/>
-        </p:nvSpPr>
-        <p:spPr>
-          <a:xfrm>
-            <a:off x="548640" y="4233672"/>
-            <a:ext cx="11094415" cy="640080"/>
-          </a:xfrm>
-          <a:prstGeom prst="roundRect">
-            <a:avLst>
-              <a:gd name="adj" fmla="val 18000"/>
-            </a:avLst>
-          </a:prstGeom>
-          <a:solidFill>
-            <a:srgbClr val="FBF3EE"/>
-          </a:solidFill>
-          <a:ln>
-            <a:noFill/>
-          </a:ln>
-          <a:effectLst/>
-        </p:spPr>
-        <p:style>
-          <a:lnRef idx="1">
-            <a:schemeClr val="accent1"/>
-          </a:lnRef>
-          <a:fillRef idx="3">
-            <a:schemeClr val="accent1"/>
-          </a:fillRef>
-          <a:effectRef idx="2">
-            <a:schemeClr val="accent1"/>
-          </a:effectRef>
-          <a:fontRef idx="minor">
-            <a:schemeClr val="lt1"/>
-          </a:fontRef>
-        </p:style>
-        <p:txBody>
-          <a:bodyPr rtlCol="0" anchor="ctr"/>
-          <a:lstStyle/>
-          <a:p>
-            <a:pPr algn="ctr"/>
-          </a:p>
-        </p:txBody>
-      </p:sp>
-      <p:sp>
-        <p:nvSpPr>
-          <p:cNvPr id="16" name="Oval 15"/>
-          <p:cNvSpPr/>
-          <p:nvPr/>
-        </p:nvSpPr>
-        <p:spPr>
-          <a:xfrm>
-            <a:off x="713232" y="4343400"/>
-            <a:ext cx="420624" cy="420624"/>
-          </a:xfrm>
-          <a:prstGeom prst="ellipse">
-            <a:avLst/>
-          </a:prstGeom>
-          <a:solidFill>
-            <a:srgbClr val="A4472B"/>
-          </a:solidFill>
-          <a:ln>
-            <a:noFill/>
-          </a:ln>
-          <a:effectLst/>
-        </p:spPr>
-        <p:style>
-          <a:lnRef idx="1">
-            <a:schemeClr val="accent1"/>
-          </a:lnRef>
-          <a:fillRef idx="3">
-            <a:schemeClr val="accent1"/>
-          </a:fillRef>
-          <a:effectRef idx="2">
-            <a:schemeClr val="accent1"/>
-          </a:effectRef>
-          <a:fontRef idx="minor">
-            <a:schemeClr val="lt1"/>
-          </a:fontRef>
-        </p:style>
-        <p:txBody>
-          <a:bodyPr rtlCol="0" anchor="ctr" lIns="0" rIns="0"/>
-          <a:lstStyle/>
-          <a:p>
-            <a:pPr algn="ctr"/>
-            <a:r>
-              <a:rPr sz="1500" i="0" b="1">
-                <a:solidFill>
-                  <a:srgbClr val="FFFFFF"/>
-                </a:solidFill>
-                <a:latin typeface="Calibri"/>
-              </a:rPr>
-              <a:t>C</a:t>
-            </a:r>
-          </a:p>
-        </p:txBody>
-      </p:sp>
-      <p:sp>
-        <p:nvSpPr>
-          <p:cNvPr id="17" name="TextBox 16"/>
-          <p:cNvSpPr txBox="1"/>
-          <p:nvPr/>
-        </p:nvSpPr>
-        <p:spPr>
-          <a:xfrm>
-            <a:off x="1371600" y="4233672"/>
-            <a:ext cx="10088575" cy="640080"/>
-          </a:xfrm>
-          <a:prstGeom prst="rect">
-            <a:avLst/>
-          </a:prstGeom>
-          <a:noFill/>
-        </p:spPr>
-        <p:txBody>
-          <a:bodyPr wrap="square" anchor="ctr" lIns="0" rIns="0" tIns="0" bIns="0">
-            <a:spAutoFit/>
-          </a:bodyPr>
-          <a:lstStyle/>
-          <a:p>
-            <a:r>
-              <a:rPr sz="1900" i="0" b="0">
-                <a:solidFill>
-                  <a:srgbClr val="2B211C"/>
-                </a:solidFill>
-                <a:latin typeface="Calibri"/>
-              </a:rPr>
-              <a:t>Advertising new medicines to doctors</a:t>
-            </a:r>
-          </a:p>
-        </p:txBody>
-      </p:sp>
-      <p:sp>
-        <p:nvSpPr>
-          <p:cNvPr id="18" name="Rounded Rectangle 17"/>
-          <p:cNvSpPr/>
-          <p:nvPr/>
-        </p:nvSpPr>
-        <p:spPr>
-          <a:xfrm>
-            <a:off x="548640" y="5001768"/>
-            <a:ext cx="11094415" cy="640080"/>
-          </a:xfrm>
-          <a:prstGeom prst="roundRect">
-            <a:avLst>
-              <a:gd name="adj" fmla="val 18000"/>
-            </a:avLst>
-          </a:prstGeom>
-          <a:solidFill>
-            <a:srgbClr val="FBF3EE"/>
-          </a:solidFill>
-          <a:ln>
-            <a:noFill/>
-          </a:ln>
-          <a:effectLst/>
-        </p:spPr>
-        <p:style>
-          <a:lnRef idx="1">
-            <a:schemeClr val="accent1"/>
-          </a:lnRef>
-          <a:fillRef idx="3">
-            <a:schemeClr val="accent1"/>
-          </a:fillRef>
-          <a:effectRef idx="2">
-            <a:schemeClr val="accent1"/>
-          </a:effectRef>
-          <a:fontRef idx="minor">
-            <a:schemeClr val="lt1"/>
-          </a:fontRef>
-        </p:style>
-        <p:txBody>
-          <a:bodyPr rtlCol="0" anchor="ctr"/>
-          <a:lstStyle/>
-          <a:p>
-            <a:pPr algn="ctr"/>
-          </a:p>
-        </p:txBody>
-      </p:sp>
-      <p:sp>
-        <p:nvSpPr>
-          <p:cNvPr id="19" name="Oval 18"/>
-          <p:cNvSpPr/>
-          <p:nvPr/>
-        </p:nvSpPr>
-        <p:spPr>
-          <a:xfrm>
-            <a:off x="713232" y="5111496"/>
-            <a:ext cx="420624" cy="420624"/>
-          </a:xfrm>
-          <a:prstGeom prst="ellipse">
-            <a:avLst/>
-          </a:prstGeom>
-          <a:solidFill>
-            <a:srgbClr val="A4472B"/>
-          </a:solidFill>
-          <a:ln>
-            <a:noFill/>
-          </a:ln>
-          <a:effectLst/>
-        </p:spPr>
-        <p:style>
-          <a:lnRef idx="1">
-            <a:schemeClr val="accent1"/>
-          </a:lnRef>
-          <a:fillRef idx="3">
-            <a:schemeClr val="accent1"/>
-          </a:fillRef>
-          <a:effectRef idx="2">
-            <a:schemeClr val="accent1"/>
-          </a:effectRef>
-          <a:fontRef idx="minor">
-            <a:schemeClr val="lt1"/>
-          </a:fontRef>
-        </p:style>
-        <p:txBody>
-          <a:bodyPr rtlCol="0" anchor="ctr" lIns="0" rIns="0"/>
-          <a:lstStyle/>
-          <a:p>
-            <a:pPr algn="ctr"/>
-            <a:r>
-              <a:rPr sz="1500" i="0" b="1">
-                <a:solidFill>
-                  <a:srgbClr val="FFFFFF"/>
-                </a:solidFill>
-                <a:latin typeface="Calibri"/>
-              </a:rPr>
-              <a:t>D</a:t>
-            </a:r>
-          </a:p>
-        </p:txBody>
-      </p:sp>
-      <p:sp>
-        <p:nvSpPr>
-          <p:cNvPr id="20" name="TextBox 19"/>
-          <p:cNvSpPr txBox="1"/>
-          <p:nvPr/>
-        </p:nvSpPr>
-        <p:spPr>
-          <a:xfrm>
-            <a:off x="1371600" y="5001768"/>
-            <a:ext cx="10088575" cy="640080"/>
-          </a:xfrm>
-          <a:prstGeom prst="rect">
-            <a:avLst/>
-          </a:prstGeom>
-          <a:noFill/>
-        </p:spPr>
-        <p:txBody>
-          <a:bodyPr wrap="square" anchor="ctr" lIns="0" rIns="0" tIns="0" bIns="0">
-            <a:spAutoFit/>
-          </a:bodyPr>
-          <a:lstStyle/>
-          <a:p>
-            <a:r>
-              <a:rPr sz="1900" i="0" b="0">
-                <a:solidFill>
-                  <a:srgbClr val="2B211C"/>
-                </a:solidFill>
-                <a:latin typeface="Calibri"/>
-              </a:rPr>
-              <a:t>Testing new medicines in patients</a:t>
-            </a:r>
-          </a:p>
-        </p:txBody>
-      </p:sp>
     </p:spTree>
   </p:cSld>
   <p:clrMapOvr>
@@ -6339,7 +6453,7 @@
           </a:fontRef>
         </p:style>
         <p:txBody>
-          <a:bodyPr rtlCol="0" anchor="ctr" lIns="0" rIns="0"/>
+          <a:bodyPr rtlCol="0" anchor="ctr" lIns="0" rIns="0" tIns="0" bIns="0"/>
           <a:lstStyle/>
           <a:p>
             <a:pPr algn="ctr"/>
@@ -6384,7 +6498,7 @@
                 </a:solidFill>
                 <a:latin typeface="Calibri"/>
               </a:rPr>
-              <a:t>SELF-ASSESSMENT  ·  QUESTION 1 OF 5  ·  ANSWER</a:t>
+              <a:t>SECTION 1  ·  QUESTION 1 OF 5</a:t>
             </a:r>
           </a:p>
         </p:txBody>
@@ -6418,7 +6532,7 @@
                 </a:solidFill>
                 <a:latin typeface="Cambria"/>
               </a:rPr>
-              <a:t>Check your answer</a:t>
+              <a:t>Your turn</a:t>
             </a:r>
           </a:p>
         </p:txBody>
@@ -6501,7 +6615,7 @@
           <p:nvPr/>
         </p:nvPicPr>
         <p:blipFill>
-          <a:blip r:embed="rId2"/>
+          <a:blip r:embed="rId3"/>
           <a:stretch>
             <a:fillRect/>
           </a:stretch>
@@ -6558,8 +6672,8 @@
         </p:nvSpPr>
         <p:spPr>
           <a:xfrm>
-            <a:off x="548640" y="2606040"/>
-            <a:ext cx="11094415" cy="548640"/>
+            <a:off x="548640" y="2697480"/>
+            <a:ext cx="11094415" cy="640080"/>
           </a:xfrm>
           <a:prstGeom prst="roundRect">
             <a:avLst>
@@ -6567,7 +6681,7 @@
             </a:avLst>
           </a:prstGeom>
           <a:solidFill>
-            <a:srgbClr val="F7F4F2"/>
+            <a:srgbClr val="FAF4F2"/>
           </a:solidFill>
           <a:ln>
             <a:noFill/>
@@ -6604,14 +6718,14 @@
         </p:nvSpPr>
         <p:spPr>
           <a:xfrm>
-            <a:off x="713232" y="2670048"/>
+            <a:off x="713232" y="2807208"/>
             <a:ext cx="420624" cy="420624"/>
           </a:xfrm>
           <a:prstGeom prst="ellipse">
             <a:avLst/>
           </a:prstGeom>
           <a:solidFill>
-            <a:srgbClr val="E6DFDA"/>
+            <a:srgbClr val="A4472B"/>
           </a:solidFill>
           <a:ln>
             <a:noFill/>
@@ -6633,14 +6747,14 @@
           </a:fontRef>
         </p:style>
         <p:txBody>
-          <a:bodyPr rtlCol="0" anchor="ctr" lIns="0" rIns="0"/>
+          <a:bodyPr rtlCol="0" anchor="ctr" lIns="0" rIns="0" tIns="0" bIns="0"/>
           <a:lstStyle/>
           <a:p>
             <a:pPr algn="ctr"/>
             <a:r>
               <a:rPr sz="1500" i="0" b="1">
                 <a:solidFill>
-                  <a:srgbClr val="6E625B"/>
+                  <a:srgbClr val="FFFFFF"/>
                 </a:solidFill>
                 <a:latin typeface="Calibri"/>
               </a:rPr>
@@ -6657,8 +6771,8 @@
         </p:nvSpPr>
         <p:spPr>
           <a:xfrm>
-            <a:off x="1371600" y="2606040"/>
-            <a:ext cx="10088575" cy="548640"/>
+            <a:off x="1371600" y="2697480"/>
+            <a:ext cx="10088575" cy="640080"/>
           </a:xfrm>
           <a:prstGeom prst="rect">
             <a:avLst/>
@@ -6674,7 +6788,7 @@
             <a:r>
               <a:rPr sz="1900" i="0" b="0">
                 <a:solidFill>
-                  <a:srgbClr val="6E625B"/>
+                  <a:srgbClr val="2B211C"/>
                 </a:solidFill>
                 <a:latin typeface="Calibri"/>
               </a:rPr>
@@ -6691,8 +6805,8 @@
         </p:nvSpPr>
         <p:spPr>
           <a:xfrm>
-            <a:off x="548640" y="3282696"/>
-            <a:ext cx="11094415" cy="548640"/>
+            <a:off x="548640" y="3465576"/>
+            <a:ext cx="11094415" cy="640080"/>
           </a:xfrm>
           <a:prstGeom prst="roundRect">
             <a:avLst>
@@ -6700,7 +6814,7 @@
             </a:avLst>
           </a:prstGeom>
           <a:solidFill>
-            <a:srgbClr val="2F6F7A"/>
+            <a:srgbClr val="FAF4F2"/>
           </a:solidFill>
           <a:ln>
             <a:noFill/>
@@ -6737,14 +6851,14 @@
         </p:nvSpPr>
         <p:spPr>
           <a:xfrm>
-            <a:off x="713232" y="3346703"/>
+            <a:off x="713232" y="3575304"/>
             <a:ext cx="420624" cy="420624"/>
           </a:xfrm>
           <a:prstGeom prst="ellipse">
             <a:avLst/>
           </a:prstGeom>
           <a:solidFill>
-            <a:srgbClr val="FFFFFF"/>
+            <a:srgbClr val="A4472B"/>
           </a:solidFill>
           <a:ln>
             <a:noFill/>
@@ -6766,14 +6880,14 @@
           </a:fontRef>
         </p:style>
         <p:txBody>
-          <a:bodyPr rtlCol="0" anchor="ctr" lIns="0" rIns="0"/>
+          <a:bodyPr rtlCol="0" anchor="ctr" lIns="0" rIns="0" tIns="0" bIns="0"/>
           <a:lstStyle/>
           <a:p>
             <a:pPr algn="ctr"/>
             <a:r>
               <a:rPr sz="1500" i="0" b="1">
                 <a:solidFill>
-                  <a:srgbClr val="2F6F7A"/>
+                  <a:srgbClr val="FFFFFF"/>
                 </a:solidFill>
                 <a:latin typeface="Calibri"/>
               </a:rPr>
@@ -6790,8 +6904,8 @@
         </p:nvSpPr>
         <p:spPr>
           <a:xfrm>
-            <a:off x="1371600" y="3282696"/>
-            <a:ext cx="10088575" cy="548640"/>
+            <a:off x="1371600" y="3465576"/>
+            <a:ext cx="10088575" cy="640080"/>
           </a:xfrm>
           <a:prstGeom prst="rect">
             <a:avLst/>
@@ -6805,9 +6919,9 @@
           <a:lstStyle/>
           <a:p>
             <a:r>
-              <a:rPr sz="1900" i="0" b="1">
-                <a:solidFill>
-                  <a:srgbClr val="FFFFFF"/>
+              <a:rPr sz="1900" i="0" b="0">
+                <a:solidFill>
+                  <a:srgbClr val="2B211C"/>
                 </a:solidFill>
                 <a:latin typeface="Calibri"/>
               </a:rPr>
@@ -6824,8 +6938,8 @@
         </p:nvSpPr>
         <p:spPr>
           <a:xfrm>
-            <a:off x="548640" y="3959352"/>
-            <a:ext cx="11094415" cy="548640"/>
+            <a:off x="548640" y="4233672"/>
+            <a:ext cx="11094415" cy="640080"/>
           </a:xfrm>
           <a:prstGeom prst="roundRect">
             <a:avLst>
@@ -6833,7 +6947,7 @@
             </a:avLst>
           </a:prstGeom>
           <a:solidFill>
-            <a:srgbClr val="F7F4F2"/>
+            <a:srgbClr val="FAF4F2"/>
           </a:solidFill>
           <a:ln>
             <a:noFill/>
@@ -6870,14 +6984,14 @@
         </p:nvSpPr>
         <p:spPr>
           <a:xfrm>
-            <a:off x="713232" y="4023360"/>
+            <a:off x="713232" y="4343400"/>
             <a:ext cx="420624" cy="420624"/>
           </a:xfrm>
           <a:prstGeom prst="ellipse">
             <a:avLst/>
           </a:prstGeom>
           <a:solidFill>
-            <a:srgbClr val="E6DFDA"/>
+            <a:srgbClr val="A4472B"/>
           </a:solidFill>
           <a:ln>
             <a:noFill/>
@@ -6899,14 +7013,14 @@
           </a:fontRef>
         </p:style>
         <p:txBody>
-          <a:bodyPr rtlCol="0" anchor="ctr" lIns="0" rIns="0"/>
+          <a:bodyPr rtlCol="0" anchor="ctr" lIns="0" rIns="0" tIns="0" bIns="0"/>
           <a:lstStyle/>
           <a:p>
             <a:pPr algn="ctr"/>
             <a:r>
               <a:rPr sz="1500" i="0" b="1">
                 <a:solidFill>
-                  <a:srgbClr val="6E625B"/>
+                  <a:srgbClr val="FFFFFF"/>
                 </a:solidFill>
                 <a:latin typeface="Calibri"/>
               </a:rPr>
@@ -6923,8 +7037,8 @@
         </p:nvSpPr>
         <p:spPr>
           <a:xfrm>
-            <a:off x="1371600" y="3959352"/>
-            <a:ext cx="10088575" cy="548640"/>
+            <a:off x="1371600" y="4233672"/>
+            <a:ext cx="10088575" cy="640080"/>
           </a:xfrm>
           <a:prstGeom prst="rect">
             <a:avLst/>
@@ -6940,7 +7054,7 @@
             <a:r>
               <a:rPr sz="1900" i="0" b="0">
                 <a:solidFill>
-                  <a:srgbClr val="6E625B"/>
+                  <a:srgbClr val="2B211C"/>
                 </a:solidFill>
                 <a:latin typeface="Calibri"/>
               </a:rPr>
@@ -6957,8 +7071,8 @@
         </p:nvSpPr>
         <p:spPr>
           <a:xfrm>
-            <a:off x="548640" y="4636008"/>
-            <a:ext cx="11094415" cy="548640"/>
+            <a:off x="548640" y="5001768"/>
+            <a:ext cx="11094415" cy="640080"/>
           </a:xfrm>
           <a:prstGeom prst="roundRect">
             <a:avLst>
@@ -6966,7 +7080,7 @@
             </a:avLst>
           </a:prstGeom>
           <a:solidFill>
-            <a:srgbClr val="F7F4F2"/>
+            <a:srgbClr val="FAF4F2"/>
           </a:solidFill>
           <a:ln>
             <a:noFill/>
@@ -7003,14 +7117,14 @@
         </p:nvSpPr>
         <p:spPr>
           <a:xfrm>
-            <a:off x="713232" y="4700016"/>
+            <a:off x="713232" y="5111496"/>
             <a:ext cx="420624" cy="420624"/>
           </a:xfrm>
           <a:prstGeom prst="ellipse">
             <a:avLst/>
           </a:prstGeom>
           <a:solidFill>
-            <a:srgbClr val="E6DFDA"/>
+            <a:srgbClr val="A4472B"/>
           </a:solidFill>
           <a:ln>
             <a:noFill/>
@@ -7032,14 +7146,14 @@
           </a:fontRef>
         </p:style>
         <p:txBody>
-          <a:bodyPr rtlCol="0" anchor="ctr" lIns="0" rIns="0"/>
+          <a:bodyPr rtlCol="0" anchor="ctr" lIns="0" rIns="0" tIns="0" bIns="0"/>
           <a:lstStyle/>
           <a:p>
             <a:pPr algn="ctr"/>
             <a:r>
               <a:rPr sz="1500" i="0" b="1">
                 <a:solidFill>
-                  <a:srgbClr val="6E625B"/>
+                  <a:srgbClr val="FFFFFF"/>
                 </a:solidFill>
                 <a:latin typeface="Calibri"/>
               </a:rPr>
@@ -7056,8 +7170,8 @@
         </p:nvSpPr>
         <p:spPr>
           <a:xfrm>
-            <a:off x="1371600" y="4636008"/>
-            <a:ext cx="10088575" cy="548640"/>
+            <a:off x="1371600" y="5001768"/>
+            <a:ext cx="10088575" cy="640080"/>
           </a:xfrm>
           <a:prstGeom prst="rect">
             <a:avLst/>
@@ -7073,54 +7187,11 @@
             <a:r>
               <a:rPr sz="1900" i="0" b="0">
                 <a:solidFill>
-                  <a:srgbClr val="6E625B"/>
+                  <a:srgbClr val="2B211C"/>
                 </a:solidFill>
                 <a:latin typeface="Calibri"/>
               </a:rPr>
               <a:t>Testing new medicines in patients</a:t>
-            </a:r>
-          </a:p>
-        </p:txBody>
-      </p:sp>
-      <p:sp>
-        <p:nvSpPr>
-          <p:cNvPr id="21" name="TextBox 20"/>
-          <p:cNvSpPr txBox="1"/>
-          <p:nvPr/>
-        </p:nvSpPr>
-        <p:spPr>
-          <a:xfrm>
-            <a:off x="548640" y="5358384"/>
-            <a:ext cx="11094415" cy="685800"/>
-          </a:xfrm>
-          <a:prstGeom prst="rect">
-            <a:avLst/>
-          </a:prstGeom>
-          <a:noFill/>
-        </p:spPr>
-        <p:txBody>
-          <a:bodyPr wrap="square" anchor="t" lIns="0" rIns="0" tIns="0" bIns="0">
-            <a:spAutoFit/>
-          </a:bodyPr>
-          <a:lstStyle/>
-          <a:p>
-            <a:r>
-              <a:rPr sz="1500" i="0" b="1">
-                <a:solidFill>
-                  <a:srgbClr val="2F6F7A"/>
-                </a:solidFill>
-                <a:latin typeface="Calibri"/>
-              </a:rPr>
-              <a:t>Why:  </a:t>
-            </a:r>
-            <a:r>
-              <a:rPr sz="1500" i="0" b="0">
-                <a:solidFill>
-                  <a:srgbClr val="2B211C"/>
-                </a:solidFill>
-                <a:latin typeface="Calibri"/>
-              </a:rPr>
-              <a:t>This is the definition; it includes answers to the public. A, C and D are other activities.</a:t>
             </a:r>
           </a:p>
         </p:txBody>
@@ -7188,7 +7259,7 @@
           </a:fontRef>
         </p:style>
         <p:txBody>
-          <a:bodyPr rtlCol="0" anchor="ctr" lIns="0" rIns="0"/>
+          <a:bodyPr rtlCol="0" anchor="ctr" lIns="0" rIns="0" tIns="0" bIns="0"/>
           <a:lstStyle/>
           <a:p>
             <a:pPr algn="ctr"/>
@@ -7233,7 +7304,7 @@
                 </a:solidFill>
                 <a:latin typeface="Calibri"/>
               </a:rPr>
-              <a:t>SELF-ASSESSMENT  ·  QUESTION 2 OF 5</a:t>
+              <a:t>SECTION 1  ·  QUESTION 1 OF 5  ·  ANSWER</a:t>
             </a:r>
           </a:p>
         </p:txBody>
@@ -7267,7 +7338,7 @@
                 </a:solidFill>
                 <a:latin typeface="Cambria"/>
               </a:rPr>
-              <a:t>Your turn</a:t>
+              <a:t>Check your answer</a:t>
             </a:r>
           </a:p>
         </p:txBody>
@@ -7350,7 +7421,7 @@
           <p:nvPr/>
         </p:nvPicPr>
         <p:blipFill>
-          <a:blip r:embed="rId3"/>
+          <a:blip r:embed="rId2"/>
           <a:stretch>
             <a:fillRect/>
           </a:stretch>
@@ -7394,7 +7465,7 @@
                 </a:solidFill>
                 <a:latin typeface="Calibri"/>
               </a:rPr>
-              <a:t>Which is NOT a usual activity of a drug information centre?</a:t>
+              <a:t>Which is the best definition of a drug information service?</a:t>
             </a:r>
           </a:p>
         </p:txBody>
@@ -7407,8 +7478,8 @@
         </p:nvSpPr>
         <p:spPr>
           <a:xfrm>
-            <a:off x="548640" y="2697480"/>
-            <a:ext cx="11094415" cy="640080"/>
+            <a:off x="548640" y="2606040"/>
+            <a:ext cx="11094415" cy="548640"/>
           </a:xfrm>
           <a:prstGeom prst="roundRect">
             <a:avLst>
@@ -7416,7 +7487,7 @@
             </a:avLst>
           </a:prstGeom>
           <a:solidFill>
-            <a:srgbClr val="FBF3EE"/>
+            <a:srgbClr val="F5F4F4"/>
           </a:solidFill>
           <a:ln>
             <a:noFill/>
@@ -7453,14 +7524,14 @@
         </p:nvSpPr>
         <p:spPr>
           <a:xfrm>
-            <a:off x="713232" y="2807208"/>
+            <a:off x="713232" y="2670048"/>
             <a:ext cx="420624" cy="420624"/>
           </a:xfrm>
           <a:prstGeom prst="ellipse">
             <a:avLst/>
           </a:prstGeom>
           <a:solidFill>
-            <a:srgbClr val="A4472B"/>
+            <a:srgbClr val="E2E0DE"/>
           </a:solidFill>
           <a:ln>
             <a:noFill/>
@@ -7482,14 +7553,14 @@
           </a:fontRef>
         </p:style>
         <p:txBody>
-          <a:bodyPr rtlCol="0" anchor="ctr" lIns="0" rIns="0"/>
+          <a:bodyPr rtlCol="0" anchor="ctr" lIns="0" rIns="0" tIns="0" bIns="0"/>
           <a:lstStyle/>
           <a:p>
             <a:pPr algn="ctr"/>
             <a:r>
               <a:rPr sz="1500" i="0" b="1">
                 <a:solidFill>
-                  <a:srgbClr val="FFFFFF"/>
+                  <a:srgbClr val="6E625B"/>
                 </a:solidFill>
                 <a:latin typeface="Calibri"/>
               </a:rPr>
@@ -7506,8 +7577,8 @@
         </p:nvSpPr>
         <p:spPr>
           <a:xfrm>
-            <a:off x="1371600" y="2697480"/>
-            <a:ext cx="10088575" cy="640080"/>
+            <a:off x="1371600" y="2606040"/>
+            <a:ext cx="10088575" cy="548640"/>
           </a:xfrm>
           <a:prstGeom prst="rect">
             <a:avLst/>
@@ -7523,11 +7594,11 @@
             <a:r>
               <a:rPr sz="1900" i="0" b="0">
                 <a:solidFill>
-                  <a:srgbClr val="2B211C"/>
-                </a:solidFill>
-                <a:latin typeface="Calibri"/>
-              </a:rPr>
-              <a:t>Answering questions about interactions</a:t>
+                  <a:srgbClr val="6E625B"/>
+                </a:solidFill>
+                <a:latin typeface="Calibri"/>
+              </a:rPr>
+              <a:t>Selling medicines with written leaflets</a:t>
             </a:r>
           </a:p>
         </p:txBody>
@@ -7540,8 +7611,8 @@
         </p:nvSpPr>
         <p:spPr>
           <a:xfrm>
-            <a:off x="548640" y="3465576"/>
-            <a:ext cx="11094415" cy="640080"/>
+            <a:off x="548640" y="3282696"/>
+            <a:ext cx="11094415" cy="548640"/>
           </a:xfrm>
           <a:prstGeom prst="roundRect">
             <a:avLst>
@@ -7549,7 +7620,7 @@
             </a:avLst>
           </a:prstGeom>
           <a:solidFill>
-            <a:srgbClr val="FBF3EE"/>
+            <a:srgbClr val="2F6F7A"/>
           </a:solidFill>
           <a:ln>
             <a:noFill/>
@@ -7586,14 +7657,14 @@
         </p:nvSpPr>
         <p:spPr>
           <a:xfrm>
-            <a:off x="713232" y="3575304"/>
+            <a:off x="713232" y="3346703"/>
             <a:ext cx="420624" cy="420624"/>
           </a:xfrm>
           <a:prstGeom prst="ellipse">
             <a:avLst/>
           </a:prstGeom>
           <a:solidFill>
-            <a:srgbClr val="A4472B"/>
+            <a:srgbClr val="FFFFFF"/>
           </a:solidFill>
           <a:ln>
             <a:noFill/>
@@ -7615,14 +7686,14 @@
           </a:fontRef>
         </p:style>
         <p:txBody>
-          <a:bodyPr rtlCol="0" anchor="ctr" lIns="0" rIns="0"/>
+          <a:bodyPr rtlCol="0" anchor="ctr" lIns="0" rIns="0" tIns="0" bIns="0"/>
           <a:lstStyle/>
           <a:p>
             <a:pPr algn="ctr"/>
             <a:r>
               <a:rPr sz="1500" i="0" b="1">
                 <a:solidFill>
-                  <a:srgbClr val="FFFFFF"/>
+                  <a:srgbClr val="2F6F7A"/>
                 </a:solidFill>
                 <a:latin typeface="Calibri"/>
               </a:rPr>
@@ -7639,8 +7710,8 @@
         </p:nvSpPr>
         <p:spPr>
           <a:xfrm>
-            <a:off x="1371600" y="3465576"/>
-            <a:ext cx="10088575" cy="640080"/>
+            <a:off x="1371600" y="3282696"/>
+            <a:ext cx="10088575" cy="548640"/>
           </a:xfrm>
           <a:prstGeom prst="rect">
             <a:avLst/>
@@ -7654,13 +7725,13 @@
           <a:lstStyle/>
           <a:p>
             <a:r>
-              <a:rPr sz="1900" i="0" b="0">
-                <a:solidFill>
-                  <a:srgbClr val="2B211C"/>
-                </a:solidFill>
-                <a:latin typeface="Calibri"/>
-              </a:rPr>
-              <a:t>Supporting the Drug and Therapeutics Committee</a:t>
+              <a:rPr sz="1900" i="0" b="1">
+                <a:solidFill>
+                  <a:srgbClr val="FFFFFF"/>
+                </a:solidFill>
+                <a:latin typeface="Calibri"/>
+              </a:rPr>
+              <a:t>Giving accurate, unbiased answers about medicines to health professionals and the public</a:t>
             </a:r>
           </a:p>
         </p:txBody>
@@ -7673,8 +7744,8 @@
         </p:nvSpPr>
         <p:spPr>
           <a:xfrm>
-            <a:off x="548640" y="4233672"/>
-            <a:ext cx="11094415" cy="640080"/>
+            <a:off x="548640" y="3959352"/>
+            <a:ext cx="11094415" cy="548640"/>
           </a:xfrm>
           <a:prstGeom prst="roundRect">
             <a:avLst>
@@ -7682,7 +7753,7 @@
             </a:avLst>
           </a:prstGeom>
           <a:solidFill>
-            <a:srgbClr val="FBF3EE"/>
+            <a:srgbClr val="F5F4F4"/>
           </a:solidFill>
           <a:ln>
             <a:noFill/>
@@ -7719,14 +7790,14 @@
         </p:nvSpPr>
         <p:spPr>
           <a:xfrm>
-            <a:off x="713232" y="4343400"/>
+            <a:off x="713232" y="4023360"/>
             <a:ext cx="420624" cy="420624"/>
           </a:xfrm>
           <a:prstGeom prst="ellipse">
             <a:avLst/>
           </a:prstGeom>
           <a:solidFill>
-            <a:srgbClr val="A4472B"/>
+            <a:srgbClr val="E2E0DE"/>
           </a:solidFill>
           <a:ln>
             <a:noFill/>
@@ -7748,14 +7819,14 @@
           </a:fontRef>
         </p:style>
         <p:txBody>
-          <a:bodyPr rtlCol="0" anchor="ctr" lIns="0" rIns="0"/>
+          <a:bodyPr rtlCol="0" anchor="ctr" lIns="0" rIns="0" tIns="0" bIns="0"/>
           <a:lstStyle/>
           <a:p>
             <a:pPr algn="ctr"/>
             <a:r>
               <a:rPr sz="1500" i="0" b="1">
                 <a:solidFill>
-                  <a:srgbClr val="FFFFFF"/>
+                  <a:srgbClr val="6E625B"/>
                 </a:solidFill>
                 <a:latin typeface="Calibri"/>
               </a:rPr>
@@ -7772,8 +7843,8 @@
         </p:nvSpPr>
         <p:spPr>
           <a:xfrm>
-            <a:off x="1371600" y="4233672"/>
-            <a:ext cx="10088575" cy="640080"/>
+            <a:off x="1371600" y="3959352"/>
+            <a:ext cx="10088575" cy="548640"/>
           </a:xfrm>
           <a:prstGeom prst="rect">
             <a:avLst/>
@@ -7789,11 +7860,11 @@
             <a:r>
               <a:rPr sz="1900" i="0" b="0">
                 <a:solidFill>
-                  <a:srgbClr val="2B211C"/>
-                </a:solidFill>
-                <a:latin typeface="Calibri"/>
-              </a:rPr>
-              <a:t>Manufacturing medicines</a:t>
+                  <a:srgbClr val="6E625B"/>
+                </a:solidFill>
+                <a:latin typeface="Calibri"/>
+              </a:rPr>
+              <a:t>Advertising new medicines to doctors</a:t>
             </a:r>
           </a:p>
         </p:txBody>
@@ -7806,8 +7877,8 @@
         </p:nvSpPr>
         <p:spPr>
           <a:xfrm>
-            <a:off x="548640" y="5001768"/>
-            <a:ext cx="11094415" cy="640080"/>
+            <a:off x="548640" y="4636008"/>
+            <a:ext cx="11094415" cy="548640"/>
           </a:xfrm>
           <a:prstGeom prst="roundRect">
             <a:avLst>
@@ -7815,7 +7886,7 @@
             </a:avLst>
           </a:prstGeom>
           <a:solidFill>
-            <a:srgbClr val="FBF3EE"/>
+            <a:srgbClr val="F5F4F4"/>
           </a:solidFill>
           <a:ln>
             <a:noFill/>
@@ -7852,14 +7923,14 @@
         </p:nvSpPr>
         <p:spPr>
           <a:xfrm>
-            <a:off x="713232" y="5111496"/>
+            <a:off x="713232" y="4700016"/>
             <a:ext cx="420624" cy="420624"/>
           </a:xfrm>
           <a:prstGeom prst="ellipse">
             <a:avLst/>
           </a:prstGeom>
           <a:solidFill>
-            <a:srgbClr val="A4472B"/>
+            <a:srgbClr val="E2E0DE"/>
           </a:solidFill>
           <a:ln>
             <a:noFill/>
@@ -7881,14 +7952,14 @@
           </a:fontRef>
         </p:style>
         <p:txBody>
-          <a:bodyPr rtlCol="0" anchor="ctr" lIns="0" rIns="0"/>
+          <a:bodyPr rtlCol="0" anchor="ctr" lIns="0" rIns="0" tIns="0" bIns="0"/>
           <a:lstStyle/>
           <a:p>
             <a:pPr algn="ctr"/>
             <a:r>
               <a:rPr sz="1500" i="0" b="1">
                 <a:solidFill>
-                  <a:srgbClr val="FFFFFF"/>
+                  <a:srgbClr val="6E625B"/>
                 </a:solidFill>
                 <a:latin typeface="Calibri"/>
               </a:rPr>
@@ -7905,8 +7976,8 @@
         </p:nvSpPr>
         <p:spPr>
           <a:xfrm>
-            <a:off x="1371600" y="5001768"/>
-            <a:ext cx="10088575" cy="640080"/>
+            <a:off x="1371600" y="4636008"/>
+            <a:ext cx="10088575" cy="548640"/>
           </a:xfrm>
           <a:prstGeom prst="rect">
             <a:avLst/>
@@ -7922,11 +7993,54 @@
             <a:r>
               <a:rPr sz="1900" i="0" b="0">
                 <a:solidFill>
+                  <a:srgbClr val="6E625B"/>
+                </a:solidFill>
+                <a:latin typeface="Calibri"/>
+              </a:rPr>
+              <a:t>Testing new medicines in patients</a:t>
+            </a:r>
+          </a:p>
+        </p:txBody>
+      </p:sp>
+      <p:sp>
+        <p:nvSpPr>
+          <p:cNvPr id="21" name="TextBox 20"/>
+          <p:cNvSpPr txBox="1"/>
+          <p:nvPr/>
+        </p:nvSpPr>
+        <p:spPr>
+          <a:xfrm>
+            <a:off x="548640" y="5358384"/>
+            <a:ext cx="11094415" cy="685800"/>
+          </a:xfrm>
+          <a:prstGeom prst="rect">
+            <a:avLst/>
+          </a:prstGeom>
+          <a:noFill/>
+        </p:spPr>
+        <p:txBody>
+          <a:bodyPr wrap="square" anchor="t" lIns="0" rIns="0" tIns="0" bIns="0">
+            <a:spAutoFit/>
+          </a:bodyPr>
+          <a:lstStyle/>
+          <a:p>
+            <a:r>
+              <a:rPr sz="1500" i="0" b="1">
+                <a:solidFill>
+                  <a:srgbClr val="2F6F7A"/>
+                </a:solidFill>
+                <a:latin typeface="Calibri"/>
+              </a:rPr>
+              <a:t>Why:  </a:t>
+            </a:r>
+            <a:r>
+              <a:rPr sz="1500" i="0" b="0">
+                <a:solidFill>
                   <a:srgbClr val="2B211C"/>
                 </a:solidFill>
                 <a:latin typeface="Calibri"/>
               </a:rPr>
-              <a:t>Collecting adverse drug reaction reports</a:t>
+              <a:t>This is the definition; it includes answers to the public. A, C and D are other activities.</a:t>
             </a:r>
           </a:p>
         </p:txBody>
@@ -7994,7 +8108,7 @@
           </a:fontRef>
         </p:style>
         <p:txBody>
-          <a:bodyPr rtlCol="0" anchor="ctr" lIns="0" rIns="0"/>
+          <a:bodyPr rtlCol="0" anchor="ctr" lIns="0" rIns="0" tIns="0" bIns="0"/>
           <a:lstStyle/>
           <a:p>
             <a:pPr algn="ctr"/>
@@ -8039,7 +8153,7 @@
                 </a:solidFill>
                 <a:latin typeface="Calibri"/>
               </a:rPr>
-              <a:t>SELF-ASSESSMENT  ·  QUESTION 2 OF 5  ·  ANSWER</a:t>
+              <a:t>SECTION 1  ·  QUESTION 2 OF 5</a:t>
             </a:r>
           </a:p>
         </p:txBody>
@@ -8073,7 +8187,7 @@
                 </a:solidFill>
                 <a:latin typeface="Cambria"/>
               </a:rPr>
-              <a:t>Check your answer</a:t>
+              <a:t>Your turn</a:t>
             </a:r>
           </a:p>
         </p:txBody>
@@ -8156,7 +8270,7 @@
           <p:nvPr/>
         </p:nvPicPr>
         <p:blipFill>
-          <a:blip r:embed="rId2"/>
+          <a:blip r:embed="rId3"/>
           <a:stretch>
             <a:fillRect/>
           </a:stretch>
@@ -8213,8 +8327,8 @@
         </p:nvSpPr>
         <p:spPr>
           <a:xfrm>
-            <a:off x="548640" y="2606040"/>
-            <a:ext cx="11094415" cy="548640"/>
+            <a:off x="548640" y="2697480"/>
+            <a:ext cx="11094415" cy="640080"/>
           </a:xfrm>
           <a:prstGeom prst="roundRect">
             <a:avLst>
@@ -8222,7 +8336,7 @@
             </a:avLst>
           </a:prstGeom>
           <a:solidFill>
-            <a:srgbClr val="F7F4F2"/>
+            <a:srgbClr val="FAF4F2"/>
           </a:solidFill>
           <a:ln>
             <a:noFill/>
@@ -8259,14 +8373,14 @@
         </p:nvSpPr>
         <p:spPr>
           <a:xfrm>
-            <a:off x="713232" y="2670048"/>
+            <a:off x="713232" y="2807208"/>
             <a:ext cx="420624" cy="420624"/>
           </a:xfrm>
           <a:prstGeom prst="ellipse">
             <a:avLst/>
           </a:prstGeom>
           <a:solidFill>
-            <a:srgbClr val="E6DFDA"/>
+            <a:srgbClr val="A4472B"/>
           </a:solidFill>
           <a:ln>
             <a:noFill/>
@@ -8288,14 +8402,14 @@
           </a:fontRef>
         </p:style>
         <p:txBody>
-          <a:bodyPr rtlCol="0" anchor="ctr" lIns="0" rIns="0"/>
+          <a:bodyPr rtlCol="0" anchor="ctr" lIns="0" rIns="0" tIns="0" bIns="0"/>
           <a:lstStyle/>
           <a:p>
             <a:pPr algn="ctr"/>
             <a:r>
               <a:rPr sz="1500" i="0" b="1">
                 <a:solidFill>
-                  <a:srgbClr val="6E625B"/>
+                  <a:srgbClr val="FFFFFF"/>
                 </a:solidFill>
                 <a:latin typeface="Calibri"/>
               </a:rPr>
@@ -8312,8 +8426,8 @@
         </p:nvSpPr>
         <p:spPr>
           <a:xfrm>
-            <a:off x="1371600" y="2606040"/>
-            <a:ext cx="10088575" cy="548640"/>
+            <a:off x="1371600" y="2697480"/>
+            <a:ext cx="10088575" cy="640080"/>
           </a:xfrm>
           <a:prstGeom prst="rect">
             <a:avLst/>
@@ -8329,7 +8443,7 @@
             <a:r>
               <a:rPr sz="1900" i="0" b="0">
                 <a:solidFill>
-                  <a:srgbClr val="6E625B"/>
+                  <a:srgbClr val="2B211C"/>
                 </a:solidFill>
                 <a:latin typeface="Calibri"/>
               </a:rPr>
@@ -8346,8 +8460,8 @@
         </p:nvSpPr>
         <p:spPr>
           <a:xfrm>
-            <a:off x="548640" y="3282696"/>
-            <a:ext cx="11094415" cy="548640"/>
+            <a:off x="548640" y="3465576"/>
+            <a:ext cx="11094415" cy="640080"/>
           </a:xfrm>
           <a:prstGeom prst="roundRect">
             <a:avLst>
@@ -8355,7 +8469,7 @@
             </a:avLst>
           </a:prstGeom>
           <a:solidFill>
-            <a:srgbClr val="F7F4F2"/>
+            <a:srgbClr val="FAF4F2"/>
           </a:solidFill>
           <a:ln>
             <a:noFill/>
@@ -8392,14 +8506,14 @@
         </p:nvSpPr>
         <p:spPr>
           <a:xfrm>
-            <a:off x="713232" y="3346703"/>
+            <a:off x="713232" y="3575304"/>
             <a:ext cx="420624" cy="420624"/>
           </a:xfrm>
           <a:prstGeom prst="ellipse">
             <a:avLst/>
           </a:prstGeom>
           <a:solidFill>
-            <a:srgbClr val="E6DFDA"/>
+            <a:srgbClr val="A4472B"/>
           </a:solidFill>
           <a:ln>
             <a:noFill/>
@@ -8421,14 +8535,14 @@
           </a:fontRef>
         </p:style>
         <p:txBody>
-          <a:bodyPr rtlCol="0" anchor="ctr" lIns="0" rIns="0"/>
+          <a:bodyPr rtlCol="0" anchor="ctr" lIns="0" rIns="0" tIns="0" bIns="0"/>
           <a:lstStyle/>
           <a:p>
             <a:pPr algn="ctr"/>
             <a:r>
               <a:rPr sz="1500" i="0" b="1">
                 <a:solidFill>
-                  <a:srgbClr val="6E625B"/>
+                  <a:srgbClr val="FFFFFF"/>
                 </a:solidFill>
                 <a:latin typeface="Calibri"/>
               </a:rPr>
@@ -8445,8 +8559,8 @@
         </p:nvSpPr>
         <p:spPr>
           <a:xfrm>
-            <a:off x="1371600" y="3282696"/>
-            <a:ext cx="10088575" cy="548640"/>
+            <a:off x="1371600" y="3465576"/>
+            <a:ext cx="10088575" cy="640080"/>
           </a:xfrm>
           <a:prstGeom prst="rect">
             <a:avLst/>
@@ -8462,7 +8576,7 @@
             <a:r>
               <a:rPr sz="1900" i="0" b="0">
                 <a:solidFill>
-                  <a:srgbClr val="6E625B"/>
+                  <a:srgbClr val="2B211C"/>
                 </a:solidFill>
                 <a:latin typeface="Calibri"/>
               </a:rPr>
@@ -8479,8 +8593,8 @@
         </p:nvSpPr>
         <p:spPr>
           <a:xfrm>
-            <a:off x="548640" y="3959352"/>
-            <a:ext cx="11094415" cy="548640"/>
+            <a:off x="548640" y="4233672"/>
+            <a:ext cx="11094415" cy="640080"/>
           </a:xfrm>
           <a:prstGeom prst="roundRect">
             <a:avLst>
@@ -8488,7 +8602,7 @@
             </a:avLst>
           </a:prstGeom>
           <a:solidFill>
-            <a:srgbClr val="2F6F7A"/>
+            <a:srgbClr val="FAF4F2"/>
           </a:solidFill>
           <a:ln>
             <a:noFill/>
@@ -8525,14 +8639,14 @@
         </p:nvSpPr>
         <p:spPr>
           <a:xfrm>
-            <a:off x="713232" y="4023360"/>
+            <a:off x="713232" y="4343400"/>
             <a:ext cx="420624" cy="420624"/>
           </a:xfrm>
           <a:prstGeom prst="ellipse">
             <a:avLst/>
           </a:prstGeom>
           <a:solidFill>
-            <a:srgbClr val="FFFFFF"/>
+            <a:srgbClr val="A4472B"/>
           </a:solidFill>
           <a:ln>
             <a:noFill/>
@@ -8554,14 +8668,14 @@
           </a:fontRef>
         </p:style>
         <p:txBody>
-          <a:bodyPr rtlCol="0" anchor="ctr" lIns="0" rIns="0"/>
+          <a:bodyPr rtlCol="0" anchor="ctr" lIns="0" rIns="0" tIns="0" bIns="0"/>
           <a:lstStyle/>
           <a:p>
             <a:pPr algn="ctr"/>
             <a:r>
               <a:rPr sz="1500" i="0" b="1">
                 <a:solidFill>
-                  <a:srgbClr val="2F6F7A"/>
+                  <a:srgbClr val="FFFFFF"/>
                 </a:solidFill>
                 <a:latin typeface="Calibri"/>
               </a:rPr>
@@ -8578,8 +8692,8 @@
         </p:nvSpPr>
         <p:spPr>
           <a:xfrm>
-            <a:off x="1371600" y="3959352"/>
-            <a:ext cx="10088575" cy="548640"/>
+            <a:off x="1371600" y="4233672"/>
+            <a:ext cx="10088575" cy="640080"/>
           </a:xfrm>
           <a:prstGeom prst="rect">
             <a:avLst/>
@@ -8593,9 +8707,9 @@
           <a:lstStyle/>
           <a:p>
             <a:r>
-              <a:rPr sz="1900" i="0" b="1">
-                <a:solidFill>
-                  <a:srgbClr val="FFFFFF"/>
+              <a:rPr sz="1900" i="0" b="0">
+                <a:solidFill>
+                  <a:srgbClr val="2B211C"/>
                 </a:solidFill>
                 <a:latin typeface="Calibri"/>
               </a:rPr>
@@ -8612,8 +8726,8 @@
         </p:nvSpPr>
         <p:spPr>
           <a:xfrm>
-            <a:off x="548640" y="4636008"/>
-            <a:ext cx="11094415" cy="548640"/>
+            <a:off x="548640" y="5001768"/>
+            <a:ext cx="11094415" cy="640080"/>
           </a:xfrm>
           <a:prstGeom prst="roundRect">
             <a:avLst>
@@ -8621,7 +8735,7 @@
             </a:avLst>
           </a:prstGeom>
           <a:solidFill>
-            <a:srgbClr val="F7F4F2"/>
+            <a:srgbClr val="FAF4F2"/>
           </a:solidFill>
           <a:ln>
             <a:noFill/>
@@ -8658,14 +8772,14 @@
         </p:nvSpPr>
         <p:spPr>
           <a:xfrm>
-            <a:off x="713232" y="4700016"/>
+            <a:off x="713232" y="5111496"/>
             <a:ext cx="420624" cy="420624"/>
           </a:xfrm>
           <a:prstGeom prst="ellipse">
             <a:avLst/>
           </a:prstGeom>
           <a:solidFill>
-            <a:srgbClr val="E6DFDA"/>
+            <a:srgbClr val="A4472B"/>
           </a:solidFill>
           <a:ln>
             <a:noFill/>
@@ -8687,14 +8801,14 @@
           </a:fontRef>
         </p:style>
         <p:txBody>
-          <a:bodyPr rtlCol="0" anchor="ctr" lIns="0" rIns="0"/>
+          <a:bodyPr rtlCol="0" anchor="ctr" lIns="0" rIns="0" tIns="0" bIns="0"/>
           <a:lstStyle/>
           <a:p>
             <a:pPr algn="ctr"/>
             <a:r>
               <a:rPr sz="1500" i="0" b="1">
                 <a:solidFill>
-                  <a:srgbClr val="6E625B"/>
+                  <a:srgbClr val="FFFFFF"/>
                 </a:solidFill>
                 <a:latin typeface="Calibri"/>
               </a:rPr>
@@ -8711,8 +8825,8 @@
         </p:nvSpPr>
         <p:spPr>
           <a:xfrm>
-            <a:off x="1371600" y="4636008"/>
-            <a:ext cx="10088575" cy="548640"/>
+            <a:off x="1371600" y="5001768"/>
+            <a:ext cx="10088575" cy="640080"/>
           </a:xfrm>
           <a:prstGeom prst="rect">
             <a:avLst/>
@@ -8728,54 +8842,11 @@
             <a:r>
               <a:rPr sz="1900" i="0" b="0">
                 <a:solidFill>
-                  <a:srgbClr val="6E625B"/>
+                  <a:srgbClr val="2B211C"/>
                 </a:solidFill>
                 <a:latin typeface="Calibri"/>
               </a:rPr>
               <a:t>Collecting adverse drug reaction reports</a:t>
-            </a:r>
-          </a:p>
-        </p:txBody>
-      </p:sp>
-      <p:sp>
-        <p:nvSpPr>
-          <p:cNvPr id="21" name="TextBox 20"/>
-          <p:cNvSpPr txBox="1"/>
-          <p:nvPr/>
-        </p:nvSpPr>
-        <p:spPr>
-          <a:xfrm>
-            <a:off x="548640" y="5358384"/>
-            <a:ext cx="11094415" cy="685800"/>
-          </a:xfrm>
-          <a:prstGeom prst="rect">
-            <a:avLst/>
-          </a:prstGeom>
-          <a:noFill/>
-        </p:spPr>
-        <p:txBody>
-          <a:bodyPr wrap="square" anchor="t" lIns="0" rIns="0" tIns="0" bIns="0">
-            <a:spAutoFit/>
-          </a:bodyPr>
-          <a:lstStyle/>
-          <a:p>
-            <a:r>
-              <a:rPr sz="1500" i="0" b="1">
-                <a:solidFill>
-                  <a:srgbClr val="2F6F7A"/>
-                </a:solidFill>
-                <a:latin typeface="Calibri"/>
-              </a:rPr>
-              <a:t>Why:  </a:t>
-            </a:r>
-            <a:r>
-              <a:rPr sz="1500" i="0" b="0">
-                <a:solidFill>
-                  <a:srgbClr val="2B211C"/>
-                </a:solidFill>
-                <a:latin typeface="Calibri"/>
-              </a:rPr>
-              <a:t>A DIC gives information; it does not make medicines. A, B and D are core DIC work.</a:t>
             </a:r>
           </a:p>
         </p:txBody>
@@ -8843,7 +8914,7 @@
           </a:fontRef>
         </p:style>
         <p:txBody>
-          <a:bodyPr rtlCol="0" anchor="ctr" lIns="0" rIns="0"/>
+          <a:bodyPr rtlCol="0" anchor="ctr" lIns="0" rIns="0" tIns="0" bIns="0"/>
           <a:lstStyle/>
           <a:p>
             <a:pPr algn="ctr"/>
@@ -8888,7 +8959,7 @@
                 </a:solidFill>
                 <a:latin typeface="Calibri"/>
               </a:rPr>
-              <a:t>SELF-ASSESSMENT  ·  QUESTION 3 OF 5</a:t>
+              <a:t>SECTION 1  ·  QUESTION 2 OF 5  ·  ANSWER</a:t>
             </a:r>
           </a:p>
         </p:txBody>
@@ -8922,7 +8993,7 @@
                 </a:solidFill>
                 <a:latin typeface="Cambria"/>
               </a:rPr>
-              <a:t>Your turn</a:t>
+              <a:t>Check your answer</a:t>
             </a:r>
           </a:p>
         </p:txBody>
@@ -9005,7 +9076,7 @@
           <p:nvPr/>
         </p:nvPicPr>
         <p:blipFill>
-          <a:blip r:embed="rId3"/>
+          <a:blip r:embed="rId2"/>
           <a:stretch>
             <a:fillRect/>
           </a:stretch>
@@ -9049,7 +9120,7 @@
                 </a:solidFill>
                 <a:latin typeface="Calibri"/>
               </a:rPr>
-              <a:t>Why is information from drug companies used with care?</a:t>
+              <a:t>Which is NOT a usual activity of a drug information centre?</a:t>
             </a:r>
           </a:p>
         </p:txBody>
@@ -9062,8 +9133,8 @@
         </p:nvSpPr>
         <p:spPr>
           <a:xfrm>
-            <a:off x="548640" y="2697480"/>
-            <a:ext cx="11094415" cy="640080"/>
+            <a:off x="548640" y="2606040"/>
+            <a:ext cx="11094415" cy="548640"/>
           </a:xfrm>
           <a:prstGeom prst="roundRect">
             <a:avLst>
@@ -9071,7 +9142,7 @@
             </a:avLst>
           </a:prstGeom>
           <a:solidFill>
-            <a:srgbClr val="FBF3EE"/>
+            <a:srgbClr val="F5F4F4"/>
           </a:solidFill>
           <a:ln>
             <a:noFill/>
@@ -9108,14 +9179,14 @@
         </p:nvSpPr>
         <p:spPr>
           <a:xfrm>
-            <a:off x="713232" y="2807208"/>
+            <a:off x="713232" y="2670048"/>
             <a:ext cx="420624" cy="420624"/>
           </a:xfrm>
           <a:prstGeom prst="ellipse">
             <a:avLst/>
           </a:prstGeom>
           <a:solidFill>
-            <a:srgbClr val="A4472B"/>
+            <a:srgbClr val="E2E0DE"/>
           </a:solidFill>
           <a:ln>
             <a:noFill/>
@@ -9137,14 +9208,14 @@
           </a:fontRef>
         </p:style>
         <p:txBody>
-          <a:bodyPr rtlCol="0" anchor="ctr" lIns="0" rIns="0"/>
+          <a:bodyPr rtlCol="0" anchor="ctr" lIns="0" rIns="0" tIns="0" bIns="0"/>
           <a:lstStyle/>
           <a:p>
             <a:pPr algn="ctr"/>
             <a:r>
               <a:rPr sz="1500" i="0" b="1">
                 <a:solidFill>
-                  <a:srgbClr val="FFFFFF"/>
+                  <a:srgbClr val="6E625B"/>
                 </a:solidFill>
                 <a:latin typeface="Calibri"/>
               </a:rPr>
@@ -9161,8 +9232,8 @@
         </p:nvSpPr>
         <p:spPr>
           <a:xfrm>
-            <a:off x="1371600" y="2697480"/>
-            <a:ext cx="10088575" cy="640080"/>
+            <a:off x="1371600" y="2606040"/>
+            <a:ext cx="10088575" cy="548640"/>
           </a:xfrm>
           <a:prstGeom prst="rect">
             <a:avLst/>
@@ -9178,11 +9249,11 @@
             <a:r>
               <a:rPr sz="1900" i="0" b="0">
                 <a:solidFill>
-                  <a:srgbClr val="2B211C"/>
-                </a:solidFill>
-                <a:latin typeface="Calibri"/>
-              </a:rPr>
-              <a:t>It may be biased</a:t>
+                  <a:srgbClr val="6E625B"/>
+                </a:solidFill>
+                <a:latin typeface="Calibri"/>
+              </a:rPr>
+              <a:t>Answering questions about interactions</a:t>
             </a:r>
           </a:p>
         </p:txBody>
@@ -9195,8 +9266,8 @@
         </p:nvSpPr>
         <p:spPr>
           <a:xfrm>
-            <a:off x="548640" y="3465576"/>
-            <a:ext cx="11094415" cy="640080"/>
+            <a:off x="548640" y="3282696"/>
+            <a:ext cx="11094415" cy="548640"/>
           </a:xfrm>
           <a:prstGeom prst="roundRect">
             <a:avLst>
@@ -9204,7 +9275,7 @@
             </a:avLst>
           </a:prstGeom>
           <a:solidFill>
-            <a:srgbClr val="FBF3EE"/>
+            <a:srgbClr val="F5F4F4"/>
           </a:solidFill>
           <a:ln>
             <a:noFill/>
@@ -9241,14 +9312,14 @@
         </p:nvSpPr>
         <p:spPr>
           <a:xfrm>
-            <a:off x="713232" y="3575304"/>
+            <a:off x="713232" y="3346703"/>
             <a:ext cx="420624" cy="420624"/>
           </a:xfrm>
           <a:prstGeom prst="ellipse">
             <a:avLst/>
           </a:prstGeom>
           <a:solidFill>
-            <a:srgbClr val="A4472B"/>
+            <a:srgbClr val="E2E0DE"/>
           </a:solidFill>
           <a:ln>
             <a:noFill/>
@@ -9270,14 +9341,14 @@
           </a:fontRef>
         </p:style>
         <p:txBody>
-          <a:bodyPr rtlCol="0" anchor="ctr" lIns="0" rIns="0"/>
+          <a:bodyPr rtlCol="0" anchor="ctr" lIns="0" rIns="0" tIns="0" bIns="0"/>
           <a:lstStyle/>
           <a:p>
             <a:pPr algn="ctr"/>
             <a:r>
               <a:rPr sz="1500" i="0" b="1">
                 <a:solidFill>
-                  <a:srgbClr val="FFFFFF"/>
+                  <a:srgbClr val="6E625B"/>
                 </a:solidFill>
                 <a:latin typeface="Calibri"/>
               </a:rPr>
@@ -9294,8 +9365,8 @@
         </p:nvSpPr>
         <p:spPr>
           <a:xfrm>
-            <a:off x="1371600" y="3465576"/>
-            <a:ext cx="10088575" cy="640080"/>
+            <a:off x="1371600" y="3282696"/>
+            <a:ext cx="10088575" cy="548640"/>
           </a:xfrm>
           <a:prstGeom prst="rect">
             <a:avLst/>
@@ -9311,11 +9382,11 @@
             <a:r>
               <a:rPr sz="1900" i="0" b="0">
                 <a:solidFill>
-                  <a:srgbClr val="2B211C"/>
-                </a:solidFill>
-                <a:latin typeface="Calibri"/>
-              </a:rPr>
-              <a:t>It is always out of date</a:t>
+                  <a:srgbClr val="6E625B"/>
+                </a:solidFill>
+                <a:latin typeface="Calibri"/>
+              </a:rPr>
+              <a:t>Supporting the Drug and Therapeutics Committee</a:t>
             </a:r>
           </a:p>
         </p:txBody>
@@ -9328,8 +9399,8 @@
         </p:nvSpPr>
         <p:spPr>
           <a:xfrm>
-            <a:off x="548640" y="4233672"/>
-            <a:ext cx="11094415" cy="640080"/>
+            <a:off x="548640" y="3959352"/>
+            <a:ext cx="11094415" cy="548640"/>
           </a:xfrm>
           <a:prstGeom prst="roundRect">
             <a:avLst>
@@ -9337,7 +9408,7 @@
             </a:avLst>
           </a:prstGeom>
           <a:solidFill>
-            <a:srgbClr val="FBF3EE"/>
+            <a:srgbClr val="2F6F7A"/>
           </a:solidFill>
           <a:ln>
             <a:noFill/>
@@ -9374,14 +9445,14 @@
         </p:nvSpPr>
         <p:spPr>
           <a:xfrm>
-            <a:off x="713232" y="4343400"/>
+            <a:off x="713232" y="4023360"/>
             <a:ext cx="420624" cy="420624"/>
           </a:xfrm>
           <a:prstGeom prst="ellipse">
             <a:avLst/>
           </a:prstGeom>
           <a:solidFill>
-            <a:srgbClr val="A4472B"/>
+            <a:srgbClr val="FFFFFF"/>
           </a:solidFill>
           <a:ln>
             <a:noFill/>
@@ -9403,14 +9474,14 @@
           </a:fontRef>
         </p:style>
         <p:txBody>
-          <a:bodyPr rtlCol="0" anchor="ctr" lIns="0" rIns="0"/>
+          <a:bodyPr rtlCol="0" anchor="ctr" lIns="0" rIns="0" tIns="0" bIns="0"/>
           <a:lstStyle/>
           <a:p>
             <a:pPr algn="ctr"/>
             <a:r>
               <a:rPr sz="1500" i="0" b="1">
                 <a:solidFill>
-                  <a:srgbClr val="FFFFFF"/>
+                  <a:srgbClr val="2F6F7A"/>
                 </a:solidFill>
                 <a:latin typeface="Calibri"/>
               </a:rPr>
@@ -9427,8 +9498,8 @@
         </p:nvSpPr>
         <p:spPr>
           <a:xfrm>
-            <a:off x="1371600" y="4233672"/>
-            <a:ext cx="10088575" cy="640080"/>
+            <a:off x="1371600" y="3959352"/>
+            <a:ext cx="10088575" cy="548640"/>
           </a:xfrm>
           <a:prstGeom prst="rect">
             <a:avLst/>
@@ -9442,13 +9513,13 @@
           <a:lstStyle/>
           <a:p>
             <a:r>
-              <a:rPr sz="1900" i="0" b="0">
-                <a:solidFill>
-                  <a:srgbClr val="2B211C"/>
-                </a:solidFill>
-                <a:latin typeface="Calibri"/>
-              </a:rPr>
-              <a:t>It is never referenced</a:t>
+              <a:rPr sz="1900" i="0" b="1">
+                <a:solidFill>
+                  <a:srgbClr val="FFFFFF"/>
+                </a:solidFill>
+                <a:latin typeface="Calibri"/>
+              </a:rPr>
+              <a:t>Manufacturing medicines</a:t>
             </a:r>
           </a:p>
         </p:txBody>
@@ -9461,8 +9532,8 @@
         </p:nvSpPr>
         <p:spPr>
           <a:xfrm>
-            <a:off x="548640" y="5001768"/>
-            <a:ext cx="11094415" cy="640080"/>
+            <a:off x="548640" y="4636008"/>
+            <a:ext cx="11094415" cy="548640"/>
           </a:xfrm>
           <a:prstGeom prst="roundRect">
             <a:avLst>
@@ -9470,7 +9541,7 @@
             </a:avLst>
           </a:prstGeom>
           <a:solidFill>
-            <a:srgbClr val="FBF3EE"/>
+            <a:srgbClr val="F5F4F4"/>
           </a:solidFill>
           <a:ln>
             <a:noFill/>
@@ -9507,14 +9578,14 @@
         </p:nvSpPr>
         <p:spPr>
           <a:xfrm>
-            <a:off x="713232" y="5111496"/>
+            <a:off x="713232" y="4700016"/>
             <a:ext cx="420624" cy="420624"/>
           </a:xfrm>
           <a:prstGeom prst="ellipse">
             <a:avLst/>
           </a:prstGeom>
           <a:solidFill>
-            <a:srgbClr val="A4472B"/>
+            <a:srgbClr val="E2E0DE"/>
           </a:solidFill>
           <a:ln>
             <a:noFill/>
@@ -9536,14 +9607,14 @@
           </a:fontRef>
         </p:style>
         <p:txBody>
-          <a:bodyPr rtlCol="0" anchor="ctr" lIns="0" rIns="0"/>
+          <a:bodyPr rtlCol="0" anchor="ctr" lIns="0" rIns="0" tIns="0" bIns="0"/>
           <a:lstStyle/>
           <a:p>
             <a:pPr algn="ctr"/>
             <a:r>
               <a:rPr sz="1500" i="0" b="1">
                 <a:solidFill>
-                  <a:srgbClr val="FFFFFF"/>
+                  <a:srgbClr val="6E625B"/>
                 </a:solidFill>
                 <a:latin typeface="Calibri"/>
               </a:rPr>
@@ -9560,8 +9631,8 @@
         </p:nvSpPr>
         <p:spPr>
           <a:xfrm>
-            <a:off x="1371600" y="5001768"/>
-            <a:ext cx="10088575" cy="640080"/>
+            <a:off x="1371600" y="4636008"/>
+            <a:ext cx="10088575" cy="548640"/>
           </a:xfrm>
           <a:prstGeom prst="rect">
             <a:avLst/>
@@ -9577,11 +9648,54 @@
             <a:r>
               <a:rPr sz="1900" i="0" b="0">
                 <a:solidFill>
+                  <a:srgbClr val="6E625B"/>
+                </a:solidFill>
+                <a:latin typeface="Calibri"/>
+              </a:rPr>
+              <a:t>Collecting adverse drug reaction reports</a:t>
+            </a:r>
+          </a:p>
+        </p:txBody>
+      </p:sp>
+      <p:sp>
+        <p:nvSpPr>
+          <p:cNvPr id="21" name="TextBox 20"/>
+          <p:cNvSpPr txBox="1"/>
+          <p:nvPr/>
+        </p:nvSpPr>
+        <p:spPr>
+          <a:xfrm>
+            <a:off x="548640" y="5358384"/>
+            <a:ext cx="11094415" cy="685800"/>
+          </a:xfrm>
+          <a:prstGeom prst="rect">
+            <a:avLst/>
+          </a:prstGeom>
+          <a:noFill/>
+        </p:spPr>
+        <p:txBody>
+          <a:bodyPr wrap="square" anchor="t" lIns="0" rIns="0" tIns="0" bIns="0">
+            <a:spAutoFit/>
+          </a:bodyPr>
+          <a:lstStyle/>
+          <a:p>
+            <a:r>
+              <a:rPr sz="1500" i="0" b="1">
+                <a:solidFill>
+                  <a:srgbClr val="2F6F7A"/>
+                </a:solidFill>
+                <a:latin typeface="Calibri"/>
+              </a:rPr>
+              <a:t>Why:  </a:t>
+            </a:r>
+            <a:r>
+              <a:rPr sz="1500" i="0" b="0">
+                <a:solidFill>
                   <a:srgbClr val="2B211C"/>
                 </a:solidFill>
                 <a:latin typeface="Calibri"/>
               </a:rPr>
-              <a:t>It is too expensive</a:t>
+              <a:t>A DIC gives information; it does not make medicines. A, B and D are core DIC work.</a:t>
             </a:r>
           </a:p>
         </p:txBody>
@@ -9649,7 +9763,7 @@
           </a:fontRef>
         </p:style>
         <p:txBody>
-          <a:bodyPr rtlCol="0" anchor="ctr" lIns="0" rIns="0"/>
+          <a:bodyPr rtlCol="0" anchor="ctr" lIns="0" rIns="0" tIns="0" bIns="0"/>
           <a:lstStyle/>
           <a:p>
             <a:pPr algn="ctr"/>
@@ -9694,7 +9808,7 @@
                 </a:solidFill>
                 <a:latin typeface="Calibri"/>
               </a:rPr>
-              <a:t>SELF-ASSESSMENT  ·  QUESTION 3 OF 5  ·  ANSWER</a:t>
+              <a:t>SECTION 1  ·  QUESTION 3 OF 5</a:t>
             </a:r>
           </a:p>
         </p:txBody>
@@ -9728,7 +9842,7 @@
                 </a:solidFill>
                 <a:latin typeface="Cambria"/>
               </a:rPr>
-              <a:t>Check your answer</a:t>
+              <a:t>Your turn</a:t>
             </a:r>
           </a:p>
         </p:txBody>
@@ -9811,7 +9925,7 @@
           <p:nvPr/>
         </p:nvPicPr>
         <p:blipFill>
-          <a:blip r:embed="rId2"/>
+          <a:blip r:embed="rId3"/>
           <a:stretch>
             <a:fillRect/>
           </a:stretch>
@@ -9868,8 +9982,8 @@
         </p:nvSpPr>
         <p:spPr>
           <a:xfrm>
-            <a:off x="548640" y="2606040"/>
-            <a:ext cx="11094415" cy="548640"/>
+            <a:off x="548640" y="2697480"/>
+            <a:ext cx="11094415" cy="640080"/>
           </a:xfrm>
           <a:prstGeom prst="roundRect">
             <a:avLst>
@@ -9877,7 +9991,7 @@
             </a:avLst>
           </a:prstGeom>
           <a:solidFill>
-            <a:srgbClr val="2F6F7A"/>
+            <a:srgbClr val="FAF4F2"/>
           </a:solidFill>
           <a:ln>
             <a:noFill/>
@@ -9914,14 +10028,14 @@
         </p:nvSpPr>
         <p:spPr>
           <a:xfrm>
-            <a:off x="713232" y="2670048"/>
+            <a:off x="713232" y="2807208"/>
             <a:ext cx="420624" cy="420624"/>
           </a:xfrm>
           <a:prstGeom prst="ellipse">
             <a:avLst/>
           </a:prstGeom>
           <a:solidFill>
-            <a:srgbClr val="FFFFFF"/>
+            <a:srgbClr val="A4472B"/>
           </a:solidFill>
           <a:ln>
             <a:noFill/>
@@ -9943,14 +10057,14 @@
           </a:fontRef>
         </p:style>
         <p:txBody>
-          <a:bodyPr rtlCol="0" anchor="ctr" lIns="0" rIns="0"/>
+          <a:bodyPr rtlCol="0" anchor="ctr" lIns="0" rIns="0" tIns="0" bIns="0"/>
           <a:lstStyle/>
           <a:p>
             <a:pPr algn="ctr"/>
             <a:r>
               <a:rPr sz="1500" i="0" b="1">
                 <a:solidFill>
-                  <a:srgbClr val="2F6F7A"/>
+                  <a:srgbClr val="FFFFFF"/>
                 </a:solidFill>
                 <a:latin typeface="Calibri"/>
               </a:rPr>
@@ -9967,8 +10081,8 @@
         </p:nvSpPr>
         <p:spPr>
           <a:xfrm>
-            <a:off x="1371600" y="2606040"/>
-            <a:ext cx="10088575" cy="548640"/>
+            <a:off x="1371600" y="2697480"/>
+            <a:ext cx="10088575" cy="640080"/>
           </a:xfrm>
           <a:prstGeom prst="rect">
             <a:avLst/>
@@ -9982,9 +10096,9 @@
           <a:lstStyle/>
           <a:p>
             <a:r>
-              <a:rPr sz="1900" i="0" b="1">
-                <a:solidFill>
-                  <a:srgbClr val="FFFFFF"/>
+              <a:rPr sz="1900" i="0" b="0">
+                <a:solidFill>
+                  <a:srgbClr val="2B211C"/>
                 </a:solidFill>
                 <a:latin typeface="Calibri"/>
               </a:rPr>
@@ -10001,8 +10115,8 @@
         </p:nvSpPr>
         <p:spPr>
           <a:xfrm>
-            <a:off x="548640" y="3282696"/>
-            <a:ext cx="11094415" cy="548640"/>
+            <a:off x="548640" y="3465576"/>
+            <a:ext cx="11094415" cy="640080"/>
           </a:xfrm>
           <a:prstGeom prst="roundRect">
             <a:avLst>
@@ -10010,7 +10124,7 @@
             </a:avLst>
           </a:prstGeom>
           <a:solidFill>
-            <a:srgbClr val="F7F4F2"/>
+            <a:srgbClr val="FAF4F2"/>
           </a:solidFill>
           <a:ln>
             <a:noFill/>
@@ -10047,14 +10161,14 @@
         </p:nvSpPr>
         <p:spPr>
           <a:xfrm>
-            <a:off x="713232" y="3346703"/>
+            <a:off x="713232" y="3575304"/>
             <a:ext cx="420624" cy="420624"/>
           </a:xfrm>
           <a:prstGeom prst="ellipse">
             <a:avLst/>
           </a:prstGeom>
           <a:solidFill>
-            <a:srgbClr val="E6DFDA"/>
+            <a:srgbClr val="A4472B"/>
           </a:solidFill>
           <a:ln>
             <a:noFill/>
@@ -10076,14 +10190,14 @@
           </a:fontRef>
         </p:style>
         <p:txBody>
-          <a:bodyPr rtlCol="0" anchor="ctr" lIns="0" rIns="0"/>
+          <a:bodyPr rtlCol="0" anchor="ctr" lIns="0" rIns="0" tIns="0" bIns="0"/>
           <a:lstStyle/>
           <a:p>
             <a:pPr algn="ctr"/>
             <a:r>
               <a:rPr sz="1500" i="0" b="1">
                 <a:solidFill>
-                  <a:srgbClr val="6E625B"/>
+                  <a:srgbClr val="FFFFFF"/>
                 </a:solidFill>
                 <a:latin typeface="Calibri"/>
               </a:rPr>
@@ -10100,8 +10214,8 @@
         </p:nvSpPr>
         <p:spPr>
           <a:xfrm>
-            <a:off x="1371600" y="3282696"/>
-            <a:ext cx="10088575" cy="548640"/>
+            <a:off x="1371600" y="3465576"/>
+            <a:ext cx="10088575" cy="640080"/>
           </a:xfrm>
           <a:prstGeom prst="rect">
             <a:avLst/>
@@ -10117,7 +10231,7 @@
             <a:r>
               <a:rPr sz="1900" i="0" b="0">
                 <a:solidFill>
-                  <a:srgbClr val="6E625B"/>
+                  <a:srgbClr val="2B211C"/>
                 </a:solidFill>
                 <a:latin typeface="Calibri"/>
               </a:rPr>
@@ -10134,8 +10248,8 @@
         </p:nvSpPr>
         <p:spPr>
           <a:xfrm>
-            <a:off x="548640" y="3959352"/>
-            <a:ext cx="11094415" cy="548640"/>
+            <a:off x="548640" y="4233672"/>
+            <a:ext cx="11094415" cy="640080"/>
           </a:xfrm>
           <a:prstGeom prst="roundRect">
             <a:avLst>
@@ -10143,7 +10257,7 @@
             </a:avLst>
           </a:prstGeom>
           <a:solidFill>
-            <a:srgbClr val="F7F4F2"/>
+            <a:srgbClr val="FAF4F2"/>
           </a:solidFill>
           <a:ln>
             <a:noFill/>
@@ -10180,14 +10294,14 @@
         </p:nvSpPr>
         <p:spPr>
           <a:xfrm>
-            <a:off x="713232" y="4023360"/>
+            <a:off x="713232" y="4343400"/>
             <a:ext cx="420624" cy="420624"/>
           </a:xfrm>
           <a:prstGeom prst="ellipse">
             <a:avLst/>
           </a:prstGeom>
           <a:solidFill>
-            <a:srgbClr val="E6DFDA"/>
+            <a:srgbClr val="A4472B"/>
           </a:solidFill>
           <a:ln>
             <a:noFill/>
@@ -10209,14 +10323,14 @@
           </a:fontRef>
         </p:style>
         <p:txBody>
-          <a:bodyPr rtlCol="0" anchor="ctr" lIns="0" rIns="0"/>
+          <a:bodyPr rtlCol="0" anchor="ctr" lIns="0" rIns="0" tIns="0" bIns="0"/>
           <a:lstStyle/>
           <a:p>
             <a:pPr algn="ctr"/>
             <a:r>
               <a:rPr sz="1500" i="0" b="1">
                 <a:solidFill>
-                  <a:srgbClr val="6E625B"/>
+                  <a:srgbClr val="FFFFFF"/>
                 </a:solidFill>
                 <a:latin typeface="Calibri"/>
               </a:rPr>
@@ -10233,8 +10347,8 @@
         </p:nvSpPr>
         <p:spPr>
           <a:xfrm>
-            <a:off x="1371600" y="3959352"/>
-            <a:ext cx="10088575" cy="548640"/>
+            <a:off x="1371600" y="4233672"/>
+            <a:ext cx="10088575" cy="640080"/>
           </a:xfrm>
           <a:prstGeom prst="rect">
             <a:avLst/>
@@ -10250,7 +10364,7 @@
             <a:r>
               <a:rPr sz="1900" i="0" b="0">
                 <a:solidFill>
-                  <a:srgbClr val="6E625B"/>
+                  <a:srgbClr val="2B211C"/>
                 </a:solidFill>
                 <a:latin typeface="Calibri"/>
               </a:rPr>
@@ -10267,8 +10381,8 @@
         </p:nvSpPr>
         <p:spPr>
           <a:xfrm>
-            <a:off x="548640" y="4636008"/>
-            <a:ext cx="11094415" cy="548640"/>
+            <a:off x="548640" y="5001768"/>
+            <a:ext cx="11094415" cy="640080"/>
           </a:xfrm>
           <a:prstGeom prst="roundRect">
             <a:avLst>
@@ -10276,7 +10390,7 @@
             </a:avLst>
           </a:prstGeom>
           <a:solidFill>
-            <a:srgbClr val="F7F4F2"/>
+            <a:srgbClr val="FAF4F2"/>
           </a:solidFill>
           <a:ln>
             <a:noFill/>
@@ -10313,14 +10427,14 @@
         </p:nvSpPr>
         <p:spPr>
           <a:xfrm>
-            <a:off x="713232" y="4700016"/>
+            <a:off x="713232" y="5111496"/>
             <a:ext cx="420624" cy="420624"/>
           </a:xfrm>
           <a:prstGeom prst="ellipse">
             <a:avLst/>
           </a:prstGeom>
           <a:solidFill>
-            <a:srgbClr val="E6DFDA"/>
+            <a:srgbClr val="A4472B"/>
           </a:solidFill>
           <a:ln>
             <a:noFill/>
@@ -10342,14 +10456,14 @@
           </a:fontRef>
         </p:style>
         <p:txBody>
-          <a:bodyPr rtlCol="0" anchor="ctr" lIns="0" rIns="0"/>
+          <a:bodyPr rtlCol="0" anchor="ctr" lIns="0" rIns="0" tIns="0" bIns="0"/>
           <a:lstStyle/>
           <a:p>
             <a:pPr algn="ctr"/>
             <a:r>
               <a:rPr sz="1500" i="0" b="1">
                 <a:solidFill>
-                  <a:srgbClr val="6E625B"/>
+                  <a:srgbClr val="FFFFFF"/>
                 </a:solidFill>
                 <a:latin typeface="Calibri"/>
               </a:rPr>
@@ -10366,8 +10480,8 @@
         </p:nvSpPr>
         <p:spPr>
           <a:xfrm>
-            <a:off x="1371600" y="4636008"/>
-            <a:ext cx="10088575" cy="548640"/>
+            <a:off x="1371600" y="5001768"/>
+            <a:ext cx="10088575" cy="640080"/>
           </a:xfrm>
           <a:prstGeom prst="rect">
             <a:avLst/>
@@ -10383,54 +10497,11 @@
             <a:r>
               <a:rPr sz="1900" i="0" b="0">
                 <a:solidFill>
-                  <a:srgbClr val="6E625B"/>
+                  <a:srgbClr val="2B211C"/>
                 </a:solidFill>
                 <a:latin typeface="Calibri"/>
               </a:rPr>
               <a:t>It is too expensive</a:t>
-            </a:r>
-          </a:p>
-        </p:txBody>
-      </p:sp>
-      <p:sp>
-        <p:nvSpPr>
-          <p:cNvPr id="21" name="TextBox 20"/>
-          <p:cNvSpPr txBox="1"/>
-          <p:nvPr/>
-        </p:nvSpPr>
-        <p:spPr>
-          <a:xfrm>
-            <a:off x="548640" y="5358384"/>
-            <a:ext cx="11094415" cy="685800"/>
-          </a:xfrm>
-          <a:prstGeom prst="rect">
-            <a:avLst/>
-          </a:prstGeom>
-          <a:noFill/>
-        </p:spPr>
-        <p:txBody>
-          <a:bodyPr wrap="square" anchor="t" lIns="0" rIns="0" tIns="0" bIns="0">
-            <a:spAutoFit/>
-          </a:bodyPr>
-          <a:lstStyle/>
-          <a:p>
-            <a:r>
-              <a:rPr sz="1500" i="0" b="1">
-                <a:solidFill>
-                  <a:srgbClr val="2F6F7A"/>
-                </a:solidFill>
-                <a:latin typeface="Calibri"/>
-              </a:rPr>
-              <a:t>Why:  </a:t>
-            </a:r>
-            <a:r>
-              <a:rPr sz="1500" i="0" b="0">
-                <a:solidFill>
-                  <a:srgbClr val="2B211C"/>
-                </a:solidFill>
-                <a:latin typeface="Calibri"/>
-              </a:rPr>
-              <a:t>Companies promote their own products, so their information may be biased. B, C and D are not always true.</a:t>
             </a:r>
           </a:p>
         </p:txBody>
@@ -10498,7 +10569,7 @@
           </a:fontRef>
         </p:style>
         <p:txBody>
-          <a:bodyPr rtlCol="0" anchor="ctr" lIns="0" rIns="0"/>
+          <a:bodyPr rtlCol="0" anchor="ctr" lIns="0" rIns="0" tIns="0" bIns="0"/>
           <a:lstStyle/>
           <a:p>
             <a:pPr algn="ctr"/>
@@ -10543,7 +10614,7 @@
                 </a:solidFill>
                 <a:latin typeface="Calibri"/>
               </a:rPr>
-              <a:t>SELF-ASSESSMENT  ·  QUESTION 4 OF 5</a:t>
+              <a:t>SECTION 1  ·  QUESTION 3 OF 5  ·  ANSWER</a:t>
             </a:r>
           </a:p>
         </p:txBody>
@@ -10577,7 +10648,7 @@
                 </a:solidFill>
                 <a:latin typeface="Cambria"/>
               </a:rPr>
-              <a:t>Your turn</a:t>
+              <a:t>Check your answer</a:t>
             </a:r>
           </a:p>
         </p:txBody>
@@ -10660,7 +10731,7 @@
           <p:nvPr/>
         </p:nvPicPr>
         <p:blipFill>
-          <a:blip r:embed="rId3"/>
+          <a:blip r:embed="rId2"/>
           <a:stretch>
             <a:fillRect/>
           </a:stretch>
@@ -10704,7 +10775,7 @@
                 </a:solidFill>
                 <a:latin typeface="Calibri"/>
               </a:rPr>
-              <a:t>A nurse asks, "Can I crush this tablet?" Which step helps you most to find the real need?</a:t>
+              <a:t>Why is information from drug companies used with care?</a:t>
             </a:r>
           </a:p>
         </p:txBody>
@@ -10717,8 +10788,8 @@
         </p:nvSpPr>
         <p:spPr>
           <a:xfrm>
-            <a:off x="548640" y="2697480"/>
-            <a:ext cx="11094415" cy="640080"/>
+            <a:off x="548640" y="2606040"/>
+            <a:ext cx="11094415" cy="548640"/>
           </a:xfrm>
           <a:prstGeom prst="roundRect">
             <a:avLst>
@@ -10726,7 +10797,7 @@
             </a:avLst>
           </a:prstGeom>
           <a:solidFill>
-            <a:srgbClr val="FBF3EE"/>
+            <a:srgbClr val="2F6F7A"/>
           </a:solidFill>
           <a:ln>
             <a:noFill/>
@@ -10763,14 +10834,14 @@
         </p:nvSpPr>
         <p:spPr>
           <a:xfrm>
-            <a:off x="713232" y="2807208"/>
+            <a:off x="713232" y="2670048"/>
             <a:ext cx="420624" cy="420624"/>
           </a:xfrm>
           <a:prstGeom prst="ellipse">
             <a:avLst/>
           </a:prstGeom>
           <a:solidFill>
-            <a:srgbClr val="A4472B"/>
+            <a:srgbClr val="FFFFFF"/>
           </a:solidFill>
           <a:ln>
             <a:noFill/>
@@ -10792,14 +10863,14 @@
           </a:fontRef>
         </p:style>
         <p:txBody>
-          <a:bodyPr rtlCol="0" anchor="ctr" lIns="0" rIns="0"/>
+          <a:bodyPr rtlCol="0" anchor="ctr" lIns="0" rIns="0" tIns="0" bIns="0"/>
           <a:lstStyle/>
           <a:p>
             <a:pPr algn="ctr"/>
             <a:r>
               <a:rPr sz="1500" i="0" b="1">
                 <a:solidFill>
-                  <a:srgbClr val="FFFFFF"/>
+                  <a:srgbClr val="2F6F7A"/>
                 </a:solidFill>
                 <a:latin typeface="Calibri"/>
               </a:rPr>
@@ -10816,8 +10887,8 @@
         </p:nvSpPr>
         <p:spPr>
           <a:xfrm>
-            <a:off x="1371600" y="2697480"/>
-            <a:ext cx="10088575" cy="640080"/>
+            <a:off x="1371600" y="2606040"/>
+            <a:ext cx="10088575" cy="548640"/>
           </a:xfrm>
           <a:prstGeom prst="rect">
             <a:avLst/>
@@ -10831,13 +10902,13 @@
           <a:lstStyle/>
           <a:p>
             <a:r>
-              <a:rPr sz="1900" i="0" b="0">
-                <a:solidFill>
-                  <a:srgbClr val="2B211C"/>
-                </a:solidFill>
-                <a:latin typeface="Calibri"/>
-              </a:rPr>
-              <a:t>Classifying the question as a formulation question</a:t>
+              <a:rPr sz="1900" i="0" b="1">
+                <a:solidFill>
+                  <a:srgbClr val="FFFFFF"/>
+                </a:solidFill>
+                <a:latin typeface="Calibri"/>
+              </a:rPr>
+              <a:t>It may be biased</a:t>
             </a:r>
           </a:p>
         </p:txBody>
@@ -10850,8 +10921,8 @@
         </p:nvSpPr>
         <p:spPr>
           <a:xfrm>
-            <a:off x="548640" y="3465576"/>
-            <a:ext cx="11094415" cy="640080"/>
+            <a:off x="548640" y="3282696"/>
+            <a:ext cx="11094415" cy="548640"/>
           </a:xfrm>
           <a:prstGeom prst="roundRect">
             <a:avLst>
@@ -10859,7 +10930,7 @@
             </a:avLst>
           </a:prstGeom>
           <a:solidFill>
-            <a:srgbClr val="FBF3EE"/>
+            <a:srgbClr val="F5F4F4"/>
           </a:solidFill>
           <a:ln>
             <a:noFill/>
@@ -10896,14 +10967,14 @@
         </p:nvSpPr>
         <p:spPr>
           <a:xfrm>
-            <a:off x="713232" y="3575304"/>
+            <a:off x="713232" y="3346703"/>
             <a:ext cx="420624" cy="420624"/>
           </a:xfrm>
           <a:prstGeom prst="ellipse">
             <a:avLst/>
           </a:prstGeom>
           <a:solidFill>
-            <a:srgbClr val="A4472B"/>
+            <a:srgbClr val="E2E0DE"/>
           </a:solidFill>
           <a:ln>
             <a:noFill/>
@@ -10925,14 +10996,14 @@
           </a:fontRef>
         </p:style>
         <p:txBody>
-          <a:bodyPr rtlCol="0" anchor="ctr" lIns="0" rIns="0"/>
+          <a:bodyPr rtlCol="0" anchor="ctr" lIns="0" rIns="0" tIns="0" bIns="0"/>
           <a:lstStyle/>
           <a:p>
             <a:pPr algn="ctr"/>
             <a:r>
               <a:rPr sz="1500" i="0" b="1">
                 <a:solidFill>
-                  <a:srgbClr val="FFFFFF"/>
+                  <a:srgbClr val="6E625B"/>
                 </a:solidFill>
                 <a:latin typeface="Calibri"/>
               </a:rPr>
@@ -10949,8 +11020,8 @@
         </p:nvSpPr>
         <p:spPr>
           <a:xfrm>
-            <a:off x="1371600" y="3465576"/>
-            <a:ext cx="10088575" cy="640080"/>
+            <a:off x="1371600" y="3282696"/>
+            <a:ext cx="10088575" cy="548640"/>
           </a:xfrm>
           <a:prstGeom prst="rect">
             <a:avLst/>
@@ -10966,11 +11037,11 @@
             <a:r>
               <a:rPr sz="1900" i="0" b="0">
                 <a:solidFill>
-                  <a:srgbClr val="2B211C"/>
-                </a:solidFill>
-                <a:latin typeface="Calibri"/>
-              </a:rPr>
-              <a:t>Searching the internet</a:t>
+                  <a:srgbClr val="6E625B"/>
+                </a:solidFill>
+                <a:latin typeface="Calibri"/>
+              </a:rPr>
+              <a:t>It is always out of date</a:t>
             </a:r>
           </a:p>
         </p:txBody>
@@ -10983,8 +11054,8 @@
         </p:nvSpPr>
         <p:spPr>
           <a:xfrm>
-            <a:off x="548640" y="4233672"/>
-            <a:ext cx="11094415" cy="640080"/>
+            <a:off x="548640" y="3959352"/>
+            <a:ext cx="11094415" cy="548640"/>
           </a:xfrm>
           <a:prstGeom prst="roundRect">
             <a:avLst>
@@ -10992,7 +11063,7 @@
             </a:avLst>
           </a:prstGeom>
           <a:solidFill>
-            <a:srgbClr val="FBF3EE"/>
+            <a:srgbClr val="F5F4F4"/>
           </a:solidFill>
           <a:ln>
             <a:noFill/>
@@ -11029,14 +11100,14 @@
         </p:nvSpPr>
         <p:spPr>
           <a:xfrm>
-            <a:off x="713232" y="4343400"/>
+            <a:off x="713232" y="4023360"/>
             <a:ext cx="420624" cy="420624"/>
           </a:xfrm>
           <a:prstGeom prst="ellipse">
             <a:avLst/>
           </a:prstGeom>
           <a:solidFill>
-            <a:srgbClr val="A4472B"/>
+            <a:srgbClr val="E2E0DE"/>
           </a:solidFill>
           <a:ln>
             <a:noFill/>
@@ -11058,14 +11129,14 @@
           </a:fontRef>
         </p:style>
         <p:txBody>
-          <a:bodyPr rtlCol="0" anchor="ctr" lIns="0" rIns="0"/>
+          <a:bodyPr rtlCol="0" anchor="ctr" lIns="0" rIns="0" tIns="0" bIns="0"/>
           <a:lstStyle/>
           <a:p>
             <a:pPr algn="ctr"/>
             <a:r>
               <a:rPr sz="1500" i="0" b="1">
                 <a:solidFill>
-                  <a:srgbClr val="FFFFFF"/>
+                  <a:srgbClr val="6E625B"/>
                 </a:solidFill>
                 <a:latin typeface="Calibri"/>
               </a:rPr>
@@ -11082,8 +11153,8 @@
         </p:nvSpPr>
         <p:spPr>
           <a:xfrm>
-            <a:off x="1371600" y="4233672"/>
-            <a:ext cx="10088575" cy="640080"/>
+            <a:off x="1371600" y="3959352"/>
+            <a:ext cx="10088575" cy="548640"/>
           </a:xfrm>
           <a:prstGeom prst="rect">
             <a:avLst/>
@@ -11099,11 +11170,11 @@
             <a:r>
               <a:rPr sz="1900" i="0" b="0">
                 <a:solidFill>
-                  <a:srgbClr val="2B211C"/>
-                </a:solidFill>
-                <a:latin typeface="Calibri"/>
-              </a:rPr>
-              <a:t>Asking why the tablet needs to be crushed</a:t>
+                  <a:srgbClr val="6E625B"/>
+                </a:solidFill>
+                <a:latin typeface="Calibri"/>
+              </a:rPr>
+              <a:t>It is never referenced</a:t>
             </a:r>
           </a:p>
         </p:txBody>
@@ -11116,8 +11187,8 @@
         </p:nvSpPr>
         <p:spPr>
           <a:xfrm>
-            <a:off x="548640" y="5001768"/>
-            <a:ext cx="11094415" cy="640080"/>
+            <a:off x="548640" y="4636008"/>
+            <a:ext cx="11094415" cy="548640"/>
           </a:xfrm>
           <a:prstGeom prst="roundRect">
             <a:avLst>
@@ -11125,7 +11196,7 @@
             </a:avLst>
           </a:prstGeom>
           <a:solidFill>
-            <a:srgbClr val="FBF3EE"/>
+            <a:srgbClr val="F5F4F4"/>
           </a:solidFill>
           <a:ln>
             <a:noFill/>
@@ -11162,14 +11233,14 @@
         </p:nvSpPr>
         <p:spPr>
           <a:xfrm>
-            <a:off x="713232" y="5111496"/>
+            <a:off x="713232" y="4700016"/>
             <a:ext cx="420624" cy="420624"/>
           </a:xfrm>
           <a:prstGeom prst="ellipse">
             <a:avLst/>
           </a:prstGeom>
           <a:solidFill>
-            <a:srgbClr val="A4472B"/>
+            <a:srgbClr val="E2E0DE"/>
           </a:solidFill>
           <a:ln>
             <a:noFill/>
@@ -11191,14 +11262,14 @@
           </a:fontRef>
         </p:style>
         <p:txBody>
-          <a:bodyPr rtlCol="0" anchor="ctr" lIns="0" rIns="0"/>
+          <a:bodyPr rtlCol="0" anchor="ctr" lIns="0" rIns="0" tIns="0" bIns="0"/>
           <a:lstStyle/>
           <a:p>
             <a:pPr algn="ctr"/>
             <a:r>
               <a:rPr sz="1500" i="0" b="1">
                 <a:solidFill>
-                  <a:srgbClr val="FFFFFF"/>
+                  <a:srgbClr val="6E625B"/>
                 </a:solidFill>
                 <a:latin typeface="Calibri"/>
               </a:rPr>
@@ -11215,8 +11286,8 @@
         </p:nvSpPr>
         <p:spPr>
           <a:xfrm>
-            <a:off x="1371600" y="5001768"/>
-            <a:ext cx="10088575" cy="640080"/>
+            <a:off x="1371600" y="4636008"/>
+            <a:ext cx="10088575" cy="548640"/>
           </a:xfrm>
           <a:prstGeom prst="rect">
             <a:avLst/>
@@ -11232,11 +11303,54 @@
             <a:r>
               <a:rPr sz="1900" i="0" b="0">
                 <a:solidFill>
+                  <a:srgbClr val="6E625B"/>
+                </a:solidFill>
+                <a:latin typeface="Calibri"/>
+              </a:rPr>
+              <a:t>It is too expensive</a:t>
+            </a:r>
+          </a:p>
+        </p:txBody>
+      </p:sp>
+      <p:sp>
+        <p:nvSpPr>
+          <p:cNvPr id="21" name="TextBox 20"/>
+          <p:cNvSpPr txBox="1"/>
+          <p:nvPr/>
+        </p:nvSpPr>
+        <p:spPr>
+          <a:xfrm>
+            <a:off x="548640" y="5358384"/>
+            <a:ext cx="11094415" cy="685800"/>
+          </a:xfrm>
+          <a:prstGeom prst="rect">
+            <a:avLst/>
+          </a:prstGeom>
+          <a:noFill/>
+        </p:spPr>
+        <p:txBody>
+          <a:bodyPr wrap="square" anchor="t" lIns="0" rIns="0" tIns="0" bIns="0">
+            <a:spAutoFit/>
+          </a:bodyPr>
+          <a:lstStyle/>
+          <a:p>
+            <a:r>
+              <a:rPr sz="1500" i="0" b="1">
+                <a:solidFill>
+                  <a:srgbClr val="2F6F7A"/>
+                </a:solidFill>
+                <a:latin typeface="Calibri"/>
+              </a:rPr>
+              <a:t>Why:  </a:t>
+            </a:r>
+            <a:r>
+              <a:rPr sz="1500" i="0" b="0">
+                <a:solidFill>
                   <a:srgbClr val="2B211C"/>
                 </a:solidFill>
                 <a:latin typeface="Calibri"/>
               </a:rPr>
-              <a:t>Documenting the request</a:t>
+              <a:t>Companies promote their own products, so their information may be biased. B, C and D are not always true.</a:t>
             </a:r>
           </a:p>
         </p:txBody>
@@ -11304,7 +11418,7 @@
           </a:fontRef>
         </p:style>
         <p:txBody>
-          <a:bodyPr rtlCol="0" anchor="ctr" lIns="0" rIns="0"/>
+          <a:bodyPr rtlCol="0" anchor="ctr" lIns="0" rIns="0" tIns="0" bIns="0"/>
           <a:lstStyle/>
           <a:p>
             <a:pPr algn="ctr"/>
@@ -11349,7 +11463,7 @@
                 </a:solidFill>
                 <a:latin typeface="Calibri"/>
               </a:rPr>
-              <a:t>SELF-ASSESSMENT  ·  QUESTION 4 OF 5  ·  ANSWER</a:t>
+              <a:t>SECTION 1  ·  QUESTION 4 OF 5</a:t>
             </a:r>
           </a:p>
         </p:txBody>
@@ -11383,7 +11497,7 @@
                 </a:solidFill>
                 <a:latin typeface="Cambria"/>
               </a:rPr>
-              <a:t>Check your answer</a:t>
+              <a:t>Your turn</a:t>
             </a:r>
           </a:p>
         </p:txBody>
@@ -11466,7 +11580,7 @@
           <p:nvPr/>
         </p:nvPicPr>
         <p:blipFill>
-          <a:blip r:embed="rId2"/>
+          <a:blip r:embed="rId3"/>
           <a:stretch>
             <a:fillRect/>
           </a:stretch>
@@ -11523,8 +11637,8 @@
         </p:nvSpPr>
         <p:spPr>
           <a:xfrm>
-            <a:off x="548640" y="2606040"/>
-            <a:ext cx="11094415" cy="548640"/>
+            <a:off x="548640" y="2697480"/>
+            <a:ext cx="11094415" cy="640080"/>
           </a:xfrm>
           <a:prstGeom prst="roundRect">
             <a:avLst>
@@ -11532,7 +11646,7 @@
             </a:avLst>
           </a:prstGeom>
           <a:solidFill>
-            <a:srgbClr val="F7F4F2"/>
+            <a:srgbClr val="FAF4F2"/>
           </a:solidFill>
           <a:ln>
             <a:noFill/>
@@ -11569,14 +11683,14 @@
         </p:nvSpPr>
         <p:spPr>
           <a:xfrm>
-            <a:off x="713232" y="2670048"/>
+            <a:off x="713232" y="2807208"/>
             <a:ext cx="420624" cy="420624"/>
           </a:xfrm>
           <a:prstGeom prst="ellipse">
             <a:avLst/>
           </a:prstGeom>
           <a:solidFill>
-            <a:srgbClr val="E6DFDA"/>
+            <a:srgbClr val="A4472B"/>
           </a:solidFill>
           <a:ln>
             <a:noFill/>
@@ -11598,14 +11712,14 @@
           </a:fontRef>
         </p:style>
         <p:txBody>
-          <a:bodyPr rtlCol="0" anchor="ctr" lIns="0" rIns="0"/>
+          <a:bodyPr rtlCol="0" anchor="ctr" lIns="0" rIns="0" tIns="0" bIns="0"/>
           <a:lstStyle/>
           <a:p>
             <a:pPr algn="ctr"/>
             <a:r>
               <a:rPr sz="1500" i="0" b="1">
                 <a:solidFill>
-                  <a:srgbClr val="6E625B"/>
+                  <a:srgbClr val="FFFFFF"/>
                 </a:solidFill>
                 <a:latin typeface="Calibri"/>
               </a:rPr>
@@ -11622,8 +11736,8 @@
         </p:nvSpPr>
         <p:spPr>
           <a:xfrm>
-            <a:off x="1371600" y="2606040"/>
-            <a:ext cx="10088575" cy="548640"/>
+            <a:off x="1371600" y="2697480"/>
+            <a:ext cx="10088575" cy="640080"/>
           </a:xfrm>
           <a:prstGeom prst="rect">
             <a:avLst/>
@@ -11639,7 +11753,7 @@
             <a:r>
               <a:rPr sz="1900" i="0" b="0">
                 <a:solidFill>
-                  <a:srgbClr val="6E625B"/>
+                  <a:srgbClr val="2B211C"/>
                 </a:solidFill>
                 <a:latin typeface="Calibri"/>
               </a:rPr>
@@ -11656,8 +11770,8 @@
         </p:nvSpPr>
         <p:spPr>
           <a:xfrm>
-            <a:off x="548640" y="3282696"/>
-            <a:ext cx="11094415" cy="548640"/>
+            <a:off x="548640" y="3465576"/>
+            <a:ext cx="11094415" cy="640080"/>
           </a:xfrm>
           <a:prstGeom prst="roundRect">
             <a:avLst>
@@ -11665,7 +11779,7 @@
             </a:avLst>
           </a:prstGeom>
           <a:solidFill>
-            <a:srgbClr val="F7F4F2"/>
+            <a:srgbClr val="FAF4F2"/>
           </a:solidFill>
           <a:ln>
             <a:noFill/>
@@ -11702,14 +11816,14 @@
         </p:nvSpPr>
         <p:spPr>
           <a:xfrm>
-            <a:off x="713232" y="3346703"/>
+            <a:off x="713232" y="3575304"/>
             <a:ext cx="420624" cy="420624"/>
           </a:xfrm>
           <a:prstGeom prst="ellipse">
             <a:avLst/>
           </a:prstGeom>
           <a:solidFill>
-            <a:srgbClr val="E6DFDA"/>
+            <a:srgbClr val="A4472B"/>
           </a:solidFill>
           <a:ln>
             <a:noFill/>
@@ -11731,14 +11845,14 @@
           </a:fontRef>
         </p:style>
         <p:txBody>
-          <a:bodyPr rtlCol="0" anchor="ctr" lIns="0" rIns="0"/>
+          <a:bodyPr rtlCol="0" anchor="ctr" lIns="0" rIns="0" tIns="0" bIns="0"/>
           <a:lstStyle/>
           <a:p>
             <a:pPr algn="ctr"/>
             <a:r>
               <a:rPr sz="1500" i="0" b="1">
                 <a:solidFill>
-                  <a:srgbClr val="6E625B"/>
+                  <a:srgbClr val="FFFFFF"/>
                 </a:solidFill>
                 <a:latin typeface="Calibri"/>
               </a:rPr>
@@ -11755,8 +11869,8 @@
         </p:nvSpPr>
         <p:spPr>
           <a:xfrm>
-            <a:off x="1371600" y="3282696"/>
-            <a:ext cx="10088575" cy="548640"/>
+            <a:off x="1371600" y="3465576"/>
+            <a:ext cx="10088575" cy="640080"/>
           </a:xfrm>
           <a:prstGeom prst="rect">
             <a:avLst/>
@@ -11772,7 +11886,7 @@
             <a:r>
               <a:rPr sz="1900" i="0" b="0">
                 <a:solidFill>
-                  <a:srgbClr val="6E625B"/>
+                  <a:srgbClr val="2B211C"/>
                 </a:solidFill>
                 <a:latin typeface="Calibri"/>
               </a:rPr>
@@ -11789,8 +11903,8 @@
         </p:nvSpPr>
         <p:spPr>
           <a:xfrm>
-            <a:off x="548640" y="3959352"/>
-            <a:ext cx="11094415" cy="548640"/>
+            <a:off x="548640" y="4233672"/>
+            <a:ext cx="11094415" cy="640080"/>
           </a:xfrm>
           <a:prstGeom prst="roundRect">
             <a:avLst>
@@ -11798,7 +11912,7 @@
             </a:avLst>
           </a:prstGeom>
           <a:solidFill>
-            <a:srgbClr val="2F6F7A"/>
+            <a:srgbClr val="FAF4F2"/>
           </a:solidFill>
           <a:ln>
             <a:noFill/>
@@ -11835,14 +11949,14 @@
         </p:nvSpPr>
         <p:spPr>
           <a:xfrm>
-            <a:off x="713232" y="4023360"/>
+            <a:off x="713232" y="4343400"/>
             <a:ext cx="420624" cy="420624"/>
           </a:xfrm>
           <a:prstGeom prst="ellipse">
             <a:avLst/>
           </a:prstGeom>
           <a:solidFill>
-            <a:srgbClr val="FFFFFF"/>
+            <a:srgbClr val="A4472B"/>
           </a:solidFill>
           <a:ln>
             <a:noFill/>
@@ -11864,14 +11978,14 @@
           </a:fontRef>
         </p:style>
         <p:txBody>
-          <a:bodyPr rtlCol="0" anchor="ctr" lIns="0" rIns="0"/>
+          <a:bodyPr rtlCol="0" anchor="ctr" lIns="0" rIns="0" tIns="0" bIns="0"/>
           <a:lstStyle/>
           <a:p>
             <a:pPr algn="ctr"/>
             <a:r>
               <a:rPr sz="1500" i="0" b="1">
                 <a:solidFill>
-                  <a:srgbClr val="2F6F7A"/>
+                  <a:srgbClr val="FFFFFF"/>
                 </a:solidFill>
                 <a:latin typeface="Calibri"/>
               </a:rPr>
@@ -11888,8 +12002,8 @@
         </p:nvSpPr>
         <p:spPr>
           <a:xfrm>
-            <a:off x="1371600" y="3959352"/>
-            <a:ext cx="10088575" cy="548640"/>
+            <a:off x="1371600" y="4233672"/>
+            <a:ext cx="10088575" cy="640080"/>
           </a:xfrm>
           <a:prstGeom prst="rect">
             <a:avLst/>
@@ -11903,9 +12017,9 @@
           <a:lstStyle/>
           <a:p>
             <a:r>
-              <a:rPr sz="1900" i="0" b="1">
-                <a:solidFill>
-                  <a:srgbClr val="FFFFFF"/>
+              <a:rPr sz="1900" i="0" b="0">
+                <a:solidFill>
+                  <a:srgbClr val="2B211C"/>
                 </a:solidFill>
                 <a:latin typeface="Calibri"/>
               </a:rPr>
@@ -11922,8 +12036,8 @@
         </p:nvSpPr>
         <p:spPr>
           <a:xfrm>
-            <a:off x="548640" y="4636008"/>
-            <a:ext cx="11094415" cy="548640"/>
+            <a:off x="548640" y="5001768"/>
+            <a:ext cx="11094415" cy="640080"/>
           </a:xfrm>
           <a:prstGeom prst="roundRect">
             <a:avLst>
@@ -11931,7 +12045,7 @@
             </a:avLst>
           </a:prstGeom>
           <a:solidFill>
-            <a:srgbClr val="F7F4F2"/>
+            <a:srgbClr val="FAF4F2"/>
           </a:solidFill>
           <a:ln>
             <a:noFill/>
@@ -11968,14 +12082,14 @@
         </p:nvSpPr>
         <p:spPr>
           <a:xfrm>
-            <a:off x="713232" y="4700016"/>
+            <a:off x="713232" y="5111496"/>
             <a:ext cx="420624" cy="420624"/>
           </a:xfrm>
           <a:prstGeom prst="ellipse">
             <a:avLst/>
           </a:prstGeom>
           <a:solidFill>
-            <a:srgbClr val="E6DFDA"/>
+            <a:srgbClr val="A4472B"/>
           </a:solidFill>
           <a:ln>
             <a:noFill/>
@@ -11997,14 +12111,14 @@
           </a:fontRef>
         </p:style>
         <p:txBody>
-          <a:bodyPr rtlCol="0" anchor="ctr" lIns="0" rIns="0"/>
+          <a:bodyPr rtlCol="0" anchor="ctr" lIns="0" rIns="0" tIns="0" bIns="0"/>
           <a:lstStyle/>
           <a:p>
             <a:pPr algn="ctr"/>
             <a:r>
               <a:rPr sz="1500" i="0" b="1">
                 <a:solidFill>
-                  <a:srgbClr val="6E625B"/>
+                  <a:srgbClr val="FFFFFF"/>
                 </a:solidFill>
                 <a:latin typeface="Calibri"/>
               </a:rPr>
@@ -12021,8 +12135,8 @@
         </p:nvSpPr>
         <p:spPr>
           <a:xfrm>
-            <a:off x="1371600" y="4636008"/>
-            <a:ext cx="10088575" cy="548640"/>
+            <a:off x="1371600" y="5001768"/>
+            <a:ext cx="10088575" cy="640080"/>
           </a:xfrm>
           <a:prstGeom prst="rect">
             <a:avLst/>
@@ -12038,54 +12152,11 @@
             <a:r>
               <a:rPr sz="1900" i="0" b="0">
                 <a:solidFill>
-                  <a:srgbClr val="6E625B"/>
+                  <a:srgbClr val="2B211C"/>
                 </a:solidFill>
                 <a:latin typeface="Calibri"/>
               </a:rPr>
               <a:t>Documenting the request</a:t>
-            </a:r>
-          </a:p>
-        </p:txBody>
-      </p:sp>
-      <p:sp>
-        <p:nvSpPr>
-          <p:cNvPr id="21" name="TextBox 20"/>
-          <p:cNvSpPr txBox="1"/>
-          <p:nvPr/>
-        </p:nvSpPr>
-        <p:spPr>
-          <a:xfrm>
-            <a:off x="548640" y="5358384"/>
-            <a:ext cx="11094415" cy="685800"/>
-          </a:xfrm>
-          <a:prstGeom prst="rect">
-            <a:avLst/>
-          </a:prstGeom>
-          <a:noFill/>
-        </p:spPr>
-        <p:txBody>
-          <a:bodyPr wrap="square" anchor="t" lIns="0" rIns="0" tIns="0" bIns="0">
-            <a:spAutoFit/>
-          </a:bodyPr>
-          <a:lstStyle/>
-          <a:p>
-            <a:r>
-              <a:rPr sz="1500" i="0" b="1">
-                <a:solidFill>
-                  <a:srgbClr val="2F6F7A"/>
-                </a:solidFill>
-                <a:latin typeface="Calibri"/>
-              </a:rPr>
-              <a:t>Why:  </a:t>
-            </a:r>
-            <a:r>
-              <a:rPr sz="1500" i="0" b="0">
-                <a:solidFill>
-                  <a:srgbClr val="2B211C"/>
-                </a:solidFill>
-                <a:latin typeface="Calibri"/>
-              </a:rPr>
-              <a:t>Asking why reveals the real problem, such as swallowing difficulty or a feeding tube. A, B and D come later.</a:t>
             </a:r>
           </a:p>
         </p:txBody>
@@ -12153,7 +12224,7 @@
           </a:fontRef>
         </p:style>
         <p:txBody>
-          <a:bodyPr rtlCol="0" anchor="ctr" lIns="0" rIns="0"/>
+          <a:bodyPr rtlCol="0" anchor="ctr" lIns="0" rIns="0" tIns="0" bIns="0"/>
           <a:lstStyle/>
           <a:p>
             <a:pPr algn="ctr"/>
@@ -12198,7 +12269,7 @@
                 </a:solidFill>
                 <a:latin typeface="Calibri"/>
               </a:rPr>
-              <a:t>SECTION GOALS</a:t>
+              <a:t>SECTION 1</a:t>
             </a:r>
           </a:p>
         </p:txBody>
@@ -12338,14 +12409,14 @@
         </p:nvSpPr>
         <p:spPr>
           <a:xfrm>
-            <a:off x="548640" y="1618488"/>
+            <a:off x="548640" y="1572768"/>
             <a:ext cx="402336" cy="402336"/>
           </a:xfrm>
           <a:prstGeom prst="ellipse">
             <a:avLst/>
           </a:prstGeom>
           <a:solidFill>
-            <a:srgbClr val="E0EEF0"/>
+            <a:srgbClr val="E6EEEF"/>
           </a:solidFill>
           <a:ln>
             <a:noFill/>
@@ -12367,7 +12438,7 @@
           </a:fontRef>
         </p:style>
         <p:txBody>
-          <a:bodyPr rtlCol="0" anchor="ctr" lIns="0" rIns="0"/>
+          <a:bodyPr rtlCol="0" anchor="ctr" lIns="0" rIns="0" tIns="0" bIns="0"/>
           <a:lstStyle/>
           <a:p>
             <a:pPr algn="ctr"/>
@@ -12391,8 +12462,8 @@
         </p:nvSpPr>
         <p:spPr>
           <a:xfrm>
-            <a:off x="1143000" y="1636776"/>
-            <a:ext cx="6629400" cy="1085850"/>
+            <a:off x="1143000" y="1591056"/>
+            <a:ext cx="6629400" cy="1108710"/>
           </a:xfrm>
           <a:prstGeom prst="rect">
             <a:avLst/>
@@ -12425,14 +12496,14 @@
         </p:nvSpPr>
         <p:spPr>
           <a:xfrm>
-            <a:off x="548640" y="2750058"/>
+            <a:off x="548640" y="2727198"/>
             <a:ext cx="402336" cy="402336"/>
           </a:xfrm>
           <a:prstGeom prst="ellipse">
             <a:avLst/>
           </a:prstGeom>
           <a:solidFill>
-            <a:srgbClr val="E0EEF0"/>
+            <a:srgbClr val="E6EEEF"/>
           </a:solidFill>
           <a:ln>
             <a:noFill/>
@@ -12454,7 +12525,7 @@
           </a:fontRef>
         </p:style>
         <p:txBody>
-          <a:bodyPr rtlCol="0" anchor="ctr" lIns="0" rIns="0"/>
+          <a:bodyPr rtlCol="0" anchor="ctr" lIns="0" rIns="0" tIns="0" bIns="0"/>
           <a:lstStyle/>
           <a:p>
             <a:pPr algn="ctr"/>
@@ -12478,8 +12549,8 @@
         </p:nvSpPr>
         <p:spPr>
           <a:xfrm>
-            <a:off x="1143000" y="2768346"/>
-            <a:ext cx="6629400" cy="1085850"/>
+            <a:off x="1143000" y="2745486"/>
+            <a:ext cx="6629400" cy="1108710"/>
           </a:xfrm>
           <a:prstGeom prst="rect">
             <a:avLst/>
@@ -12519,7 +12590,7 @@
             <a:avLst/>
           </a:prstGeom>
           <a:solidFill>
-            <a:srgbClr val="E0EEF0"/>
+            <a:srgbClr val="E6EEEF"/>
           </a:solidFill>
           <a:ln>
             <a:noFill/>
@@ -12541,7 +12612,7 @@
           </a:fontRef>
         </p:style>
         <p:txBody>
-          <a:bodyPr rtlCol="0" anchor="ctr" lIns="0" rIns="0"/>
+          <a:bodyPr rtlCol="0" anchor="ctr" lIns="0" rIns="0" tIns="0" bIns="0"/>
           <a:lstStyle/>
           <a:p>
             <a:pPr algn="ctr"/>
@@ -12566,7 +12637,7 @@
         <p:spPr>
           <a:xfrm>
             <a:off x="1143000" y="3899915"/>
-            <a:ext cx="6629400" cy="1085850"/>
+            <a:ext cx="6629400" cy="1108710"/>
           </a:xfrm>
           <a:prstGeom prst="rect">
             <a:avLst/>
@@ -12599,14 +12670,14 @@
         </p:nvSpPr>
         <p:spPr>
           <a:xfrm>
-            <a:off x="548640" y="5013197"/>
+            <a:off x="548640" y="5036057"/>
             <a:ext cx="402336" cy="402336"/>
           </a:xfrm>
           <a:prstGeom prst="ellipse">
             <a:avLst/>
           </a:prstGeom>
           <a:solidFill>
-            <a:srgbClr val="E0EEF0"/>
+            <a:srgbClr val="E6EEEF"/>
           </a:solidFill>
           <a:ln>
             <a:noFill/>
@@ -12628,7 +12699,7 @@
           </a:fontRef>
         </p:style>
         <p:txBody>
-          <a:bodyPr rtlCol="0" anchor="ctr" lIns="0" rIns="0"/>
+          <a:bodyPr rtlCol="0" anchor="ctr" lIns="0" rIns="0" tIns="0" bIns="0"/>
           <a:lstStyle/>
           <a:p>
             <a:pPr algn="ctr"/>
@@ -12652,8 +12723,8 @@
         </p:nvSpPr>
         <p:spPr>
           <a:xfrm>
-            <a:off x="1143000" y="5031486"/>
-            <a:ext cx="6629400" cy="1085850"/>
+            <a:off x="1143000" y="5054346"/>
+            <a:ext cx="6629400" cy="1108710"/>
           </a:xfrm>
           <a:prstGeom prst="rect">
             <a:avLst/>
@@ -12695,7 +12766,7 @@
             </a:avLst>
           </a:prstGeom>
           <a:solidFill>
-            <a:srgbClr val="FBF3EE"/>
+            <a:srgbClr val="FAF4F2"/>
           </a:solidFill>
           <a:ln>
             <a:noFill/>
@@ -12891,7 +12962,7 @@
           </a:fontRef>
         </p:style>
         <p:txBody>
-          <a:bodyPr rtlCol="0" anchor="ctr" lIns="0" rIns="0"/>
+          <a:bodyPr rtlCol="0" anchor="ctr" lIns="0" rIns="0" tIns="0" bIns="0"/>
           <a:lstStyle/>
           <a:p>
             <a:pPr algn="ctr"/>
@@ -12936,7 +13007,7 @@
                 </a:solidFill>
                 <a:latin typeface="Calibri"/>
               </a:rPr>
-              <a:t>SELF-ASSESSMENT  ·  QUESTION 5 OF 5</a:t>
+              <a:t>SECTION 1  ·  QUESTION 4 OF 5  ·  ANSWER</a:t>
             </a:r>
           </a:p>
         </p:txBody>
@@ -12970,7 +13041,7 @@
                 </a:solidFill>
                 <a:latin typeface="Cambria"/>
               </a:rPr>
-              <a:t>Your turn</a:t>
+              <a:t>Check your answer</a:t>
             </a:r>
           </a:p>
         </p:txBody>
@@ -13053,7 +13124,7 @@
           <p:nvPr/>
         </p:nvPicPr>
         <p:blipFill>
-          <a:blip r:embed="rId3"/>
+          <a:blip r:embed="rId2"/>
           <a:stretch>
             <a:fillRect/>
           </a:stretch>
@@ -13097,7 +13168,7 @@
                 </a:solidFill>
                 <a:latin typeface="Calibri"/>
               </a:rPr>
-              <a:t>What is the last step of the systematic approach?</a:t>
+              <a:t>A nurse asks, "Can I crush this tablet?" Which step helps you most to find the real need?</a:t>
             </a:r>
           </a:p>
         </p:txBody>
@@ -13110,8 +13181,8 @@
         </p:nvSpPr>
         <p:spPr>
           <a:xfrm>
-            <a:off x="548640" y="2697480"/>
-            <a:ext cx="11094415" cy="640080"/>
+            <a:off x="548640" y="2606040"/>
+            <a:ext cx="11094415" cy="548640"/>
           </a:xfrm>
           <a:prstGeom prst="roundRect">
             <a:avLst>
@@ -13119,7 +13190,7 @@
             </a:avLst>
           </a:prstGeom>
           <a:solidFill>
-            <a:srgbClr val="FBF3EE"/>
+            <a:srgbClr val="F5F4F4"/>
           </a:solidFill>
           <a:ln>
             <a:noFill/>
@@ -13156,14 +13227,14 @@
         </p:nvSpPr>
         <p:spPr>
           <a:xfrm>
-            <a:off x="713232" y="2807208"/>
+            <a:off x="713232" y="2670048"/>
             <a:ext cx="420624" cy="420624"/>
           </a:xfrm>
           <a:prstGeom prst="ellipse">
             <a:avLst/>
           </a:prstGeom>
           <a:solidFill>
-            <a:srgbClr val="A4472B"/>
+            <a:srgbClr val="E2E0DE"/>
           </a:solidFill>
           <a:ln>
             <a:noFill/>
@@ -13185,14 +13256,14 @@
           </a:fontRef>
         </p:style>
         <p:txBody>
-          <a:bodyPr rtlCol="0" anchor="ctr" lIns="0" rIns="0"/>
+          <a:bodyPr rtlCol="0" anchor="ctr" lIns="0" rIns="0" tIns="0" bIns="0"/>
           <a:lstStyle/>
           <a:p>
             <a:pPr algn="ctr"/>
             <a:r>
               <a:rPr sz="1500" i="0" b="1">
                 <a:solidFill>
-                  <a:srgbClr val="FFFFFF"/>
+                  <a:srgbClr val="6E625B"/>
                 </a:solidFill>
                 <a:latin typeface="Calibri"/>
               </a:rPr>
@@ -13209,8 +13280,8 @@
         </p:nvSpPr>
         <p:spPr>
           <a:xfrm>
-            <a:off x="1371600" y="2697480"/>
-            <a:ext cx="10088575" cy="640080"/>
+            <a:off x="1371600" y="2606040"/>
+            <a:ext cx="10088575" cy="548640"/>
           </a:xfrm>
           <a:prstGeom prst="rect">
             <a:avLst/>
@@ -13226,11 +13297,11 @@
             <a:r>
               <a:rPr sz="1900" i="0" b="0">
                 <a:solidFill>
-                  <a:srgbClr val="2B211C"/>
-                </a:solidFill>
-                <a:latin typeface="Calibri"/>
-              </a:rPr>
-              <a:t>Searching tertiary sources</a:t>
+                  <a:srgbClr val="6E625B"/>
+                </a:solidFill>
+                <a:latin typeface="Calibri"/>
+              </a:rPr>
+              <a:t>Classifying the question as a formulation question</a:t>
             </a:r>
           </a:p>
         </p:txBody>
@@ -13243,8 +13314,8 @@
         </p:nvSpPr>
         <p:spPr>
           <a:xfrm>
-            <a:off x="548640" y="3465576"/>
-            <a:ext cx="11094415" cy="640080"/>
+            <a:off x="548640" y="3282696"/>
+            <a:ext cx="11094415" cy="548640"/>
           </a:xfrm>
           <a:prstGeom prst="roundRect">
             <a:avLst>
@@ -13252,7 +13323,7 @@
             </a:avLst>
           </a:prstGeom>
           <a:solidFill>
-            <a:srgbClr val="FBF3EE"/>
+            <a:srgbClr val="F5F4F4"/>
           </a:solidFill>
           <a:ln>
             <a:noFill/>
@@ -13289,14 +13360,14 @@
         </p:nvSpPr>
         <p:spPr>
           <a:xfrm>
-            <a:off x="713232" y="3575304"/>
+            <a:off x="713232" y="3346703"/>
             <a:ext cx="420624" cy="420624"/>
           </a:xfrm>
           <a:prstGeom prst="ellipse">
             <a:avLst/>
           </a:prstGeom>
           <a:solidFill>
-            <a:srgbClr val="A4472B"/>
+            <a:srgbClr val="E2E0DE"/>
           </a:solidFill>
           <a:ln>
             <a:noFill/>
@@ -13318,14 +13389,14 @@
           </a:fontRef>
         </p:style>
         <p:txBody>
-          <a:bodyPr rtlCol="0" anchor="ctr" lIns="0" rIns="0"/>
+          <a:bodyPr rtlCol="0" anchor="ctr" lIns="0" rIns="0" tIns="0" bIns="0"/>
           <a:lstStyle/>
           <a:p>
             <a:pPr algn="ctr"/>
             <a:r>
               <a:rPr sz="1500" i="0" b="1">
                 <a:solidFill>
-                  <a:srgbClr val="FFFFFF"/>
+                  <a:srgbClr val="6E625B"/>
                 </a:solidFill>
                 <a:latin typeface="Calibri"/>
               </a:rPr>
@@ -13342,8 +13413,8 @@
         </p:nvSpPr>
         <p:spPr>
           <a:xfrm>
-            <a:off x="1371600" y="3465576"/>
-            <a:ext cx="10088575" cy="640080"/>
+            <a:off x="1371600" y="3282696"/>
+            <a:ext cx="10088575" cy="548640"/>
           </a:xfrm>
           <a:prstGeom prst="rect">
             <a:avLst/>
@@ -13359,11 +13430,11 @@
             <a:r>
               <a:rPr sz="1900" i="0" b="0">
                 <a:solidFill>
-                  <a:srgbClr val="2B211C"/>
-                </a:solidFill>
-                <a:latin typeface="Calibri"/>
-              </a:rPr>
-              <a:t>Collecting background</a:t>
+                  <a:srgbClr val="6E625B"/>
+                </a:solidFill>
+                <a:latin typeface="Calibri"/>
+              </a:rPr>
+              <a:t>Searching the internet</a:t>
             </a:r>
           </a:p>
         </p:txBody>
@@ -13376,8 +13447,8 @@
         </p:nvSpPr>
         <p:spPr>
           <a:xfrm>
-            <a:off x="548640" y="4233672"/>
-            <a:ext cx="11094415" cy="640080"/>
+            <a:off x="548640" y="3959352"/>
+            <a:ext cx="11094415" cy="548640"/>
           </a:xfrm>
           <a:prstGeom prst="roundRect">
             <a:avLst>
@@ -13385,7 +13456,7 @@
             </a:avLst>
           </a:prstGeom>
           <a:solidFill>
-            <a:srgbClr val="FBF3EE"/>
+            <a:srgbClr val="2F6F7A"/>
           </a:solidFill>
           <a:ln>
             <a:noFill/>
@@ -13422,14 +13493,14 @@
         </p:nvSpPr>
         <p:spPr>
           <a:xfrm>
-            <a:off x="713232" y="4343400"/>
+            <a:off x="713232" y="4023360"/>
             <a:ext cx="420624" cy="420624"/>
           </a:xfrm>
           <a:prstGeom prst="ellipse">
             <a:avLst/>
           </a:prstGeom>
           <a:solidFill>
-            <a:srgbClr val="A4472B"/>
+            <a:srgbClr val="FFFFFF"/>
           </a:solidFill>
           <a:ln>
             <a:noFill/>
@@ -13451,14 +13522,14 @@
           </a:fontRef>
         </p:style>
         <p:txBody>
-          <a:bodyPr rtlCol="0" anchor="ctr" lIns="0" rIns="0"/>
+          <a:bodyPr rtlCol="0" anchor="ctr" lIns="0" rIns="0" tIns="0" bIns="0"/>
           <a:lstStyle/>
           <a:p>
             <a:pPr algn="ctr"/>
             <a:r>
               <a:rPr sz="1500" i="0" b="1">
                 <a:solidFill>
-                  <a:srgbClr val="FFFFFF"/>
+                  <a:srgbClr val="2F6F7A"/>
                 </a:solidFill>
                 <a:latin typeface="Calibri"/>
               </a:rPr>
@@ -13475,8 +13546,8 @@
         </p:nvSpPr>
         <p:spPr>
           <a:xfrm>
-            <a:off x="1371600" y="4233672"/>
-            <a:ext cx="10088575" cy="640080"/>
+            <a:off x="1371600" y="3959352"/>
+            <a:ext cx="10088575" cy="548640"/>
           </a:xfrm>
           <a:prstGeom prst="rect">
             <a:avLst/>
@@ -13490,13 +13561,13 @@
           <a:lstStyle/>
           <a:p>
             <a:r>
-              <a:rPr sz="1900" i="0" b="0">
-                <a:solidFill>
-                  <a:srgbClr val="2B211C"/>
-                </a:solidFill>
-                <a:latin typeface="Calibri"/>
-              </a:rPr>
-              <a:t>Classifying the question</a:t>
+              <a:rPr sz="1900" i="0" b="1">
+                <a:solidFill>
+                  <a:srgbClr val="FFFFFF"/>
+                </a:solidFill>
+                <a:latin typeface="Calibri"/>
+              </a:rPr>
+              <a:t>Asking why the tablet needs to be crushed</a:t>
             </a:r>
           </a:p>
         </p:txBody>
@@ -13509,8 +13580,8 @@
         </p:nvSpPr>
         <p:spPr>
           <a:xfrm>
-            <a:off x="548640" y="5001768"/>
-            <a:ext cx="11094415" cy="640080"/>
+            <a:off x="548640" y="4636008"/>
+            <a:ext cx="11094415" cy="548640"/>
           </a:xfrm>
           <a:prstGeom prst="roundRect">
             <a:avLst>
@@ -13518,7 +13589,7 @@
             </a:avLst>
           </a:prstGeom>
           <a:solidFill>
-            <a:srgbClr val="FBF3EE"/>
+            <a:srgbClr val="F5F4F4"/>
           </a:solidFill>
           <a:ln>
             <a:noFill/>
@@ -13555,14 +13626,14 @@
         </p:nvSpPr>
         <p:spPr>
           <a:xfrm>
-            <a:off x="713232" y="5111496"/>
+            <a:off x="713232" y="4700016"/>
             <a:ext cx="420624" cy="420624"/>
           </a:xfrm>
           <a:prstGeom prst="ellipse">
             <a:avLst/>
           </a:prstGeom>
           <a:solidFill>
-            <a:srgbClr val="A4472B"/>
+            <a:srgbClr val="E2E0DE"/>
           </a:solidFill>
           <a:ln>
             <a:noFill/>
@@ -13584,14 +13655,14 @@
           </a:fontRef>
         </p:style>
         <p:txBody>
-          <a:bodyPr rtlCol="0" anchor="ctr" lIns="0" rIns="0"/>
+          <a:bodyPr rtlCol="0" anchor="ctr" lIns="0" rIns="0" tIns="0" bIns="0"/>
           <a:lstStyle/>
           <a:p>
             <a:pPr algn="ctr"/>
             <a:r>
               <a:rPr sz="1500" i="0" b="1">
                 <a:solidFill>
-                  <a:srgbClr val="FFFFFF"/>
+                  <a:srgbClr val="6E625B"/>
                 </a:solidFill>
                 <a:latin typeface="Calibri"/>
               </a:rPr>
@@ -13608,8 +13679,8 @@
         </p:nvSpPr>
         <p:spPr>
           <a:xfrm>
-            <a:off x="1371600" y="5001768"/>
-            <a:ext cx="10088575" cy="640080"/>
+            <a:off x="1371600" y="4636008"/>
+            <a:ext cx="10088575" cy="548640"/>
           </a:xfrm>
           <a:prstGeom prst="rect">
             <a:avLst/>
@@ -13625,11 +13696,54 @@
             <a:r>
               <a:rPr sz="1900" i="0" b="0">
                 <a:solidFill>
+                  <a:srgbClr val="6E625B"/>
+                </a:solidFill>
+                <a:latin typeface="Calibri"/>
+              </a:rPr>
+              <a:t>Documenting the request</a:t>
+            </a:r>
+          </a:p>
+        </p:txBody>
+      </p:sp>
+      <p:sp>
+        <p:nvSpPr>
+          <p:cNvPr id="21" name="TextBox 20"/>
+          <p:cNvSpPr txBox="1"/>
+          <p:nvPr/>
+        </p:nvSpPr>
+        <p:spPr>
+          <a:xfrm>
+            <a:off x="548640" y="5358384"/>
+            <a:ext cx="11094415" cy="685800"/>
+          </a:xfrm>
+          <a:prstGeom prst="rect">
+            <a:avLst/>
+          </a:prstGeom>
+          <a:noFill/>
+        </p:spPr>
+        <p:txBody>
+          <a:bodyPr wrap="square" anchor="t" lIns="0" rIns="0" tIns="0" bIns="0">
+            <a:spAutoFit/>
+          </a:bodyPr>
+          <a:lstStyle/>
+          <a:p>
+            <a:r>
+              <a:rPr sz="1500" i="0" b="1">
+                <a:solidFill>
+                  <a:srgbClr val="2F6F7A"/>
+                </a:solidFill>
+                <a:latin typeface="Calibri"/>
+              </a:rPr>
+              <a:t>Why:  </a:t>
+            </a:r>
+            <a:r>
+              <a:rPr sz="1500" i="0" b="0">
+                <a:solidFill>
                   <a:srgbClr val="2B211C"/>
                 </a:solidFill>
                 <a:latin typeface="Calibri"/>
               </a:rPr>
-              <a:t>Follow up and documentation</a:t>
+              <a:t>Asking why reveals the real problem, such as swallowing difficulty or a feeding tube. A, B and D come later.</a:t>
             </a:r>
           </a:p>
         </p:txBody>
@@ -13697,7 +13811,7 @@
           </a:fontRef>
         </p:style>
         <p:txBody>
-          <a:bodyPr rtlCol="0" anchor="ctr" lIns="0" rIns="0"/>
+          <a:bodyPr rtlCol="0" anchor="ctr" lIns="0" rIns="0" tIns="0" bIns="0"/>
           <a:lstStyle/>
           <a:p>
             <a:pPr algn="ctr"/>
@@ -13742,7 +13856,7 @@
                 </a:solidFill>
                 <a:latin typeface="Calibri"/>
               </a:rPr>
-              <a:t>SELF-ASSESSMENT  ·  QUESTION 5 OF 5  ·  ANSWER</a:t>
+              <a:t>SECTION 1  ·  QUESTION 5 OF 5</a:t>
             </a:r>
           </a:p>
         </p:txBody>
@@ -13776,7 +13890,7 @@
                 </a:solidFill>
                 <a:latin typeface="Cambria"/>
               </a:rPr>
-              <a:t>Check your answer</a:t>
+              <a:t>Your turn</a:t>
             </a:r>
           </a:p>
         </p:txBody>
@@ -13859,7 +13973,7 @@
           <p:nvPr/>
         </p:nvPicPr>
         <p:blipFill>
-          <a:blip r:embed="rId2"/>
+          <a:blip r:embed="rId3"/>
           <a:stretch>
             <a:fillRect/>
           </a:stretch>
@@ -13916,8 +14030,8 @@
         </p:nvSpPr>
         <p:spPr>
           <a:xfrm>
-            <a:off x="548640" y="2606040"/>
-            <a:ext cx="11094415" cy="548640"/>
+            <a:off x="548640" y="2697480"/>
+            <a:ext cx="11094415" cy="640080"/>
           </a:xfrm>
           <a:prstGeom prst="roundRect">
             <a:avLst>
@@ -13925,7 +14039,7 @@
             </a:avLst>
           </a:prstGeom>
           <a:solidFill>
-            <a:srgbClr val="F7F4F2"/>
+            <a:srgbClr val="FAF4F2"/>
           </a:solidFill>
           <a:ln>
             <a:noFill/>
@@ -13962,14 +14076,14 @@
         </p:nvSpPr>
         <p:spPr>
           <a:xfrm>
-            <a:off x="713232" y="2670048"/>
+            <a:off x="713232" y="2807208"/>
             <a:ext cx="420624" cy="420624"/>
           </a:xfrm>
           <a:prstGeom prst="ellipse">
             <a:avLst/>
           </a:prstGeom>
           <a:solidFill>
-            <a:srgbClr val="E6DFDA"/>
+            <a:srgbClr val="A4472B"/>
           </a:solidFill>
           <a:ln>
             <a:noFill/>
@@ -13991,14 +14105,14 @@
           </a:fontRef>
         </p:style>
         <p:txBody>
-          <a:bodyPr rtlCol="0" anchor="ctr" lIns="0" rIns="0"/>
+          <a:bodyPr rtlCol="0" anchor="ctr" lIns="0" rIns="0" tIns="0" bIns="0"/>
           <a:lstStyle/>
           <a:p>
             <a:pPr algn="ctr"/>
             <a:r>
               <a:rPr sz="1500" i="0" b="1">
                 <a:solidFill>
-                  <a:srgbClr val="6E625B"/>
+                  <a:srgbClr val="FFFFFF"/>
                 </a:solidFill>
                 <a:latin typeface="Calibri"/>
               </a:rPr>
@@ -14015,8 +14129,8 @@
         </p:nvSpPr>
         <p:spPr>
           <a:xfrm>
-            <a:off x="1371600" y="2606040"/>
-            <a:ext cx="10088575" cy="548640"/>
+            <a:off x="1371600" y="2697480"/>
+            <a:ext cx="10088575" cy="640080"/>
           </a:xfrm>
           <a:prstGeom prst="rect">
             <a:avLst/>
@@ -14032,7 +14146,7 @@
             <a:r>
               <a:rPr sz="1900" i="0" b="0">
                 <a:solidFill>
-                  <a:srgbClr val="6E625B"/>
+                  <a:srgbClr val="2B211C"/>
                 </a:solidFill>
                 <a:latin typeface="Calibri"/>
               </a:rPr>
@@ -14049,8 +14163,8 @@
         </p:nvSpPr>
         <p:spPr>
           <a:xfrm>
-            <a:off x="548640" y="3282696"/>
-            <a:ext cx="11094415" cy="548640"/>
+            <a:off x="548640" y="3465576"/>
+            <a:ext cx="11094415" cy="640080"/>
           </a:xfrm>
           <a:prstGeom prst="roundRect">
             <a:avLst>
@@ -14058,7 +14172,7 @@
             </a:avLst>
           </a:prstGeom>
           <a:solidFill>
-            <a:srgbClr val="F7F4F2"/>
+            <a:srgbClr val="FAF4F2"/>
           </a:solidFill>
           <a:ln>
             <a:noFill/>
@@ -14095,14 +14209,14 @@
         </p:nvSpPr>
         <p:spPr>
           <a:xfrm>
-            <a:off x="713232" y="3346703"/>
+            <a:off x="713232" y="3575304"/>
             <a:ext cx="420624" cy="420624"/>
           </a:xfrm>
           <a:prstGeom prst="ellipse">
             <a:avLst/>
           </a:prstGeom>
           <a:solidFill>
-            <a:srgbClr val="E6DFDA"/>
+            <a:srgbClr val="A4472B"/>
           </a:solidFill>
           <a:ln>
             <a:noFill/>
@@ -14124,14 +14238,14 @@
           </a:fontRef>
         </p:style>
         <p:txBody>
-          <a:bodyPr rtlCol="0" anchor="ctr" lIns="0" rIns="0"/>
+          <a:bodyPr rtlCol="0" anchor="ctr" lIns="0" rIns="0" tIns="0" bIns="0"/>
           <a:lstStyle/>
           <a:p>
             <a:pPr algn="ctr"/>
             <a:r>
               <a:rPr sz="1500" i="0" b="1">
                 <a:solidFill>
-                  <a:srgbClr val="6E625B"/>
+                  <a:srgbClr val="FFFFFF"/>
                 </a:solidFill>
                 <a:latin typeface="Calibri"/>
               </a:rPr>
@@ -14148,8 +14262,8 @@
         </p:nvSpPr>
         <p:spPr>
           <a:xfrm>
-            <a:off x="1371600" y="3282696"/>
-            <a:ext cx="10088575" cy="548640"/>
+            <a:off x="1371600" y="3465576"/>
+            <a:ext cx="10088575" cy="640080"/>
           </a:xfrm>
           <a:prstGeom prst="rect">
             <a:avLst/>
@@ -14165,7 +14279,7 @@
             <a:r>
               <a:rPr sz="1900" i="0" b="0">
                 <a:solidFill>
-                  <a:srgbClr val="6E625B"/>
+                  <a:srgbClr val="2B211C"/>
                 </a:solidFill>
                 <a:latin typeface="Calibri"/>
               </a:rPr>
@@ -14182,8 +14296,8 @@
         </p:nvSpPr>
         <p:spPr>
           <a:xfrm>
-            <a:off x="548640" y="3959352"/>
-            <a:ext cx="11094415" cy="548640"/>
+            <a:off x="548640" y="4233672"/>
+            <a:ext cx="11094415" cy="640080"/>
           </a:xfrm>
           <a:prstGeom prst="roundRect">
             <a:avLst>
@@ -14191,7 +14305,7 @@
             </a:avLst>
           </a:prstGeom>
           <a:solidFill>
-            <a:srgbClr val="F7F4F2"/>
+            <a:srgbClr val="FAF4F2"/>
           </a:solidFill>
           <a:ln>
             <a:noFill/>
@@ -14228,14 +14342,14 @@
         </p:nvSpPr>
         <p:spPr>
           <a:xfrm>
-            <a:off x="713232" y="4023360"/>
+            <a:off x="713232" y="4343400"/>
             <a:ext cx="420624" cy="420624"/>
           </a:xfrm>
           <a:prstGeom prst="ellipse">
             <a:avLst/>
           </a:prstGeom>
           <a:solidFill>
-            <a:srgbClr val="E6DFDA"/>
+            <a:srgbClr val="A4472B"/>
           </a:solidFill>
           <a:ln>
             <a:noFill/>
@@ -14257,14 +14371,14 @@
           </a:fontRef>
         </p:style>
         <p:txBody>
-          <a:bodyPr rtlCol="0" anchor="ctr" lIns="0" rIns="0"/>
+          <a:bodyPr rtlCol="0" anchor="ctr" lIns="0" rIns="0" tIns="0" bIns="0"/>
           <a:lstStyle/>
           <a:p>
             <a:pPr algn="ctr"/>
             <a:r>
               <a:rPr sz="1500" i="0" b="1">
                 <a:solidFill>
-                  <a:srgbClr val="6E625B"/>
+                  <a:srgbClr val="FFFFFF"/>
                 </a:solidFill>
                 <a:latin typeface="Calibri"/>
               </a:rPr>
@@ -14281,8 +14395,8 @@
         </p:nvSpPr>
         <p:spPr>
           <a:xfrm>
-            <a:off x="1371600" y="3959352"/>
-            <a:ext cx="10088575" cy="548640"/>
+            <a:off x="1371600" y="4233672"/>
+            <a:ext cx="10088575" cy="640080"/>
           </a:xfrm>
           <a:prstGeom prst="rect">
             <a:avLst/>
@@ -14298,7 +14412,7 @@
             <a:r>
               <a:rPr sz="1900" i="0" b="0">
                 <a:solidFill>
-                  <a:srgbClr val="6E625B"/>
+                  <a:srgbClr val="2B211C"/>
                 </a:solidFill>
                 <a:latin typeface="Calibri"/>
               </a:rPr>
@@ -14315,8 +14429,8 @@
         </p:nvSpPr>
         <p:spPr>
           <a:xfrm>
-            <a:off x="548640" y="4636008"/>
-            <a:ext cx="11094415" cy="548640"/>
+            <a:off x="548640" y="5001768"/>
+            <a:ext cx="11094415" cy="640080"/>
           </a:xfrm>
           <a:prstGeom prst="roundRect">
             <a:avLst>
@@ -14324,7 +14438,7 @@
             </a:avLst>
           </a:prstGeom>
           <a:solidFill>
-            <a:srgbClr val="2F6F7A"/>
+            <a:srgbClr val="FAF4F2"/>
           </a:solidFill>
           <a:ln>
             <a:noFill/>
@@ -14361,14 +14475,14 @@
         </p:nvSpPr>
         <p:spPr>
           <a:xfrm>
-            <a:off x="713232" y="4700016"/>
+            <a:off x="713232" y="5111496"/>
             <a:ext cx="420624" cy="420624"/>
           </a:xfrm>
           <a:prstGeom prst="ellipse">
             <a:avLst/>
           </a:prstGeom>
           <a:solidFill>
-            <a:srgbClr val="FFFFFF"/>
+            <a:srgbClr val="A4472B"/>
           </a:solidFill>
           <a:ln>
             <a:noFill/>
@@ -14390,14 +14504,14 @@
           </a:fontRef>
         </p:style>
         <p:txBody>
-          <a:bodyPr rtlCol="0" anchor="ctr" lIns="0" rIns="0"/>
+          <a:bodyPr rtlCol="0" anchor="ctr" lIns="0" rIns="0" tIns="0" bIns="0"/>
           <a:lstStyle/>
           <a:p>
             <a:pPr algn="ctr"/>
             <a:r>
               <a:rPr sz="1500" i="0" b="1">
                 <a:solidFill>
-                  <a:srgbClr val="2F6F7A"/>
+                  <a:srgbClr val="FFFFFF"/>
                 </a:solidFill>
                 <a:latin typeface="Calibri"/>
               </a:rPr>
@@ -14414,8 +14528,8 @@
         </p:nvSpPr>
         <p:spPr>
           <a:xfrm>
-            <a:off x="1371600" y="4636008"/>
-            <a:ext cx="10088575" cy="548640"/>
+            <a:off x="1371600" y="5001768"/>
+            <a:ext cx="10088575" cy="640080"/>
           </a:xfrm>
           <a:prstGeom prst="rect">
             <a:avLst/>
@@ -14429,56 +14543,13 @@
           <a:lstStyle/>
           <a:p>
             <a:r>
-              <a:rPr sz="1900" i="0" b="1">
-                <a:solidFill>
-                  <a:srgbClr val="FFFFFF"/>
+              <a:rPr sz="1900" i="0" b="0">
+                <a:solidFill>
+                  <a:srgbClr val="2B211C"/>
                 </a:solidFill>
                 <a:latin typeface="Calibri"/>
               </a:rPr>
               <a:t>Follow up and documentation</a:t>
-            </a:r>
-          </a:p>
-        </p:txBody>
-      </p:sp>
-      <p:sp>
-        <p:nvSpPr>
-          <p:cNvPr id="21" name="TextBox 20"/>
-          <p:cNvSpPr txBox="1"/>
-          <p:nvPr/>
-        </p:nvSpPr>
-        <p:spPr>
-          <a:xfrm>
-            <a:off x="548640" y="5358384"/>
-            <a:ext cx="11094415" cy="685800"/>
-          </a:xfrm>
-          <a:prstGeom prst="rect">
-            <a:avLst/>
-          </a:prstGeom>
-          <a:noFill/>
-        </p:spPr>
-        <p:txBody>
-          <a:bodyPr wrap="square" anchor="t" lIns="0" rIns="0" tIns="0" bIns="0">
-            <a:spAutoFit/>
-          </a:bodyPr>
-          <a:lstStyle/>
-          <a:p>
-            <a:r>
-              <a:rPr sz="1500" i="0" b="1">
-                <a:solidFill>
-                  <a:srgbClr val="2F6F7A"/>
-                </a:solidFill>
-                <a:latin typeface="Calibri"/>
-              </a:rPr>
-              <a:t>Why:  </a:t>
-            </a:r>
-            <a:r>
-              <a:rPr sz="1500" i="0" b="0">
-                <a:solidFill>
-                  <a:srgbClr val="2B211C"/>
-                </a:solidFill>
-                <a:latin typeface="Calibri"/>
-              </a:rPr>
-              <a:t>The request ends with follow-up and documentation. A, B and C come earlier.</a:t>
             </a:r>
           </a:p>
         </p:txBody>
@@ -14511,6 +14582,855 @@
       <p:grpSpPr/>
       <p:sp>
         <p:nvSpPr>
+          <p:cNvPr id="2" name="Oval 1"/>
+          <p:cNvSpPr/>
+          <p:nvPr/>
+        </p:nvSpPr>
+        <p:spPr>
+          <a:xfrm>
+            <a:off x="548640" y="475488"/>
+            <a:ext cx="658368" cy="658368"/>
+          </a:xfrm>
+          <a:prstGeom prst="ellipse">
+            <a:avLst/>
+          </a:prstGeom>
+          <a:solidFill>
+            <a:srgbClr val="2F6F7A"/>
+          </a:solidFill>
+          <a:ln>
+            <a:noFill/>
+          </a:ln>
+          <a:effectLst/>
+        </p:spPr>
+        <p:style>
+          <a:lnRef idx="1">
+            <a:schemeClr val="accent1"/>
+          </a:lnRef>
+          <a:fillRef idx="3">
+            <a:schemeClr val="accent1"/>
+          </a:fillRef>
+          <a:effectRef idx="2">
+            <a:schemeClr val="accent1"/>
+          </a:effectRef>
+          <a:fontRef idx="minor">
+            <a:schemeClr val="lt1"/>
+          </a:fontRef>
+        </p:style>
+        <p:txBody>
+          <a:bodyPr rtlCol="0" anchor="ctr" lIns="0" rIns="0" tIns="0" bIns="0"/>
+          <a:lstStyle/>
+          <a:p>
+            <a:pPr algn="ctr"/>
+            <a:r>
+              <a:rPr sz="1800" i="0" b="1">
+                <a:solidFill>
+                  <a:srgbClr val="FFFFFF"/>
+                </a:solidFill>
+                <a:latin typeface="Cambria"/>
+              </a:rPr>
+              <a:t>01</a:t>
+            </a:r>
+          </a:p>
+        </p:txBody>
+      </p:sp>
+      <p:sp>
+        <p:nvSpPr>
+          <p:cNvPr id="3" name="TextBox 2"/>
+          <p:cNvSpPr txBox="1"/>
+          <p:nvPr/>
+        </p:nvSpPr>
+        <p:spPr>
+          <a:xfrm>
+            <a:off x="1417319" y="438912"/>
+            <a:ext cx="10180015" cy="292608"/>
+          </a:xfrm>
+          <a:prstGeom prst="rect">
+            <a:avLst/>
+          </a:prstGeom>
+          <a:noFill/>
+        </p:spPr>
+        <p:txBody>
+          <a:bodyPr wrap="square" anchor="t" lIns="0" rIns="0" tIns="0" bIns="0">
+            <a:spAutoFit/>
+          </a:bodyPr>
+          <a:lstStyle/>
+          <a:p>
+            <a:r>
+              <a:rPr sz="1200" i="0" b="1" spc="150">
+                <a:solidFill>
+                  <a:srgbClr val="2F6F7A"/>
+                </a:solidFill>
+                <a:latin typeface="Calibri"/>
+              </a:rPr>
+              <a:t>SECTION 1  ·  QUESTION 5 OF 5  ·  ANSWER</a:t>
+            </a:r>
+          </a:p>
+        </p:txBody>
+      </p:sp>
+      <p:sp>
+        <p:nvSpPr>
+          <p:cNvPr id="4" name="TextBox 3"/>
+          <p:cNvSpPr txBox="1"/>
+          <p:nvPr/>
+        </p:nvSpPr>
+        <p:spPr>
+          <a:xfrm>
+            <a:off x="1417319" y="676656"/>
+            <a:ext cx="10180015" cy="640080"/>
+          </a:xfrm>
+          <a:prstGeom prst="rect">
+            <a:avLst/>
+          </a:prstGeom>
+          <a:noFill/>
+        </p:spPr>
+        <p:txBody>
+          <a:bodyPr wrap="square" anchor="t" lIns="0" rIns="0" tIns="0" bIns="0">
+            <a:spAutoFit/>
+          </a:bodyPr>
+          <a:lstStyle/>
+          <a:p>
+            <a:r>
+              <a:rPr sz="3200" i="0" b="1">
+                <a:solidFill>
+                  <a:srgbClr val="2B211C"/>
+                </a:solidFill>
+                <a:latin typeface="Cambria"/>
+              </a:rPr>
+              <a:t>Check your answer</a:t>
+            </a:r>
+          </a:p>
+        </p:txBody>
+      </p:sp>
+      <p:sp>
+        <p:nvSpPr>
+          <p:cNvPr id="5" name="TextBox 4"/>
+          <p:cNvSpPr txBox="1"/>
+          <p:nvPr/>
+        </p:nvSpPr>
+        <p:spPr>
+          <a:xfrm>
+            <a:off x="548640" y="6419088"/>
+            <a:ext cx="8229600" cy="274320"/>
+          </a:xfrm>
+          <a:prstGeom prst="rect">
+            <a:avLst/>
+          </a:prstGeom>
+          <a:noFill/>
+        </p:spPr>
+        <p:txBody>
+          <a:bodyPr wrap="square" anchor="t" lIns="0" rIns="0" tIns="0" bIns="0">
+            <a:spAutoFit/>
+          </a:bodyPr>
+          <a:lstStyle/>
+          <a:p>
+            <a:r>
+              <a:rPr sz="1000" i="0" b="0">
+                <a:solidFill>
+                  <a:srgbClr val="6E625B"/>
+                </a:solidFill>
+                <a:latin typeface="Calibri"/>
+              </a:rPr>
+              <a:t>Drug Information  ·  Section 1  ·  The Drug Information Centre</a:t>
+            </a:r>
+          </a:p>
+        </p:txBody>
+      </p:sp>
+      <p:sp>
+        <p:nvSpPr>
+          <p:cNvPr id="6" name="TextBox 5"/>
+          <p:cNvSpPr txBox="1"/>
+          <p:nvPr/>
+        </p:nvSpPr>
+        <p:spPr>
+          <a:xfrm>
+            <a:off x="10424160" y="6419088"/>
+            <a:ext cx="731520" cy="274320"/>
+          </a:xfrm>
+          <a:prstGeom prst="rect">
+            <a:avLst/>
+          </a:prstGeom>
+          <a:noFill/>
+        </p:spPr>
+        <p:txBody>
+          <a:bodyPr wrap="square" anchor="t" lIns="0" rIns="0" tIns="0" bIns="0">
+            <a:spAutoFit/>
+          </a:bodyPr>
+          <a:lstStyle/>
+          <a:p>
+            <a:pPr algn="r"/>
+            <a:r>
+              <a:rPr sz="1000" i="0" b="1">
+                <a:solidFill>
+                  <a:srgbClr val="6E625B"/>
+                </a:solidFill>
+                <a:latin typeface="Calibri"/>
+              </a:rPr>
+              <a:t>22</a:t>
+            </a:r>
+          </a:p>
+        </p:txBody>
+      </p:sp>
+      <p:pic>
+        <p:nvPicPr>
+          <p:cNvPr id="7" name="Picture 6" descr="faculty-of-pharmacy.png"/>
+          <p:cNvPicPr>
+            <a:picLocks noChangeAspect="1"/>
+          </p:cNvPicPr>
+          <p:nvPr/>
+        </p:nvPicPr>
+        <p:blipFill>
+          <a:blip r:embed="rId2"/>
+          <a:stretch>
+            <a:fillRect/>
+          </a:stretch>
+        </p:blipFill>
+        <p:spPr>
+          <a:xfrm>
+            <a:off x="11247120" y="6309360"/>
+            <a:ext cx="384048" cy="384048"/>
+          </a:xfrm>
+          <a:prstGeom prst="rect">
+            <a:avLst/>
+          </a:prstGeom>
+        </p:spPr>
+      </p:pic>
+      <p:sp>
+        <p:nvSpPr>
+          <p:cNvPr id="8" name="TextBox 7"/>
+          <p:cNvSpPr txBox="1"/>
+          <p:nvPr/>
+        </p:nvSpPr>
+        <p:spPr>
+          <a:xfrm>
+            <a:off x="548640" y="1554480"/>
+            <a:ext cx="11094415" cy="1005840"/>
+          </a:xfrm>
+          <a:prstGeom prst="rect">
+            <a:avLst/>
+          </a:prstGeom>
+          <a:noFill/>
+        </p:spPr>
+        <p:txBody>
+          <a:bodyPr wrap="square" anchor="t" lIns="0" rIns="0" tIns="0" bIns="0">
+            <a:spAutoFit/>
+          </a:bodyPr>
+          <a:lstStyle/>
+          <a:p>
+            <a:r>
+              <a:rPr sz="2400" i="0" b="1">
+                <a:solidFill>
+                  <a:srgbClr val="2B211C"/>
+                </a:solidFill>
+                <a:latin typeface="Calibri"/>
+              </a:rPr>
+              <a:t>What is the last step of the systematic approach?</a:t>
+            </a:r>
+          </a:p>
+        </p:txBody>
+      </p:sp>
+      <p:sp>
+        <p:nvSpPr>
+          <p:cNvPr id="9" name="Rounded Rectangle 8"/>
+          <p:cNvSpPr/>
+          <p:nvPr/>
+        </p:nvSpPr>
+        <p:spPr>
+          <a:xfrm>
+            <a:off x="548640" y="2606040"/>
+            <a:ext cx="11094415" cy="548640"/>
+          </a:xfrm>
+          <a:prstGeom prst="roundRect">
+            <a:avLst>
+              <a:gd name="adj" fmla="val 18000"/>
+            </a:avLst>
+          </a:prstGeom>
+          <a:solidFill>
+            <a:srgbClr val="F5F4F4"/>
+          </a:solidFill>
+          <a:ln>
+            <a:noFill/>
+          </a:ln>
+          <a:effectLst/>
+        </p:spPr>
+        <p:style>
+          <a:lnRef idx="1">
+            <a:schemeClr val="accent1"/>
+          </a:lnRef>
+          <a:fillRef idx="3">
+            <a:schemeClr val="accent1"/>
+          </a:fillRef>
+          <a:effectRef idx="2">
+            <a:schemeClr val="accent1"/>
+          </a:effectRef>
+          <a:fontRef idx="minor">
+            <a:schemeClr val="lt1"/>
+          </a:fontRef>
+        </p:style>
+        <p:txBody>
+          <a:bodyPr rtlCol="0" anchor="ctr"/>
+          <a:lstStyle/>
+          <a:p>
+            <a:pPr algn="ctr"/>
+          </a:p>
+        </p:txBody>
+      </p:sp>
+      <p:sp>
+        <p:nvSpPr>
+          <p:cNvPr id="10" name="Oval 9"/>
+          <p:cNvSpPr/>
+          <p:nvPr/>
+        </p:nvSpPr>
+        <p:spPr>
+          <a:xfrm>
+            <a:off x="713232" y="2670048"/>
+            <a:ext cx="420624" cy="420624"/>
+          </a:xfrm>
+          <a:prstGeom prst="ellipse">
+            <a:avLst/>
+          </a:prstGeom>
+          <a:solidFill>
+            <a:srgbClr val="E2E0DE"/>
+          </a:solidFill>
+          <a:ln>
+            <a:noFill/>
+          </a:ln>
+          <a:effectLst/>
+        </p:spPr>
+        <p:style>
+          <a:lnRef idx="1">
+            <a:schemeClr val="accent1"/>
+          </a:lnRef>
+          <a:fillRef idx="3">
+            <a:schemeClr val="accent1"/>
+          </a:fillRef>
+          <a:effectRef idx="2">
+            <a:schemeClr val="accent1"/>
+          </a:effectRef>
+          <a:fontRef idx="minor">
+            <a:schemeClr val="lt1"/>
+          </a:fontRef>
+        </p:style>
+        <p:txBody>
+          <a:bodyPr rtlCol="0" anchor="ctr" lIns="0" rIns="0" tIns="0" bIns="0"/>
+          <a:lstStyle/>
+          <a:p>
+            <a:pPr algn="ctr"/>
+            <a:r>
+              <a:rPr sz="1500" i="0" b="1">
+                <a:solidFill>
+                  <a:srgbClr val="6E625B"/>
+                </a:solidFill>
+                <a:latin typeface="Calibri"/>
+              </a:rPr>
+              <a:t>A</a:t>
+            </a:r>
+          </a:p>
+        </p:txBody>
+      </p:sp>
+      <p:sp>
+        <p:nvSpPr>
+          <p:cNvPr id="11" name="TextBox 10"/>
+          <p:cNvSpPr txBox="1"/>
+          <p:nvPr/>
+        </p:nvSpPr>
+        <p:spPr>
+          <a:xfrm>
+            <a:off x="1371600" y="2606040"/>
+            <a:ext cx="10088575" cy="548640"/>
+          </a:xfrm>
+          <a:prstGeom prst="rect">
+            <a:avLst/>
+          </a:prstGeom>
+          <a:noFill/>
+        </p:spPr>
+        <p:txBody>
+          <a:bodyPr wrap="square" anchor="ctr" lIns="0" rIns="0" tIns="0" bIns="0">
+            <a:spAutoFit/>
+          </a:bodyPr>
+          <a:lstStyle/>
+          <a:p>
+            <a:r>
+              <a:rPr sz="1900" i="0" b="0">
+                <a:solidFill>
+                  <a:srgbClr val="6E625B"/>
+                </a:solidFill>
+                <a:latin typeface="Calibri"/>
+              </a:rPr>
+              <a:t>Searching tertiary sources</a:t>
+            </a:r>
+          </a:p>
+        </p:txBody>
+      </p:sp>
+      <p:sp>
+        <p:nvSpPr>
+          <p:cNvPr id="12" name="Rounded Rectangle 11"/>
+          <p:cNvSpPr/>
+          <p:nvPr/>
+        </p:nvSpPr>
+        <p:spPr>
+          <a:xfrm>
+            <a:off x="548640" y="3282696"/>
+            <a:ext cx="11094415" cy="548640"/>
+          </a:xfrm>
+          <a:prstGeom prst="roundRect">
+            <a:avLst>
+              <a:gd name="adj" fmla="val 18000"/>
+            </a:avLst>
+          </a:prstGeom>
+          <a:solidFill>
+            <a:srgbClr val="F5F4F4"/>
+          </a:solidFill>
+          <a:ln>
+            <a:noFill/>
+          </a:ln>
+          <a:effectLst/>
+        </p:spPr>
+        <p:style>
+          <a:lnRef idx="1">
+            <a:schemeClr val="accent1"/>
+          </a:lnRef>
+          <a:fillRef idx="3">
+            <a:schemeClr val="accent1"/>
+          </a:fillRef>
+          <a:effectRef idx="2">
+            <a:schemeClr val="accent1"/>
+          </a:effectRef>
+          <a:fontRef idx="minor">
+            <a:schemeClr val="lt1"/>
+          </a:fontRef>
+        </p:style>
+        <p:txBody>
+          <a:bodyPr rtlCol="0" anchor="ctr"/>
+          <a:lstStyle/>
+          <a:p>
+            <a:pPr algn="ctr"/>
+          </a:p>
+        </p:txBody>
+      </p:sp>
+      <p:sp>
+        <p:nvSpPr>
+          <p:cNvPr id="13" name="Oval 12"/>
+          <p:cNvSpPr/>
+          <p:nvPr/>
+        </p:nvSpPr>
+        <p:spPr>
+          <a:xfrm>
+            <a:off x="713232" y="3346703"/>
+            <a:ext cx="420624" cy="420624"/>
+          </a:xfrm>
+          <a:prstGeom prst="ellipse">
+            <a:avLst/>
+          </a:prstGeom>
+          <a:solidFill>
+            <a:srgbClr val="E2E0DE"/>
+          </a:solidFill>
+          <a:ln>
+            <a:noFill/>
+          </a:ln>
+          <a:effectLst/>
+        </p:spPr>
+        <p:style>
+          <a:lnRef idx="1">
+            <a:schemeClr val="accent1"/>
+          </a:lnRef>
+          <a:fillRef idx="3">
+            <a:schemeClr val="accent1"/>
+          </a:fillRef>
+          <a:effectRef idx="2">
+            <a:schemeClr val="accent1"/>
+          </a:effectRef>
+          <a:fontRef idx="minor">
+            <a:schemeClr val="lt1"/>
+          </a:fontRef>
+        </p:style>
+        <p:txBody>
+          <a:bodyPr rtlCol="0" anchor="ctr" lIns="0" rIns="0" tIns="0" bIns="0"/>
+          <a:lstStyle/>
+          <a:p>
+            <a:pPr algn="ctr"/>
+            <a:r>
+              <a:rPr sz="1500" i="0" b="1">
+                <a:solidFill>
+                  <a:srgbClr val="6E625B"/>
+                </a:solidFill>
+                <a:latin typeface="Calibri"/>
+              </a:rPr>
+              <a:t>B</a:t>
+            </a:r>
+          </a:p>
+        </p:txBody>
+      </p:sp>
+      <p:sp>
+        <p:nvSpPr>
+          <p:cNvPr id="14" name="TextBox 13"/>
+          <p:cNvSpPr txBox="1"/>
+          <p:nvPr/>
+        </p:nvSpPr>
+        <p:spPr>
+          <a:xfrm>
+            <a:off x="1371600" y="3282696"/>
+            <a:ext cx="10088575" cy="548640"/>
+          </a:xfrm>
+          <a:prstGeom prst="rect">
+            <a:avLst/>
+          </a:prstGeom>
+          <a:noFill/>
+        </p:spPr>
+        <p:txBody>
+          <a:bodyPr wrap="square" anchor="ctr" lIns="0" rIns="0" tIns="0" bIns="0">
+            <a:spAutoFit/>
+          </a:bodyPr>
+          <a:lstStyle/>
+          <a:p>
+            <a:r>
+              <a:rPr sz="1900" i="0" b="0">
+                <a:solidFill>
+                  <a:srgbClr val="6E625B"/>
+                </a:solidFill>
+                <a:latin typeface="Calibri"/>
+              </a:rPr>
+              <a:t>Collecting background</a:t>
+            </a:r>
+          </a:p>
+        </p:txBody>
+      </p:sp>
+      <p:sp>
+        <p:nvSpPr>
+          <p:cNvPr id="15" name="Rounded Rectangle 14"/>
+          <p:cNvSpPr/>
+          <p:nvPr/>
+        </p:nvSpPr>
+        <p:spPr>
+          <a:xfrm>
+            <a:off x="548640" y="3959352"/>
+            <a:ext cx="11094415" cy="548640"/>
+          </a:xfrm>
+          <a:prstGeom prst="roundRect">
+            <a:avLst>
+              <a:gd name="adj" fmla="val 18000"/>
+            </a:avLst>
+          </a:prstGeom>
+          <a:solidFill>
+            <a:srgbClr val="F5F4F4"/>
+          </a:solidFill>
+          <a:ln>
+            <a:noFill/>
+          </a:ln>
+          <a:effectLst/>
+        </p:spPr>
+        <p:style>
+          <a:lnRef idx="1">
+            <a:schemeClr val="accent1"/>
+          </a:lnRef>
+          <a:fillRef idx="3">
+            <a:schemeClr val="accent1"/>
+          </a:fillRef>
+          <a:effectRef idx="2">
+            <a:schemeClr val="accent1"/>
+          </a:effectRef>
+          <a:fontRef idx="minor">
+            <a:schemeClr val="lt1"/>
+          </a:fontRef>
+        </p:style>
+        <p:txBody>
+          <a:bodyPr rtlCol="0" anchor="ctr"/>
+          <a:lstStyle/>
+          <a:p>
+            <a:pPr algn="ctr"/>
+          </a:p>
+        </p:txBody>
+      </p:sp>
+      <p:sp>
+        <p:nvSpPr>
+          <p:cNvPr id="16" name="Oval 15"/>
+          <p:cNvSpPr/>
+          <p:nvPr/>
+        </p:nvSpPr>
+        <p:spPr>
+          <a:xfrm>
+            <a:off x="713232" y="4023360"/>
+            <a:ext cx="420624" cy="420624"/>
+          </a:xfrm>
+          <a:prstGeom prst="ellipse">
+            <a:avLst/>
+          </a:prstGeom>
+          <a:solidFill>
+            <a:srgbClr val="E2E0DE"/>
+          </a:solidFill>
+          <a:ln>
+            <a:noFill/>
+          </a:ln>
+          <a:effectLst/>
+        </p:spPr>
+        <p:style>
+          <a:lnRef idx="1">
+            <a:schemeClr val="accent1"/>
+          </a:lnRef>
+          <a:fillRef idx="3">
+            <a:schemeClr val="accent1"/>
+          </a:fillRef>
+          <a:effectRef idx="2">
+            <a:schemeClr val="accent1"/>
+          </a:effectRef>
+          <a:fontRef idx="minor">
+            <a:schemeClr val="lt1"/>
+          </a:fontRef>
+        </p:style>
+        <p:txBody>
+          <a:bodyPr rtlCol="0" anchor="ctr" lIns="0" rIns="0" tIns="0" bIns="0"/>
+          <a:lstStyle/>
+          <a:p>
+            <a:pPr algn="ctr"/>
+            <a:r>
+              <a:rPr sz="1500" i="0" b="1">
+                <a:solidFill>
+                  <a:srgbClr val="6E625B"/>
+                </a:solidFill>
+                <a:latin typeface="Calibri"/>
+              </a:rPr>
+              <a:t>C</a:t>
+            </a:r>
+          </a:p>
+        </p:txBody>
+      </p:sp>
+      <p:sp>
+        <p:nvSpPr>
+          <p:cNvPr id="17" name="TextBox 16"/>
+          <p:cNvSpPr txBox="1"/>
+          <p:nvPr/>
+        </p:nvSpPr>
+        <p:spPr>
+          <a:xfrm>
+            <a:off x="1371600" y="3959352"/>
+            <a:ext cx="10088575" cy="548640"/>
+          </a:xfrm>
+          <a:prstGeom prst="rect">
+            <a:avLst/>
+          </a:prstGeom>
+          <a:noFill/>
+        </p:spPr>
+        <p:txBody>
+          <a:bodyPr wrap="square" anchor="ctr" lIns="0" rIns="0" tIns="0" bIns="0">
+            <a:spAutoFit/>
+          </a:bodyPr>
+          <a:lstStyle/>
+          <a:p>
+            <a:r>
+              <a:rPr sz="1900" i="0" b="0">
+                <a:solidFill>
+                  <a:srgbClr val="6E625B"/>
+                </a:solidFill>
+                <a:latin typeface="Calibri"/>
+              </a:rPr>
+              <a:t>Classifying the question</a:t>
+            </a:r>
+          </a:p>
+        </p:txBody>
+      </p:sp>
+      <p:sp>
+        <p:nvSpPr>
+          <p:cNvPr id="18" name="Rounded Rectangle 17"/>
+          <p:cNvSpPr/>
+          <p:nvPr/>
+        </p:nvSpPr>
+        <p:spPr>
+          <a:xfrm>
+            <a:off x="548640" y="4636008"/>
+            <a:ext cx="11094415" cy="548640"/>
+          </a:xfrm>
+          <a:prstGeom prst="roundRect">
+            <a:avLst>
+              <a:gd name="adj" fmla="val 18000"/>
+            </a:avLst>
+          </a:prstGeom>
+          <a:solidFill>
+            <a:srgbClr val="2F6F7A"/>
+          </a:solidFill>
+          <a:ln>
+            <a:noFill/>
+          </a:ln>
+          <a:effectLst/>
+        </p:spPr>
+        <p:style>
+          <a:lnRef idx="1">
+            <a:schemeClr val="accent1"/>
+          </a:lnRef>
+          <a:fillRef idx="3">
+            <a:schemeClr val="accent1"/>
+          </a:fillRef>
+          <a:effectRef idx="2">
+            <a:schemeClr val="accent1"/>
+          </a:effectRef>
+          <a:fontRef idx="minor">
+            <a:schemeClr val="lt1"/>
+          </a:fontRef>
+        </p:style>
+        <p:txBody>
+          <a:bodyPr rtlCol="0" anchor="ctr"/>
+          <a:lstStyle/>
+          <a:p>
+            <a:pPr algn="ctr"/>
+          </a:p>
+        </p:txBody>
+      </p:sp>
+      <p:sp>
+        <p:nvSpPr>
+          <p:cNvPr id="19" name="Oval 18"/>
+          <p:cNvSpPr/>
+          <p:nvPr/>
+        </p:nvSpPr>
+        <p:spPr>
+          <a:xfrm>
+            <a:off x="713232" y="4700016"/>
+            <a:ext cx="420624" cy="420624"/>
+          </a:xfrm>
+          <a:prstGeom prst="ellipse">
+            <a:avLst/>
+          </a:prstGeom>
+          <a:solidFill>
+            <a:srgbClr val="FFFFFF"/>
+          </a:solidFill>
+          <a:ln>
+            <a:noFill/>
+          </a:ln>
+          <a:effectLst/>
+        </p:spPr>
+        <p:style>
+          <a:lnRef idx="1">
+            <a:schemeClr val="accent1"/>
+          </a:lnRef>
+          <a:fillRef idx="3">
+            <a:schemeClr val="accent1"/>
+          </a:fillRef>
+          <a:effectRef idx="2">
+            <a:schemeClr val="accent1"/>
+          </a:effectRef>
+          <a:fontRef idx="minor">
+            <a:schemeClr val="lt1"/>
+          </a:fontRef>
+        </p:style>
+        <p:txBody>
+          <a:bodyPr rtlCol="0" anchor="ctr" lIns="0" rIns="0" tIns="0" bIns="0"/>
+          <a:lstStyle/>
+          <a:p>
+            <a:pPr algn="ctr"/>
+            <a:r>
+              <a:rPr sz="1500" i="0" b="1">
+                <a:solidFill>
+                  <a:srgbClr val="2F6F7A"/>
+                </a:solidFill>
+                <a:latin typeface="Calibri"/>
+              </a:rPr>
+              <a:t>D</a:t>
+            </a:r>
+          </a:p>
+        </p:txBody>
+      </p:sp>
+      <p:sp>
+        <p:nvSpPr>
+          <p:cNvPr id="20" name="TextBox 19"/>
+          <p:cNvSpPr txBox="1"/>
+          <p:nvPr/>
+        </p:nvSpPr>
+        <p:spPr>
+          <a:xfrm>
+            <a:off x="1371600" y="4636008"/>
+            <a:ext cx="10088575" cy="548640"/>
+          </a:xfrm>
+          <a:prstGeom prst="rect">
+            <a:avLst/>
+          </a:prstGeom>
+          <a:noFill/>
+        </p:spPr>
+        <p:txBody>
+          <a:bodyPr wrap="square" anchor="ctr" lIns="0" rIns="0" tIns="0" bIns="0">
+            <a:spAutoFit/>
+          </a:bodyPr>
+          <a:lstStyle/>
+          <a:p>
+            <a:r>
+              <a:rPr sz="1900" i="0" b="1">
+                <a:solidFill>
+                  <a:srgbClr val="FFFFFF"/>
+                </a:solidFill>
+                <a:latin typeface="Calibri"/>
+              </a:rPr>
+              <a:t>Follow up and documentation</a:t>
+            </a:r>
+          </a:p>
+        </p:txBody>
+      </p:sp>
+      <p:sp>
+        <p:nvSpPr>
+          <p:cNvPr id="21" name="TextBox 20"/>
+          <p:cNvSpPr txBox="1"/>
+          <p:nvPr/>
+        </p:nvSpPr>
+        <p:spPr>
+          <a:xfrm>
+            <a:off x="548640" y="5358384"/>
+            <a:ext cx="11094415" cy="685800"/>
+          </a:xfrm>
+          <a:prstGeom prst="rect">
+            <a:avLst/>
+          </a:prstGeom>
+          <a:noFill/>
+        </p:spPr>
+        <p:txBody>
+          <a:bodyPr wrap="square" anchor="t" lIns="0" rIns="0" tIns="0" bIns="0">
+            <a:spAutoFit/>
+          </a:bodyPr>
+          <a:lstStyle/>
+          <a:p>
+            <a:r>
+              <a:rPr sz="1500" i="0" b="1">
+                <a:solidFill>
+                  <a:srgbClr val="2F6F7A"/>
+                </a:solidFill>
+                <a:latin typeface="Calibri"/>
+              </a:rPr>
+              <a:t>Why:  </a:t>
+            </a:r>
+            <a:r>
+              <a:rPr sz="1500" i="0" b="0">
+                <a:solidFill>
+                  <a:srgbClr val="2B211C"/>
+                </a:solidFill>
+                <a:latin typeface="Calibri"/>
+              </a:rPr>
+              <a:t>The request ends with follow-up and documentation. A, B and C come earlier.</a:t>
+            </a:r>
+          </a:p>
+        </p:txBody>
+      </p:sp>
+    </p:spTree>
+  </p:cSld>
+  <p:clrMapOvr>
+    <a:masterClrMapping/>
+  </p:clrMapOvr>
+</p:sld>
+</file>
+
+<file path=ppt/slides/slide23.xml><?xml version="1.0" encoding="utf-8"?>
+<p:sld xmlns:a="http://schemas.openxmlformats.org/drawingml/2006/main" xmlns:p="http://schemas.openxmlformats.org/presentationml/2006/main" xmlns:r="http://schemas.openxmlformats.org/officeDocument/2006/relationships">
+  <p:cSld>
+    <p:bg>
+      <p:bgPr>
+        <a:solidFill>
+          <a:srgbClr val="FFFFFF"/>
+        </a:solidFill>
+        <a:effectLst/>
+      </p:bgPr>
+    </p:bg>
+    <p:spTree>
+      <p:nvGrpSpPr>
+        <p:cNvPr id="1" name=""/>
+        <p:cNvGrpSpPr/>
+        <p:nvPr/>
+      </p:nvGrpSpPr>
+      <p:grpSpPr/>
+      <p:sp>
+        <p:nvSpPr>
           <p:cNvPr id="2" name="Rectangle 1"/>
           <p:cNvSpPr/>
           <p:nvPr/>
@@ -14575,11 +15495,10 @@
           </a:bodyPr>
           <a:lstStyle/>
           <a:p>
-            <a:pPr algn="l"/>
             <a:r>
               <a:rPr sz="13000" i="0" b="1">
                 <a:solidFill>
-                  <a:srgbClr val="F6E5DE"/>
+                  <a:srgbClr val="F1E3DF"/>
                 </a:solidFill>
                 <a:latin typeface="Cambria"/>
               </a:rPr>
@@ -14624,7 +15543,7 @@
             <a:r>
               <a:rPr sz="1400" i="0" b="1" spc="150">
                 <a:solidFill>
-                  <a:srgbClr val="F6E5DE"/>
+                  <a:srgbClr val="F1E3DF"/>
                 </a:solidFill>
                 <a:latin typeface="Calibri"/>
               </a:rPr>
@@ -14676,7 +15595,7 @@
         <p:spPr>
           <a:xfrm>
             <a:off x="4526280" y="6419088"/>
-            <a:ext cx="5486400" cy="274320"/>
+            <a:ext cx="8229600" cy="274320"/>
           </a:xfrm>
           <a:prstGeom prst="rect">
             <a:avLst/>
@@ -14731,7 +15650,7 @@
                 </a:solidFill>
                 <a:latin typeface="Calibri"/>
               </a:rPr>
-              <a:t>22</a:t>
+              <a:t>23</a:t>
             </a:r>
           </a:p>
         </p:txBody>
@@ -14768,7 +15687,7 @@
 </p:sld>
 </file>
 
-<file path=ppt/slides/slide23.xml><?xml version="1.0" encoding="utf-8"?>
+<file path=ppt/slides/slide24.xml><?xml version="1.0" encoding="utf-8"?>
 <p:sld xmlns:a="http://schemas.openxmlformats.org/drawingml/2006/main" xmlns:p="http://schemas.openxmlformats.org/presentationml/2006/main" xmlns:r="http://schemas.openxmlformats.org/officeDocument/2006/relationships">
   <p:cSld>
     <p:bg>
@@ -14811,7 +15730,7 @@
             <a:r>
               <a:rPr sz="1300" i="0" b="1" spc="200">
                 <a:solidFill>
-                  <a:srgbClr val="F3E6D8"/>
+                  <a:srgbClr val="F2E5E1"/>
                 </a:solidFill>
                 <a:latin typeface="Calibri"/>
               </a:rPr>
@@ -14869,7 +15788,7 @@
             <a:avLst/>
           </a:prstGeom>
           <a:solidFill>
-            <a:srgbClr val="F3E6D8"/>
+            <a:srgbClr val="F2E5E1"/>
           </a:solidFill>
           <a:ln>
             <a:noFill/>
@@ -14891,7 +15810,7 @@
           </a:fontRef>
         </p:style>
         <p:txBody>
-          <a:bodyPr rtlCol="0" anchor="ctr" lIns="0" rIns="0"/>
+          <a:bodyPr rtlCol="0" anchor="ctr" lIns="0" rIns="0" tIns="0" bIns="0"/>
           <a:lstStyle/>
           <a:p>
             <a:pPr algn="ctr"/>
@@ -14956,7 +15875,7 @@
             <a:avLst/>
           </a:prstGeom>
           <a:solidFill>
-            <a:srgbClr val="F3E6D8"/>
+            <a:srgbClr val="F2E5E1"/>
           </a:solidFill>
           <a:ln>
             <a:noFill/>
@@ -14978,7 +15897,7 @@
           </a:fontRef>
         </p:style>
         <p:txBody>
-          <a:bodyPr rtlCol="0" anchor="ctr" lIns="0" rIns="0"/>
+          <a:bodyPr rtlCol="0" anchor="ctr" lIns="0" rIns="0" tIns="0" bIns="0"/>
           <a:lstStyle/>
           <a:p>
             <a:pPr algn="ctr"/>
@@ -15043,7 +15962,7 @@
             <a:avLst/>
           </a:prstGeom>
           <a:solidFill>
-            <a:srgbClr val="F3E6D8"/>
+            <a:srgbClr val="F2E5E1"/>
           </a:solidFill>
           <a:ln>
             <a:noFill/>
@@ -15065,7 +15984,7 @@
           </a:fontRef>
         </p:style>
         <p:txBody>
-          <a:bodyPr rtlCol="0" anchor="ctr" lIns="0" rIns="0"/>
+          <a:bodyPr rtlCol="0" anchor="ctr" lIns="0" rIns="0" tIns="0" bIns="0"/>
           <a:lstStyle/>
           <a:p>
             <a:pPr algn="ctr"/>
@@ -15130,7 +16049,7 @@
             <a:avLst/>
           </a:prstGeom>
           <a:solidFill>
-            <a:srgbClr val="F3E6D8"/>
+            <a:srgbClr val="F2E5E1"/>
           </a:solidFill>
           <a:ln>
             <a:noFill/>
@@ -15152,7 +16071,7 @@
           </a:fontRef>
         </p:style>
         <p:txBody>
-          <a:bodyPr rtlCol="0" anchor="ctr" lIns="0" rIns="0"/>
+          <a:bodyPr rtlCol="0" anchor="ctr" lIns="0" rIns="0" tIns="0" bIns="0"/>
           <a:lstStyle/>
           <a:p>
             <a:pPr algn="ctr"/>
@@ -15217,7 +16136,7 @@
             <a:avLst/>
           </a:prstGeom>
           <a:solidFill>
-            <a:srgbClr val="F3E6D8"/>
+            <a:srgbClr val="F2E5E1"/>
           </a:solidFill>
           <a:ln>
             <a:noFill/>
@@ -15239,7 +16158,7 @@
           </a:fontRef>
         </p:style>
         <p:txBody>
-          <a:bodyPr rtlCol="0" anchor="ctr" lIns="0" rIns="0"/>
+          <a:bodyPr rtlCol="0" anchor="ctr" lIns="0" rIns="0" tIns="0" bIns="0"/>
           <a:lstStyle/>
           <a:p>
             <a:pPr algn="ctr"/>
@@ -15400,7 +16319,7 @@
           </a:fontRef>
         </p:style>
         <p:txBody>
-          <a:bodyPr rtlCol="0" anchor="ctr" lIns="0" rIns="0"/>
+          <a:bodyPr rtlCol="0" anchor="ctr" lIns="0" rIns="0" tIns="0" bIns="0"/>
           <a:lstStyle/>
           <a:p>
             <a:pPr algn="ctr"/>
@@ -15585,14 +16504,14 @@
         </p:nvSpPr>
         <p:spPr>
           <a:xfrm>
-            <a:off x="548640" y="1618488"/>
+            <a:off x="548640" y="1572768"/>
             <a:ext cx="402336" cy="402336"/>
           </a:xfrm>
           <a:prstGeom prst="ellipse">
             <a:avLst/>
           </a:prstGeom>
           <a:solidFill>
-            <a:srgbClr val="E0EEF0"/>
+            <a:srgbClr val="E6EEEF"/>
           </a:solidFill>
           <a:ln>
             <a:noFill/>
@@ -15614,7 +16533,7 @@
           </a:fontRef>
         </p:style>
         <p:txBody>
-          <a:bodyPr rtlCol="0" anchor="ctr" lIns="0" rIns="0"/>
+          <a:bodyPr rtlCol="0" anchor="ctr" lIns="0" rIns="0" tIns="0" bIns="0"/>
           <a:lstStyle/>
           <a:p>
             <a:pPr algn="ctr"/>
@@ -15638,8 +16557,8 @@
         </p:nvSpPr>
         <p:spPr>
           <a:xfrm>
-            <a:off x="1143000" y="1636776"/>
-            <a:ext cx="10500055" cy="1237488"/>
+            <a:off x="1143000" y="1591056"/>
+            <a:ext cx="10500055" cy="1475612"/>
           </a:xfrm>
           <a:prstGeom prst="rect">
             <a:avLst/>
@@ -15653,7 +16572,7 @@
           <a:lstStyle/>
           <a:p>
             <a:r>
-              <a:rPr sz="2400" i="0" b="1">
+              <a:rPr sz="2100" i="0" b="1">
                 <a:solidFill>
                   <a:srgbClr val="2B211C"/>
                 </a:solidFill>
@@ -15662,13 +16581,13 @@
               <a:t>Drug information</a:t>
             </a:r>
             <a:r>
-              <a:rPr sz="2400" i="0" b="0">
+              <a:rPr sz="2100" i="0" b="0">
                 <a:solidFill>
                   <a:srgbClr val="2B211C"/>
                 </a:solidFill>
                 <a:latin typeface="Calibri"/>
               </a:rPr>
-              <a:t> is knowledge about medicines that helps people use them well.</a:t>
+              <a:t> is knowledge about medicines that helps people use them well. It covers doses, effects, adverse effects, interactions, and use in special groups.</a:t>
             </a:r>
           </a:p>
         </p:txBody>
@@ -15681,14 +16600,14 @@
         </p:nvSpPr>
         <p:spPr>
           <a:xfrm>
-            <a:off x="548640" y="2901696"/>
+            <a:off x="548640" y="3094100"/>
             <a:ext cx="402336" cy="402336"/>
           </a:xfrm>
           <a:prstGeom prst="ellipse">
             <a:avLst/>
           </a:prstGeom>
           <a:solidFill>
-            <a:srgbClr val="E0EEF0"/>
+            <a:srgbClr val="E6EEEF"/>
           </a:solidFill>
           <a:ln>
             <a:noFill/>
@@ -15710,7 +16629,7 @@
           </a:fontRef>
         </p:style>
         <p:txBody>
-          <a:bodyPr rtlCol="0" anchor="ctr" lIns="0" rIns="0"/>
+          <a:bodyPr rtlCol="0" anchor="ctr" lIns="0" rIns="0" tIns="0" bIns="0"/>
           <a:lstStyle/>
           <a:p>
             <a:pPr algn="ctr"/>
@@ -15734,8 +16653,8 @@
         </p:nvSpPr>
         <p:spPr>
           <a:xfrm>
-            <a:off x="1143000" y="2919984"/>
-            <a:ext cx="10500055" cy="1237488"/>
+            <a:off x="1143000" y="3112388"/>
+            <a:ext cx="10500055" cy="1475612"/>
           </a:xfrm>
           <a:prstGeom prst="rect">
             <a:avLst/>
@@ -15749,7 +16668,7 @@
           <a:lstStyle/>
           <a:p>
             <a:r>
-              <a:rPr sz="2400" i="0" b="0">
+              <a:rPr sz="2100" i="0" b="0">
                 <a:solidFill>
                   <a:srgbClr val="2B211C"/>
                 </a:solidFill>
@@ -15758,7 +16677,7 @@
               <a:t>A </a:t>
             </a:r>
             <a:r>
-              <a:rPr sz="2400" i="0" b="1">
+              <a:rPr sz="2100" i="0" b="1">
                 <a:solidFill>
                   <a:srgbClr val="2B211C"/>
                 </a:solidFill>
@@ -15767,13 +16686,13 @@
               <a:t>drug information service</a:t>
             </a:r>
             <a:r>
-              <a:rPr sz="2400" i="0" b="0">
+              <a:rPr sz="2100" i="0" b="0">
                 <a:solidFill>
                   <a:srgbClr val="2B211C"/>
                 </a:solidFill>
                 <a:latin typeface="Calibri"/>
               </a:rPr>
-              <a:t> is the work pharmacists do to give accurate, unbiased and useful answers about medicines.</a:t>
+              <a:t> is the work pharmacists do to give accurate, unbiased and useful answers about medicines. The questions come from doctors, nurses, other pharmacists, patients and the public.</a:t>
             </a:r>
           </a:p>
         </p:txBody>
@@ -15786,14 +16705,14 @@
         </p:nvSpPr>
         <p:spPr>
           <a:xfrm>
-            <a:off x="548640" y="4184903"/>
+            <a:off x="548640" y="4615433"/>
             <a:ext cx="402336" cy="402336"/>
           </a:xfrm>
           <a:prstGeom prst="ellipse">
             <a:avLst/>
           </a:prstGeom>
           <a:solidFill>
-            <a:srgbClr val="E0EEF0"/>
+            <a:srgbClr val="E6EEEF"/>
           </a:solidFill>
           <a:ln>
             <a:noFill/>
@@ -15815,7 +16734,7 @@
           </a:fontRef>
         </p:style>
         <p:txBody>
-          <a:bodyPr rtlCol="0" anchor="ctr" lIns="0" rIns="0"/>
+          <a:bodyPr rtlCol="0" anchor="ctr" lIns="0" rIns="0" tIns="0" bIns="0"/>
           <a:lstStyle/>
           <a:p>
             <a:pPr algn="ctr"/>
@@ -15839,8 +16758,8 @@
         </p:nvSpPr>
         <p:spPr>
           <a:xfrm>
-            <a:off x="1143000" y="4203192"/>
-            <a:ext cx="10500055" cy="856488"/>
+            <a:off x="1143000" y="4633722"/>
+            <a:ext cx="10500055" cy="1475612"/>
           </a:xfrm>
           <a:prstGeom prst="rect">
             <a:avLst/>
@@ -15854,13 +16773,13 @@
           <a:lstStyle/>
           <a:p>
             <a:r>
-              <a:rPr sz="2400" i="0" b="0">
+              <a:rPr sz="2100" i="0" b="0">
                 <a:solidFill>
                   <a:srgbClr val="2B211C"/>
                 </a:solidFill>
                 <a:latin typeface="Calibri"/>
               </a:rPr>
-              <a:t>Every pharmacist gives drug information.</a:t>
+              <a:t>Every pharmacist gives drug information. You will do it in the community pharmacy, the hospital ward and the clinic. The skill is the same everywhere: understand the real question, find good evidence, and give a clear answer.</a:t>
             </a:r>
           </a:p>
         </p:txBody>
@@ -15928,7 +16847,7 @@
           </a:fontRef>
         </p:style>
         <p:txBody>
-          <a:bodyPr rtlCol="0" anchor="ctr" lIns="0" rIns="0"/>
+          <a:bodyPr rtlCol="0" anchor="ctr" lIns="0" rIns="0" tIns="0" bIns="0"/>
           <a:lstStyle/>
           <a:p>
             <a:pPr algn="ctr"/>
@@ -16105,17 +17024,74 @@
           </a:prstGeom>
         </p:spPr>
       </p:pic>
+      <p:sp>
+        <p:nvSpPr>
+          <p:cNvPr id="8" name="TextBox 7"/>
+          <p:cNvSpPr txBox="1"/>
+          <p:nvPr/>
+        </p:nvSpPr>
+        <p:spPr>
+          <a:xfrm>
+            <a:off x="548640" y="1554480"/>
+            <a:ext cx="11094415" cy="795528"/>
+          </a:xfrm>
+          <a:prstGeom prst="rect">
+            <a:avLst/>
+          </a:prstGeom>
+          <a:noFill/>
+        </p:spPr>
+        <p:txBody>
+          <a:bodyPr wrap="square" anchor="t" lIns="0" rIns="0" tIns="0" bIns="0">
+            <a:spAutoFit/>
+          </a:bodyPr>
+          <a:lstStyle/>
+          <a:p>
+            <a:pPr>
+              <a:spcAft>
+                <a:spcPts val="800"/>
+              </a:spcAft>
+            </a:pPr>
+            <a:r>
+              <a:rPr sz="1800" i="0" b="0">
+                <a:solidFill>
+                  <a:srgbClr val="2B211C"/>
+                </a:solidFill>
+                <a:latin typeface="Calibri"/>
+              </a:rPr>
+              <a:t>A </a:t>
+            </a:r>
+            <a:r>
+              <a:rPr sz="1800" i="0" b="1">
+                <a:solidFill>
+                  <a:srgbClr val="2B211C"/>
+                </a:solidFill>
+                <a:latin typeface="Calibri"/>
+              </a:rPr>
+              <a:t>drug information centre (DIC)</a:t>
+            </a:r>
+            <a:r>
+              <a:rPr sz="1800" i="0" b="0">
+                <a:solidFill>
+                  <a:srgbClr val="2B211C"/>
+                </a:solidFill>
+                <a:latin typeface="Calibri"/>
+              </a:rPr>
+              <a:t> is a unit run by trained pharmacists and other health professionals. Its job is to answer questions about medicines and to support safe use.</a:t>
+            </a:r>
+          </a:p>
+        </p:txBody>
+      </p:sp>
       <p:graphicFrame>
         <p:nvGraphicFramePr>
-          <p:cNvPr id="8" name="Table 7"/>
+          <p:cNvPr id="9" name="Table 8"/>
           <p:cNvGraphicFramePr>
             <a:graphicFrameLocks noGrp="1"/>
           </p:cNvGraphicFramePr>
           <p:nvPr/>
         </p:nvGraphicFramePr>
         <p:xfrm>
-          <a:off x="548640" y="1600200"/>
-          <a:ext cx="11094414" cy="3886200"/>
+          <a:off x="548640" y="2532887"/>
+          <a:ext cx="11094414" cy="3200400"/>
         </p:xfrm>
         <a:graphic>
           <a:graphicData uri="http://schemas.openxmlformats.org/drawingml/2006/table">
@@ -16127,14 +17103,14 @@
                 <a:gridCol w="2521457"/>
                 <a:gridCol w="8572957"/>
               </a:tblGrid>
-              <a:tr h="777240">
+              <a:tr h="640080">
                 <a:tc>
                   <a:txBody>
                     <a:bodyPr/>
                     <a:lstStyle/>
                     <a:p>
                       <a:r>
-                        <a:rPr sz="1700" i="0" b="1">
+                        <a:rPr sz="1600" i="0" b="1">
                           <a:solidFill>
                             <a:srgbClr val="FFFFFF"/>
                           </a:solidFill>
@@ -16156,7 +17132,7 @@
                     <a:lstStyle/>
                     <a:p>
                       <a:r>
-                        <a:rPr sz="1700" i="0" b="1">
+                        <a:rPr sz="1600" i="0" b="1">
                           <a:solidFill>
                             <a:srgbClr val="FFFFFF"/>
                           </a:solidFill>
@@ -16173,14 +17149,14 @@
                   </a:tcPr>
                 </a:tc>
               </a:tr>
-              <a:tr h="777240">
+              <a:tr h="640080">
                 <a:tc>
                   <a:txBody>
                     <a:bodyPr/>
                     <a:lstStyle/>
                     <a:p>
                       <a:r>
-                        <a:rPr sz="1800" i="0" b="1">
+                        <a:rPr sz="1700" i="0" b="1">
                           <a:solidFill>
                             <a:srgbClr val="2B211C"/>
                           </a:solidFill>
@@ -16202,7 +17178,7 @@
                     <a:lstStyle/>
                     <a:p>
                       <a:r>
-                        <a:rPr sz="1800" i="0" b="0">
+                        <a:rPr sz="1700" i="0" b="0">
                           <a:solidFill>
                             <a:srgbClr val="2B211C"/>
                           </a:solidFill>
@@ -16219,14 +17195,14 @@
                   </a:tcPr>
                 </a:tc>
               </a:tr>
-              <a:tr h="777240">
+              <a:tr h="640080">
                 <a:tc>
                   <a:txBody>
                     <a:bodyPr/>
                     <a:lstStyle/>
                     <a:p>
                       <a:r>
-                        <a:rPr sz="1800" i="0" b="1">
+                        <a:rPr sz="1700" i="0" b="1">
                           <a:solidFill>
                             <a:srgbClr val="2B211C"/>
                           </a:solidFill>
@@ -16238,7 +17214,7 @@
                   </a:txBody>
                   <a:tcPr marL="109728" marR="109728" marT="45720" marB="45720" anchor="ctr">
                     <a:solidFill>
-                      <a:srgbClr val="FBF3EE"/>
+                      <a:srgbClr val="FAF4F2"/>
                     </a:solidFill>
                   </a:tcPr>
                 </a:tc>
@@ -16248,7 +17224,7 @@
                     <a:lstStyle/>
                     <a:p>
                       <a:r>
-                        <a:rPr sz="1800" i="0" b="0">
+                        <a:rPr sz="1700" i="0" b="0">
                           <a:solidFill>
                             <a:srgbClr val="2B211C"/>
                           </a:solidFill>
@@ -16260,19 +17236,19 @@
                   </a:txBody>
                   <a:tcPr marL="109728" marR="109728" marT="45720" marB="45720" anchor="ctr">
                     <a:solidFill>
-                      <a:srgbClr val="FBF3EE"/>
+                      <a:srgbClr val="FAF4F2"/>
                     </a:solidFill>
                   </a:tcPr>
                 </a:tc>
               </a:tr>
-              <a:tr h="777240">
+              <a:tr h="640080">
                 <a:tc>
                   <a:txBody>
                     <a:bodyPr/>
                     <a:lstStyle/>
                     <a:p>
                       <a:r>
-                        <a:rPr sz="1800" i="0" b="1">
+                        <a:rPr sz="1700" i="0" b="1">
                           <a:solidFill>
                             <a:srgbClr val="2B211C"/>
                           </a:solidFill>
@@ -16294,7 +17270,7 @@
                     <a:lstStyle/>
                     <a:p>
                       <a:r>
-                        <a:rPr sz="1800" i="0" b="0">
+                        <a:rPr sz="1700" i="0" b="0">
                           <a:solidFill>
                             <a:srgbClr val="2B211C"/>
                           </a:solidFill>
@@ -16311,14 +17287,14 @@
                   </a:tcPr>
                 </a:tc>
               </a:tr>
-              <a:tr h="777240">
+              <a:tr h="640080">
                 <a:tc>
                   <a:txBody>
                     <a:bodyPr/>
                     <a:lstStyle/>
                     <a:p>
                       <a:r>
-                        <a:rPr sz="1800" i="0" b="1">
+                        <a:rPr sz="1700" i="0" b="1">
                           <a:solidFill>
                             <a:srgbClr val="2B211C"/>
                           </a:solidFill>
@@ -16330,7 +17306,7 @@
                   </a:txBody>
                   <a:tcPr marL="109728" marR="109728" marT="45720" marB="45720" anchor="ctr">
                     <a:solidFill>
-                      <a:srgbClr val="FBF3EE"/>
+                      <a:srgbClr val="FAF4F2"/>
                     </a:solidFill>
                   </a:tcPr>
                 </a:tc>
@@ -16340,7 +17316,7 @@
                     <a:lstStyle/>
                     <a:p>
                       <a:r>
-                        <a:rPr sz="1800" i="0" b="0">
+                        <a:rPr sz="1700" i="0" b="0">
                           <a:solidFill>
                             <a:srgbClr val="2B211C"/>
                           </a:solidFill>
@@ -16352,7 +17328,7 @@
                   </a:txBody>
                   <a:tcPr marL="109728" marR="109728" marT="45720" marB="45720" anchor="ctr">
                     <a:solidFill>
-                      <a:srgbClr val="FBF3EE"/>
+                      <a:srgbClr val="FAF4F2"/>
                     </a:solidFill>
                   </a:tcPr>
                 </a:tc>
@@ -16424,7 +17400,7 @@
           </a:fontRef>
         </p:style>
         <p:txBody>
-          <a:bodyPr rtlCol="0" anchor="ctr" lIns="0" rIns="0"/>
+          <a:bodyPr rtlCol="0" anchor="ctr" lIns="0" rIns="0" tIns="0" bIns="0"/>
           <a:lstStyle/>
           <a:p>
             <a:pPr algn="ctr"/>
@@ -16503,7 +17479,7 @@
                 </a:solidFill>
                 <a:latin typeface="Cambria"/>
               </a:rPr>
-              <a:t>The Drug Information Centre</a:t>
+              <a:t>What a DIC does</a:t>
             </a:r>
           </a:p>
         </p:txBody>
@@ -16610,8 +17586,8 @@
           <p:nvPr/>
         </p:nvGraphicFramePr>
         <p:xfrm>
-          <a:off x="548640" y="1600200"/>
-          <a:ext cx="11094414" cy="4526280"/>
+          <a:off x="548640" y="1554480"/>
+          <a:ext cx="11094414" cy="3840480"/>
         </p:xfrm>
         <a:graphic>
           <a:graphicData uri="http://schemas.openxmlformats.org/drawingml/2006/table">
@@ -16623,7 +17599,7 @@
                 <a:gridCol w="3153149"/>
                 <a:gridCol w="7941265"/>
               </a:tblGrid>
-              <a:tr h="754380">
+              <a:tr h="640080">
                 <a:tc>
                   <a:txBody>
                     <a:bodyPr/>
@@ -16669,7 +17645,7 @@
                   </a:tcPr>
                 </a:tc>
               </a:tr>
-              <a:tr h="754380">
+              <a:tr h="640080">
                 <a:tc>
                   <a:txBody>
                     <a:bodyPr/>
@@ -16715,7 +17691,7 @@
                   </a:tcPr>
                 </a:tc>
               </a:tr>
-              <a:tr h="754380">
+              <a:tr h="640080">
                 <a:tc>
                   <a:txBody>
                     <a:bodyPr/>
@@ -16734,7 +17710,7 @@
                   </a:txBody>
                   <a:tcPr marL="109728" marR="109728" marT="45720" marB="45720" anchor="ctr">
                     <a:solidFill>
-                      <a:srgbClr val="FBF3EE"/>
+                      <a:srgbClr val="FAF4F2"/>
                     </a:solidFill>
                   </a:tcPr>
                 </a:tc>
@@ -16756,12 +17732,12 @@
                   </a:txBody>
                   <a:tcPr marL="109728" marR="109728" marT="45720" marB="45720" anchor="ctr">
                     <a:solidFill>
-                      <a:srgbClr val="FBF3EE"/>
+                      <a:srgbClr val="FAF4F2"/>
                     </a:solidFill>
                   </a:tcPr>
                 </a:tc>
               </a:tr>
-              <a:tr h="754380">
+              <a:tr h="640080">
                 <a:tc>
                   <a:txBody>
                     <a:bodyPr/>
@@ -16807,7 +17783,7 @@
                   </a:tcPr>
                 </a:tc>
               </a:tr>
-              <a:tr h="754380">
+              <a:tr h="640080">
                 <a:tc>
                   <a:txBody>
                     <a:bodyPr/>
@@ -16826,7 +17802,7 @@
                   </a:txBody>
                   <a:tcPr marL="109728" marR="109728" marT="45720" marB="45720" anchor="ctr">
                     <a:solidFill>
-                      <a:srgbClr val="FBF3EE"/>
+                      <a:srgbClr val="FAF4F2"/>
                     </a:solidFill>
                   </a:tcPr>
                 </a:tc>
@@ -16848,12 +17824,12 @@
                   </a:txBody>
                   <a:tcPr marL="109728" marR="109728" marT="45720" marB="45720" anchor="ctr">
                     <a:solidFill>
-                      <a:srgbClr val="FBF3EE"/>
+                      <a:srgbClr val="FAF4F2"/>
                     </a:solidFill>
                   </a:tcPr>
                 </a:tc>
               </a:tr>
-              <a:tr h="754380">
+              <a:tr h="640080">
                 <a:tc>
                   <a:txBody>
                     <a:bodyPr/>
@@ -16966,7 +17942,7 @@
           </a:fontRef>
         </p:style>
         <p:txBody>
-          <a:bodyPr rtlCol="0" anchor="ctr" lIns="0" rIns="0"/>
+          <a:bodyPr rtlCol="0" anchor="ctr" lIns="0" rIns="0" tIns="0" bIns="0"/>
           <a:lstStyle/>
           <a:p>
             <a:pPr algn="ctr"/>
@@ -17151,14 +18127,14 @@
         </p:nvSpPr>
         <p:spPr>
           <a:xfrm>
-            <a:off x="548640" y="1618488"/>
+            <a:off x="548640" y="1572768"/>
             <a:ext cx="402336" cy="402336"/>
           </a:xfrm>
           <a:prstGeom prst="ellipse">
             <a:avLst/>
           </a:prstGeom>
           <a:solidFill>
-            <a:srgbClr val="E0EEF0"/>
+            <a:srgbClr val="E6EEEF"/>
           </a:solidFill>
           <a:ln>
             <a:noFill/>
@@ -17180,7 +18156,7 @@
           </a:fontRef>
         </p:style>
         <p:txBody>
-          <a:bodyPr rtlCol="0" anchor="ctr" lIns="0" rIns="0"/>
+          <a:bodyPr rtlCol="0" anchor="ctr" lIns="0" rIns="0" tIns="0" bIns="0"/>
           <a:lstStyle/>
           <a:p>
             <a:pPr algn="ctr"/>
@@ -17204,7 +18180,7 @@
         </p:nvSpPr>
         <p:spPr>
           <a:xfrm>
-            <a:off x="1143000" y="1636776"/>
+            <a:off x="1143000" y="1591056"/>
             <a:ext cx="10500055" cy="808863"/>
           </a:xfrm>
           <a:prstGeom prst="rect">
@@ -17247,14 +18223,14 @@
         </p:nvSpPr>
         <p:spPr>
           <a:xfrm>
-            <a:off x="548640" y="2473071"/>
+            <a:off x="548640" y="2427351"/>
             <a:ext cx="402336" cy="402336"/>
           </a:xfrm>
           <a:prstGeom prst="ellipse">
             <a:avLst/>
           </a:prstGeom>
           <a:solidFill>
-            <a:srgbClr val="E0EEF0"/>
+            <a:srgbClr val="E6EEEF"/>
           </a:solidFill>
           <a:ln>
             <a:noFill/>
@@ -17276,7 +18252,7 @@
           </a:fontRef>
         </p:style>
         <p:txBody>
-          <a:bodyPr rtlCol="0" anchor="ctr" lIns="0" rIns="0"/>
+          <a:bodyPr rtlCol="0" anchor="ctr" lIns="0" rIns="0" tIns="0" bIns="0"/>
           <a:lstStyle/>
           <a:p>
             <a:pPr algn="ctr"/>
@@ -17300,7 +18276,7 @@
         </p:nvSpPr>
         <p:spPr>
           <a:xfrm>
-            <a:off x="1143000" y="2491359"/>
+            <a:off x="1143000" y="2445639"/>
             <a:ext cx="10500055" cy="808863"/>
           </a:xfrm>
           <a:prstGeom prst="rect">
@@ -17343,14 +18319,14 @@
         </p:nvSpPr>
         <p:spPr>
           <a:xfrm>
-            <a:off x="548640" y="3327654"/>
+            <a:off x="548640" y="3281934"/>
             <a:ext cx="402336" cy="402336"/>
           </a:xfrm>
           <a:prstGeom prst="ellipse">
             <a:avLst/>
           </a:prstGeom>
           <a:solidFill>
-            <a:srgbClr val="E0EEF0"/>
+            <a:srgbClr val="E6EEEF"/>
           </a:solidFill>
           <a:ln>
             <a:noFill/>
@@ -17372,7 +18348,7 @@
           </a:fontRef>
         </p:style>
         <p:txBody>
-          <a:bodyPr rtlCol="0" anchor="ctr" lIns="0" rIns="0"/>
+          <a:bodyPr rtlCol="0" anchor="ctr" lIns="0" rIns="0" tIns="0" bIns="0"/>
           <a:lstStyle/>
           <a:p>
             <a:pPr algn="ctr"/>
@@ -17396,7 +18372,7 @@
         </p:nvSpPr>
         <p:spPr>
           <a:xfrm>
-            <a:off x="1143000" y="3345942"/>
+            <a:off x="1143000" y="3300222"/>
             <a:ext cx="10500055" cy="808863"/>
           </a:xfrm>
           <a:prstGeom prst="rect">
@@ -17439,14 +18415,14 @@
         </p:nvSpPr>
         <p:spPr>
           <a:xfrm>
-            <a:off x="548640" y="4182236"/>
+            <a:off x="548640" y="4136516"/>
             <a:ext cx="402336" cy="402336"/>
           </a:xfrm>
           <a:prstGeom prst="ellipse">
             <a:avLst/>
           </a:prstGeom>
           <a:solidFill>
-            <a:srgbClr val="E0EEF0"/>
+            <a:srgbClr val="E6EEEF"/>
           </a:solidFill>
           <a:ln>
             <a:noFill/>
@@ -17468,7 +18444,7 @@
           </a:fontRef>
         </p:style>
         <p:txBody>
-          <a:bodyPr rtlCol="0" anchor="ctr" lIns="0" rIns="0"/>
+          <a:bodyPr rtlCol="0" anchor="ctr" lIns="0" rIns="0" tIns="0" bIns="0"/>
           <a:lstStyle/>
           <a:p>
             <a:pPr algn="ctr"/>
@@ -17492,7 +18468,7 @@
         </p:nvSpPr>
         <p:spPr>
           <a:xfrm>
-            <a:off x="1143000" y="4200525"/>
+            <a:off x="1143000" y="4154805"/>
             <a:ext cx="10500055" cy="808863"/>
           </a:xfrm>
           <a:prstGeom prst="rect">
@@ -17590,7 +18566,7 @@
           </a:fontRef>
         </p:style>
         <p:txBody>
-          <a:bodyPr rtlCol="0" anchor="ctr" lIns="0" rIns="0"/>
+          <a:bodyPr rtlCol="0" anchor="ctr" lIns="0" rIns="0" tIns="0" bIns="0"/>
           <a:lstStyle/>
           <a:p>
             <a:pPr algn="ctr"/>
@@ -17769,20 +18745,93 @@
       </p:pic>
       <p:sp>
         <p:nvSpPr>
-          <p:cNvPr id="8" name="Oval 7"/>
+          <p:cNvPr id="8" name="TextBox 7"/>
+          <p:cNvSpPr txBox="1"/>
+          <p:nvPr/>
+        </p:nvSpPr>
+        <p:spPr>
+          <a:xfrm>
+            <a:off x="548640" y="1554480"/>
+            <a:ext cx="11094415" cy="1202436"/>
+          </a:xfrm>
+          <a:prstGeom prst="rect">
+            <a:avLst/>
+          </a:prstGeom>
+          <a:noFill/>
+        </p:spPr>
+        <p:txBody>
+          <a:bodyPr wrap="square" anchor="t" lIns="0" rIns="0" tIns="0" bIns="0">
+            <a:spAutoFit/>
+          </a:bodyPr>
+          <a:lstStyle/>
+          <a:p>
+            <a:pPr>
+              <a:spcAft>
+                <a:spcPts val="800"/>
+              </a:spcAft>
+            </a:pPr>
+            <a:r>
+              <a:rPr sz="1800" i="0" b="0">
+                <a:solidFill>
+                  <a:srgbClr val="2B211C"/>
+                </a:solidFill>
+                <a:latin typeface="Calibri"/>
+              </a:rPr>
+              <a:t>Health teams face three problems when they look for drug information:</a:t>
+            </a:r>
+          </a:p>
+          <a:p>
+            <a:pPr>
+              <a:spcAft>
+                <a:spcPts val="800"/>
+              </a:spcAft>
+            </a:pPr>
+            <a:r>
+              <a:rPr sz="1800" i="0" b="0">
+                <a:solidFill>
+                  <a:srgbClr val="2B211C"/>
+                </a:solidFill>
+                <a:latin typeface="Calibri"/>
+              </a:rPr>
+              <a:t>So the demand for </a:t>
+            </a:r>
+            <a:r>
+              <a:rPr sz="1800" i="0" b="1">
+                <a:solidFill>
+                  <a:srgbClr val="2B211C"/>
+                </a:solidFill>
+                <a:latin typeface="Calibri"/>
+              </a:rPr>
+              <a:t>fast, reliable and accurate</a:t>
+            </a:r>
+            <a:r>
+              <a:rPr sz="1800" i="0" b="0">
+                <a:solidFill>
+                  <a:srgbClr val="2B211C"/>
+                </a:solidFill>
+                <a:latin typeface="Calibri"/>
+              </a:rPr>
+              <a:t> drug information keeps growing. A pharmacist who answers well prevents errors and saves time for the whole team.</a:t>
+            </a:r>
+          </a:p>
+        </p:txBody>
+      </p:sp>
+      <p:sp>
+        <p:nvSpPr>
+          <p:cNvPr id="9" name="Oval 8"/>
           <p:cNvSpPr/>
           <p:nvPr/>
         </p:nvSpPr>
         <p:spPr>
           <a:xfrm>
-            <a:off x="548640" y="1618488"/>
+            <a:off x="548640" y="2958084"/>
             <a:ext cx="402336" cy="402336"/>
           </a:xfrm>
           <a:prstGeom prst="ellipse">
             <a:avLst/>
           </a:prstGeom>
           <a:solidFill>
-            <a:srgbClr val="E0EEF0"/>
+            <a:srgbClr val="E6EEEF"/>
           </a:solidFill>
           <a:ln>
             <a:noFill/>
@@ -17804,7 +18853,7 @@
           </a:fontRef>
         </p:style>
         <p:txBody>
-          <a:bodyPr rtlCol="0" anchor="ctr" lIns="0" rIns="0"/>
+          <a:bodyPr rtlCol="0" anchor="ctr" lIns="0" rIns="0" tIns="0" bIns="0"/>
           <a:lstStyle/>
           <a:p>
             <a:pPr algn="ctr"/>
@@ -17822,14 +18871,14 @@
       </p:sp>
       <p:sp>
         <p:nvSpPr>
-          <p:cNvPr id="9" name="TextBox 8"/>
+          <p:cNvPr id="10" name="TextBox 9"/>
           <p:cNvSpPr txBox="1"/>
           <p:nvPr/>
         </p:nvSpPr>
         <p:spPr>
           <a:xfrm>
-            <a:off x="1143000" y="1636776"/>
-            <a:ext cx="6355079" cy="1110488"/>
+            <a:off x="1143000" y="2976372"/>
+            <a:ext cx="10500055" cy="808863"/>
           </a:xfrm>
           <a:prstGeom prst="rect">
             <a:avLst/>
@@ -17843,7 +18892,7 @@
           <a:lstStyle/>
           <a:p>
             <a:r>
-              <a:rPr sz="2000" i="0" b="0">
+              <a:rPr sz="2100" i="0" b="0">
                 <a:solidFill>
                   <a:srgbClr val="2B211C"/>
                 </a:solidFill>
@@ -17856,20 +18905,20 @@
       </p:sp>
       <p:sp>
         <p:nvSpPr>
-          <p:cNvPr id="10" name="Oval 9"/>
+          <p:cNvPr id="11" name="Oval 10"/>
           <p:cNvSpPr/>
           <p:nvPr/>
         </p:nvSpPr>
         <p:spPr>
           <a:xfrm>
-            <a:off x="548640" y="2774696"/>
+            <a:off x="548640" y="3812666"/>
             <a:ext cx="402336" cy="402336"/>
           </a:xfrm>
           <a:prstGeom prst="ellipse">
             <a:avLst/>
           </a:prstGeom>
           <a:solidFill>
-            <a:srgbClr val="E0EEF0"/>
+            <a:srgbClr val="E6EEEF"/>
           </a:solidFill>
           <a:ln>
             <a:noFill/>
@@ -17891,7 +18940,7 @@
           </a:fontRef>
         </p:style>
         <p:txBody>
-          <a:bodyPr rtlCol="0" anchor="ctr" lIns="0" rIns="0"/>
+          <a:bodyPr rtlCol="0" anchor="ctr" lIns="0" rIns="0" tIns="0" bIns="0"/>
           <a:lstStyle/>
           <a:p>
             <a:pPr algn="ctr"/>
@@ -17909,14 +18958,14 @@
       </p:sp>
       <p:sp>
         <p:nvSpPr>
-          <p:cNvPr id="11" name="TextBox 10"/>
+          <p:cNvPr id="12" name="TextBox 11"/>
           <p:cNvSpPr txBox="1"/>
           <p:nvPr/>
         </p:nvSpPr>
         <p:spPr>
           <a:xfrm>
-            <a:off x="1143000" y="2792984"/>
-            <a:ext cx="6355079" cy="792987"/>
+            <a:off x="1143000" y="3830955"/>
+            <a:ext cx="10500055" cy="808863"/>
           </a:xfrm>
           <a:prstGeom prst="rect">
             <a:avLst/>
@@ -17930,7 +18979,7 @@
           <a:lstStyle/>
           <a:p>
             <a:r>
-              <a:rPr sz="2000" i="0" b="0">
+              <a:rPr sz="2100" i="0" b="0">
                 <a:solidFill>
                   <a:srgbClr val="2B211C"/>
                 </a:solidFill>
@@ -17943,20 +18992,20 @@
       </p:sp>
       <p:sp>
         <p:nvSpPr>
-          <p:cNvPr id="12" name="Oval 11"/>
+          <p:cNvPr id="13" name="Oval 12"/>
           <p:cNvSpPr/>
           <p:nvPr/>
         </p:nvSpPr>
         <p:spPr>
           <a:xfrm>
-            <a:off x="548640" y="3613404"/>
+            <a:off x="548640" y="4667249"/>
             <a:ext cx="402336" cy="402336"/>
           </a:xfrm>
           <a:prstGeom prst="ellipse">
             <a:avLst/>
           </a:prstGeom>
           <a:solidFill>
-            <a:srgbClr val="E0EEF0"/>
+            <a:srgbClr val="E6EEEF"/>
           </a:solidFill>
           <a:ln>
             <a:noFill/>
@@ -17978,7 +19027,7 @@
           </a:fontRef>
         </p:style>
         <p:txBody>
-          <a:bodyPr rtlCol="0" anchor="ctr" lIns="0" rIns="0"/>
+          <a:bodyPr rtlCol="0" anchor="ctr" lIns="0" rIns="0" tIns="0" bIns="0"/>
           <a:lstStyle/>
           <a:p>
             <a:pPr algn="ctr"/>
@@ -17996,14 +19045,14 @@
       </p:sp>
       <p:sp>
         <p:nvSpPr>
-          <p:cNvPr id="13" name="TextBox 12"/>
+          <p:cNvPr id="14" name="TextBox 13"/>
           <p:cNvSpPr txBox="1"/>
           <p:nvPr/>
         </p:nvSpPr>
         <p:spPr>
           <a:xfrm>
-            <a:off x="1143000" y="3631692"/>
-            <a:ext cx="6355079" cy="792987"/>
+            <a:off x="1143000" y="4685538"/>
+            <a:ext cx="10500055" cy="808863"/>
           </a:xfrm>
           <a:prstGeom prst="rect">
             <a:avLst/>
@@ -18017,148 +19066,13 @@
           <a:lstStyle/>
           <a:p>
             <a:r>
-              <a:rPr sz="2000" i="0" b="0">
+              <a:rPr sz="2100" i="0" b="0">
                 <a:solidFill>
                   <a:srgbClr val="2B211C"/>
                 </a:solidFill>
                 <a:latin typeface="Calibri"/>
               </a:rPr>
               <a:t>Information from drug companies may be biased.</a:t>
-            </a:r>
-          </a:p>
-        </p:txBody>
-      </p:sp>
-      <p:sp>
-        <p:nvSpPr>
-          <p:cNvPr id="14" name="Rounded Rectangle 13"/>
-          <p:cNvSpPr/>
-          <p:nvPr/>
-        </p:nvSpPr>
-        <p:spPr>
-          <a:xfrm>
-            <a:off x="8001000" y="1600200"/>
-            <a:ext cx="3639312" cy="4526280"/>
-          </a:xfrm>
-          <a:prstGeom prst="roundRect">
-            <a:avLst>
-              <a:gd name="adj" fmla="val 6000"/>
-            </a:avLst>
-          </a:prstGeom>
-          <a:solidFill>
-            <a:srgbClr val="FBEAEA"/>
-          </a:solidFill>
-          <a:ln>
-            <a:noFill/>
-          </a:ln>
-          <a:effectLst/>
-        </p:spPr>
-        <p:style>
-          <a:lnRef idx="1">
-            <a:schemeClr val="accent1"/>
-          </a:lnRef>
-          <a:fillRef idx="3">
-            <a:schemeClr val="accent1"/>
-          </a:fillRef>
-          <a:effectRef idx="2">
-            <a:schemeClr val="accent1"/>
-          </a:effectRef>
-          <a:fontRef idx="minor">
-            <a:schemeClr val="lt1"/>
-          </a:fontRef>
-        </p:style>
-        <p:txBody>
-          <a:bodyPr rtlCol="0" anchor="ctr"/>
-          <a:lstStyle/>
-          <a:p>
-            <a:pPr algn="ctr"/>
-          </a:p>
-        </p:txBody>
-      </p:sp>
-      <p:sp>
-        <p:nvSpPr>
-          <p:cNvPr id="15" name="Rounded Rectangle 14"/>
-          <p:cNvSpPr/>
-          <p:nvPr/>
-        </p:nvSpPr>
-        <p:spPr>
-          <a:xfrm>
-            <a:off x="8275320" y="1828800"/>
-            <a:ext cx="900684" cy="310896"/>
-          </a:xfrm>
-          <a:prstGeom prst="roundRect">
-            <a:avLst>
-              <a:gd name="adj" fmla="val 50000"/>
-            </a:avLst>
-          </a:prstGeom>
-          <a:solidFill>
-            <a:srgbClr val="B3261E"/>
-          </a:solidFill>
-          <a:ln>
-            <a:noFill/>
-          </a:ln>
-          <a:effectLst/>
-        </p:spPr>
-        <p:style>
-          <a:lnRef idx="1">
-            <a:schemeClr val="accent1"/>
-          </a:lnRef>
-          <a:fillRef idx="3">
-            <a:schemeClr val="accent1"/>
-          </a:fillRef>
-          <a:effectRef idx="2">
-            <a:schemeClr val="accent1"/>
-          </a:effectRef>
-          <a:fontRef idx="minor">
-            <a:schemeClr val="lt1"/>
-          </a:fontRef>
-        </p:style>
-        <p:txBody>
-          <a:bodyPr rtlCol="0" anchor="ctr" lIns="0" rIns="0" tIns="0" bIns="0"/>
-          <a:lstStyle/>
-          <a:p>
-            <a:pPr algn="ctr"/>
-            <a:r>
-              <a:rPr sz="1050" i="0" b="1" spc="100">
-                <a:solidFill>
-                  <a:srgbClr val="FFFFFF"/>
-                </a:solidFill>
-                <a:latin typeface="Calibri"/>
-              </a:rPr>
-              <a:t>CAUTION</a:t>
-            </a:r>
-          </a:p>
-        </p:txBody>
-      </p:sp>
-      <p:sp>
-        <p:nvSpPr>
-          <p:cNvPr id="16" name="TextBox 15"/>
-          <p:cNvSpPr txBox="1"/>
-          <p:nvPr/>
-        </p:nvSpPr>
-        <p:spPr>
-          <a:xfrm>
-            <a:off x="8275320" y="2286000"/>
-            <a:ext cx="3090672" cy="3657600"/>
-          </a:xfrm>
-          <a:prstGeom prst="rect">
-            <a:avLst/>
-          </a:prstGeom>
-          <a:noFill/>
-        </p:spPr>
-        <p:txBody>
-          <a:bodyPr wrap="square" anchor="t" lIns="0" rIns="0" tIns="0" bIns="0">
-            <a:spAutoFit/>
-          </a:bodyPr>
-          <a:lstStyle/>
-          <a:p>
-            <a:r>
-              <a:rPr sz="1600" i="0" b="0">
-                <a:solidFill>
-                  <a:srgbClr val="2B211C"/>
-                </a:solidFill>
-                <a:latin typeface="Calibri"/>
-              </a:rPr>
-              <a:t>It is tempting to use the easiest and most familiar source every time. Doing so can miss new evidence. Match the source to the question.</a:t>
             </a:r>
           </a:p>
         </p:txBody>
@@ -18226,7 +19140,7 @@
           </a:fontRef>
         </p:style>
         <p:txBody>
-          <a:bodyPr rtlCol="0" anchor="ctr" lIns="0" rIns="0"/>
+          <a:bodyPr rtlCol="0" anchor="ctr" lIns="0" rIns="0" tIns="0" bIns="0"/>
           <a:lstStyle/>
           <a:p>
             <a:pPr algn="ctr"/>
@@ -18299,13 +19213,13 @@
           <a:lstStyle/>
           <a:p>
             <a:r>
-              <a:rPr sz="2700" i="0" b="1">
+              <a:rPr sz="3200" i="0" b="1">
                 <a:solidFill>
                   <a:srgbClr val="2B211C"/>
                 </a:solidFill>
                 <a:latin typeface="Cambria"/>
               </a:rPr>
-              <a:t>Answering a Request: The Systematic Approach</a:t>
+              <a:t>Why Drug Information Matters</a:t>
             </a:r>
           </a:p>
         </p:txBody>
@@ -18403,40 +19317,117 @@
           </a:prstGeom>
         </p:spPr>
       </p:pic>
-      <p:pic>
-        <p:nvPicPr>
-          <p:cNvPr id="8" name="Picture 7" descr="di-request-steps.png"/>
-          <p:cNvPicPr>
-            <a:picLocks noChangeAspect="1"/>
-          </p:cNvPicPr>
-          <p:nvPr/>
-        </p:nvPicPr>
-        <p:blipFill>
-          <a:blip r:embed="rId4"/>
-          <a:stretch>
-            <a:fillRect/>
-          </a:stretch>
-        </p:blipFill>
-        <p:spPr>
-          <a:xfrm>
-            <a:off x="1035921" y="1554480"/>
-            <a:ext cx="10119853" cy="4160520"/>
-          </a:xfrm>
-          <a:prstGeom prst="rect">
-            <a:avLst/>
-          </a:prstGeom>
-        </p:spPr>
-      </p:pic>
-      <p:sp>
-        <p:nvSpPr>
-          <p:cNvPr id="9" name="TextBox 8"/>
+      <p:sp>
+        <p:nvSpPr>
+          <p:cNvPr id="8" name="Rounded Rectangle 7"/>
+          <p:cNvSpPr/>
+          <p:nvPr/>
+        </p:nvSpPr>
+        <p:spPr>
+          <a:xfrm>
+            <a:off x="1645919" y="2103120"/>
+            <a:ext cx="8899855" cy="2377440"/>
+          </a:xfrm>
+          <a:prstGeom prst="roundRect">
+            <a:avLst>
+              <a:gd name="adj" fmla="val 6000"/>
+            </a:avLst>
+          </a:prstGeom>
+          <a:solidFill>
+            <a:srgbClr val="FBEAEA"/>
+          </a:solidFill>
+          <a:ln>
+            <a:noFill/>
+          </a:ln>
+          <a:effectLst/>
+        </p:spPr>
+        <p:style>
+          <a:lnRef idx="1">
+            <a:schemeClr val="accent1"/>
+          </a:lnRef>
+          <a:fillRef idx="3">
+            <a:schemeClr val="accent1"/>
+          </a:fillRef>
+          <a:effectRef idx="2">
+            <a:schemeClr val="accent1"/>
+          </a:effectRef>
+          <a:fontRef idx="minor">
+            <a:schemeClr val="lt1"/>
+          </a:fontRef>
+        </p:style>
+        <p:txBody>
+          <a:bodyPr rtlCol="0" anchor="ctr"/>
+          <a:lstStyle/>
+          <a:p>
+            <a:pPr algn="ctr"/>
+          </a:p>
+        </p:txBody>
+      </p:sp>
+      <p:sp>
+        <p:nvSpPr>
+          <p:cNvPr id="9" name="Rounded Rectangle 8"/>
+          <p:cNvSpPr/>
+          <p:nvPr/>
+        </p:nvSpPr>
+        <p:spPr>
+          <a:xfrm>
+            <a:off x="1920239" y="2331720"/>
+            <a:ext cx="900684" cy="310896"/>
+          </a:xfrm>
+          <a:prstGeom prst="roundRect">
+            <a:avLst>
+              <a:gd name="adj" fmla="val 50000"/>
+            </a:avLst>
+          </a:prstGeom>
+          <a:solidFill>
+            <a:srgbClr val="B3261E"/>
+          </a:solidFill>
+          <a:ln>
+            <a:noFill/>
+          </a:ln>
+          <a:effectLst/>
+        </p:spPr>
+        <p:style>
+          <a:lnRef idx="1">
+            <a:schemeClr val="accent1"/>
+          </a:lnRef>
+          <a:fillRef idx="3">
+            <a:schemeClr val="accent1"/>
+          </a:fillRef>
+          <a:effectRef idx="2">
+            <a:schemeClr val="accent1"/>
+          </a:effectRef>
+          <a:fontRef idx="minor">
+            <a:schemeClr val="lt1"/>
+          </a:fontRef>
+        </p:style>
+        <p:txBody>
+          <a:bodyPr rtlCol="0" anchor="ctr" lIns="0" rIns="0" tIns="0" bIns="0"/>
+          <a:lstStyle/>
+          <a:p>
+            <a:pPr algn="ctr"/>
+            <a:r>
+              <a:rPr sz="1050" i="0" b="1">
+                <a:solidFill>
+                  <a:srgbClr val="FFFFFF"/>
+                </a:solidFill>
+                <a:latin typeface="Calibri"/>
+              </a:rPr>
+              <a:t>CAUTION</a:t>
+            </a:r>
+          </a:p>
+        </p:txBody>
+      </p:sp>
+      <p:sp>
+        <p:nvSpPr>
+          <p:cNvPr id="10" name="TextBox 9"/>
           <p:cNvSpPr txBox="1"/>
           <p:nvPr/>
         </p:nvSpPr>
         <p:spPr>
           <a:xfrm>
-            <a:off x="548640" y="5852160"/>
-            <a:ext cx="11094415" cy="365760"/>
+            <a:off x="1920239" y="2788920"/>
+            <a:ext cx="8351215" cy="1508760"/>
           </a:xfrm>
           <a:prstGeom prst="rect">
             <a:avLst/>
@@ -18449,15 +19440,14 @@
           </a:bodyPr>
           <a:lstStyle/>
           <a:p>
-            <a:pPr algn="ctr"/>
-            <a:r>
-              <a:rPr sz="1300" i="1" b="0">
-                <a:solidFill>
-                  <a:srgbClr val="6E625B"/>
-                </a:solidFill>
-                <a:latin typeface="Calibri"/>
-              </a:rPr>
-              <a:t>The seven-step systematic approach to a drug information request.</a:t>
+            <a:r>
+              <a:rPr sz="2600" i="0" b="0">
+                <a:solidFill>
+                  <a:srgbClr val="2B211C"/>
+                </a:solidFill>
+                <a:latin typeface="Calibri"/>
+              </a:rPr>
+              <a:t>It is tempting to use the easiest and most familiar source every time. Doing so can miss new evidence. Match the source to the question.</a:t>
             </a:r>
           </a:p>
         </p:txBody>
@@ -18525,7 +19515,7 @@
           </a:fontRef>
         </p:style>
         <p:txBody>
-          <a:bodyPr rtlCol="0" anchor="ctr" lIns="0" rIns="0"/>
+          <a:bodyPr rtlCol="0" anchor="ctr" lIns="0" rIns="0" tIns="0" bIns="0"/>
           <a:lstStyle/>
           <a:p>
             <a:pPr algn="ctr"/>
@@ -18702,577 +19692,104 @@
           </a:prstGeom>
         </p:spPr>
       </p:pic>
-      <p:graphicFrame>
-        <p:nvGraphicFramePr>
-          <p:cNvPr id="8" name="Table 7"/>
-          <p:cNvGraphicFramePr>
-            <a:graphicFrameLocks noGrp="1"/>
-          </p:cNvGraphicFramePr>
-          <p:nvPr/>
-        </p:nvGraphicFramePr>
-        <p:xfrm>
-          <a:off x="548640" y="1600200"/>
-          <a:ext cx="11094413" cy="4526280"/>
-        </p:xfrm>
-        <a:graphic>
-          <a:graphicData uri="http://schemas.openxmlformats.org/drawingml/2006/table">
-            <a:tbl>
-              <a:tblPr firstRow="0" bandRow="0">
-                <a:tableStyleId>{5C22544A-7EE6-4342-B048-85BDC9FD1C3A}</a:tableStyleId>
-              </a:tblPr>
-              <a:tblGrid>
-                <a:gridCol w="2596565"/>
-                <a:gridCol w="3855505"/>
-                <a:gridCol w="4642343"/>
-              </a:tblGrid>
-              <a:tr h="565785">
-                <a:tc>
-                  <a:txBody>
-                    <a:bodyPr/>
-                    <a:lstStyle/>
-                    <a:p>
-                      <a:r>
-                        <a:rPr sz="1500" i="0" b="1">
-                          <a:solidFill>
-                            <a:srgbClr val="FFFFFF"/>
-                          </a:solidFill>
-                          <a:latin typeface="Calibri"/>
-                        </a:rPr>
-                        <a:t>Step</a:t>
-                      </a:r>
-                    </a:p>
-                  </a:txBody>
-                  <a:tcPr marL="109728" marR="109728" marT="45720" marB="45720" anchor="ctr">
-                    <a:solidFill>
-                      <a:srgbClr val="A4472B"/>
-                    </a:solidFill>
-                  </a:tcPr>
-                </a:tc>
-                <a:tc>
-                  <a:txBody>
-                    <a:bodyPr/>
-                    <a:lstStyle/>
-                    <a:p>
-                      <a:r>
-                        <a:rPr sz="1500" i="0" b="1">
-                          <a:solidFill>
-                            <a:srgbClr val="FFFFFF"/>
-                          </a:solidFill>
-                          <a:latin typeface="Calibri"/>
-                        </a:rPr>
-                        <a:t>What you do</a:t>
-                      </a:r>
-                    </a:p>
-                  </a:txBody>
-                  <a:tcPr marL="109728" marR="109728" marT="45720" marB="45720" anchor="ctr">
-                    <a:solidFill>
-                      <a:srgbClr val="A4472B"/>
-                    </a:solidFill>
-                  </a:tcPr>
-                </a:tc>
-                <a:tc>
-                  <a:txBody>
-                    <a:bodyPr/>
-                    <a:lstStyle/>
-                    <a:p>
-                      <a:r>
-                        <a:rPr sz="1500" i="0" b="1">
-                          <a:solidFill>
-                            <a:srgbClr val="FFFFFF"/>
-                          </a:solidFill>
-                          <a:latin typeface="Calibri"/>
-                        </a:rPr>
-                        <a:t>Ask yourself</a:t>
-                      </a:r>
-                    </a:p>
-                  </a:txBody>
-                  <a:tcPr marL="109728" marR="109728" marT="45720" marB="45720" anchor="ctr">
-                    <a:solidFill>
-                      <a:srgbClr val="A4472B"/>
-                    </a:solidFill>
-                  </a:tcPr>
-                </a:tc>
-              </a:tr>
-              <a:tr h="565785">
-                <a:tc>
-                  <a:txBody>
-                    <a:bodyPr/>
-                    <a:lstStyle/>
-                    <a:p>
-                      <a:r>
-                        <a:rPr sz="1600" i="0" b="1">
-                          <a:solidFill>
-                            <a:srgbClr val="2B211C"/>
-                          </a:solidFill>
-                          <a:latin typeface="Calibri"/>
-                        </a:rPr>
-                        <a:t>1. Requester</a:t>
-                      </a:r>
-                    </a:p>
-                  </a:txBody>
-                  <a:tcPr marL="109728" marR="109728" marT="45720" marB="45720" anchor="ctr">
-                    <a:solidFill>
-                      <a:srgbClr val="FFFFFF"/>
-                    </a:solidFill>
-                  </a:tcPr>
-                </a:tc>
-                <a:tc>
-                  <a:txBody>
-                    <a:bodyPr/>
-                    <a:lstStyle/>
-                    <a:p>
-                      <a:r>
-                        <a:rPr sz="1600" i="0" b="0">
-                          <a:solidFill>
-                            <a:srgbClr val="2B211C"/>
-                          </a:solidFill>
-                          <a:latin typeface="Calibri"/>
-                        </a:rPr>
-                        <a:t>Note who is asking and how to reach them</a:t>
-                      </a:r>
-                    </a:p>
-                  </a:txBody>
-                  <a:tcPr marL="109728" marR="109728" marT="45720" marB="45720" anchor="ctr">
-                    <a:solidFill>
-                      <a:srgbClr val="FFFFFF"/>
-                    </a:solidFill>
-                  </a:tcPr>
-                </a:tc>
-                <a:tc>
-                  <a:txBody>
-                    <a:bodyPr/>
-                    <a:lstStyle/>
-                    <a:p>
-                      <a:r>
-                        <a:rPr sz="1600" i="0" b="0">
-                          <a:solidFill>
-                            <a:srgbClr val="2B211C"/>
-                          </a:solidFill>
-                          <a:latin typeface="Calibri"/>
-                        </a:rPr>
-                        <a:t>Doctor, nurse, patient? How urgent?</a:t>
-                      </a:r>
-                    </a:p>
-                  </a:txBody>
-                  <a:tcPr marL="109728" marR="109728" marT="45720" marB="45720" anchor="ctr">
-                    <a:solidFill>
-                      <a:srgbClr val="FFFFFF"/>
-                    </a:solidFill>
-                  </a:tcPr>
-                </a:tc>
-              </a:tr>
-              <a:tr h="565785">
-                <a:tc>
-                  <a:txBody>
-                    <a:bodyPr/>
-                    <a:lstStyle/>
-                    <a:p>
-                      <a:r>
-                        <a:rPr sz="1600" i="0" b="1">
-                          <a:solidFill>
-                            <a:srgbClr val="2B211C"/>
-                          </a:solidFill>
-                          <a:latin typeface="Calibri"/>
-                        </a:rPr>
-                        <a:t>2. Background</a:t>
-                      </a:r>
-                    </a:p>
-                  </a:txBody>
-                  <a:tcPr marL="109728" marR="109728" marT="45720" marB="45720" anchor="ctr">
-                    <a:solidFill>
-                      <a:srgbClr val="FBF3EE"/>
-                    </a:solidFill>
-                  </a:tcPr>
-                </a:tc>
-                <a:tc>
-                  <a:txBody>
-                    <a:bodyPr/>
-                    <a:lstStyle/>
-                    <a:p>
-                      <a:r>
-                        <a:rPr sz="1600" i="0" b="0">
-                          <a:solidFill>
-                            <a:srgbClr val="2B211C"/>
-                          </a:solidFill>
-                          <a:latin typeface="Calibri"/>
-                        </a:rPr>
-                        <a:t>Collect patient and drug details</a:t>
-                      </a:r>
-                    </a:p>
-                  </a:txBody>
-                  <a:tcPr marL="109728" marR="109728" marT="45720" marB="45720" anchor="ctr">
-                    <a:solidFill>
-                      <a:srgbClr val="FBF3EE"/>
-                    </a:solidFill>
-                  </a:tcPr>
-                </a:tc>
-                <a:tc>
-                  <a:txBody>
-                    <a:bodyPr/>
-                    <a:lstStyle/>
-                    <a:p>
-                      <a:r>
-                        <a:rPr sz="1600" i="0" b="0">
-                          <a:solidFill>
-                            <a:srgbClr val="2B211C"/>
-                          </a:solidFill>
-                          <a:latin typeface="Calibri"/>
-                        </a:rPr>
-                        <a:t>Age, weight, kidney and liver function, other drugs</a:t>
-                      </a:r>
-                    </a:p>
-                  </a:txBody>
-                  <a:tcPr marL="109728" marR="109728" marT="45720" marB="45720" anchor="ctr">
-                    <a:solidFill>
-                      <a:srgbClr val="FBF3EE"/>
-                    </a:solidFill>
-                  </a:tcPr>
-                </a:tc>
-              </a:tr>
-              <a:tr h="565785">
-                <a:tc>
-                  <a:txBody>
-                    <a:bodyPr/>
-                    <a:lstStyle/>
-                    <a:p>
-                      <a:r>
-                        <a:rPr sz="1600" i="0" b="1">
-                          <a:solidFill>
-                            <a:srgbClr val="2B211C"/>
-                          </a:solidFill>
-                          <a:latin typeface="Calibri"/>
-                        </a:rPr>
-                        <a:t>3. Real question</a:t>
-                      </a:r>
-                    </a:p>
-                  </a:txBody>
-                  <a:tcPr marL="109728" marR="109728" marT="45720" marB="45720" anchor="ctr">
-                    <a:solidFill>
-                      <a:srgbClr val="FFFFFF"/>
-                    </a:solidFill>
-                  </a:tcPr>
-                </a:tc>
-                <a:tc>
-                  <a:txBody>
-                    <a:bodyPr/>
-                    <a:lstStyle/>
-                    <a:p>
-                      <a:r>
-                        <a:rPr sz="1600" i="0" b="0">
-                          <a:solidFill>
-                            <a:srgbClr val="2B211C"/>
-                          </a:solidFill>
-                          <a:latin typeface="Calibri"/>
-                        </a:rPr>
-                        <a:t>Find the true need behind the question</a:t>
-                      </a:r>
-                    </a:p>
-                  </a:txBody>
-                  <a:tcPr marL="109728" marR="109728" marT="45720" marB="45720" anchor="ctr">
-                    <a:solidFill>
-                      <a:srgbClr val="FFFFFF"/>
-                    </a:solidFill>
-                  </a:tcPr>
-                </a:tc>
-                <a:tc>
-                  <a:txBody>
-                    <a:bodyPr/>
-                    <a:lstStyle/>
-                    <a:p>
-                      <a:r>
-                        <a:rPr sz="1600" i="0" b="0">
-                          <a:solidFill>
-                            <a:srgbClr val="2B211C"/>
-                          </a:solidFill>
-                          <a:latin typeface="Calibri"/>
-                        </a:rPr>
-                        <a:t>What will the person do with my answer?</a:t>
-                      </a:r>
-                    </a:p>
-                  </a:txBody>
-                  <a:tcPr marL="109728" marR="109728" marT="45720" marB="45720" anchor="ctr">
-                    <a:solidFill>
-                      <a:srgbClr val="FFFFFF"/>
-                    </a:solidFill>
-                  </a:tcPr>
-                </a:tc>
-              </a:tr>
-              <a:tr h="565785">
-                <a:tc>
-                  <a:txBody>
-                    <a:bodyPr/>
-                    <a:lstStyle/>
-                    <a:p>
-                      <a:r>
-                        <a:rPr sz="1600" i="0" b="1">
-                          <a:solidFill>
-                            <a:srgbClr val="2B211C"/>
-                          </a:solidFill>
-                          <a:latin typeface="Calibri"/>
-                        </a:rPr>
-                        <a:t>4. Classify</a:t>
-                      </a:r>
-                    </a:p>
-                  </a:txBody>
-                  <a:tcPr marL="109728" marR="109728" marT="45720" marB="45720" anchor="ctr">
-                    <a:solidFill>
-                      <a:srgbClr val="FBF3EE"/>
-                    </a:solidFill>
-                  </a:tcPr>
-                </a:tc>
-                <a:tc>
-                  <a:txBody>
-                    <a:bodyPr/>
-                    <a:lstStyle/>
-                    <a:p>
-                      <a:r>
-                        <a:rPr sz="1600" i="0" b="0">
-                          <a:solidFill>
-                            <a:srgbClr val="2B211C"/>
-                          </a:solidFill>
-                          <a:latin typeface="Calibri"/>
-                        </a:rPr>
-                        <a:t>Name the type of question</a:t>
-                      </a:r>
-                    </a:p>
-                  </a:txBody>
-                  <a:tcPr marL="109728" marR="109728" marT="45720" marB="45720" anchor="ctr">
-                    <a:solidFill>
-                      <a:srgbClr val="FBF3EE"/>
-                    </a:solidFill>
-                  </a:tcPr>
-                </a:tc>
-                <a:tc>
-                  <a:txBody>
-                    <a:bodyPr/>
-                    <a:lstStyle/>
-                    <a:p>
-                      <a:r>
-                        <a:rPr sz="1600" i="0" b="0">
-                          <a:solidFill>
-                            <a:srgbClr val="2B211C"/>
-                          </a:solidFill>
-                          <a:latin typeface="Calibri"/>
-                        </a:rPr>
-                        <a:t>Dose, interaction, ADR, pregnancy, availability?</a:t>
-                      </a:r>
-                    </a:p>
-                  </a:txBody>
-                  <a:tcPr marL="109728" marR="109728" marT="45720" marB="45720" anchor="ctr">
-                    <a:solidFill>
-                      <a:srgbClr val="FBF3EE"/>
-                    </a:solidFill>
-                  </a:tcPr>
-                </a:tc>
-              </a:tr>
-              <a:tr h="565785">
-                <a:tc>
-                  <a:txBody>
-                    <a:bodyPr/>
-                    <a:lstStyle/>
-                    <a:p>
-                      <a:r>
-                        <a:rPr sz="1600" i="0" b="1">
-                          <a:solidFill>
-                            <a:srgbClr val="2B211C"/>
-                          </a:solidFill>
-                          <a:latin typeface="Calibri"/>
-                        </a:rPr>
-                        <a:t>5. Search</a:t>
-                      </a:r>
-                    </a:p>
-                  </a:txBody>
-                  <a:tcPr marL="109728" marR="109728" marT="45720" marB="45720" anchor="ctr">
-                    <a:solidFill>
-                      <a:srgbClr val="FFFFFF"/>
-                    </a:solidFill>
-                  </a:tcPr>
-                </a:tc>
-                <a:tc>
-                  <a:txBody>
-                    <a:bodyPr/>
-                    <a:lstStyle/>
-                    <a:p>
-                      <a:r>
-                        <a:rPr sz="1600" i="0" b="0">
-                          <a:solidFill>
-                            <a:srgbClr val="2B211C"/>
-                          </a:solidFill>
-                          <a:latin typeface="Calibri"/>
-                        </a:rPr>
-                        <a:t>Look in the right sources, tertiary first</a:t>
-                      </a:r>
-                    </a:p>
-                  </a:txBody>
-                  <a:tcPr marL="109728" marR="109728" marT="45720" marB="45720" anchor="ctr">
-                    <a:solidFill>
-                      <a:srgbClr val="FFFFFF"/>
-                    </a:solidFill>
-                  </a:tcPr>
-                </a:tc>
-                <a:tc>
-                  <a:txBody>
-                    <a:bodyPr/>
-                    <a:lstStyle/>
-                    <a:p>
-                      <a:r>
-                        <a:rPr sz="1600" i="0" b="0">
-                          <a:solidFill>
-                            <a:srgbClr val="2B211C"/>
-                          </a:solidFill>
-                          <a:latin typeface="Calibri"/>
-                        </a:rPr>
-                        <a:t>Is the evidence current and complete?</a:t>
-                      </a:r>
-                    </a:p>
-                  </a:txBody>
-                  <a:tcPr marL="109728" marR="109728" marT="45720" marB="45720" anchor="ctr">
-                    <a:solidFill>
-                      <a:srgbClr val="FFFFFF"/>
-                    </a:solidFill>
-                  </a:tcPr>
-                </a:tc>
-              </a:tr>
-              <a:tr h="565785">
-                <a:tc>
-                  <a:txBody>
-                    <a:bodyPr/>
-                    <a:lstStyle/>
-                    <a:p>
-                      <a:r>
-                        <a:rPr sz="1600" i="0" b="1">
-                          <a:solidFill>
-                            <a:srgbClr val="2B211C"/>
-                          </a:solidFill>
-                          <a:latin typeface="Calibri"/>
-                        </a:rPr>
-                        <a:t>6. Answer</a:t>
-                      </a:r>
-                    </a:p>
-                  </a:txBody>
-                  <a:tcPr marL="109728" marR="109728" marT="45720" marB="45720" anchor="ctr">
-                    <a:solidFill>
-                      <a:srgbClr val="FBF3EE"/>
-                    </a:solidFill>
-                  </a:tcPr>
-                </a:tc>
-                <a:tc>
-                  <a:txBody>
-                    <a:bodyPr/>
-                    <a:lstStyle/>
-                    <a:p>
-                      <a:r>
-                        <a:rPr sz="1600" i="0" b="0">
-                          <a:solidFill>
-                            <a:srgbClr val="2B211C"/>
-                          </a:solidFill>
-                          <a:latin typeface="Calibri"/>
-                        </a:rPr>
-                        <a:t>Give a clear, specific, referenced reply</a:t>
-                      </a:r>
-                    </a:p>
-                  </a:txBody>
-                  <a:tcPr marL="109728" marR="109728" marT="45720" marB="45720" anchor="ctr">
-                    <a:solidFill>
-                      <a:srgbClr val="FBF3EE"/>
-                    </a:solidFill>
-                  </a:tcPr>
-                </a:tc>
-                <a:tc>
-                  <a:txBody>
-                    <a:bodyPr/>
-                    <a:lstStyle/>
-                    <a:p>
-                      <a:r>
-                        <a:rPr sz="1600" i="0" b="0">
-                          <a:solidFill>
-                            <a:srgbClr val="2B211C"/>
-                          </a:solidFill>
-                          <a:latin typeface="Calibri"/>
-                        </a:rPr>
-                        <a:t>Is it right for this patient?</a:t>
-                      </a:r>
-                    </a:p>
-                  </a:txBody>
-                  <a:tcPr marL="109728" marR="109728" marT="45720" marB="45720" anchor="ctr">
-                    <a:solidFill>
-                      <a:srgbClr val="FBF3EE"/>
-                    </a:solidFill>
-                  </a:tcPr>
-                </a:tc>
-              </a:tr>
-              <a:tr h="565785">
-                <a:tc>
-                  <a:txBody>
-                    <a:bodyPr/>
-                    <a:lstStyle/>
-                    <a:p>
-                      <a:r>
-                        <a:rPr sz="1600" i="0" b="1">
-                          <a:solidFill>
-                            <a:srgbClr val="2B211C"/>
-                          </a:solidFill>
-                          <a:latin typeface="Calibri"/>
-                        </a:rPr>
-                        <a:t>7. Follow up and document</a:t>
-                      </a:r>
-                    </a:p>
-                  </a:txBody>
-                  <a:tcPr marL="109728" marR="109728" marT="45720" marB="45720" anchor="ctr">
-                    <a:solidFill>
-                      <a:srgbClr val="FFFFFF"/>
-                    </a:solidFill>
-                  </a:tcPr>
-                </a:tc>
-                <a:tc>
-                  <a:txBody>
-                    <a:bodyPr/>
-                    <a:lstStyle/>
-                    <a:p>
-                      <a:r>
-                        <a:rPr sz="1600" i="0" b="0">
-                          <a:solidFill>
-                            <a:srgbClr val="2B211C"/>
-                          </a:solidFill>
-                          <a:latin typeface="Calibri"/>
-                        </a:rPr>
-                        <a:t>Check the outcome; record the request</a:t>
-                      </a:r>
-                    </a:p>
-                  </a:txBody>
-                  <a:tcPr marL="109728" marR="109728" marT="45720" marB="45720" anchor="ctr">
-                    <a:solidFill>
-                      <a:srgbClr val="FFFFFF"/>
-                    </a:solidFill>
-                  </a:tcPr>
-                </a:tc>
-                <a:tc>
-                  <a:txBody>
-                    <a:bodyPr/>
-                    <a:lstStyle/>
-                    <a:p>
-                      <a:r>
-                        <a:rPr sz="1600" i="0" b="0">
-                          <a:solidFill>
-                            <a:srgbClr val="2B211C"/>
-                          </a:solidFill>
-                          <a:latin typeface="Calibri"/>
-                        </a:rPr>
-                        <a:t>Did it work? Can others learn from it?</a:t>
-                      </a:r>
-                    </a:p>
-                  </a:txBody>
-                  <a:tcPr marL="109728" marR="109728" marT="45720" marB="45720" anchor="ctr">
-                    <a:solidFill>
-                      <a:srgbClr val="FFFFFF"/>
-                    </a:solidFill>
-                  </a:tcPr>
-                </a:tc>
-              </a:tr>
-            </a:tbl>
-          </a:graphicData>
-        </a:graphic>
-      </p:graphicFrame>
+      <p:sp>
+        <p:nvSpPr>
+          <p:cNvPr id="8" name="TextBox 7"/>
+          <p:cNvSpPr txBox="1"/>
+          <p:nvPr/>
+        </p:nvSpPr>
+        <p:spPr>
+          <a:xfrm>
+            <a:off x="548640" y="1554480"/>
+            <a:ext cx="11094415" cy="498348"/>
+          </a:xfrm>
+          <a:prstGeom prst="rect">
+            <a:avLst/>
+          </a:prstGeom>
+          <a:noFill/>
+        </p:spPr>
+        <p:txBody>
+          <a:bodyPr wrap="square" anchor="t" lIns="0" rIns="0" tIns="0" bIns="0">
+            <a:spAutoFit/>
+          </a:bodyPr>
+          <a:lstStyle/>
+          <a:p>
+            <a:pPr>
+              <a:spcAft>
+                <a:spcPts val="800"/>
+              </a:spcAft>
+            </a:pPr>
+            <a:r>
+              <a:rPr sz="1800" i="0" b="0">
+                <a:solidFill>
+                  <a:srgbClr val="2B211C"/>
+                </a:solidFill>
+                <a:latin typeface="Calibri"/>
+              </a:rPr>
+              <a:t>A good answer follows seven steps.</a:t>
+            </a:r>
+          </a:p>
+        </p:txBody>
+      </p:sp>
+      <p:pic>
+        <p:nvPicPr>
+          <p:cNvPr id="9" name="Picture 8" descr="di-request-steps.png"/>
+          <p:cNvPicPr>
+            <a:picLocks noChangeAspect="1"/>
+          </p:cNvPicPr>
+          <p:nvPr/>
+        </p:nvPicPr>
+        <p:blipFill>
+          <a:blip r:embed="rId4"/>
+          <a:stretch>
+            <a:fillRect/>
+          </a:stretch>
+        </p:blipFill>
+        <p:spPr>
+          <a:xfrm>
+            <a:off x="1808812" y="2235708"/>
+            <a:ext cx="8574071" cy="3525011"/>
+          </a:xfrm>
+          <a:prstGeom prst="rect">
+            <a:avLst/>
+          </a:prstGeom>
+        </p:spPr>
+      </p:pic>
+      <p:sp>
+        <p:nvSpPr>
+          <p:cNvPr id="10" name="TextBox 9"/>
+          <p:cNvSpPr txBox="1"/>
+          <p:nvPr/>
+        </p:nvSpPr>
+        <p:spPr>
+          <a:xfrm>
+            <a:off x="548640" y="5852158"/>
+            <a:ext cx="11094415" cy="365760"/>
+          </a:xfrm>
+          <a:prstGeom prst="rect">
+            <a:avLst/>
+          </a:prstGeom>
+          <a:noFill/>
+        </p:spPr>
+        <p:txBody>
+          <a:bodyPr wrap="square" anchor="t" lIns="0" rIns="0" tIns="0" bIns="0">
+            <a:spAutoFit/>
+          </a:bodyPr>
+          <a:lstStyle/>
+          <a:p>
+            <a:pPr algn="ctr"/>
+            <a:r>
+              <a:rPr sz="1300" i="1" b="0">
+                <a:solidFill>
+                  <a:srgbClr val="6E625B"/>
+                </a:solidFill>
+                <a:latin typeface="Calibri"/>
+              </a:rPr>
+              <a:t>The seven-step systematic approach to a drug information request.</a:t>
+            </a:r>
+          </a:p>
+        </p:txBody>
+      </p:sp>
     </p:spTree>
   </p:cSld>
   <p:clrMapOvr>

--- a/projects/drug-information-practical/slides/ch01-drug-information-centre.pptx
+++ b/projects/drug-information-practical/slides/ch01-drug-information-centre.pptx
@@ -30,7 +30,6 @@
     <p:sldId id="278" r:id="rId30"/>
     <p:sldId id="279" r:id="rId31"/>
     <p:sldId id="280" r:id="rId32"/>
-    <p:sldId id="281" r:id="rId33"/>
   </p:sldIdLst>
   <p:sldSz cx="12191695" cy="6858000" type="screen4x3"/>
   <p:notesSz cx="6858000" cy="9144000"/>
@@ -609,7 +608,7 @@
           <a:p/>
           <a:p>
             <a:r>
-              <a:t>About 30 s.  Next: Answering a Request: The Systematic Approach.</a:t>
+              <a:t>About 30 s.  Next: Your turn.</a:t>
             </a:r>
           </a:p>
         </p:txBody>
@@ -679,13 +678,13 @@
           <a:lstStyle/>
           <a:p>
             <a:r>
-              <a:t>A good answer follows seven steps. Step 3 is the one most often skipped. A person may ask "Is drug X available as a liquid?" when the real problem is that the patient cannot swallow tablets. The right answer may then be a different drug.</a:t>
+              <a:t>Discuss with the class: what would you ask, check and say?</a:t>
             </a:r>
           </a:p>
           <a:p/>
           <a:p>
             <a:r>
-              <a:t>About 30 s.  Next: Your turn.</a:t>
+              <a:t>About 60 s.  Next: Your turn.</a:t>
             </a:r>
           </a:p>
         </p:txBody>
@@ -755,13 +754,13 @@
           <a:lstStyle/>
           <a:p>
             <a:r>
-              <a:t>Discuss with the class: what would you ask, check and say?</a:t>
+              <a:t>Answer B: This is the definition; it includes answers to the public. A, C and D are other activities.</a:t>
             </a:r>
           </a:p>
           <a:p/>
           <a:p>
             <a:r>
-              <a:t>About 60 s.  Next: Your turn.</a:t>
+              <a:t>About 30 s.  Next: Check your answer.</a:t>
             </a:r>
           </a:p>
         </p:txBody>
@@ -831,7 +830,7 @@
           <a:lstStyle/>
           <a:p>
             <a:r>
-              <a:t>Answer B: This is the definition; it includes answers to the public. A, C and D are other activities.</a:t>
+              <a:t>Answer C: A DIC gives information; it does not make medicines. A, B and D are core DIC work.</a:t>
             </a:r>
           </a:p>
           <a:p/>
@@ -907,7 +906,7 @@
           <a:lstStyle/>
           <a:p>
             <a:r>
-              <a:t>Answer C: A DIC gives information; it does not make medicines. A, B and D are core DIC work.</a:t>
+              <a:t>Answer A: Companies promote their own products, so their information may be biased. B, C and D are not always true.</a:t>
             </a:r>
           </a:p>
           <a:p/>
@@ -983,7 +982,7 @@
           <a:lstStyle/>
           <a:p>
             <a:r>
-              <a:t>Answer A: Companies promote their own products, so their information may be biased. B, C and D are not always true.</a:t>
+              <a:t>Answer C: Asking why reveals the real problem, such as swallowing difficulty or a feeding tube. A, B and D come later.</a:t>
             </a:r>
           </a:p>
           <a:p/>
@@ -1059,7 +1058,7 @@
           <a:lstStyle/>
           <a:p>
             <a:r>
-              <a:t>Answer C: Asking why reveals the real problem, such as swallowing difficulty or a feeding tube. A, B and D come later.</a:t>
+              <a:t>Answer D: The request ends with follow-up and documentation. A, B and C come earlier.</a:t>
             </a:r>
           </a:p>
           <a:p/>
@@ -1135,13 +1134,13 @@
           <a:lstStyle/>
           <a:p>
             <a:r>
-              <a:t>Answer D: The request ends with follow-up and documentation. A, B and C come earlier.</a:t>
+              <a:t>Model answer: (a) Age, kidney function (eGFR), liver function, heart failure or other illness, planned contrast scans or surgery, and other drugs. (b) Often the real question is whether metformin is safe with reduced kidney function or before an iodinated contrast scan. (c) Give a clear answer with its source, check that the doctor received it, and record the request.</a:t>
             </a:r>
           </a:p>
           <a:p/>
           <a:p>
             <a:r>
-              <a:t>About 30 s.  Next: Check your answer.</a:t>
+              <a:t>About 60 s.</a:t>
             </a:r>
           </a:p>
         </p:txBody>
@@ -1211,13 +1210,7 @@
           <a:lstStyle/>
           <a:p>
             <a:r>
-              <a:t>Model answer: (a) Age, kidney function (eGFR), liver function, heart failure or other illness, planned contrast scans or surgery, and other drugs. (b) Often the real question is whether metformin is safe with reduced kidney function or before an iodinated contrast scan. (c) Give a clear answer with its source, check that the doctor received it, and record the request.</a:t>
-            </a:r>
-          </a:p>
-          <a:p/>
-          <a:p>
-            <a:r>
-              <a:t>About 60 s.</a:t>
+              <a:t>About 30 s.  Next: In This Section.</a:t>
             </a:r>
           </a:p>
         </p:txBody>
@@ -1287,7 +1280,7 @@
           <a:lstStyle/>
           <a:p>
             <a:r>
-              <a:t>About 30 s.  Next: In This Section.</a:t>
+              <a:t>About 30 s.  Next: Roadmap.</a:t>
             </a:r>
           </a:p>
         </p:txBody>
@@ -1433,7 +1426,7 @@
           <a:lstStyle/>
           <a:p>
             <a:r>
-              <a:t>About 30 s.  Next: Roadmap.</a:t>
+              <a:t>About 30 s.  Next: Your turn.</a:t>
             </a:r>
           </a:p>
         </p:txBody>
@@ -1713,7 +1706,7 @@
           <a:lstStyle/>
           <a:p>
             <a:r>
-              <a:t>About 30 s.  Next: Your turn.</a:t>
+              <a:t>About 30 s.</a:t>
             </a:r>
           </a:p>
         </p:txBody>
@@ -1739,76 +1732,6 @@
 </file>
 
 <file path=ppt/notesSlides/notesSlide25.xml><?xml version="1.0" encoding="utf-8"?>
-<p:notes xmlns:a="http://schemas.openxmlformats.org/drawingml/2006/main" xmlns:p="http://schemas.openxmlformats.org/presentationml/2006/main" xmlns:r="http://schemas.openxmlformats.org/officeDocument/2006/relationships">
-  <p:cSld>
-    <p:spTree>
-      <p:nvGrpSpPr>
-        <p:cNvPr id="1" name=""/>
-        <p:cNvGrpSpPr/>
-        <p:nvPr/>
-      </p:nvGrpSpPr>
-      <p:grpSpPr>
-        <a:xfrm>
-          <a:off x="0" y="0"/>
-          <a:ext cx="0" cy="0"/>
-          <a:chOff x="0" y="0"/>
-          <a:chExt cx="0" cy="0"/>
-        </a:xfrm>
-      </p:grpSpPr>
-      <p:sp>
-        <p:nvSpPr>
-          <p:cNvPr id="2" name="Slide Image Placeholder 1"/>
-          <p:cNvSpPr>
-            <a:spLocks noGrp="1"/>
-          </p:cNvSpPr>
-          <p:nvPr>
-            <p:ph type="sldImg" idx="2"/>
-          </p:nvPr>
-        </p:nvSpPr>
-        <p:spPr/>
-      </p:sp>
-      <p:sp>
-        <p:nvSpPr>
-          <p:cNvPr id="3" name="Notes Placeholder 2"/>
-          <p:cNvSpPr>
-            <a:spLocks noGrp="1"/>
-          </p:cNvSpPr>
-          <p:nvPr>
-            <p:ph type="body" idx="3" sz="quarter"/>
-          </p:nvPr>
-        </p:nvSpPr>
-        <p:spPr/>
-        <p:txBody>
-          <a:bodyPr/>
-          <a:lstStyle/>
-          <a:p>
-            <a:r>
-              <a:t>About 30 s.</a:t>
-            </a:r>
-          </a:p>
-        </p:txBody>
-      </p:sp>
-      <p:sp>
-        <p:nvSpPr>
-          <p:cNvPr id="4" name="Slide Number Placeholder 3"/>
-          <p:cNvSpPr>
-            <a:spLocks noGrp="1"/>
-          </p:cNvSpPr>
-          <p:nvPr>
-            <p:ph type="sldNum" idx="5" sz="quarter"/>
-          </p:nvPr>
-        </p:nvSpPr>
-        <p:spPr/>
-      </p:sp>
-    </p:spTree>
-  </p:cSld>
-  <p:clrMapOvr>
-    <a:masterClrMapping/>
-  </p:clrMapOvr>
-</p:notes>
-</file>
-
-<file path=ppt/notesSlides/notesSlide26.xml><?xml version="1.0" encoding="utf-8"?>
 <p:notes xmlns:a="http://schemas.openxmlformats.org/drawingml/2006/main" xmlns:p="http://schemas.openxmlformats.org/presentationml/2006/main" xmlns:r="http://schemas.openxmlformats.org/officeDocument/2006/relationships">
   <p:cSld>
     <p:spTree>
@@ -5838,7 +5761,7 @@
                 </a:solidFill>
                 <a:latin typeface="Calibri"/>
               </a:rPr>
-              <a:t>10 / 26</a:t>
+              <a:t>10 / 25</a:t>
             </a:r>
           </a:p>
         </p:txBody>
@@ -6176,7 +6099,7 @@
                 </a:solidFill>
                 <a:latin typeface="Calibri"/>
               </a:rPr>
-              <a:t>11 / 26</a:t>
+              <a:t>11 / 25</a:t>
             </a:r>
           </a:p>
         </p:txBody>
@@ -6214,7 +6137,7 @@
         <p:spPr>
           <a:xfrm>
             <a:off x="548640" y="1554480"/>
-            <a:ext cx="11094415" cy="4617720"/>
+            <a:ext cx="11094415" cy="1092708"/>
           </a:xfrm>
           <a:prstGeom prst="rect">
             <a:avLst/>
@@ -6233,7 +6156,7 @@
               </a:spcAft>
             </a:pPr>
             <a:r>
-              <a:rPr sz="2100" i="0" b="0">
+              <a:rPr sz="1800" i="0" b="0">
                 <a:solidFill>
                   <a:srgbClr val="2B211C"/>
                 </a:solidFill>
@@ -6244,257 +6167,17 @@
           </a:p>
         </p:txBody>
       </p:sp>
-    </p:spTree>
-  </p:cSld>
-  <p:clrMapOvr>
-    <a:masterClrMapping/>
-  </p:clrMapOvr>
-</p:sld>
-</file>
-
-<file path=ppt/slides/slide12.xml><?xml version="1.0" encoding="utf-8"?>
-<p:sld xmlns:a="http://schemas.openxmlformats.org/drawingml/2006/main" xmlns:p="http://schemas.openxmlformats.org/presentationml/2006/main" xmlns:r="http://schemas.openxmlformats.org/officeDocument/2006/relationships">
-  <p:cSld>
-    <p:bg>
-      <p:bgPr>
-        <a:solidFill>
-          <a:srgbClr val="FFFFFF"/>
-        </a:solidFill>
-        <a:effectLst/>
-      </p:bgPr>
-    </p:bg>
-    <p:spTree>
-      <p:nvGrpSpPr>
-        <p:cNvPr id="1" name=""/>
-        <p:cNvGrpSpPr/>
-        <p:nvPr/>
-      </p:nvGrpSpPr>
-      <p:grpSpPr/>
-      <p:sp>
-        <p:nvSpPr>
-          <p:cNvPr id="2" name="Oval 1"/>
-          <p:cNvSpPr/>
-          <p:nvPr/>
-        </p:nvSpPr>
-        <p:spPr>
-          <a:xfrm>
-            <a:off x="548640" y="475488"/>
-            <a:ext cx="658368" cy="658368"/>
-          </a:xfrm>
-          <a:prstGeom prst="ellipse">
-            <a:avLst/>
-          </a:prstGeom>
-          <a:solidFill>
-            <a:srgbClr val="2F6F7A"/>
-          </a:solidFill>
-          <a:ln>
-            <a:noFill/>
-          </a:ln>
-          <a:effectLst/>
-        </p:spPr>
-        <p:style>
-          <a:lnRef idx="1">
-            <a:schemeClr val="accent1"/>
-          </a:lnRef>
-          <a:fillRef idx="3">
-            <a:schemeClr val="accent1"/>
-          </a:fillRef>
-          <a:effectRef idx="2">
-            <a:schemeClr val="accent1"/>
-          </a:effectRef>
-          <a:fontRef idx="minor">
-            <a:schemeClr val="lt1"/>
-          </a:fontRef>
-        </p:style>
-        <p:txBody>
-          <a:bodyPr rtlCol="0" anchor="ctr" lIns="0" rIns="0" tIns="0" bIns="0"/>
-          <a:lstStyle/>
-          <a:p>
-            <a:pPr algn="ctr"/>
-            <a:r>
-              <a:rPr sz="1800" i="0" b="1">
-                <a:solidFill>
-                  <a:srgbClr val="FFFFFF"/>
-                </a:solidFill>
-                <a:latin typeface="Cambria"/>
-              </a:rPr>
-              <a:t>01</a:t>
-            </a:r>
-          </a:p>
-        </p:txBody>
-      </p:sp>
-      <p:sp>
-        <p:nvSpPr>
-          <p:cNvPr id="3" name="TextBox 2"/>
-          <p:cNvSpPr txBox="1"/>
-          <p:nvPr/>
-        </p:nvSpPr>
-        <p:spPr>
-          <a:xfrm>
-            <a:off x="1417319" y="438912"/>
-            <a:ext cx="10180015" cy="292608"/>
-          </a:xfrm>
-          <a:prstGeom prst="rect">
-            <a:avLst/>
-          </a:prstGeom>
-          <a:noFill/>
-        </p:spPr>
-        <p:txBody>
-          <a:bodyPr wrap="square" anchor="t" lIns="0" rIns="0" tIns="0" bIns="0">
-            <a:spAutoFit/>
-          </a:bodyPr>
-          <a:lstStyle/>
-          <a:p>
-            <a:r>
-              <a:rPr sz="1200" i="0" b="1" spc="150">
-                <a:solidFill>
-                  <a:srgbClr val="2F6F7A"/>
-                </a:solidFill>
-                <a:latin typeface="Calibri"/>
-              </a:rPr>
-              <a:t>SECTION 1</a:t>
-            </a:r>
-          </a:p>
-        </p:txBody>
-      </p:sp>
-      <p:sp>
-        <p:nvSpPr>
-          <p:cNvPr id="4" name="TextBox 3"/>
-          <p:cNvSpPr txBox="1"/>
-          <p:nvPr/>
-        </p:nvSpPr>
-        <p:spPr>
-          <a:xfrm>
-            <a:off x="1417319" y="676656"/>
-            <a:ext cx="10180015" cy="640080"/>
-          </a:xfrm>
-          <a:prstGeom prst="rect">
-            <a:avLst/>
-          </a:prstGeom>
-          <a:noFill/>
-        </p:spPr>
-        <p:txBody>
-          <a:bodyPr wrap="square" anchor="t" lIns="0" rIns="0" tIns="0" bIns="0">
-            <a:spAutoFit/>
-          </a:bodyPr>
-          <a:lstStyle/>
-          <a:p>
-            <a:r>
-              <a:rPr sz="2700" i="0" b="1">
-                <a:solidFill>
-                  <a:srgbClr val="2B211C"/>
-                </a:solidFill>
-                <a:latin typeface="Cambria"/>
-              </a:rPr>
-              <a:t>Answering a Request: The Systematic Approach</a:t>
-            </a:r>
-          </a:p>
-        </p:txBody>
-      </p:sp>
-      <p:sp>
-        <p:nvSpPr>
-          <p:cNvPr id="5" name="TextBox 4"/>
-          <p:cNvSpPr txBox="1"/>
-          <p:nvPr/>
-        </p:nvSpPr>
-        <p:spPr>
-          <a:xfrm>
-            <a:off x="548640" y="6419088"/>
-            <a:ext cx="8229600" cy="274320"/>
-          </a:xfrm>
-          <a:prstGeom prst="rect">
-            <a:avLst/>
-          </a:prstGeom>
-          <a:noFill/>
-        </p:spPr>
-        <p:txBody>
-          <a:bodyPr wrap="square" anchor="t" lIns="0" rIns="0" tIns="0" bIns="0">
-            <a:spAutoFit/>
-          </a:bodyPr>
-          <a:lstStyle/>
-          <a:p>
-            <a:r>
-              <a:rPr sz="1200" i="0" b="0">
-                <a:solidFill>
-                  <a:srgbClr val="6E625B"/>
-                </a:solidFill>
-                <a:latin typeface="Calibri"/>
-              </a:rPr>
-              <a:t>Drug Information  ·  Section 1  ·  The Drug Information Centre</a:t>
-            </a:r>
-          </a:p>
-        </p:txBody>
-      </p:sp>
-      <p:sp>
-        <p:nvSpPr>
-          <p:cNvPr id="6" name="TextBox 5"/>
-          <p:cNvSpPr txBox="1"/>
-          <p:nvPr/>
-        </p:nvSpPr>
-        <p:spPr>
-          <a:xfrm>
-            <a:off x="10058400" y="6419088"/>
-            <a:ext cx="1097280" cy="274320"/>
-          </a:xfrm>
-          <a:prstGeom prst="rect">
-            <a:avLst/>
-          </a:prstGeom>
-          <a:noFill/>
-        </p:spPr>
-        <p:txBody>
-          <a:bodyPr wrap="square" anchor="t" lIns="0" rIns="0" tIns="0" bIns="0">
-            <a:spAutoFit/>
-          </a:bodyPr>
-          <a:lstStyle/>
-          <a:p>
-            <a:pPr algn="r"/>
-            <a:r>
-              <a:rPr sz="1200" i="0" b="1">
-                <a:solidFill>
-                  <a:srgbClr val="6E625B"/>
-                </a:solidFill>
-                <a:latin typeface="Calibri"/>
-              </a:rPr>
-              <a:t>12 / 26</a:t>
-            </a:r>
-          </a:p>
-        </p:txBody>
-      </p:sp>
-      <p:pic>
-        <p:nvPicPr>
-          <p:cNvPr id="7" name="Picture 6" descr="logo"/>
-          <p:cNvPicPr>
-            <a:picLocks noChangeAspect="1"/>
-          </p:cNvPicPr>
-          <p:nvPr/>
-        </p:nvPicPr>
-        <p:blipFill>
-          <a:blip r:embed="rId3"/>
-          <a:stretch>
-            <a:fillRect/>
-          </a:stretch>
-        </p:blipFill>
-        <p:spPr>
-          <a:xfrm>
-            <a:off x="11247120" y="6309360"/>
-            <a:ext cx="384048" cy="384048"/>
-          </a:xfrm>
-          <a:prstGeom prst="rect">
-            <a:avLst/>
-          </a:prstGeom>
-        </p:spPr>
-      </p:pic>
       <p:graphicFrame>
         <p:nvGraphicFramePr>
-          <p:cNvPr id="8" name="Table 7"/>
+          <p:cNvPr id="9" name="Table 8"/>
           <p:cNvGraphicFramePr>
             <a:graphicFrameLocks noGrp="1"/>
           </p:cNvGraphicFramePr>
           <p:nvPr/>
         </p:nvGraphicFramePr>
         <p:xfrm>
-          <a:off x="548640" y="1554480"/>
-          <a:ext cx="11094413" cy="4617720"/>
+          <a:off x="548640" y="2830068"/>
+          <a:ext cx="11094413" cy="3342128"/>
         </p:xfrm>
         <a:graphic>
           <a:graphicData uri="http://schemas.openxmlformats.org/drawingml/2006/table">
@@ -6507,7 +6190,7 @@
                 <a:gridCol w="3855505"/>
                 <a:gridCol w="4642343"/>
               </a:tblGrid>
-              <a:tr h="577215">
+              <a:tr h="417766">
                 <a:tc>
                   <a:txBody>
                     <a:bodyPr/>
@@ -6575,7 +6258,7 @@
                   </a:tcPr>
                 </a:tc>
               </a:tr>
-              <a:tr h="577215">
+              <a:tr h="417766">
                 <a:tc>
                   <a:txBody>
                     <a:bodyPr/>
@@ -6643,7 +6326,7 @@
                   </a:tcPr>
                 </a:tc>
               </a:tr>
-              <a:tr h="577215">
+              <a:tr h="417766">
                 <a:tc>
                   <a:txBody>
                     <a:bodyPr/>
@@ -6711,7 +6394,7 @@
                   </a:tcPr>
                 </a:tc>
               </a:tr>
-              <a:tr h="577215">
+              <a:tr h="417766">
                 <a:tc>
                   <a:txBody>
                     <a:bodyPr/>
@@ -6779,7 +6462,7 @@
                   </a:tcPr>
                 </a:tc>
               </a:tr>
-              <a:tr h="577215">
+              <a:tr h="417766">
                 <a:tc>
                   <a:txBody>
                     <a:bodyPr/>
@@ -6847,7 +6530,7 @@
                   </a:tcPr>
                 </a:tc>
               </a:tr>
-              <a:tr h="577215">
+              <a:tr h="417766">
                 <a:tc>
                   <a:txBody>
                     <a:bodyPr/>
@@ -6915,7 +6598,7 @@
                   </a:tcPr>
                 </a:tc>
               </a:tr>
-              <a:tr h="577215">
+              <a:tr h="417766">
                 <a:tc>
                   <a:txBody>
                     <a:bodyPr/>
@@ -6983,7 +6666,7 @@
                   </a:tcPr>
                 </a:tc>
               </a:tr>
-              <a:tr h="577215">
+              <a:tr h="417766">
                 <a:tc>
                   <a:txBody>
                     <a:bodyPr/>
@@ -7063,6 +6746,381 @@
 </p:sld>
 </file>
 
+<file path=ppt/slides/slide12.xml><?xml version="1.0" encoding="utf-8"?>
+<p:sld xmlns:a="http://schemas.openxmlformats.org/drawingml/2006/main" xmlns:p="http://schemas.openxmlformats.org/presentationml/2006/main" xmlns:r="http://schemas.openxmlformats.org/officeDocument/2006/relationships">
+  <p:cSld>
+    <p:bg>
+      <p:bgPr>
+        <a:solidFill>
+          <a:srgbClr val="FFFFFF"/>
+        </a:solidFill>
+        <a:effectLst/>
+      </p:bgPr>
+    </p:bg>
+    <p:spTree>
+      <p:nvGrpSpPr>
+        <p:cNvPr id="1" name=""/>
+        <p:cNvGrpSpPr/>
+        <p:nvPr/>
+      </p:nvGrpSpPr>
+      <p:grpSpPr/>
+      <p:sp>
+        <p:nvSpPr>
+          <p:cNvPr id="2" name="Oval 1"/>
+          <p:cNvSpPr/>
+          <p:nvPr/>
+        </p:nvSpPr>
+        <p:spPr>
+          <a:xfrm>
+            <a:off x="548640" y="475488"/>
+            <a:ext cx="658368" cy="658368"/>
+          </a:xfrm>
+          <a:prstGeom prst="ellipse">
+            <a:avLst/>
+          </a:prstGeom>
+          <a:solidFill>
+            <a:srgbClr val="2F6F7A"/>
+          </a:solidFill>
+          <a:ln>
+            <a:noFill/>
+          </a:ln>
+          <a:effectLst/>
+        </p:spPr>
+        <p:style>
+          <a:lnRef idx="1">
+            <a:schemeClr val="accent1"/>
+          </a:lnRef>
+          <a:fillRef idx="3">
+            <a:schemeClr val="accent1"/>
+          </a:fillRef>
+          <a:effectRef idx="2">
+            <a:schemeClr val="accent1"/>
+          </a:effectRef>
+          <a:fontRef idx="minor">
+            <a:schemeClr val="lt1"/>
+          </a:fontRef>
+        </p:style>
+        <p:txBody>
+          <a:bodyPr rtlCol="0" anchor="ctr" lIns="0" rIns="0" tIns="0" bIns="0"/>
+          <a:lstStyle/>
+          <a:p>
+            <a:pPr algn="ctr"/>
+            <a:r>
+              <a:rPr sz="1800" i="0" b="1">
+                <a:solidFill>
+                  <a:srgbClr val="FFFFFF"/>
+                </a:solidFill>
+                <a:latin typeface="Cambria"/>
+              </a:rPr>
+              <a:t>01</a:t>
+            </a:r>
+          </a:p>
+        </p:txBody>
+      </p:sp>
+      <p:sp>
+        <p:nvSpPr>
+          <p:cNvPr id="3" name="TextBox 2"/>
+          <p:cNvSpPr txBox="1"/>
+          <p:nvPr/>
+        </p:nvSpPr>
+        <p:spPr>
+          <a:xfrm>
+            <a:off x="1417319" y="438912"/>
+            <a:ext cx="10180015" cy="292608"/>
+          </a:xfrm>
+          <a:prstGeom prst="rect">
+            <a:avLst/>
+          </a:prstGeom>
+          <a:noFill/>
+        </p:spPr>
+        <p:txBody>
+          <a:bodyPr wrap="square" anchor="t" lIns="0" rIns="0" tIns="0" bIns="0">
+            <a:spAutoFit/>
+          </a:bodyPr>
+          <a:lstStyle/>
+          <a:p>
+            <a:r>
+              <a:rPr sz="1200" i="0" b="1" spc="150">
+                <a:solidFill>
+                  <a:srgbClr val="2F6F7A"/>
+                </a:solidFill>
+                <a:latin typeface="Calibri"/>
+              </a:rPr>
+              <a:t>SECTION 1</a:t>
+            </a:r>
+          </a:p>
+        </p:txBody>
+      </p:sp>
+      <p:sp>
+        <p:nvSpPr>
+          <p:cNvPr id="4" name="TextBox 3"/>
+          <p:cNvSpPr txBox="1"/>
+          <p:nvPr/>
+        </p:nvSpPr>
+        <p:spPr>
+          <a:xfrm>
+            <a:off x="1417319" y="676656"/>
+            <a:ext cx="10180015" cy="640080"/>
+          </a:xfrm>
+          <a:prstGeom prst="rect">
+            <a:avLst/>
+          </a:prstGeom>
+          <a:noFill/>
+        </p:spPr>
+        <p:txBody>
+          <a:bodyPr wrap="square" anchor="t" lIns="0" rIns="0" tIns="0" bIns="0">
+            <a:spAutoFit/>
+          </a:bodyPr>
+          <a:lstStyle/>
+          <a:p>
+            <a:r>
+              <a:rPr sz="2700" i="0" b="1">
+                <a:solidFill>
+                  <a:srgbClr val="2B211C"/>
+                </a:solidFill>
+                <a:latin typeface="Cambria"/>
+              </a:rPr>
+              <a:t>Answering a Request: The Systematic Approach</a:t>
+            </a:r>
+          </a:p>
+        </p:txBody>
+      </p:sp>
+      <p:sp>
+        <p:nvSpPr>
+          <p:cNvPr id="5" name="TextBox 4"/>
+          <p:cNvSpPr txBox="1"/>
+          <p:nvPr/>
+        </p:nvSpPr>
+        <p:spPr>
+          <a:xfrm>
+            <a:off x="548640" y="6419088"/>
+            <a:ext cx="8229600" cy="274320"/>
+          </a:xfrm>
+          <a:prstGeom prst="rect">
+            <a:avLst/>
+          </a:prstGeom>
+          <a:noFill/>
+        </p:spPr>
+        <p:txBody>
+          <a:bodyPr wrap="square" anchor="t" lIns="0" rIns="0" tIns="0" bIns="0">
+            <a:spAutoFit/>
+          </a:bodyPr>
+          <a:lstStyle/>
+          <a:p>
+            <a:r>
+              <a:rPr sz="1200" i="0" b="0">
+                <a:solidFill>
+                  <a:srgbClr val="6E625B"/>
+                </a:solidFill>
+                <a:latin typeface="Calibri"/>
+              </a:rPr>
+              <a:t>Drug Information  ·  Section 1  ·  The Drug Information Centre</a:t>
+            </a:r>
+          </a:p>
+        </p:txBody>
+      </p:sp>
+      <p:sp>
+        <p:nvSpPr>
+          <p:cNvPr id="6" name="TextBox 5"/>
+          <p:cNvSpPr txBox="1"/>
+          <p:nvPr/>
+        </p:nvSpPr>
+        <p:spPr>
+          <a:xfrm>
+            <a:off x="10058400" y="6419088"/>
+            <a:ext cx="1097280" cy="274320"/>
+          </a:xfrm>
+          <a:prstGeom prst="rect">
+            <a:avLst/>
+          </a:prstGeom>
+          <a:noFill/>
+        </p:spPr>
+        <p:txBody>
+          <a:bodyPr wrap="square" anchor="t" lIns="0" rIns="0" tIns="0" bIns="0">
+            <a:spAutoFit/>
+          </a:bodyPr>
+          <a:lstStyle/>
+          <a:p>
+            <a:pPr algn="r"/>
+            <a:r>
+              <a:rPr sz="1200" i="0" b="1">
+                <a:solidFill>
+                  <a:srgbClr val="6E625B"/>
+                </a:solidFill>
+                <a:latin typeface="Calibri"/>
+              </a:rPr>
+              <a:t>12 / 25</a:t>
+            </a:r>
+          </a:p>
+        </p:txBody>
+      </p:sp>
+      <p:pic>
+        <p:nvPicPr>
+          <p:cNvPr id="7" name="Picture 6" descr="logo"/>
+          <p:cNvPicPr>
+            <a:picLocks noChangeAspect="1"/>
+          </p:cNvPicPr>
+          <p:nvPr/>
+        </p:nvPicPr>
+        <p:blipFill>
+          <a:blip r:embed="rId3"/>
+          <a:stretch>
+            <a:fillRect/>
+          </a:stretch>
+        </p:blipFill>
+        <p:spPr>
+          <a:xfrm>
+            <a:off x="11247120" y="6309360"/>
+            <a:ext cx="384048" cy="384048"/>
+          </a:xfrm>
+          <a:prstGeom prst="rect">
+            <a:avLst/>
+          </a:prstGeom>
+        </p:spPr>
+      </p:pic>
+      <p:sp>
+        <p:nvSpPr>
+          <p:cNvPr id="8" name="Rounded Rectangle 7"/>
+          <p:cNvSpPr/>
+          <p:nvPr/>
+        </p:nvSpPr>
+        <p:spPr>
+          <a:xfrm>
+            <a:off x="1645919" y="2103120"/>
+            <a:ext cx="8899855" cy="2377440"/>
+          </a:xfrm>
+          <a:prstGeom prst="roundRect">
+            <a:avLst>
+              <a:gd name="adj" fmla="val 6000"/>
+            </a:avLst>
+          </a:prstGeom>
+          <a:solidFill>
+            <a:srgbClr val="F6E5DE"/>
+          </a:solidFill>
+          <a:ln>
+            <a:noFill/>
+          </a:ln>
+          <a:effectLst/>
+        </p:spPr>
+        <p:style>
+          <a:lnRef idx="1">
+            <a:schemeClr val="accent1"/>
+          </a:lnRef>
+          <a:fillRef idx="3">
+            <a:schemeClr val="accent1"/>
+          </a:fillRef>
+          <a:effectRef idx="2">
+            <a:schemeClr val="accent1"/>
+          </a:effectRef>
+          <a:fontRef idx="minor">
+            <a:schemeClr val="lt1"/>
+          </a:fontRef>
+        </p:style>
+        <p:txBody>
+          <a:bodyPr rtlCol="0" anchor="ctr"/>
+          <a:lstStyle/>
+          <a:p>
+            <a:pPr algn="ctr"/>
+          </a:p>
+        </p:txBody>
+      </p:sp>
+      <p:sp>
+        <p:nvSpPr>
+          <p:cNvPr id="9" name="Rounded Rectangle 8"/>
+          <p:cNvSpPr/>
+          <p:nvPr/>
+        </p:nvSpPr>
+        <p:spPr>
+          <a:xfrm>
+            <a:off x="1920239" y="2331720"/>
+            <a:ext cx="1188720" cy="347472"/>
+          </a:xfrm>
+          <a:prstGeom prst="roundRect">
+            <a:avLst>
+              <a:gd name="adj" fmla="val 50000"/>
+            </a:avLst>
+          </a:prstGeom>
+          <a:solidFill>
+            <a:srgbClr val="A4472B"/>
+          </a:solidFill>
+          <a:ln>
+            <a:noFill/>
+          </a:ln>
+          <a:effectLst/>
+        </p:spPr>
+        <p:style>
+          <a:lnRef idx="1">
+            <a:schemeClr val="accent1"/>
+          </a:lnRef>
+          <a:fillRef idx="3">
+            <a:schemeClr val="accent1"/>
+          </a:fillRef>
+          <a:effectRef idx="2">
+            <a:schemeClr val="accent1"/>
+          </a:effectRef>
+          <a:fontRef idx="minor">
+            <a:schemeClr val="lt1"/>
+          </a:fontRef>
+        </p:style>
+        <p:txBody>
+          <a:bodyPr rtlCol="0" anchor="ctr" lIns="0" rIns="0" tIns="0" bIns="0"/>
+          <a:lstStyle/>
+          <a:p>
+            <a:pPr algn="ctr"/>
+            <a:r>
+              <a:rPr sz="1200" i="0" b="1">
+                <a:solidFill>
+                  <a:srgbClr val="FFFFFF"/>
+                </a:solidFill>
+                <a:latin typeface="Calibri"/>
+              </a:rPr>
+              <a:t>EXAM TIP</a:t>
+            </a:r>
+          </a:p>
+        </p:txBody>
+      </p:sp>
+      <p:sp>
+        <p:nvSpPr>
+          <p:cNvPr id="10" name="TextBox 9"/>
+          <p:cNvSpPr txBox="1"/>
+          <p:nvPr/>
+        </p:nvSpPr>
+        <p:spPr>
+          <a:xfrm>
+            <a:off x="1920239" y="2788920"/>
+            <a:ext cx="8351215" cy="1508760"/>
+          </a:xfrm>
+          <a:prstGeom prst="rect">
+            <a:avLst/>
+          </a:prstGeom>
+          <a:noFill/>
+        </p:spPr>
+        <p:txBody>
+          <a:bodyPr wrap="square" anchor="t" lIns="0" rIns="0" tIns="0" bIns="0">
+            <a:spAutoFit/>
+          </a:bodyPr>
+          <a:lstStyle/>
+          <a:p>
+            <a:r>
+              <a:rPr sz="2600" i="0" b="0">
+                <a:solidFill>
+                  <a:srgbClr val="2B211C"/>
+                </a:solidFill>
+                <a:latin typeface="Calibri"/>
+              </a:rPr>
+              <a:t>Learn the seven steps in order: requester, background, real question, classify, search, answer, follow up.</a:t>
+            </a:r>
+          </a:p>
+        </p:txBody>
+      </p:sp>
+    </p:spTree>
+  </p:cSld>
+  <p:clrMapOvr>
+    <a:masterClrMapping/>
+  </p:clrMapOvr>
+</p:sld>
+</file>
+
 <file path=ppt/slides/slide13.xml><?xml version="1.0" encoding="utf-8"?>
 <p:sld xmlns:a="http://schemas.openxmlformats.org/drawingml/2006/main" xmlns:p="http://schemas.openxmlformats.org/presentationml/2006/main" xmlns:r="http://schemas.openxmlformats.org/officeDocument/2006/relationships">
   <p:cSld>
@@ -7083,16 +7141,16 @@
       <p:grpSpPr/>
       <p:sp>
         <p:nvSpPr>
-          <p:cNvPr id="2" name="Oval 1"/>
+          <p:cNvPr id="2" name="Rectangle 1"/>
           <p:cNvSpPr/>
           <p:nvPr/>
         </p:nvSpPr>
         <p:spPr>
           <a:xfrm>
-            <a:off x="548640" y="475488"/>
-            <a:ext cx="658368" cy="658368"/>
-          </a:xfrm>
-          <a:prstGeom prst="ellipse">
+            <a:off x="0" y="0"/>
+            <a:ext cx="3931920" cy="6858000"/>
+          </a:xfrm>
+          <a:prstGeom prst="rect">
             <a:avLst/>
           </a:prstGeom>
           <a:solidFill>
@@ -7118,19 +7176,10 @@
           </a:fontRef>
         </p:style>
         <p:txBody>
-          <a:bodyPr rtlCol="0" anchor="ctr" lIns="0" rIns="0" tIns="0" bIns="0"/>
+          <a:bodyPr rtlCol="0" anchor="ctr"/>
           <a:lstStyle/>
           <a:p>
             <a:pPr algn="ctr"/>
-            <a:r>
-              <a:rPr sz="1800" i="0" b="1">
-                <a:solidFill>
-                  <a:srgbClr val="FFFFFF"/>
-                </a:solidFill>
-                <a:latin typeface="Cambria"/>
-              </a:rPr>
-              <a:t>01</a:t>
-            </a:r>
           </a:p>
         </p:txBody>
       </p:sp>
@@ -7142,8 +7191,8 @@
         </p:nvSpPr>
         <p:spPr>
           <a:xfrm>
-            <a:off x="1417319" y="438912"/>
-            <a:ext cx="10180015" cy="292608"/>
+            <a:off x="548640" y="1188720"/>
+            <a:ext cx="2926080" cy="2377440"/>
           </a:xfrm>
           <a:prstGeom prst="rect">
             <a:avLst/>
@@ -7157,13 +7206,13 @@
           <a:lstStyle/>
           <a:p>
             <a:r>
-              <a:rPr sz="1200" i="0" b="1" spc="150">
-                <a:solidFill>
-                  <a:srgbClr val="2F6F7A"/>
-                </a:solidFill>
-                <a:latin typeface="Calibri"/>
-              </a:rPr>
-              <a:t>SECTION 1</a:t>
+              <a:rPr sz="13000" i="0" b="1">
+                <a:solidFill>
+                  <a:srgbClr val="E6EEEF"/>
+                </a:solidFill>
+                <a:latin typeface="Cambria"/>
+              </a:rPr>
+              <a:t>℞</a:t>
             </a:r>
           </a:p>
         </p:txBody>
@@ -7176,8 +7225,8 @@
         </p:nvSpPr>
         <p:spPr>
           <a:xfrm>
-            <a:off x="1417319" y="676656"/>
-            <a:ext cx="10180015" cy="640080"/>
+            <a:off x="548640" y="3977639"/>
+            <a:ext cx="3017520" cy="1280160"/>
           </a:xfrm>
           <a:prstGeom prst="rect">
             <a:avLst/>
@@ -7191,13 +7240,24 @@
           <a:lstStyle/>
           <a:p>
             <a:r>
-              <a:rPr sz="2700" i="0" b="1">
-                <a:solidFill>
-                  <a:srgbClr val="2B211C"/>
+              <a:rPr sz="3000" i="0" b="1">
+                <a:solidFill>
+                  <a:srgbClr val="FFFFFF"/>
                 </a:solidFill>
                 <a:latin typeface="Cambria"/>
               </a:rPr>
-              <a:t>Answering a Request: The Systematic Approach</a:t>
+              <a:t>At the Pharmacy</a:t>
+            </a:r>
+          </a:p>
+          <a:p>
+            <a:r>
+              <a:rPr sz="1400" i="0" b="1" spc="150">
+                <a:solidFill>
+                  <a:srgbClr val="E6EEEF"/>
+                </a:solidFill>
+                <a:latin typeface="Calibri"/>
+              </a:rPr>
+              <a:t>Section 1</a:t>
             </a:r>
           </a:p>
         </p:txBody>
@@ -7210,7 +7270,113 @@
         </p:nvSpPr>
         <p:spPr>
           <a:xfrm>
-            <a:off x="548640" y="6419088"/>
+            <a:off x="4526280" y="822960"/>
+            <a:ext cx="7132320" cy="5120640"/>
+          </a:xfrm>
+          <a:prstGeom prst="rect">
+            <a:avLst/>
+          </a:prstGeom>
+          <a:noFill/>
+        </p:spPr>
+        <p:txBody>
+          <a:bodyPr wrap="square" anchor="ctr" lIns="0" rIns="0" tIns="0" bIns="0">
+            <a:spAutoFit/>
+          </a:bodyPr>
+          <a:lstStyle/>
+          <a:p>
+            <a:r>
+              <a:rPr sz="2000" i="0" b="0">
+                <a:solidFill>
+                  <a:srgbClr val="2B211C"/>
+                </a:solidFill>
+                <a:latin typeface="Calibri"/>
+              </a:rPr>
+              <a:t>A mother asks whether she can give her 4-year-old child paracetamol and ibuprofen together. </a:t>
+            </a:r>
+            <a:r>
+              <a:rPr sz="2000" i="0" b="1">
+                <a:solidFill>
+                  <a:srgbClr val="2B211C"/>
+                </a:solidFill>
+                <a:latin typeface="Calibri"/>
+              </a:rPr>
+              <a:t>Background:</a:t>
+            </a:r>
+            <a:r>
+              <a:rPr sz="2000" i="0" b="0">
+                <a:solidFill>
+                  <a:srgbClr val="2B211C"/>
+                </a:solidFill>
+                <a:latin typeface="Calibri"/>
+              </a:rPr>
+              <a:t> the child weighs 16 kg, has a fever of 39 °C and takes no other drugs. </a:t>
+            </a:r>
+            <a:r>
+              <a:rPr sz="2000" i="0" b="1">
+                <a:solidFill>
+                  <a:srgbClr val="2B211C"/>
+                </a:solidFill>
+                <a:latin typeface="Calibri"/>
+              </a:rPr>
+              <a:t>Real question:</a:t>
+            </a:r>
+            <a:r>
+              <a:rPr sz="2000" i="0" b="0">
+                <a:solidFill>
+                  <a:srgbClr val="2B211C"/>
+                </a:solidFill>
+                <a:latin typeface="Calibri"/>
+              </a:rPr>
+              <a:t> how to control fever safely. </a:t>
+            </a:r>
+            <a:r>
+              <a:rPr sz="2000" i="0" b="1">
+                <a:solidFill>
+                  <a:srgbClr val="2B211C"/>
+                </a:solidFill>
+                <a:latin typeface="Calibri"/>
+              </a:rPr>
+              <a:t>Answer:</a:t>
+            </a:r>
+            <a:r>
+              <a:rPr sz="2000" i="0" b="0">
+                <a:solidFill>
+                  <a:srgbClr val="2B211C"/>
+                </a:solidFill>
+                <a:latin typeface="Calibri"/>
+              </a:rPr>
+              <a:t> use one drug at the correct weight-based dose first. Paracetamol is 15 mg/kg every 4-6 hours (maximum four doses a day). Switch or alternate only if the fever does not respond, and keep a written dose record. Advise a doctor's review if the fever lasts more than three days. </a:t>
+            </a:r>
+            <a:r>
+              <a:rPr sz="2000" i="0" b="1">
+                <a:solidFill>
+                  <a:srgbClr val="2B211C"/>
+                </a:solidFill>
+                <a:latin typeface="Calibri"/>
+              </a:rPr>
+              <a:t>Document</a:t>
+            </a:r>
+            <a:r>
+              <a:rPr sz="2000" i="0" b="0">
+                <a:solidFill>
+                  <a:srgbClr val="2B211C"/>
+                </a:solidFill>
+                <a:latin typeface="Calibri"/>
+              </a:rPr>
+              <a:t> the request.</a:t>
+            </a:r>
+          </a:p>
+        </p:txBody>
+      </p:sp>
+      <p:sp>
+        <p:nvSpPr>
+          <p:cNvPr id="6" name="TextBox 5"/>
+          <p:cNvSpPr txBox="1"/>
+          <p:nvPr/>
+        </p:nvSpPr>
+        <p:spPr>
+          <a:xfrm>
+            <a:off x="4526280" y="6419088"/>
             <a:ext cx="8229600" cy="274320"/>
           </a:xfrm>
           <a:prstGeom prst="rect">
@@ -7231,14 +7397,14 @@
                 </a:solidFill>
                 <a:latin typeface="Calibri"/>
               </a:rPr>
-              <a:t>Drug Information  ·  Section 1  ·  The Drug Information Centre</a:t>
-            </a:r>
-          </a:p>
-        </p:txBody>
-      </p:sp>
-      <p:sp>
-        <p:nvSpPr>
-          <p:cNvPr id="6" name="TextBox 5"/>
+              <a:t>Drug Information  ·  The Drug Information Centre</a:t>
+            </a:r>
+          </a:p>
+        </p:txBody>
+      </p:sp>
+      <p:sp>
+        <p:nvSpPr>
+          <p:cNvPr id="7" name="TextBox 6"/>
           <p:cNvSpPr txBox="1"/>
           <p:nvPr/>
         </p:nvSpPr>
@@ -7266,14 +7432,14 @@
                 </a:solidFill>
                 <a:latin typeface="Calibri"/>
               </a:rPr>
-              <a:t>13 / 26</a:t>
+              <a:t>13 / 25</a:t>
             </a:r>
           </a:p>
         </p:txBody>
       </p:sp>
       <p:pic>
         <p:nvPicPr>
-          <p:cNvPr id="7" name="Picture 6" descr="logo"/>
+          <p:cNvPr id="8" name="Picture 7" descr="logo"/>
           <p:cNvPicPr>
             <a:picLocks noChangeAspect="1"/>
           </p:cNvPicPr>
@@ -7295,141 +7461,6 @@
           </a:prstGeom>
         </p:spPr>
       </p:pic>
-      <p:sp>
-        <p:nvSpPr>
-          <p:cNvPr id="8" name="Rounded Rectangle 7"/>
-          <p:cNvSpPr/>
-          <p:nvPr/>
-        </p:nvSpPr>
-        <p:spPr>
-          <a:xfrm>
-            <a:off x="1645919" y="2103120"/>
-            <a:ext cx="8899855" cy="2377440"/>
-          </a:xfrm>
-          <a:prstGeom prst="roundRect">
-            <a:avLst>
-              <a:gd name="adj" fmla="val 6000"/>
-            </a:avLst>
-          </a:prstGeom>
-          <a:solidFill>
-            <a:srgbClr val="F6E5DE"/>
-          </a:solidFill>
-          <a:ln>
-            <a:noFill/>
-          </a:ln>
-          <a:effectLst/>
-        </p:spPr>
-        <p:style>
-          <a:lnRef idx="1">
-            <a:schemeClr val="accent1"/>
-          </a:lnRef>
-          <a:fillRef idx="3">
-            <a:schemeClr val="accent1"/>
-          </a:fillRef>
-          <a:effectRef idx="2">
-            <a:schemeClr val="accent1"/>
-          </a:effectRef>
-          <a:fontRef idx="minor">
-            <a:schemeClr val="lt1"/>
-          </a:fontRef>
-        </p:style>
-        <p:txBody>
-          <a:bodyPr rtlCol="0" anchor="ctr"/>
-          <a:lstStyle/>
-          <a:p>
-            <a:pPr algn="ctr"/>
-          </a:p>
-        </p:txBody>
-      </p:sp>
-      <p:sp>
-        <p:nvSpPr>
-          <p:cNvPr id="9" name="Rounded Rectangle 8"/>
-          <p:cNvSpPr/>
-          <p:nvPr/>
-        </p:nvSpPr>
-        <p:spPr>
-          <a:xfrm>
-            <a:off x="1920239" y="2331720"/>
-            <a:ext cx="1188720" cy="347472"/>
-          </a:xfrm>
-          <a:prstGeom prst="roundRect">
-            <a:avLst>
-              <a:gd name="adj" fmla="val 50000"/>
-            </a:avLst>
-          </a:prstGeom>
-          <a:solidFill>
-            <a:srgbClr val="A4472B"/>
-          </a:solidFill>
-          <a:ln>
-            <a:noFill/>
-          </a:ln>
-          <a:effectLst/>
-        </p:spPr>
-        <p:style>
-          <a:lnRef idx="1">
-            <a:schemeClr val="accent1"/>
-          </a:lnRef>
-          <a:fillRef idx="3">
-            <a:schemeClr val="accent1"/>
-          </a:fillRef>
-          <a:effectRef idx="2">
-            <a:schemeClr val="accent1"/>
-          </a:effectRef>
-          <a:fontRef idx="minor">
-            <a:schemeClr val="lt1"/>
-          </a:fontRef>
-        </p:style>
-        <p:txBody>
-          <a:bodyPr rtlCol="0" anchor="ctr" lIns="0" rIns="0" tIns="0" bIns="0"/>
-          <a:lstStyle/>
-          <a:p>
-            <a:pPr algn="ctr"/>
-            <a:r>
-              <a:rPr sz="1200" i="0" b="1">
-                <a:solidFill>
-                  <a:srgbClr val="FFFFFF"/>
-                </a:solidFill>
-                <a:latin typeface="Calibri"/>
-              </a:rPr>
-              <a:t>EXAM TIP</a:t>
-            </a:r>
-          </a:p>
-        </p:txBody>
-      </p:sp>
-      <p:sp>
-        <p:nvSpPr>
-          <p:cNvPr id="10" name="TextBox 9"/>
-          <p:cNvSpPr txBox="1"/>
-          <p:nvPr/>
-        </p:nvSpPr>
-        <p:spPr>
-          <a:xfrm>
-            <a:off x="1920239" y="2788920"/>
-            <a:ext cx="8351215" cy="1508760"/>
-          </a:xfrm>
-          <a:prstGeom prst="rect">
-            <a:avLst/>
-          </a:prstGeom>
-          <a:noFill/>
-        </p:spPr>
-        <p:txBody>
-          <a:bodyPr wrap="square" anchor="t" lIns="0" rIns="0" tIns="0" bIns="0">
-            <a:spAutoFit/>
-          </a:bodyPr>
-          <a:lstStyle/>
-          <a:p>
-            <a:r>
-              <a:rPr sz="2600" i="0" b="0">
-                <a:solidFill>
-                  <a:srgbClr val="2B211C"/>
-                </a:solidFill>
-                <a:latin typeface="Calibri"/>
-              </a:rPr>
-              <a:t>Learn the seven steps in order: requester, background, real question, classify, search, answer, follow up.</a:t>
-            </a:r>
-          </a:p>
-        </p:txBody>
-      </p:sp>
     </p:spTree>
   </p:cSld>
   <p:clrMapOvr>
@@ -7458,16 +7489,16 @@
       <p:grpSpPr/>
       <p:sp>
         <p:nvSpPr>
-          <p:cNvPr id="2" name="Rectangle 1"/>
+          <p:cNvPr id="2" name="Oval 1"/>
           <p:cNvSpPr/>
           <p:nvPr/>
         </p:nvSpPr>
         <p:spPr>
           <a:xfrm>
-            <a:off x="0" y="0"/>
-            <a:ext cx="3931920" cy="6858000"/>
-          </a:xfrm>
-          <a:prstGeom prst="rect">
+            <a:off x="548640" y="475488"/>
+            <a:ext cx="658368" cy="658368"/>
+          </a:xfrm>
+          <a:prstGeom prst="ellipse">
             <a:avLst/>
           </a:prstGeom>
           <a:solidFill>
@@ -7493,10 +7524,19 @@
           </a:fontRef>
         </p:style>
         <p:txBody>
-          <a:bodyPr rtlCol="0" anchor="ctr"/>
+          <a:bodyPr rtlCol="0" anchor="ctr" lIns="0" rIns="0" tIns="0" bIns="0"/>
           <a:lstStyle/>
           <a:p>
             <a:pPr algn="ctr"/>
+            <a:r>
+              <a:rPr sz="1800" i="0" b="1">
+                <a:solidFill>
+                  <a:srgbClr val="FFFFFF"/>
+                </a:solidFill>
+                <a:latin typeface="Cambria"/>
+              </a:rPr>
+              <a:t>01</a:t>
+            </a:r>
           </a:p>
         </p:txBody>
       </p:sp>
@@ -7508,8 +7548,8 @@
         </p:nvSpPr>
         <p:spPr>
           <a:xfrm>
-            <a:off x="548640" y="1188720"/>
-            <a:ext cx="2926080" cy="2377440"/>
+            <a:off x="1417319" y="438912"/>
+            <a:ext cx="10180015" cy="292608"/>
           </a:xfrm>
           <a:prstGeom prst="rect">
             <a:avLst/>
@@ -7523,13 +7563,13 @@
           <a:lstStyle/>
           <a:p>
             <a:r>
-              <a:rPr sz="13000" i="0" b="1">
-                <a:solidFill>
-                  <a:srgbClr val="E6EEEF"/>
-                </a:solidFill>
-                <a:latin typeface="Cambria"/>
-              </a:rPr>
-              <a:t>℞</a:t>
+              <a:rPr sz="1200" i="0" b="1" spc="150">
+                <a:solidFill>
+                  <a:srgbClr val="2F6F7A"/>
+                </a:solidFill>
+                <a:latin typeface="Calibri"/>
+              </a:rPr>
+              <a:t>SECTION 1  ·  QUESTION 1 OF 5</a:t>
             </a:r>
           </a:p>
         </p:txBody>
@@ -7542,8 +7582,8 @@
         </p:nvSpPr>
         <p:spPr>
           <a:xfrm>
-            <a:off x="548640" y="3977639"/>
-            <a:ext cx="3017520" cy="1280160"/>
+            <a:off x="1417319" y="676656"/>
+            <a:ext cx="10180015" cy="640080"/>
           </a:xfrm>
           <a:prstGeom prst="rect">
             <a:avLst/>
@@ -7557,24 +7597,13 @@
           <a:lstStyle/>
           <a:p>
             <a:r>
-              <a:rPr sz="3000" i="0" b="1">
-                <a:solidFill>
-                  <a:srgbClr val="FFFFFF"/>
+              <a:rPr sz="3200" i="0" b="1">
+                <a:solidFill>
+                  <a:srgbClr val="2B211C"/>
                 </a:solidFill>
                 <a:latin typeface="Cambria"/>
               </a:rPr>
-              <a:t>At the Pharmacy</a:t>
-            </a:r>
-          </a:p>
-          <a:p>
-            <a:r>
-              <a:rPr sz="1400" i="0" b="1" spc="150">
-                <a:solidFill>
-                  <a:srgbClr val="E6EEEF"/>
-                </a:solidFill>
-                <a:latin typeface="Calibri"/>
-              </a:rPr>
-              <a:t>Section 1</a:t>
+              <a:t>Your turn</a:t>
             </a:r>
           </a:p>
         </p:txBody>
@@ -7587,113 +7616,7 @@
         </p:nvSpPr>
         <p:spPr>
           <a:xfrm>
-            <a:off x="4526280" y="822960"/>
-            <a:ext cx="7132320" cy="5120640"/>
-          </a:xfrm>
-          <a:prstGeom prst="rect">
-            <a:avLst/>
-          </a:prstGeom>
-          <a:noFill/>
-        </p:spPr>
-        <p:txBody>
-          <a:bodyPr wrap="square" anchor="ctr" lIns="0" rIns="0" tIns="0" bIns="0">
-            <a:spAutoFit/>
-          </a:bodyPr>
-          <a:lstStyle/>
-          <a:p>
-            <a:r>
-              <a:rPr sz="2000" i="0" b="0">
-                <a:solidFill>
-                  <a:srgbClr val="2B211C"/>
-                </a:solidFill>
-                <a:latin typeface="Calibri"/>
-              </a:rPr>
-              <a:t>A mother asks whether she can give her 4-year-old child paracetamol and ibuprofen together. </a:t>
-            </a:r>
-            <a:r>
-              <a:rPr sz="2000" i="0" b="1">
-                <a:solidFill>
-                  <a:srgbClr val="2B211C"/>
-                </a:solidFill>
-                <a:latin typeface="Calibri"/>
-              </a:rPr>
-              <a:t>Background:</a:t>
-            </a:r>
-            <a:r>
-              <a:rPr sz="2000" i="0" b="0">
-                <a:solidFill>
-                  <a:srgbClr val="2B211C"/>
-                </a:solidFill>
-                <a:latin typeface="Calibri"/>
-              </a:rPr>
-              <a:t> the child weighs 16 kg, has a fever of 39 °C and takes no other drugs. </a:t>
-            </a:r>
-            <a:r>
-              <a:rPr sz="2000" i="0" b="1">
-                <a:solidFill>
-                  <a:srgbClr val="2B211C"/>
-                </a:solidFill>
-                <a:latin typeface="Calibri"/>
-              </a:rPr>
-              <a:t>Real question:</a:t>
-            </a:r>
-            <a:r>
-              <a:rPr sz="2000" i="0" b="0">
-                <a:solidFill>
-                  <a:srgbClr val="2B211C"/>
-                </a:solidFill>
-                <a:latin typeface="Calibri"/>
-              </a:rPr>
-              <a:t> how to control fever safely. </a:t>
-            </a:r>
-            <a:r>
-              <a:rPr sz="2000" i="0" b="1">
-                <a:solidFill>
-                  <a:srgbClr val="2B211C"/>
-                </a:solidFill>
-                <a:latin typeface="Calibri"/>
-              </a:rPr>
-              <a:t>Answer:</a:t>
-            </a:r>
-            <a:r>
-              <a:rPr sz="2000" i="0" b="0">
-                <a:solidFill>
-                  <a:srgbClr val="2B211C"/>
-                </a:solidFill>
-                <a:latin typeface="Calibri"/>
-              </a:rPr>
-              <a:t> use one drug at the correct weight-based dose first. Paracetamol is 15 mg/kg every 4-6 hours (maximum four doses a day). Switch or alternate only if the fever does not respond, and keep a written dose record. Advise a doctor's review if the fever lasts more than three days. </a:t>
-            </a:r>
-            <a:r>
-              <a:rPr sz="2000" i="0" b="1">
-                <a:solidFill>
-                  <a:srgbClr val="2B211C"/>
-                </a:solidFill>
-                <a:latin typeface="Calibri"/>
-              </a:rPr>
-              <a:t>Document</a:t>
-            </a:r>
-            <a:r>
-              <a:rPr sz="2000" i="0" b="0">
-                <a:solidFill>
-                  <a:srgbClr val="2B211C"/>
-                </a:solidFill>
-                <a:latin typeface="Calibri"/>
-              </a:rPr>
-              <a:t> the request.</a:t>
-            </a:r>
-          </a:p>
-        </p:txBody>
-      </p:sp>
-      <p:sp>
-        <p:nvSpPr>
-          <p:cNvPr id="6" name="TextBox 5"/>
-          <p:cNvSpPr txBox="1"/>
-          <p:nvPr/>
-        </p:nvSpPr>
-        <p:spPr>
-          <a:xfrm>
-            <a:off x="4526280" y="6419088"/>
+            <a:off x="548640" y="6419088"/>
             <a:ext cx="8229600" cy="274320"/>
           </a:xfrm>
           <a:prstGeom prst="rect">
@@ -7714,14 +7637,14 @@
                 </a:solidFill>
                 <a:latin typeface="Calibri"/>
               </a:rPr>
-              <a:t>Drug Information  ·  The Drug Information Centre</a:t>
-            </a:r>
-          </a:p>
-        </p:txBody>
-      </p:sp>
-      <p:sp>
-        <p:nvSpPr>
-          <p:cNvPr id="7" name="TextBox 6"/>
+              <a:t>Drug Information  ·  Section 1  ·  The Drug Information Centre</a:t>
+            </a:r>
+          </a:p>
+        </p:txBody>
+      </p:sp>
+      <p:sp>
+        <p:nvSpPr>
+          <p:cNvPr id="6" name="TextBox 5"/>
           <p:cNvSpPr txBox="1"/>
           <p:nvPr/>
         </p:nvSpPr>
@@ -7749,14 +7672,14 @@
                 </a:solidFill>
                 <a:latin typeface="Calibri"/>
               </a:rPr>
-              <a:t>14 / 26</a:t>
+              <a:t>14 / 25</a:t>
             </a:r>
           </a:p>
         </p:txBody>
       </p:sp>
       <p:pic>
         <p:nvPicPr>
-          <p:cNvPr id="8" name="Picture 7" descr="logo"/>
+          <p:cNvPr id="7" name="Picture 6" descr="logo"/>
           <p:cNvPicPr>
             <a:picLocks noChangeAspect="1"/>
           </p:cNvPicPr>
@@ -7778,6 +7701,572 @@
           </a:prstGeom>
         </p:spPr>
       </p:pic>
+      <p:sp>
+        <p:nvSpPr>
+          <p:cNvPr id="8" name="TextBox 7"/>
+          <p:cNvSpPr txBox="1"/>
+          <p:nvPr/>
+        </p:nvSpPr>
+        <p:spPr>
+          <a:xfrm>
+            <a:off x="548640" y="1554480"/>
+            <a:ext cx="11094415" cy="1005840"/>
+          </a:xfrm>
+          <a:prstGeom prst="rect">
+            <a:avLst/>
+          </a:prstGeom>
+          <a:noFill/>
+        </p:spPr>
+        <p:txBody>
+          <a:bodyPr wrap="square" anchor="t" lIns="0" rIns="0" tIns="0" bIns="0">
+            <a:spAutoFit/>
+          </a:bodyPr>
+          <a:lstStyle/>
+          <a:p>
+            <a:r>
+              <a:rPr sz="2400" i="0" b="1">
+                <a:solidFill>
+                  <a:srgbClr val="2B211C"/>
+                </a:solidFill>
+                <a:latin typeface="Calibri"/>
+              </a:rPr>
+              <a:t>Which is the best definition of a drug information service?</a:t>
+            </a:r>
+          </a:p>
+        </p:txBody>
+      </p:sp>
+      <p:sp>
+        <p:nvSpPr>
+          <p:cNvPr id="9" name="Rounded Rectangle 8"/>
+          <p:cNvSpPr/>
+          <p:nvPr/>
+        </p:nvSpPr>
+        <p:spPr>
+          <a:xfrm>
+            <a:off x="548640" y="2697480"/>
+            <a:ext cx="11094415" cy="640080"/>
+          </a:xfrm>
+          <a:prstGeom prst="roundRect">
+            <a:avLst>
+              <a:gd name="adj" fmla="val 18000"/>
+            </a:avLst>
+          </a:prstGeom>
+          <a:solidFill>
+            <a:srgbClr val="FAF4F2"/>
+          </a:solidFill>
+          <a:ln>
+            <a:noFill/>
+          </a:ln>
+          <a:effectLst/>
+        </p:spPr>
+        <p:style>
+          <a:lnRef idx="1">
+            <a:schemeClr val="accent1"/>
+          </a:lnRef>
+          <a:fillRef idx="3">
+            <a:schemeClr val="accent1"/>
+          </a:fillRef>
+          <a:effectRef idx="2">
+            <a:schemeClr val="accent1"/>
+          </a:effectRef>
+          <a:fontRef idx="minor">
+            <a:schemeClr val="lt1"/>
+          </a:fontRef>
+        </p:style>
+        <p:txBody>
+          <a:bodyPr rtlCol="0" anchor="ctr"/>
+          <a:lstStyle/>
+          <a:p>
+            <a:pPr algn="ctr"/>
+          </a:p>
+        </p:txBody>
+      </p:sp>
+      <p:sp>
+        <p:nvSpPr>
+          <p:cNvPr id="10" name="Oval 9"/>
+          <p:cNvSpPr/>
+          <p:nvPr/>
+        </p:nvSpPr>
+        <p:spPr>
+          <a:xfrm>
+            <a:off x="713232" y="2807208"/>
+            <a:ext cx="420624" cy="420624"/>
+          </a:xfrm>
+          <a:prstGeom prst="ellipse">
+            <a:avLst/>
+          </a:prstGeom>
+          <a:solidFill>
+            <a:srgbClr val="A4472B"/>
+          </a:solidFill>
+          <a:ln>
+            <a:noFill/>
+          </a:ln>
+          <a:effectLst/>
+        </p:spPr>
+        <p:style>
+          <a:lnRef idx="1">
+            <a:schemeClr val="accent1"/>
+          </a:lnRef>
+          <a:fillRef idx="3">
+            <a:schemeClr val="accent1"/>
+          </a:fillRef>
+          <a:effectRef idx="2">
+            <a:schemeClr val="accent1"/>
+          </a:effectRef>
+          <a:fontRef idx="minor">
+            <a:schemeClr val="lt1"/>
+          </a:fontRef>
+        </p:style>
+        <p:txBody>
+          <a:bodyPr rtlCol="0" anchor="ctr" lIns="0" rIns="0" tIns="0" bIns="0"/>
+          <a:lstStyle/>
+          <a:p>
+            <a:pPr algn="ctr"/>
+            <a:r>
+              <a:rPr sz="1500" i="0" b="1">
+                <a:solidFill>
+                  <a:srgbClr val="FFFFFF"/>
+                </a:solidFill>
+                <a:latin typeface="Calibri"/>
+              </a:rPr>
+              <a:t>A</a:t>
+            </a:r>
+          </a:p>
+        </p:txBody>
+      </p:sp>
+      <p:sp>
+        <p:nvSpPr>
+          <p:cNvPr id="11" name="TextBox 10"/>
+          <p:cNvSpPr txBox="1"/>
+          <p:nvPr/>
+        </p:nvSpPr>
+        <p:spPr>
+          <a:xfrm>
+            <a:off x="1371600" y="2697480"/>
+            <a:ext cx="10088575" cy="640080"/>
+          </a:xfrm>
+          <a:prstGeom prst="rect">
+            <a:avLst/>
+          </a:prstGeom>
+          <a:noFill/>
+        </p:spPr>
+        <p:txBody>
+          <a:bodyPr wrap="square" anchor="ctr" lIns="0" rIns="0" tIns="0" bIns="0">
+            <a:spAutoFit/>
+          </a:bodyPr>
+          <a:lstStyle/>
+          <a:p>
+            <a:r>
+              <a:rPr sz="1900" i="0" b="0">
+                <a:solidFill>
+                  <a:srgbClr val="2B211C"/>
+                </a:solidFill>
+                <a:latin typeface="Calibri"/>
+              </a:rPr>
+              <a:t>Selling medicines with written leaflets</a:t>
+            </a:r>
+          </a:p>
+        </p:txBody>
+      </p:sp>
+      <p:sp>
+        <p:nvSpPr>
+          <p:cNvPr id="12" name="Rounded Rectangle 11"/>
+          <p:cNvSpPr/>
+          <p:nvPr/>
+        </p:nvSpPr>
+        <p:spPr>
+          <a:xfrm>
+            <a:off x="548640" y="3465576"/>
+            <a:ext cx="11094415" cy="640080"/>
+          </a:xfrm>
+          <a:prstGeom prst="roundRect">
+            <a:avLst>
+              <a:gd name="adj" fmla="val 18000"/>
+            </a:avLst>
+          </a:prstGeom>
+          <a:solidFill>
+            <a:srgbClr val="FAF4F2"/>
+          </a:solidFill>
+          <a:ln>
+            <a:noFill/>
+          </a:ln>
+          <a:effectLst/>
+        </p:spPr>
+        <p:style>
+          <a:lnRef idx="1">
+            <a:schemeClr val="accent1"/>
+          </a:lnRef>
+          <a:fillRef idx="3">
+            <a:schemeClr val="accent1"/>
+          </a:fillRef>
+          <a:effectRef idx="2">
+            <a:schemeClr val="accent1"/>
+          </a:effectRef>
+          <a:fontRef idx="minor">
+            <a:schemeClr val="lt1"/>
+          </a:fontRef>
+        </p:style>
+        <p:txBody>
+          <a:bodyPr rtlCol="0" anchor="ctr"/>
+          <a:lstStyle/>
+          <a:p>
+            <a:pPr algn="ctr"/>
+          </a:p>
+        </p:txBody>
+      </p:sp>
+      <p:sp>
+        <p:nvSpPr>
+          <p:cNvPr id="13" name="Oval 12"/>
+          <p:cNvSpPr/>
+          <p:nvPr/>
+        </p:nvSpPr>
+        <p:spPr>
+          <a:xfrm>
+            <a:off x="713232" y="3575304"/>
+            <a:ext cx="420624" cy="420624"/>
+          </a:xfrm>
+          <a:prstGeom prst="ellipse">
+            <a:avLst/>
+          </a:prstGeom>
+          <a:solidFill>
+            <a:srgbClr val="A4472B"/>
+          </a:solidFill>
+          <a:ln>
+            <a:noFill/>
+          </a:ln>
+          <a:effectLst/>
+        </p:spPr>
+        <p:style>
+          <a:lnRef idx="1">
+            <a:schemeClr val="accent1"/>
+          </a:lnRef>
+          <a:fillRef idx="3">
+            <a:schemeClr val="accent1"/>
+          </a:fillRef>
+          <a:effectRef idx="2">
+            <a:schemeClr val="accent1"/>
+          </a:effectRef>
+          <a:fontRef idx="minor">
+            <a:schemeClr val="lt1"/>
+          </a:fontRef>
+        </p:style>
+        <p:txBody>
+          <a:bodyPr rtlCol="0" anchor="ctr" lIns="0" rIns="0" tIns="0" bIns="0"/>
+          <a:lstStyle/>
+          <a:p>
+            <a:pPr algn="ctr"/>
+            <a:r>
+              <a:rPr sz="1500" i="0" b="1">
+                <a:solidFill>
+                  <a:srgbClr val="FFFFFF"/>
+                </a:solidFill>
+                <a:latin typeface="Calibri"/>
+              </a:rPr>
+              <a:t>B</a:t>
+            </a:r>
+          </a:p>
+        </p:txBody>
+      </p:sp>
+      <p:sp>
+        <p:nvSpPr>
+          <p:cNvPr id="14" name="TextBox 13"/>
+          <p:cNvSpPr txBox="1"/>
+          <p:nvPr/>
+        </p:nvSpPr>
+        <p:spPr>
+          <a:xfrm>
+            <a:off x="1371600" y="3465576"/>
+            <a:ext cx="10088575" cy="640080"/>
+          </a:xfrm>
+          <a:prstGeom prst="rect">
+            <a:avLst/>
+          </a:prstGeom>
+          <a:noFill/>
+        </p:spPr>
+        <p:txBody>
+          <a:bodyPr wrap="square" anchor="ctr" lIns="0" rIns="0" tIns="0" bIns="0">
+            <a:spAutoFit/>
+          </a:bodyPr>
+          <a:lstStyle/>
+          <a:p>
+            <a:r>
+              <a:rPr sz="1900" i="0" b="0">
+                <a:solidFill>
+                  <a:srgbClr val="2B211C"/>
+                </a:solidFill>
+                <a:latin typeface="Calibri"/>
+              </a:rPr>
+              <a:t>Giving accurate, unbiased answers about medicines to health professionals and the public</a:t>
+            </a:r>
+          </a:p>
+        </p:txBody>
+      </p:sp>
+      <p:sp>
+        <p:nvSpPr>
+          <p:cNvPr id="15" name="Rounded Rectangle 14"/>
+          <p:cNvSpPr/>
+          <p:nvPr/>
+        </p:nvSpPr>
+        <p:spPr>
+          <a:xfrm>
+            <a:off x="548640" y="4233672"/>
+            <a:ext cx="11094415" cy="640080"/>
+          </a:xfrm>
+          <a:prstGeom prst="roundRect">
+            <a:avLst>
+              <a:gd name="adj" fmla="val 18000"/>
+            </a:avLst>
+          </a:prstGeom>
+          <a:solidFill>
+            <a:srgbClr val="FAF4F2"/>
+          </a:solidFill>
+          <a:ln>
+            <a:noFill/>
+          </a:ln>
+          <a:effectLst/>
+        </p:spPr>
+        <p:style>
+          <a:lnRef idx="1">
+            <a:schemeClr val="accent1"/>
+          </a:lnRef>
+          <a:fillRef idx="3">
+            <a:schemeClr val="accent1"/>
+          </a:fillRef>
+          <a:effectRef idx="2">
+            <a:schemeClr val="accent1"/>
+          </a:effectRef>
+          <a:fontRef idx="minor">
+            <a:schemeClr val="lt1"/>
+          </a:fontRef>
+        </p:style>
+        <p:txBody>
+          <a:bodyPr rtlCol="0" anchor="ctr"/>
+          <a:lstStyle/>
+          <a:p>
+            <a:pPr algn="ctr"/>
+          </a:p>
+        </p:txBody>
+      </p:sp>
+      <p:sp>
+        <p:nvSpPr>
+          <p:cNvPr id="16" name="Oval 15"/>
+          <p:cNvSpPr/>
+          <p:nvPr/>
+        </p:nvSpPr>
+        <p:spPr>
+          <a:xfrm>
+            <a:off x="713232" y="4343400"/>
+            <a:ext cx="420624" cy="420624"/>
+          </a:xfrm>
+          <a:prstGeom prst="ellipse">
+            <a:avLst/>
+          </a:prstGeom>
+          <a:solidFill>
+            <a:srgbClr val="A4472B"/>
+          </a:solidFill>
+          <a:ln>
+            <a:noFill/>
+          </a:ln>
+          <a:effectLst/>
+        </p:spPr>
+        <p:style>
+          <a:lnRef idx="1">
+            <a:schemeClr val="accent1"/>
+          </a:lnRef>
+          <a:fillRef idx="3">
+            <a:schemeClr val="accent1"/>
+          </a:fillRef>
+          <a:effectRef idx="2">
+            <a:schemeClr val="accent1"/>
+          </a:effectRef>
+          <a:fontRef idx="minor">
+            <a:schemeClr val="lt1"/>
+          </a:fontRef>
+        </p:style>
+        <p:txBody>
+          <a:bodyPr rtlCol="0" anchor="ctr" lIns="0" rIns="0" tIns="0" bIns="0"/>
+          <a:lstStyle/>
+          <a:p>
+            <a:pPr algn="ctr"/>
+            <a:r>
+              <a:rPr sz="1500" i="0" b="1">
+                <a:solidFill>
+                  <a:srgbClr val="FFFFFF"/>
+                </a:solidFill>
+                <a:latin typeface="Calibri"/>
+              </a:rPr>
+              <a:t>C</a:t>
+            </a:r>
+          </a:p>
+        </p:txBody>
+      </p:sp>
+      <p:sp>
+        <p:nvSpPr>
+          <p:cNvPr id="17" name="TextBox 16"/>
+          <p:cNvSpPr txBox="1"/>
+          <p:nvPr/>
+        </p:nvSpPr>
+        <p:spPr>
+          <a:xfrm>
+            <a:off x="1371600" y="4233672"/>
+            <a:ext cx="10088575" cy="640080"/>
+          </a:xfrm>
+          <a:prstGeom prst="rect">
+            <a:avLst/>
+          </a:prstGeom>
+          <a:noFill/>
+        </p:spPr>
+        <p:txBody>
+          <a:bodyPr wrap="square" anchor="ctr" lIns="0" rIns="0" tIns="0" bIns="0">
+            <a:spAutoFit/>
+          </a:bodyPr>
+          <a:lstStyle/>
+          <a:p>
+            <a:r>
+              <a:rPr sz="1900" i="0" b="0">
+                <a:solidFill>
+                  <a:srgbClr val="2B211C"/>
+                </a:solidFill>
+                <a:latin typeface="Calibri"/>
+              </a:rPr>
+              <a:t>Advertising new medicines to doctors</a:t>
+            </a:r>
+          </a:p>
+        </p:txBody>
+      </p:sp>
+      <p:sp>
+        <p:nvSpPr>
+          <p:cNvPr id="18" name="Rounded Rectangle 17"/>
+          <p:cNvSpPr/>
+          <p:nvPr/>
+        </p:nvSpPr>
+        <p:spPr>
+          <a:xfrm>
+            <a:off x="548640" y="5001768"/>
+            <a:ext cx="11094415" cy="640080"/>
+          </a:xfrm>
+          <a:prstGeom prst="roundRect">
+            <a:avLst>
+              <a:gd name="adj" fmla="val 18000"/>
+            </a:avLst>
+          </a:prstGeom>
+          <a:solidFill>
+            <a:srgbClr val="FAF4F2"/>
+          </a:solidFill>
+          <a:ln>
+            <a:noFill/>
+          </a:ln>
+          <a:effectLst/>
+        </p:spPr>
+        <p:style>
+          <a:lnRef idx="1">
+            <a:schemeClr val="accent1"/>
+          </a:lnRef>
+          <a:fillRef idx="3">
+            <a:schemeClr val="accent1"/>
+          </a:fillRef>
+          <a:effectRef idx="2">
+            <a:schemeClr val="accent1"/>
+          </a:effectRef>
+          <a:fontRef idx="minor">
+            <a:schemeClr val="lt1"/>
+          </a:fontRef>
+        </p:style>
+        <p:txBody>
+          <a:bodyPr rtlCol="0" anchor="ctr"/>
+          <a:lstStyle/>
+          <a:p>
+            <a:pPr algn="ctr"/>
+          </a:p>
+        </p:txBody>
+      </p:sp>
+      <p:sp>
+        <p:nvSpPr>
+          <p:cNvPr id="19" name="Oval 18"/>
+          <p:cNvSpPr/>
+          <p:nvPr/>
+        </p:nvSpPr>
+        <p:spPr>
+          <a:xfrm>
+            <a:off x="713232" y="5111496"/>
+            <a:ext cx="420624" cy="420624"/>
+          </a:xfrm>
+          <a:prstGeom prst="ellipse">
+            <a:avLst/>
+          </a:prstGeom>
+          <a:solidFill>
+            <a:srgbClr val="A4472B"/>
+          </a:solidFill>
+          <a:ln>
+            <a:noFill/>
+          </a:ln>
+          <a:effectLst/>
+        </p:spPr>
+        <p:style>
+          <a:lnRef idx="1">
+            <a:schemeClr val="accent1"/>
+          </a:lnRef>
+          <a:fillRef idx="3">
+            <a:schemeClr val="accent1"/>
+          </a:fillRef>
+          <a:effectRef idx="2">
+            <a:schemeClr val="accent1"/>
+          </a:effectRef>
+          <a:fontRef idx="minor">
+            <a:schemeClr val="lt1"/>
+          </a:fontRef>
+        </p:style>
+        <p:txBody>
+          <a:bodyPr rtlCol="0" anchor="ctr" lIns="0" rIns="0" tIns="0" bIns="0"/>
+          <a:lstStyle/>
+          <a:p>
+            <a:pPr algn="ctr"/>
+            <a:r>
+              <a:rPr sz="1500" i="0" b="1">
+                <a:solidFill>
+                  <a:srgbClr val="FFFFFF"/>
+                </a:solidFill>
+                <a:latin typeface="Calibri"/>
+              </a:rPr>
+              <a:t>D</a:t>
+            </a:r>
+          </a:p>
+        </p:txBody>
+      </p:sp>
+      <p:sp>
+        <p:nvSpPr>
+          <p:cNvPr id="20" name="TextBox 19"/>
+          <p:cNvSpPr txBox="1"/>
+          <p:nvPr/>
+        </p:nvSpPr>
+        <p:spPr>
+          <a:xfrm>
+            <a:off x="1371600" y="5001768"/>
+            <a:ext cx="10088575" cy="640080"/>
+          </a:xfrm>
+          <a:prstGeom prst="rect">
+            <a:avLst/>
+          </a:prstGeom>
+          <a:noFill/>
+        </p:spPr>
+        <p:txBody>
+          <a:bodyPr wrap="square" anchor="ctr" lIns="0" rIns="0" tIns="0" bIns="0">
+            <a:spAutoFit/>
+          </a:bodyPr>
+          <a:lstStyle/>
+          <a:p>
+            <a:r>
+              <a:rPr sz="1900" i="0" b="0">
+                <a:solidFill>
+                  <a:srgbClr val="2B211C"/>
+                </a:solidFill>
+                <a:latin typeface="Calibri"/>
+              </a:rPr>
+              <a:t>Testing new medicines in patients</a:t>
+            </a:r>
+          </a:p>
+        </p:txBody>
+      </p:sp>
     </p:spTree>
   </p:cSld>
   <p:clrMapOvr>
@@ -7886,7 +8375,7 @@
                 </a:solidFill>
                 <a:latin typeface="Calibri"/>
               </a:rPr>
-              <a:t>SECTION 1  ·  QUESTION 1 OF 5</a:t>
+              <a:t>SECTION 1  ·  QUESTION 1 OF 5  ·  ANSWER</a:t>
             </a:r>
           </a:p>
         </p:txBody>
@@ -7920,7 +8409,7 @@
                 </a:solidFill>
                 <a:latin typeface="Cambria"/>
               </a:rPr>
-              <a:t>Your turn</a:t>
+              <a:t>Check your answer</a:t>
             </a:r>
           </a:p>
         </p:txBody>
@@ -7989,7 +8478,7 @@
                 </a:solidFill>
                 <a:latin typeface="Calibri"/>
               </a:rPr>
-              <a:t>15 / 26</a:t>
+              <a:t>15 / 25</a:t>
             </a:r>
           </a:p>
         </p:txBody>
@@ -8003,7 +8492,7 @@
           <p:nvPr/>
         </p:nvPicPr>
         <p:blipFill>
-          <a:blip r:embed="rId3"/>
+          <a:blip r:embed="rId2"/>
           <a:stretch>
             <a:fillRect/>
           </a:stretch>
@@ -8060,8 +8549,8 @@
         </p:nvSpPr>
         <p:spPr>
           <a:xfrm>
-            <a:off x="548640" y="2697480"/>
-            <a:ext cx="11094415" cy="640080"/>
+            <a:off x="548640" y="2606040"/>
+            <a:ext cx="11094415" cy="548640"/>
           </a:xfrm>
           <a:prstGeom prst="roundRect">
             <a:avLst>
@@ -8069,7 +8558,7 @@
             </a:avLst>
           </a:prstGeom>
           <a:solidFill>
-            <a:srgbClr val="FAF4F2"/>
+            <a:srgbClr val="F5F4F4"/>
           </a:solidFill>
           <a:ln>
             <a:noFill/>
@@ -8106,14 +8595,14 @@
         </p:nvSpPr>
         <p:spPr>
           <a:xfrm>
-            <a:off x="713232" y="2807208"/>
+            <a:off x="713232" y="2670048"/>
             <a:ext cx="420624" cy="420624"/>
           </a:xfrm>
           <a:prstGeom prst="ellipse">
             <a:avLst/>
           </a:prstGeom>
           <a:solidFill>
-            <a:srgbClr val="A4472B"/>
+            <a:srgbClr val="E2E0DE"/>
           </a:solidFill>
           <a:ln>
             <a:noFill/>
@@ -8142,7 +8631,7 @@
             <a:r>
               <a:rPr sz="1500" i="0" b="1">
                 <a:solidFill>
-                  <a:srgbClr val="FFFFFF"/>
+                  <a:srgbClr val="6E625B"/>
                 </a:solidFill>
                 <a:latin typeface="Calibri"/>
               </a:rPr>
@@ -8159,8 +8648,8 @@
         </p:nvSpPr>
         <p:spPr>
           <a:xfrm>
-            <a:off x="1371600" y="2697480"/>
-            <a:ext cx="10088575" cy="640080"/>
+            <a:off x="1371600" y="2606040"/>
+            <a:ext cx="10088575" cy="548640"/>
           </a:xfrm>
           <a:prstGeom prst="rect">
             <a:avLst/>
@@ -8176,7 +8665,7 @@
             <a:r>
               <a:rPr sz="1900" i="0" b="0">
                 <a:solidFill>
-                  <a:srgbClr val="2B211C"/>
+                  <a:srgbClr val="6E625B"/>
                 </a:solidFill>
                 <a:latin typeface="Calibri"/>
               </a:rPr>
@@ -8193,8 +8682,8 @@
         </p:nvSpPr>
         <p:spPr>
           <a:xfrm>
-            <a:off x="548640" y="3465576"/>
-            <a:ext cx="11094415" cy="640080"/>
+            <a:off x="548640" y="3282696"/>
+            <a:ext cx="11094415" cy="548640"/>
           </a:xfrm>
           <a:prstGeom prst="roundRect">
             <a:avLst>
@@ -8202,7 +8691,7 @@
             </a:avLst>
           </a:prstGeom>
           <a:solidFill>
-            <a:srgbClr val="FAF4F2"/>
+            <a:srgbClr val="2F6F7A"/>
           </a:solidFill>
           <a:ln>
             <a:noFill/>
@@ -8239,14 +8728,14 @@
         </p:nvSpPr>
         <p:spPr>
           <a:xfrm>
-            <a:off x="713232" y="3575304"/>
+            <a:off x="713232" y="3346703"/>
             <a:ext cx="420624" cy="420624"/>
           </a:xfrm>
           <a:prstGeom prst="ellipse">
             <a:avLst/>
           </a:prstGeom>
           <a:solidFill>
-            <a:srgbClr val="A4472B"/>
+            <a:srgbClr val="FFFFFF"/>
           </a:solidFill>
           <a:ln>
             <a:noFill/>
@@ -8275,7 +8764,7 @@
             <a:r>
               <a:rPr sz="1500" i="0" b="1">
                 <a:solidFill>
-                  <a:srgbClr val="FFFFFF"/>
+                  <a:srgbClr val="2F6F7A"/>
                 </a:solidFill>
                 <a:latin typeface="Calibri"/>
               </a:rPr>
@@ -8292,8 +8781,8 @@
         </p:nvSpPr>
         <p:spPr>
           <a:xfrm>
-            <a:off x="1371600" y="3465576"/>
-            <a:ext cx="10088575" cy="640080"/>
+            <a:off x="1371600" y="3282696"/>
+            <a:ext cx="10088575" cy="548640"/>
           </a:xfrm>
           <a:prstGeom prst="rect">
             <a:avLst/>
@@ -8307,9 +8796,9 @@
           <a:lstStyle/>
           <a:p>
             <a:r>
-              <a:rPr sz="1900" i="0" b="0">
-                <a:solidFill>
-                  <a:srgbClr val="2B211C"/>
+              <a:rPr sz="1900" i="0" b="1">
+                <a:solidFill>
+                  <a:srgbClr val="FFFFFF"/>
                 </a:solidFill>
                 <a:latin typeface="Calibri"/>
               </a:rPr>
@@ -8326,8 +8815,8 @@
         </p:nvSpPr>
         <p:spPr>
           <a:xfrm>
-            <a:off x="548640" y="4233672"/>
-            <a:ext cx="11094415" cy="640080"/>
+            <a:off x="548640" y="3959352"/>
+            <a:ext cx="11094415" cy="548640"/>
           </a:xfrm>
           <a:prstGeom prst="roundRect">
             <a:avLst>
@@ -8335,7 +8824,7 @@
             </a:avLst>
           </a:prstGeom>
           <a:solidFill>
-            <a:srgbClr val="FAF4F2"/>
+            <a:srgbClr val="F5F4F4"/>
           </a:solidFill>
           <a:ln>
             <a:noFill/>
@@ -8372,14 +8861,14 @@
         </p:nvSpPr>
         <p:spPr>
           <a:xfrm>
-            <a:off x="713232" y="4343400"/>
+            <a:off x="713232" y="4023360"/>
             <a:ext cx="420624" cy="420624"/>
           </a:xfrm>
           <a:prstGeom prst="ellipse">
             <a:avLst/>
           </a:prstGeom>
           <a:solidFill>
-            <a:srgbClr val="A4472B"/>
+            <a:srgbClr val="E2E0DE"/>
           </a:solidFill>
           <a:ln>
             <a:noFill/>
@@ -8408,7 +8897,7 @@
             <a:r>
               <a:rPr sz="1500" i="0" b="1">
                 <a:solidFill>
-                  <a:srgbClr val="FFFFFF"/>
+                  <a:srgbClr val="6E625B"/>
                 </a:solidFill>
                 <a:latin typeface="Calibri"/>
               </a:rPr>
@@ -8425,8 +8914,8 @@
         </p:nvSpPr>
         <p:spPr>
           <a:xfrm>
-            <a:off x="1371600" y="4233672"/>
-            <a:ext cx="10088575" cy="640080"/>
+            <a:off x="1371600" y="3959352"/>
+            <a:ext cx="10088575" cy="548640"/>
           </a:xfrm>
           <a:prstGeom prst="rect">
             <a:avLst/>
@@ -8442,7 +8931,7 @@
             <a:r>
               <a:rPr sz="1900" i="0" b="0">
                 <a:solidFill>
-                  <a:srgbClr val="2B211C"/>
+                  <a:srgbClr val="6E625B"/>
                 </a:solidFill>
                 <a:latin typeface="Calibri"/>
               </a:rPr>
@@ -8459,8 +8948,8 @@
         </p:nvSpPr>
         <p:spPr>
           <a:xfrm>
-            <a:off x="548640" y="5001768"/>
-            <a:ext cx="11094415" cy="640080"/>
+            <a:off x="548640" y="4636008"/>
+            <a:ext cx="11094415" cy="548640"/>
           </a:xfrm>
           <a:prstGeom prst="roundRect">
             <a:avLst>
@@ -8468,7 +8957,7 @@
             </a:avLst>
           </a:prstGeom>
           <a:solidFill>
-            <a:srgbClr val="FAF4F2"/>
+            <a:srgbClr val="F5F4F4"/>
           </a:solidFill>
           <a:ln>
             <a:noFill/>
@@ -8505,14 +8994,14 @@
         </p:nvSpPr>
         <p:spPr>
           <a:xfrm>
-            <a:off x="713232" y="5111496"/>
+            <a:off x="713232" y="4700016"/>
             <a:ext cx="420624" cy="420624"/>
           </a:xfrm>
           <a:prstGeom prst="ellipse">
             <a:avLst/>
           </a:prstGeom>
           <a:solidFill>
-            <a:srgbClr val="A4472B"/>
+            <a:srgbClr val="E2E0DE"/>
           </a:solidFill>
           <a:ln>
             <a:noFill/>
@@ -8541,7 +9030,7 @@
             <a:r>
               <a:rPr sz="1500" i="0" b="1">
                 <a:solidFill>
-                  <a:srgbClr val="FFFFFF"/>
+                  <a:srgbClr val="6E625B"/>
                 </a:solidFill>
                 <a:latin typeface="Calibri"/>
               </a:rPr>
@@ -8558,8 +9047,8 @@
         </p:nvSpPr>
         <p:spPr>
           <a:xfrm>
-            <a:off x="1371600" y="5001768"/>
-            <a:ext cx="10088575" cy="640080"/>
+            <a:off x="1371600" y="4636008"/>
+            <a:ext cx="10088575" cy="548640"/>
           </a:xfrm>
           <a:prstGeom prst="rect">
             <a:avLst/>
@@ -8575,11 +9064,54 @@
             <a:r>
               <a:rPr sz="1900" i="0" b="0">
                 <a:solidFill>
+                  <a:srgbClr val="6E625B"/>
+                </a:solidFill>
+                <a:latin typeface="Calibri"/>
+              </a:rPr>
+              <a:t>Testing new medicines in patients</a:t>
+            </a:r>
+          </a:p>
+        </p:txBody>
+      </p:sp>
+      <p:sp>
+        <p:nvSpPr>
+          <p:cNvPr id="21" name="TextBox 20"/>
+          <p:cNvSpPr txBox="1"/>
+          <p:nvPr/>
+        </p:nvSpPr>
+        <p:spPr>
+          <a:xfrm>
+            <a:off x="548640" y="5358384"/>
+            <a:ext cx="11094415" cy="685800"/>
+          </a:xfrm>
+          <a:prstGeom prst="rect">
+            <a:avLst/>
+          </a:prstGeom>
+          <a:noFill/>
+        </p:spPr>
+        <p:txBody>
+          <a:bodyPr wrap="square" anchor="t" lIns="0" rIns="0" tIns="0" bIns="0">
+            <a:spAutoFit/>
+          </a:bodyPr>
+          <a:lstStyle/>
+          <a:p>
+            <a:r>
+              <a:rPr sz="1500" i="0" b="1">
+                <a:solidFill>
+                  <a:srgbClr val="2F6F7A"/>
+                </a:solidFill>
+                <a:latin typeface="Calibri"/>
+              </a:rPr>
+              <a:t>Why:  </a:t>
+            </a:r>
+            <a:r>
+              <a:rPr sz="1500" i="0" b="0">
+                <a:solidFill>
                   <a:srgbClr val="2B211C"/>
                 </a:solidFill>
                 <a:latin typeface="Calibri"/>
               </a:rPr>
-              <a:t>Testing new medicines in patients</a:t>
+              <a:t>This is the definition; it includes answers to the public. A, C and D are other activities.</a:t>
             </a:r>
           </a:p>
         </p:txBody>
@@ -8692,7 +9224,7 @@
                 </a:solidFill>
                 <a:latin typeface="Calibri"/>
               </a:rPr>
-              <a:t>SECTION 1  ·  QUESTION 1 OF 5  ·  ANSWER</a:t>
+              <a:t>SECTION 1  ·  QUESTION 2 OF 5</a:t>
             </a:r>
           </a:p>
         </p:txBody>
@@ -8726,7 +9258,7 @@
                 </a:solidFill>
                 <a:latin typeface="Cambria"/>
               </a:rPr>
-              <a:t>Check your answer</a:t>
+              <a:t>Your turn</a:t>
             </a:r>
           </a:p>
         </p:txBody>
@@ -8795,7 +9327,7 @@
                 </a:solidFill>
                 <a:latin typeface="Calibri"/>
               </a:rPr>
-              <a:t>16 / 26</a:t>
+              <a:t>16 / 25</a:t>
             </a:r>
           </a:p>
         </p:txBody>
@@ -8809,7 +9341,7 @@
           <p:nvPr/>
         </p:nvPicPr>
         <p:blipFill>
-          <a:blip r:embed="rId2"/>
+          <a:blip r:embed="rId3"/>
           <a:stretch>
             <a:fillRect/>
           </a:stretch>
@@ -8853,7 +9385,7 @@
                 </a:solidFill>
                 <a:latin typeface="Calibri"/>
               </a:rPr>
-              <a:t>Which is the best definition of a drug information service?</a:t>
+              <a:t>Which is NOT a usual activity of a drug information centre?</a:t>
             </a:r>
           </a:p>
         </p:txBody>
@@ -8866,8 +9398,8 @@
         </p:nvSpPr>
         <p:spPr>
           <a:xfrm>
-            <a:off x="548640" y="2606040"/>
-            <a:ext cx="11094415" cy="548640"/>
+            <a:off x="548640" y="2697480"/>
+            <a:ext cx="11094415" cy="640080"/>
           </a:xfrm>
           <a:prstGeom prst="roundRect">
             <a:avLst>
@@ -8875,7 +9407,7 @@
             </a:avLst>
           </a:prstGeom>
           <a:solidFill>
-            <a:srgbClr val="F5F4F4"/>
+            <a:srgbClr val="FAF4F2"/>
           </a:solidFill>
           <a:ln>
             <a:noFill/>
@@ -8912,14 +9444,14 @@
         </p:nvSpPr>
         <p:spPr>
           <a:xfrm>
-            <a:off x="713232" y="2670048"/>
+            <a:off x="713232" y="2807208"/>
             <a:ext cx="420624" cy="420624"/>
           </a:xfrm>
           <a:prstGeom prst="ellipse">
             <a:avLst/>
           </a:prstGeom>
           <a:solidFill>
-            <a:srgbClr val="E2E0DE"/>
+            <a:srgbClr val="A4472B"/>
           </a:solidFill>
           <a:ln>
             <a:noFill/>
@@ -8948,7 +9480,7 @@
             <a:r>
               <a:rPr sz="1500" i="0" b="1">
                 <a:solidFill>
-                  <a:srgbClr val="6E625B"/>
+                  <a:srgbClr val="FFFFFF"/>
                 </a:solidFill>
                 <a:latin typeface="Calibri"/>
               </a:rPr>
@@ -8965,8 +9497,8 @@
         </p:nvSpPr>
         <p:spPr>
           <a:xfrm>
-            <a:off x="1371600" y="2606040"/>
-            <a:ext cx="10088575" cy="548640"/>
+            <a:off x="1371600" y="2697480"/>
+            <a:ext cx="10088575" cy="640080"/>
           </a:xfrm>
           <a:prstGeom prst="rect">
             <a:avLst/>
@@ -8982,11 +9514,11 @@
             <a:r>
               <a:rPr sz="1900" i="0" b="0">
                 <a:solidFill>
-                  <a:srgbClr val="6E625B"/>
-                </a:solidFill>
-                <a:latin typeface="Calibri"/>
-              </a:rPr>
-              <a:t>Selling medicines with written leaflets</a:t>
+                  <a:srgbClr val="2B211C"/>
+                </a:solidFill>
+                <a:latin typeface="Calibri"/>
+              </a:rPr>
+              <a:t>Answering questions about interactions</a:t>
             </a:r>
           </a:p>
         </p:txBody>
@@ -8999,8 +9531,8 @@
         </p:nvSpPr>
         <p:spPr>
           <a:xfrm>
-            <a:off x="548640" y="3282696"/>
-            <a:ext cx="11094415" cy="548640"/>
+            <a:off x="548640" y="3465576"/>
+            <a:ext cx="11094415" cy="640080"/>
           </a:xfrm>
           <a:prstGeom prst="roundRect">
             <a:avLst>
@@ -9008,7 +9540,7 @@
             </a:avLst>
           </a:prstGeom>
           <a:solidFill>
-            <a:srgbClr val="2F6F7A"/>
+            <a:srgbClr val="FAF4F2"/>
           </a:solidFill>
           <a:ln>
             <a:noFill/>
@@ -9045,14 +9577,14 @@
         </p:nvSpPr>
         <p:spPr>
           <a:xfrm>
-            <a:off x="713232" y="3346703"/>
+            <a:off x="713232" y="3575304"/>
             <a:ext cx="420624" cy="420624"/>
           </a:xfrm>
           <a:prstGeom prst="ellipse">
             <a:avLst/>
           </a:prstGeom>
           <a:solidFill>
-            <a:srgbClr val="FFFFFF"/>
+            <a:srgbClr val="A4472B"/>
           </a:solidFill>
           <a:ln>
             <a:noFill/>
@@ -9081,7 +9613,7 @@
             <a:r>
               <a:rPr sz="1500" i="0" b="1">
                 <a:solidFill>
-                  <a:srgbClr val="2F6F7A"/>
+                  <a:srgbClr val="FFFFFF"/>
                 </a:solidFill>
                 <a:latin typeface="Calibri"/>
               </a:rPr>
@@ -9098,8 +9630,8 @@
         </p:nvSpPr>
         <p:spPr>
           <a:xfrm>
-            <a:off x="1371600" y="3282696"/>
-            <a:ext cx="10088575" cy="548640"/>
+            <a:off x="1371600" y="3465576"/>
+            <a:ext cx="10088575" cy="640080"/>
           </a:xfrm>
           <a:prstGeom prst="rect">
             <a:avLst/>
@@ -9113,13 +9645,13 @@
           <a:lstStyle/>
           <a:p>
             <a:r>
-              <a:rPr sz="1900" i="0" b="1">
-                <a:solidFill>
-                  <a:srgbClr val="FFFFFF"/>
-                </a:solidFill>
-                <a:latin typeface="Calibri"/>
-              </a:rPr>
-              <a:t>Giving accurate, unbiased answers about medicines to health professionals and the public</a:t>
+              <a:rPr sz="1900" i="0" b="0">
+                <a:solidFill>
+                  <a:srgbClr val="2B211C"/>
+                </a:solidFill>
+                <a:latin typeface="Calibri"/>
+              </a:rPr>
+              <a:t>Supporting the Drug and Therapeutics Committee</a:t>
             </a:r>
           </a:p>
         </p:txBody>
@@ -9132,8 +9664,8 @@
         </p:nvSpPr>
         <p:spPr>
           <a:xfrm>
-            <a:off x="548640" y="3959352"/>
-            <a:ext cx="11094415" cy="548640"/>
+            <a:off x="548640" y="4233672"/>
+            <a:ext cx="11094415" cy="640080"/>
           </a:xfrm>
           <a:prstGeom prst="roundRect">
             <a:avLst>
@@ -9141,7 +9673,7 @@
             </a:avLst>
           </a:prstGeom>
           <a:solidFill>
-            <a:srgbClr val="F5F4F4"/>
+            <a:srgbClr val="FAF4F2"/>
           </a:solidFill>
           <a:ln>
             <a:noFill/>
@@ -9178,14 +9710,14 @@
         </p:nvSpPr>
         <p:spPr>
           <a:xfrm>
-            <a:off x="713232" y="4023360"/>
+            <a:off x="713232" y="4343400"/>
             <a:ext cx="420624" cy="420624"/>
           </a:xfrm>
           <a:prstGeom prst="ellipse">
             <a:avLst/>
           </a:prstGeom>
           <a:solidFill>
-            <a:srgbClr val="E2E0DE"/>
+            <a:srgbClr val="A4472B"/>
           </a:solidFill>
           <a:ln>
             <a:noFill/>
@@ -9214,7 +9746,7 @@
             <a:r>
               <a:rPr sz="1500" i="0" b="1">
                 <a:solidFill>
-                  <a:srgbClr val="6E625B"/>
+                  <a:srgbClr val="FFFFFF"/>
                 </a:solidFill>
                 <a:latin typeface="Calibri"/>
               </a:rPr>
@@ -9231,8 +9763,8 @@
         </p:nvSpPr>
         <p:spPr>
           <a:xfrm>
-            <a:off x="1371600" y="3959352"/>
-            <a:ext cx="10088575" cy="548640"/>
+            <a:off x="1371600" y="4233672"/>
+            <a:ext cx="10088575" cy="640080"/>
           </a:xfrm>
           <a:prstGeom prst="rect">
             <a:avLst/>
@@ -9248,11 +9780,11 @@
             <a:r>
               <a:rPr sz="1900" i="0" b="0">
                 <a:solidFill>
-                  <a:srgbClr val="6E625B"/>
-                </a:solidFill>
-                <a:latin typeface="Calibri"/>
-              </a:rPr>
-              <a:t>Advertising new medicines to doctors</a:t>
+                  <a:srgbClr val="2B211C"/>
+                </a:solidFill>
+                <a:latin typeface="Calibri"/>
+              </a:rPr>
+              <a:t>Manufacturing medicines</a:t>
             </a:r>
           </a:p>
         </p:txBody>
@@ -9265,8 +9797,8 @@
         </p:nvSpPr>
         <p:spPr>
           <a:xfrm>
-            <a:off x="548640" y="4636008"/>
-            <a:ext cx="11094415" cy="548640"/>
+            <a:off x="548640" y="5001768"/>
+            <a:ext cx="11094415" cy="640080"/>
           </a:xfrm>
           <a:prstGeom prst="roundRect">
             <a:avLst>
@@ -9274,7 +9806,7 @@
             </a:avLst>
           </a:prstGeom>
           <a:solidFill>
-            <a:srgbClr val="F5F4F4"/>
+            <a:srgbClr val="FAF4F2"/>
           </a:solidFill>
           <a:ln>
             <a:noFill/>
@@ -9311,14 +9843,14 @@
         </p:nvSpPr>
         <p:spPr>
           <a:xfrm>
-            <a:off x="713232" y="4700016"/>
+            <a:off x="713232" y="5111496"/>
             <a:ext cx="420624" cy="420624"/>
           </a:xfrm>
           <a:prstGeom prst="ellipse">
             <a:avLst/>
           </a:prstGeom>
           <a:solidFill>
-            <a:srgbClr val="E2E0DE"/>
+            <a:srgbClr val="A4472B"/>
           </a:solidFill>
           <a:ln>
             <a:noFill/>
@@ -9347,7 +9879,7 @@
             <a:r>
               <a:rPr sz="1500" i="0" b="1">
                 <a:solidFill>
-                  <a:srgbClr val="6E625B"/>
+                  <a:srgbClr val="FFFFFF"/>
                 </a:solidFill>
                 <a:latin typeface="Calibri"/>
               </a:rPr>
@@ -9364,8 +9896,8 @@
         </p:nvSpPr>
         <p:spPr>
           <a:xfrm>
-            <a:off x="1371600" y="4636008"/>
-            <a:ext cx="10088575" cy="548640"/>
+            <a:off x="1371600" y="5001768"/>
+            <a:ext cx="10088575" cy="640080"/>
           </a:xfrm>
           <a:prstGeom prst="rect">
             <a:avLst/>
@@ -9381,54 +9913,11 @@
             <a:r>
               <a:rPr sz="1900" i="0" b="0">
                 <a:solidFill>
-                  <a:srgbClr val="6E625B"/>
-                </a:solidFill>
-                <a:latin typeface="Calibri"/>
-              </a:rPr>
-              <a:t>Testing new medicines in patients</a:t>
-            </a:r>
-          </a:p>
-        </p:txBody>
-      </p:sp>
-      <p:sp>
-        <p:nvSpPr>
-          <p:cNvPr id="21" name="TextBox 20"/>
-          <p:cNvSpPr txBox="1"/>
-          <p:nvPr/>
-        </p:nvSpPr>
-        <p:spPr>
-          <a:xfrm>
-            <a:off x="548640" y="5358384"/>
-            <a:ext cx="11094415" cy="685800"/>
-          </a:xfrm>
-          <a:prstGeom prst="rect">
-            <a:avLst/>
-          </a:prstGeom>
-          <a:noFill/>
-        </p:spPr>
-        <p:txBody>
-          <a:bodyPr wrap="square" anchor="t" lIns="0" rIns="0" tIns="0" bIns="0">
-            <a:spAutoFit/>
-          </a:bodyPr>
-          <a:lstStyle/>
-          <a:p>
-            <a:r>
-              <a:rPr sz="1500" i="0" b="1">
-                <a:solidFill>
-                  <a:srgbClr val="2F6F7A"/>
-                </a:solidFill>
-                <a:latin typeface="Calibri"/>
-              </a:rPr>
-              <a:t>Why:  </a:t>
-            </a:r>
-            <a:r>
-              <a:rPr sz="1500" i="0" b="0">
-                <a:solidFill>
                   <a:srgbClr val="2B211C"/>
                 </a:solidFill>
                 <a:latin typeface="Calibri"/>
               </a:rPr>
-              <a:t>This is the definition; it includes answers to the public. A, C and D are other activities.</a:t>
+              <a:t>Collecting adverse drug reaction reports</a:t>
             </a:r>
           </a:p>
         </p:txBody>
@@ -9541,7 +10030,7 @@
                 </a:solidFill>
                 <a:latin typeface="Calibri"/>
               </a:rPr>
-              <a:t>SECTION 1  ·  QUESTION 2 OF 5</a:t>
+              <a:t>SECTION 1  ·  QUESTION 2 OF 5  ·  ANSWER</a:t>
             </a:r>
           </a:p>
         </p:txBody>
@@ -9575,7 +10064,7 @@
                 </a:solidFill>
                 <a:latin typeface="Cambria"/>
               </a:rPr>
-              <a:t>Your turn</a:t>
+              <a:t>Check your answer</a:t>
             </a:r>
           </a:p>
         </p:txBody>
@@ -9644,7 +10133,7 @@
                 </a:solidFill>
                 <a:latin typeface="Calibri"/>
               </a:rPr>
-              <a:t>17 / 26</a:t>
+              <a:t>17 / 25</a:t>
             </a:r>
           </a:p>
         </p:txBody>
@@ -9658,7 +10147,7 @@
           <p:nvPr/>
         </p:nvPicPr>
         <p:blipFill>
-          <a:blip r:embed="rId3"/>
+          <a:blip r:embed="rId2"/>
           <a:stretch>
             <a:fillRect/>
           </a:stretch>
@@ -9715,8 +10204,8 @@
         </p:nvSpPr>
         <p:spPr>
           <a:xfrm>
-            <a:off x="548640" y="2697480"/>
-            <a:ext cx="11094415" cy="640080"/>
+            <a:off x="548640" y="2606040"/>
+            <a:ext cx="11094415" cy="548640"/>
           </a:xfrm>
           <a:prstGeom prst="roundRect">
             <a:avLst>
@@ -9724,7 +10213,7 @@
             </a:avLst>
           </a:prstGeom>
           <a:solidFill>
-            <a:srgbClr val="FAF4F2"/>
+            <a:srgbClr val="F5F4F4"/>
           </a:solidFill>
           <a:ln>
             <a:noFill/>
@@ -9761,14 +10250,14 @@
         </p:nvSpPr>
         <p:spPr>
           <a:xfrm>
-            <a:off x="713232" y="2807208"/>
+            <a:off x="713232" y="2670048"/>
             <a:ext cx="420624" cy="420624"/>
           </a:xfrm>
           <a:prstGeom prst="ellipse">
             <a:avLst/>
           </a:prstGeom>
           <a:solidFill>
-            <a:srgbClr val="A4472B"/>
+            <a:srgbClr val="E2E0DE"/>
           </a:solidFill>
           <a:ln>
             <a:noFill/>
@@ -9797,7 +10286,7 @@
             <a:r>
               <a:rPr sz="1500" i="0" b="1">
                 <a:solidFill>
-                  <a:srgbClr val="FFFFFF"/>
+                  <a:srgbClr val="6E625B"/>
                 </a:solidFill>
                 <a:latin typeface="Calibri"/>
               </a:rPr>
@@ -9814,8 +10303,8 @@
         </p:nvSpPr>
         <p:spPr>
           <a:xfrm>
-            <a:off x="1371600" y="2697480"/>
-            <a:ext cx="10088575" cy="640080"/>
+            <a:off x="1371600" y="2606040"/>
+            <a:ext cx="10088575" cy="548640"/>
           </a:xfrm>
           <a:prstGeom prst="rect">
             <a:avLst/>
@@ -9831,7 +10320,7 @@
             <a:r>
               <a:rPr sz="1900" i="0" b="0">
                 <a:solidFill>
-                  <a:srgbClr val="2B211C"/>
+                  <a:srgbClr val="6E625B"/>
                 </a:solidFill>
                 <a:latin typeface="Calibri"/>
               </a:rPr>
@@ -9848,8 +10337,8 @@
         </p:nvSpPr>
         <p:spPr>
           <a:xfrm>
-            <a:off x="548640" y="3465576"/>
-            <a:ext cx="11094415" cy="640080"/>
+            <a:off x="548640" y="3282696"/>
+            <a:ext cx="11094415" cy="548640"/>
           </a:xfrm>
           <a:prstGeom prst="roundRect">
             <a:avLst>
@@ -9857,7 +10346,7 @@
             </a:avLst>
           </a:prstGeom>
           <a:solidFill>
-            <a:srgbClr val="FAF4F2"/>
+            <a:srgbClr val="F5F4F4"/>
           </a:solidFill>
           <a:ln>
             <a:noFill/>
@@ -9894,14 +10383,14 @@
         </p:nvSpPr>
         <p:spPr>
           <a:xfrm>
-            <a:off x="713232" y="3575304"/>
+            <a:off x="713232" y="3346703"/>
             <a:ext cx="420624" cy="420624"/>
           </a:xfrm>
           <a:prstGeom prst="ellipse">
             <a:avLst/>
           </a:prstGeom>
           <a:solidFill>
-            <a:srgbClr val="A4472B"/>
+            <a:srgbClr val="E2E0DE"/>
           </a:solidFill>
           <a:ln>
             <a:noFill/>
@@ -9930,7 +10419,7 @@
             <a:r>
               <a:rPr sz="1500" i="0" b="1">
                 <a:solidFill>
-                  <a:srgbClr val="FFFFFF"/>
+                  <a:srgbClr val="6E625B"/>
                 </a:solidFill>
                 <a:latin typeface="Calibri"/>
               </a:rPr>
@@ -9947,8 +10436,8 @@
         </p:nvSpPr>
         <p:spPr>
           <a:xfrm>
-            <a:off x="1371600" y="3465576"/>
-            <a:ext cx="10088575" cy="640080"/>
+            <a:off x="1371600" y="3282696"/>
+            <a:ext cx="10088575" cy="548640"/>
           </a:xfrm>
           <a:prstGeom prst="rect">
             <a:avLst/>
@@ -9964,7 +10453,7 @@
             <a:r>
               <a:rPr sz="1900" i="0" b="0">
                 <a:solidFill>
-                  <a:srgbClr val="2B211C"/>
+                  <a:srgbClr val="6E625B"/>
                 </a:solidFill>
                 <a:latin typeface="Calibri"/>
               </a:rPr>
@@ -9981,8 +10470,8 @@
         </p:nvSpPr>
         <p:spPr>
           <a:xfrm>
-            <a:off x="548640" y="4233672"/>
-            <a:ext cx="11094415" cy="640080"/>
+            <a:off x="548640" y="3959352"/>
+            <a:ext cx="11094415" cy="548640"/>
           </a:xfrm>
           <a:prstGeom prst="roundRect">
             <a:avLst>
@@ -9990,7 +10479,7 @@
             </a:avLst>
           </a:prstGeom>
           <a:solidFill>
-            <a:srgbClr val="FAF4F2"/>
+            <a:srgbClr val="2F6F7A"/>
           </a:solidFill>
           <a:ln>
             <a:noFill/>
@@ -10027,14 +10516,14 @@
         </p:nvSpPr>
         <p:spPr>
           <a:xfrm>
-            <a:off x="713232" y="4343400"/>
+            <a:off x="713232" y="4023360"/>
             <a:ext cx="420624" cy="420624"/>
           </a:xfrm>
           <a:prstGeom prst="ellipse">
             <a:avLst/>
           </a:prstGeom>
           <a:solidFill>
-            <a:srgbClr val="A4472B"/>
+            <a:srgbClr val="FFFFFF"/>
           </a:solidFill>
           <a:ln>
             <a:noFill/>
@@ -10063,7 +10552,7 @@
             <a:r>
               <a:rPr sz="1500" i="0" b="1">
                 <a:solidFill>
-                  <a:srgbClr val="FFFFFF"/>
+                  <a:srgbClr val="2F6F7A"/>
                 </a:solidFill>
                 <a:latin typeface="Calibri"/>
               </a:rPr>
@@ -10080,8 +10569,8 @@
         </p:nvSpPr>
         <p:spPr>
           <a:xfrm>
-            <a:off x="1371600" y="4233672"/>
-            <a:ext cx="10088575" cy="640080"/>
+            <a:off x="1371600" y="3959352"/>
+            <a:ext cx="10088575" cy="548640"/>
           </a:xfrm>
           <a:prstGeom prst="rect">
             <a:avLst/>
@@ -10095,9 +10584,9 @@
           <a:lstStyle/>
           <a:p>
             <a:r>
-              <a:rPr sz="1900" i="0" b="0">
-                <a:solidFill>
-                  <a:srgbClr val="2B211C"/>
+              <a:rPr sz="1900" i="0" b="1">
+                <a:solidFill>
+                  <a:srgbClr val="FFFFFF"/>
                 </a:solidFill>
                 <a:latin typeface="Calibri"/>
               </a:rPr>
@@ -10114,8 +10603,8 @@
         </p:nvSpPr>
         <p:spPr>
           <a:xfrm>
-            <a:off x="548640" y="5001768"/>
-            <a:ext cx="11094415" cy="640080"/>
+            <a:off x="548640" y="4636008"/>
+            <a:ext cx="11094415" cy="548640"/>
           </a:xfrm>
           <a:prstGeom prst="roundRect">
             <a:avLst>
@@ -10123,7 +10612,7 @@
             </a:avLst>
           </a:prstGeom>
           <a:solidFill>
-            <a:srgbClr val="FAF4F2"/>
+            <a:srgbClr val="F5F4F4"/>
           </a:solidFill>
           <a:ln>
             <a:noFill/>
@@ -10160,14 +10649,14 @@
         </p:nvSpPr>
         <p:spPr>
           <a:xfrm>
-            <a:off x="713232" y="5111496"/>
+            <a:off x="713232" y="4700016"/>
             <a:ext cx="420624" cy="420624"/>
           </a:xfrm>
           <a:prstGeom prst="ellipse">
             <a:avLst/>
           </a:prstGeom>
           <a:solidFill>
-            <a:srgbClr val="A4472B"/>
+            <a:srgbClr val="E2E0DE"/>
           </a:solidFill>
           <a:ln>
             <a:noFill/>
@@ -10196,7 +10685,7 @@
             <a:r>
               <a:rPr sz="1500" i="0" b="1">
                 <a:solidFill>
-                  <a:srgbClr val="FFFFFF"/>
+                  <a:srgbClr val="6E625B"/>
                 </a:solidFill>
                 <a:latin typeface="Calibri"/>
               </a:rPr>
@@ -10213,8 +10702,8 @@
         </p:nvSpPr>
         <p:spPr>
           <a:xfrm>
-            <a:off x="1371600" y="5001768"/>
-            <a:ext cx="10088575" cy="640080"/>
+            <a:off x="1371600" y="4636008"/>
+            <a:ext cx="10088575" cy="548640"/>
           </a:xfrm>
           <a:prstGeom prst="rect">
             <a:avLst/>
@@ -10230,11 +10719,54 @@
             <a:r>
               <a:rPr sz="1900" i="0" b="0">
                 <a:solidFill>
+                  <a:srgbClr val="6E625B"/>
+                </a:solidFill>
+                <a:latin typeface="Calibri"/>
+              </a:rPr>
+              <a:t>Collecting adverse drug reaction reports</a:t>
+            </a:r>
+          </a:p>
+        </p:txBody>
+      </p:sp>
+      <p:sp>
+        <p:nvSpPr>
+          <p:cNvPr id="21" name="TextBox 20"/>
+          <p:cNvSpPr txBox="1"/>
+          <p:nvPr/>
+        </p:nvSpPr>
+        <p:spPr>
+          <a:xfrm>
+            <a:off x="548640" y="5358384"/>
+            <a:ext cx="11094415" cy="685800"/>
+          </a:xfrm>
+          <a:prstGeom prst="rect">
+            <a:avLst/>
+          </a:prstGeom>
+          <a:noFill/>
+        </p:spPr>
+        <p:txBody>
+          <a:bodyPr wrap="square" anchor="t" lIns="0" rIns="0" tIns="0" bIns="0">
+            <a:spAutoFit/>
+          </a:bodyPr>
+          <a:lstStyle/>
+          <a:p>
+            <a:r>
+              <a:rPr sz="1500" i="0" b="1">
+                <a:solidFill>
+                  <a:srgbClr val="2F6F7A"/>
+                </a:solidFill>
+                <a:latin typeface="Calibri"/>
+              </a:rPr>
+              <a:t>Why:  </a:t>
+            </a:r>
+            <a:r>
+              <a:rPr sz="1500" i="0" b="0">
+                <a:solidFill>
                   <a:srgbClr val="2B211C"/>
                 </a:solidFill>
                 <a:latin typeface="Calibri"/>
               </a:rPr>
-              <a:t>Collecting adverse drug reaction reports</a:t>
+              <a:t>A DIC gives information; it does not make medicines. A, B and D are core DIC work.</a:t>
             </a:r>
           </a:p>
         </p:txBody>
@@ -10347,7 +10879,7 @@
                 </a:solidFill>
                 <a:latin typeface="Calibri"/>
               </a:rPr>
-              <a:t>SECTION 1  ·  QUESTION 2 OF 5  ·  ANSWER</a:t>
+              <a:t>SECTION 1  ·  QUESTION 3 OF 5</a:t>
             </a:r>
           </a:p>
         </p:txBody>
@@ -10381,7 +10913,7 @@
                 </a:solidFill>
                 <a:latin typeface="Cambria"/>
               </a:rPr>
-              <a:t>Check your answer</a:t>
+              <a:t>Your turn</a:t>
             </a:r>
           </a:p>
         </p:txBody>
@@ -10450,7 +10982,7 @@
                 </a:solidFill>
                 <a:latin typeface="Calibri"/>
               </a:rPr>
-              <a:t>18 / 26</a:t>
+              <a:t>18 / 25</a:t>
             </a:r>
           </a:p>
         </p:txBody>
@@ -10464,7 +10996,7 @@
           <p:nvPr/>
         </p:nvPicPr>
         <p:blipFill>
-          <a:blip r:embed="rId2"/>
+          <a:blip r:embed="rId3"/>
           <a:stretch>
             <a:fillRect/>
           </a:stretch>
@@ -10508,7 +11040,7 @@
                 </a:solidFill>
                 <a:latin typeface="Calibri"/>
               </a:rPr>
-              <a:t>Which is NOT a usual activity of a drug information centre?</a:t>
+              <a:t>Why is information from drug companies used with care?</a:t>
             </a:r>
           </a:p>
         </p:txBody>
@@ -10521,8 +11053,8 @@
         </p:nvSpPr>
         <p:spPr>
           <a:xfrm>
-            <a:off x="548640" y="2606040"/>
-            <a:ext cx="11094415" cy="548640"/>
+            <a:off x="548640" y="2697480"/>
+            <a:ext cx="11094415" cy="640080"/>
           </a:xfrm>
           <a:prstGeom prst="roundRect">
             <a:avLst>
@@ -10530,7 +11062,7 @@
             </a:avLst>
           </a:prstGeom>
           <a:solidFill>
-            <a:srgbClr val="F5F4F4"/>
+            <a:srgbClr val="FAF4F2"/>
           </a:solidFill>
           <a:ln>
             <a:noFill/>
@@ -10567,14 +11099,14 @@
         </p:nvSpPr>
         <p:spPr>
           <a:xfrm>
-            <a:off x="713232" y="2670048"/>
+            <a:off x="713232" y="2807208"/>
             <a:ext cx="420624" cy="420624"/>
           </a:xfrm>
           <a:prstGeom prst="ellipse">
             <a:avLst/>
           </a:prstGeom>
           <a:solidFill>
-            <a:srgbClr val="E2E0DE"/>
+            <a:srgbClr val="A4472B"/>
           </a:solidFill>
           <a:ln>
             <a:noFill/>
@@ -10603,7 +11135,7 @@
             <a:r>
               <a:rPr sz="1500" i="0" b="1">
                 <a:solidFill>
-                  <a:srgbClr val="6E625B"/>
+                  <a:srgbClr val="FFFFFF"/>
                 </a:solidFill>
                 <a:latin typeface="Calibri"/>
               </a:rPr>
@@ -10620,8 +11152,8 @@
         </p:nvSpPr>
         <p:spPr>
           <a:xfrm>
-            <a:off x="1371600" y="2606040"/>
-            <a:ext cx="10088575" cy="548640"/>
+            <a:off x="1371600" y="2697480"/>
+            <a:ext cx="10088575" cy="640080"/>
           </a:xfrm>
           <a:prstGeom prst="rect">
             <a:avLst/>
@@ -10637,11 +11169,11 @@
             <a:r>
               <a:rPr sz="1900" i="0" b="0">
                 <a:solidFill>
-                  <a:srgbClr val="6E625B"/>
-                </a:solidFill>
-                <a:latin typeface="Calibri"/>
-              </a:rPr>
-              <a:t>Answering questions about interactions</a:t>
+                  <a:srgbClr val="2B211C"/>
+                </a:solidFill>
+                <a:latin typeface="Calibri"/>
+              </a:rPr>
+              <a:t>It may be biased</a:t>
             </a:r>
           </a:p>
         </p:txBody>
@@ -10654,8 +11186,8 @@
         </p:nvSpPr>
         <p:spPr>
           <a:xfrm>
-            <a:off x="548640" y="3282696"/>
-            <a:ext cx="11094415" cy="548640"/>
+            <a:off x="548640" y="3465576"/>
+            <a:ext cx="11094415" cy="640080"/>
           </a:xfrm>
           <a:prstGeom prst="roundRect">
             <a:avLst>
@@ -10663,7 +11195,7 @@
             </a:avLst>
           </a:prstGeom>
           <a:solidFill>
-            <a:srgbClr val="F5F4F4"/>
+            <a:srgbClr val="FAF4F2"/>
           </a:solidFill>
           <a:ln>
             <a:noFill/>
@@ -10700,14 +11232,14 @@
         </p:nvSpPr>
         <p:spPr>
           <a:xfrm>
-            <a:off x="713232" y="3346703"/>
+            <a:off x="713232" y="3575304"/>
             <a:ext cx="420624" cy="420624"/>
           </a:xfrm>
           <a:prstGeom prst="ellipse">
             <a:avLst/>
           </a:prstGeom>
           <a:solidFill>
-            <a:srgbClr val="E2E0DE"/>
+            <a:srgbClr val="A4472B"/>
           </a:solidFill>
           <a:ln>
             <a:noFill/>
@@ -10736,7 +11268,7 @@
             <a:r>
               <a:rPr sz="1500" i="0" b="1">
                 <a:solidFill>
-                  <a:srgbClr val="6E625B"/>
+                  <a:srgbClr val="FFFFFF"/>
                 </a:solidFill>
                 <a:latin typeface="Calibri"/>
               </a:rPr>
@@ -10753,8 +11285,8 @@
         </p:nvSpPr>
         <p:spPr>
           <a:xfrm>
-            <a:off x="1371600" y="3282696"/>
-            <a:ext cx="10088575" cy="548640"/>
+            <a:off x="1371600" y="3465576"/>
+            <a:ext cx="10088575" cy="640080"/>
           </a:xfrm>
           <a:prstGeom prst="rect">
             <a:avLst/>
@@ -10770,11 +11302,11 @@
             <a:r>
               <a:rPr sz="1900" i="0" b="0">
                 <a:solidFill>
-                  <a:srgbClr val="6E625B"/>
-                </a:solidFill>
-                <a:latin typeface="Calibri"/>
-              </a:rPr>
-              <a:t>Supporting the Drug and Therapeutics Committee</a:t>
+                  <a:srgbClr val="2B211C"/>
+                </a:solidFill>
+                <a:latin typeface="Calibri"/>
+              </a:rPr>
+              <a:t>It is always out of date</a:t>
             </a:r>
           </a:p>
         </p:txBody>
@@ -10787,8 +11319,8 @@
         </p:nvSpPr>
         <p:spPr>
           <a:xfrm>
-            <a:off x="548640" y="3959352"/>
-            <a:ext cx="11094415" cy="548640"/>
+            <a:off x="548640" y="4233672"/>
+            <a:ext cx="11094415" cy="640080"/>
           </a:xfrm>
           <a:prstGeom prst="roundRect">
             <a:avLst>
@@ -10796,7 +11328,7 @@
             </a:avLst>
           </a:prstGeom>
           <a:solidFill>
-            <a:srgbClr val="2F6F7A"/>
+            <a:srgbClr val="FAF4F2"/>
           </a:solidFill>
           <a:ln>
             <a:noFill/>
@@ -10833,14 +11365,14 @@
         </p:nvSpPr>
         <p:spPr>
           <a:xfrm>
-            <a:off x="713232" y="4023360"/>
+            <a:off x="713232" y="4343400"/>
             <a:ext cx="420624" cy="420624"/>
           </a:xfrm>
           <a:prstGeom prst="ellipse">
             <a:avLst/>
           </a:prstGeom>
           <a:solidFill>
-            <a:srgbClr val="FFFFFF"/>
+            <a:srgbClr val="A4472B"/>
           </a:solidFill>
           <a:ln>
             <a:noFill/>
@@ -10869,7 +11401,7 @@
             <a:r>
               <a:rPr sz="1500" i="0" b="1">
                 <a:solidFill>
-                  <a:srgbClr val="2F6F7A"/>
+                  <a:srgbClr val="FFFFFF"/>
                 </a:solidFill>
                 <a:latin typeface="Calibri"/>
               </a:rPr>
@@ -10886,8 +11418,8 @@
         </p:nvSpPr>
         <p:spPr>
           <a:xfrm>
-            <a:off x="1371600" y="3959352"/>
-            <a:ext cx="10088575" cy="548640"/>
+            <a:off x="1371600" y="4233672"/>
+            <a:ext cx="10088575" cy="640080"/>
           </a:xfrm>
           <a:prstGeom prst="rect">
             <a:avLst/>
@@ -10901,13 +11433,13 @@
           <a:lstStyle/>
           <a:p>
             <a:r>
-              <a:rPr sz="1900" i="0" b="1">
-                <a:solidFill>
-                  <a:srgbClr val="FFFFFF"/>
-                </a:solidFill>
-                <a:latin typeface="Calibri"/>
-              </a:rPr>
-              <a:t>Manufacturing medicines</a:t>
+              <a:rPr sz="1900" i="0" b="0">
+                <a:solidFill>
+                  <a:srgbClr val="2B211C"/>
+                </a:solidFill>
+                <a:latin typeface="Calibri"/>
+              </a:rPr>
+              <a:t>It is never referenced</a:t>
             </a:r>
           </a:p>
         </p:txBody>
@@ -10920,8 +11452,8 @@
         </p:nvSpPr>
         <p:spPr>
           <a:xfrm>
-            <a:off x="548640" y="4636008"/>
-            <a:ext cx="11094415" cy="548640"/>
+            <a:off x="548640" y="5001768"/>
+            <a:ext cx="11094415" cy="640080"/>
           </a:xfrm>
           <a:prstGeom prst="roundRect">
             <a:avLst>
@@ -10929,7 +11461,7 @@
             </a:avLst>
           </a:prstGeom>
           <a:solidFill>
-            <a:srgbClr val="F5F4F4"/>
+            <a:srgbClr val="FAF4F2"/>
           </a:solidFill>
           <a:ln>
             <a:noFill/>
@@ -10966,14 +11498,14 @@
         </p:nvSpPr>
         <p:spPr>
           <a:xfrm>
-            <a:off x="713232" y="4700016"/>
+            <a:off x="713232" y="5111496"/>
             <a:ext cx="420624" cy="420624"/>
           </a:xfrm>
           <a:prstGeom prst="ellipse">
             <a:avLst/>
           </a:prstGeom>
           <a:solidFill>
-            <a:srgbClr val="E2E0DE"/>
+            <a:srgbClr val="A4472B"/>
           </a:solidFill>
           <a:ln>
             <a:noFill/>
@@ -11002,7 +11534,7 @@
             <a:r>
               <a:rPr sz="1500" i="0" b="1">
                 <a:solidFill>
-                  <a:srgbClr val="6E625B"/>
+                  <a:srgbClr val="FFFFFF"/>
                 </a:solidFill>
                 <a:latin typeface="Calibri"/>
               </a:rPr>
@@ -11019,8 +11551,8 @@
         </p:nvSpPr>
         <p:spPr>
           <a:xfrm>
-            <a:off x="1371600" y="4636008"/>
-            <a:ext cx="10088575" cy="548640"/>
+            <a:off x="1371600" y="5001768"/>
+            <a:ext cx="10088575" cy="640080"/>
           </a:xfrm>
           <a:prstGeom prst="rect">
             <a:avLst/>
@@ -11036,54 +11568,11 @@
             <a:r>
               <a:rPr sz="1900" i="0" b="0">
                 <a:solidFill>
-                  <a:srgbClr val="6E625B"/>
-                </a:solidFill>
-                <a:latin typeface="Calibri"/>
-              </a:rPr>
-              <a:t>Collecting adverse drug reaction reports</a:t>
-            </a:r>
-          </a:p>
-        </p:txBody>
-      </p:sp>
-      <p:sp>
-        <p:nvSpPr>
-          <p:cNvPr id="21" name="TextBox 20"/>
-          <p:cNvSpPr txBox="1"/>
-          <p:nvPr/>
-        </p:nvSpPr>
-        <p:spPr>
-          <a:xfrm>
-            <a:off x="548640" y="5358384"/>
-            <a:ext cx="11094415" cy="685800"/>
-          </a:xfrm>
-          <a:prstGeom prst="rect">
-            <a:avLst/>
-          </a:prstGeom>
-          <a:noFill/>
-        </p:spPr>
-        <p:txBody>
-          <a:bodyPr wrap="square" anchor="t" lIns="0" rIns="0" tIns="0" bIns="0">
-            <a:spAutoFit/>
-          </a:bodyPr>
-          <a:lstStyle/>
-          <a:p>
-            <a:r>
-              <a:rPr sz="1500" i="0" b="1">
-                <a:solidFill>
-                  <a:srgbClr val="2F6F7A"/>
-                </a:solidFill>
-                <a:latin typeface="Calibri"/>
-              </a:rPr>
-              <a:t>Why:  </a:t>
-            </a:r>
-            <a:r>
-              <a:rPr sz="1500" i="0" b="0">
-                <a:solidFill>
                   <a:srgbClr val="2B211C"/>
                 </a:solidFill>
                 <a:latin typeface="Calibri"/>
               </a:rPr>
-              <a:t>A DIC gives information; it does not make medicines. A, B and D are core DIC work.</a:t>
+              <a:t>It is too expensive</a:t>
             </a:r>
           </a:p>
         </p:txBody>
@@ -11196,7 +11685,7 @@
                 </a:solidFill>
                 <a:latin typeface="Calibri"/>
               </a:rPr>
-              <a:t>SECTION 1  ·  QUESTION 3 OF 5</a:t>
+              <a:t>SECTION 1  ·  QUESTION 3 OF 5  ·  ANSWER</a:t>
             </a:r>
           </a:p>
         </p:txBody>
@@ -11230,7 +11719,7 @@
                 </a:solidFill>
                 <a:latin typeface="Cambria"/>
               </a:rPr>
-              <a:t>Your turn</a:t>
+              <a:t>Check your answer</a:t>
             </a:r>
           </a:p>
         </p:txBody>
@@ -11299,7 +11788,7 @@
                 </a:solidFill>
                 <a:latin typeface="Calibri"/>
               </a:rPr>
-              <a:t>19 / 26</a:t>
+              <a:t>19 / 25</a:t>
             </a:r>
           </a:p>
         </p:txBody>
@@ -11313,7 +11802,7 @@
           <p:nvPr/>
         </p:nvPicPr>
         <p:blipFill>
-          <a:blip r:embed="rId3"/>
+          <a:blip r:embed="rId2"/>
           <a:stretch>
             <a:fillRect/>
           </a:stretch>
@@ -11370,8 +11859,8 @@
         </p:nvSpPr>
         <p:spPr>
           <a:xfrm>
-            <a:off x="548640" y="2697480"/>
-            <a:ext cx="11094415" cy="640080"/>
+            <a:off x="548640" y="2606040"/>
+            <a:ext cx="11094415" cy="548640"/>
           </a:xfrm>
           <a:prstGeom prst="roundRect">
             <a:avLst>
@@ -11379,7 +11868,7 @@
             </a:avLst>
           </a:prstGeom>
           <a:solidFill>
-            <a:srgbClr val="FAF4F2"/>
+            <a:srgbClr val="2F6F7A"/>
           </a:solidFill>
           <a:ln>
             <a:noFill/>
@@ -11416,14 +11905,14 @@
         </p:nvSpPr>
         <p:spPr>
           <a:xfrm>
-            <a:off x="713232" y="2807208"/>
+            <a:off x="713232" y="2670048"/>
             <a:ext cx="420624" cy="420624"/>
           </a:xfrm>
           <a:prstGeom prst="ellipse">
             <a:avLst/>
           </a:prstGeom>
           <a:solidFill>
-            <a:srgbClr val="A4472B"/>
+            <a:srgbClr val="FFFFFF"/>
           </a:solidFill>
           <a:ln>
             <a:noFill/>
@@ -11452,7 +11941,7 @@
             <a:r>
               <a:rPr sz="1500" i="0" b="1">
                 <a:solidFill>
-                  <a:srgbClr val="FFFFFF"/>
+                  <a:srgbClr val="2F6F7A"/>
                 </a:solidFill>
                 <a:latin typeface="Calibri"/>
               </a:rPr>
@@ -11469,8 +11958,8 @@
         </p:nvSpPr>
         <p:spPr>
           <a:xfrm>
-            <a:off x="1371600" y="2697480"/>
-            <a:ext cx="10088575" cy="640080"/>
+            <a:off x="1371600" y="2606040"/>
+            <a:ext cx="10088575" cy="548640"/>
           </a:xfrm>
           <a:prstGeom prst="rect">
             <a:avLst/>
@@ -11484,9 +11973,9 @@
           <a:lstStyle/>
           <a:p>
             <a:r>
-              <a:rPr sz="1900" i="0" b="0">
-                <a:solidFill>
-                  <a:srgbClr val="2B211C"/>
+              <a:rPr sz="1900" i="0" b="1">
+                <a:solidFill>
+                  <a:srgbClr val="FFFFFF"/>
                 </a:solidFill>
                 <a:latin typeface="Calibri"/>
               </a:rPr>
@@ -11503,8 +11992,8 @@
         </p:nvSpPr>
         <p:spPr>
           <a:xfrm>
-            <a:off x="548640" y="3465576"/>
-            <a:ext cx="11094415" cy="640080"/>
+            <a:off x="548640" y="3282696"/>
+            <a:ext cx="11094415" cy="548640"/>
           </a:xfrm>
           <a:prstGeom prst="roundRect">
             <a:avLst>
@@ -11512,7 +12001,7 @@
             </a:avLst>
           </a:prstGeom>
           <a:solidFill>
-            <a:srgbClr val="FAF4F2"/>
+            <a:srgbClr val="F5F4F4"/>
           </a:solidFill>
           <a:ln>
             <a:noFill/>
@@ -11549,14 +12038,14 @@
         </p:nvSpPr>
         <p:spPr>
           <a:xfrm>
-            <a:off x="713232" y="3575304"/>
+            <a:off x="713232" y="3346703"/>
             <a:ext cx="420624" cy="420624"/>
           </a:xfrm>
           <a:prstGeom prst="ellipse">
             <a:avLst/>
           </a:prstGeom>
           <a:solidFill>
-            <a:srgbClr val="A4472B"/>
+            <a:srgbClr val="E2E0DE"/>
           </a:solidFill>
           <a:ln>
             <a:noFill/>
@@ -11585,7 +12074,7 @@
             <a:r>
               <a:rPr sz="1500" i="0" b="1">
                 <a:solidFill>
-                  <a:srgbClr val="FFFFFF"/>
+                  <a:srgbClr val="6E625B"/>
                 </a:solidFill>
                 <a:latin typeface="Calibri"/>
               </a:rPr>
@@ -11602,8 +12091,8 @@
         </p:nvSpPr>
         <p:spPr>
           <a:xfrm>
-            <a:off x="1371600" y="3465576"/>
-            <a:ext cx="10088575" cy="640080"/>
+            <a:off x="1371600" y="3282696"/>
+            <a:ext cx="10088575" cy="548640"/>
           </a:xfrm>
           <a:prstGeom prst="rect">
             <a:avLst/>
@@ -11619,7 +12108,7 @@
             <a:r>
               <a:rPr sz="1900" i="0" b="0">
                 <a:solidFill>
-                  <a:srgbClr val="2B211C"/>
+                  <a:srgbClr val="6E625B"/>
                 </a:solidFill>
                 <a:latin typeface="Calibri"/>
               </a:rPr>
@@ -11636,8 +12125,8 @@
         </p:nvSpPr>
         <p:spPr>
           <a:xfrm>
-            <a:off x="548640" y="4233672"/>
-            <a:ext cx="11094415" cy="640080"/>
+            <a:off x="548640" y="3959352"/>
+            <a:ext cx="11094415" cy="548640"/>
           </a:xfrm>
           <a:prstGeom prst="roundRect">
             <a:avLst>
@@ -11645,7 +12134,7 @@
             </a:avLst>
           </a:prstGeom>
           <a:solidFill>
-            <a:srgbClr val="FAF4F2"/>
+            <a:srgbClr val="F5F4F4"/>
           </a:solidFill>
           <a:ln>
             <a:noFill/>
@@ -11682,14 +12171,14 @@
         </p:nvSpPr>
         <p:spPr>
           <a:xfrm>
-            <a:off x="713232" y="4343400"/>
+            <a:off x="713232" y="4023360"/>
             <a:ext cx="420624" cy="420624"/>
           </a:xfrm>
           <a:prstGeom prst="ellipse">
             <a:avLst/>
           </a:prstGeom>
           <a:solidFill>
-            <a:srgbClr val="A4472B"/>
+            <a:srgbClr val="E2E0DE"/>
           </a:solidFill>
           <a:ln>
             <a:noFill/>
@@ -11718,7 +12207,7 @@
             <a:r>
               <a:rPr sz="1500" i="0" b="1">
                 <a:solidFill>
-                  <a:srgbClr val="FFFFFF"/>
+                  <a:srgbClr val="6E625B"/>
                 </a:solidFill>
                 <a:latin typeface="Calibri"/>
               </a:rPr>
@@ -11735,8 +12224,8 @@
         </p:nvSpPr>
         <p:spPr>
           <a:xfrm>
-            <a:off x="1371600" y="4233672"/>
-            <a:ext cx="10088575" cy="640080"/>
+            <a:off x="1371600" y="3959352"/>
+            <a:ext cx="10088575" cy="548640"/>
           </a:xfrm>
           <a:prstGeom prst="rect">
             <a:avLst/>
@@ -11752,7 +12241,7 @@
             <a:r>
               <a:rPr sz="1900" i="0" b="0">
                 <a:solidFill>
-                  <a:srgbClr val="2B211C"/>
+                  <a:srgbClr val="6E625B"/>
                 </a:solidFill>
                 <a:latin typeface="Calibri"/>
               </a:rPr>
@@ -11769,8 +12258,8 @@
         </p:nvSpPr>
         <p:spPr>
           <a:xfrm>
-            <a:off x="548640" y="5001768"/>
-            <a:ext cx="11094415" cy="640080"/>
+            <a:off x="548640" y="4636008"/>
+            <a:ext cx="11094415" cy="548640"/>
           </a:xfrm>
           <a:prstGeom prst="roundRect">
             <a:avLst>
@@ -11778,7 +12267,7 @@
             </a:avLst>
           </a:prstGeom>
           <a:solidFill>
-            <a:srgbClr val="FAF4F2"/>
+            <a:srgbClr val="F5F4F4"/>
           </a:solidFill>
           <a:ln>
             <a:noFill/>
@@ -11815,14 +12304,14 @@
         </p:nvSpPr>
         <p:spPr>
           <a:xfrm>
-            <a:off x="713232" y="5111496"/>
+            <a:off x="713232" y="4700016"/>
             <a:ext cx="420624" cy="420624"/>
           </a:xfrm>
           <a:prstGeom prst="ellipse">
             <a:avLst/>
           </a:prstGeom>
           <a:solidFill>
-            <a:srgbClr val="A4472B"/>
+            <a:srgbClr val="E2E0DE"/>
           </a:solidFill>
           <a:ln>
             <a:noFill/>
@@ -11851,7 +12340,7 @@
             <a:r>
               <a:rPr sz="1500" i="0" b="1">
                 <a:solidFill>
-                  <a:srgbClr val="FFFFFF"/>
+                  <a:srgbClr val="6E625B"/>
                 </a:solidFill>
                 <a:latin typeface="Calibri"/>
               </a:rPr>
@@ -11868,8 +12357,8 @@
         </p:nvSpPr>
         <p:spPr>
           <a:xfrm>
-            <a:off x="1371600" y="5001768"/>
-            <a:ext cx="10088575" cy="640080"/>
+            <a:off x="1371600" y="4636008"/>
+            <a:ext cx="10088575" cy="548640"/>
           </a:xfrm>
           <a:prstGeom prst="rect">
             <a:avLst/>
@@ -11885,11 +12374,54 @@
             <a:r>
               <a:rPr sz="1900" i="0" b="0">
                 <a:solidFill>
+                  <a:srgbClr val="6E625B"/>
+                </a:solidFill>
+                <a:latin typeface="Calibri"/>
+              </a:rPr>
+              <a:t>It is too expensive</a:t>
+            </a:r>
+          </a:p>
+        </p:txBody>
+      </p:sp>
+      <p:sp>
+        <p:nvSpPr>
+          <p:cNvPr id="21" name="TextBox 20"/>
+          <p:cNvSpPr txBox="1"/>
+          <p:nvPr/>
+        </p:nvSpPr>
+        <p:spPr>
+          <a:xfrm>
+            <a:off x="548640" y="5358384"/>
+            <a:ext cx="11094415" cy="685800"/>
+          </a:xfrm>
+          <a:prstGeom prst="rect">
+            <a:avLst/>
+          </a:prstGeom>
+          <a:noFill/>
+        </p:spPr>
+        <p:txBody>
+          <a:bodyPr wrap="square" anchor="t" lIns="0" rIns="0" tIns="0" bIns="0">
+            <a:spAutoFit/>
+          </a:bodyPr>
+          <a:lstStyle/>
+          <a:p>
+            <a:r>
+              <a:rPr sz="1500" i="0" b="1">
+                <a:solidFill>
+                  <a:srgbClr val="2F6F7A"/>
+                </a:solidFill>
+                <a:latin typeface="Calibri"/>
+              </a:rPr>
+              <a:t>Why:  </a:t>
+            </a:r>
+            <a:r>
+              <a:rPr sz="1500" i="0" b="0">
+                <a:solidFill>
                   <a:srgbClr val="2B211C"/>
                 </a:solidFill>
                 <a:latin typeface="Calibri"/>
               </a:rPr>
-              <a:t>It is too expensive</a:t>
+              <a:t>Companies promote their own products, so their information may be biased. B, C and D are not always true.</a:t>
             </a:r>
           </a:p>
         </p:txBody>
@@ -12105,7 +12637,7 @@
                 </a:solidFill>
                 <a:latin typeface="Calibri"/>
               </a:rPr>
-              <a:t>02 / 26</a:t>
+              <a:t>02 / 25</a:t>
             </a:r>
           </a:p>
         </p:txBody>
@@ -12740,7 +13272,7 @@
                 </a:solidFill>
                 <a:latin typeface="Calibri"/>
               </a:rPr>
-              <a:t>SECTION 1  ·  QUESTION 3 OF 5  ·  ANSWER</a:t>
+              <a:t>SECTION 1  ·  QUESTION 4 OF 5</a:t>
             </a:r>
           </a:p>
         </p:txBody>
@@ -12774,7 +13306,7 @@
                 </a:solidFill>
                 <a:latin typeface="Cambria"/>
               </a:rPr>
-              <a:t>Check your answer</a:t>
+              <a:t>Your turn</a:t>
             </a:r>
           </a:p>
         </p:txBody>
@@ -12843,7 +13375,7 @@
                 </a:solidFill>
                 <a:latin typeface="Calibri"/>
               </a:rPr>
-              <a:t>20 / 26</a:t>
+              <a:t>20 / 25</a:t>
             </a:r>
           </a:p>
         </p:txBody>
@@ -12857,7 +13389,7 @@
           <p:nvPr/>
         </p:nvPicPr>
         <p:blipFill>
-          <a:blip r:embed="rId2"/>
+          <a:blip r:embed="rId3"/>
           <a:stretch>
             <a:fillRect/>
           </a:stretch>
@@ -12901,7 +13433,7 @@
                 </a:solidFill>
                 <a:latin typeface="Calibri"/>
               </a:rPr>
-              <a:t>Why is information from drug companies used with care?</a:t>
+              <a:t>A nurse asks, "Can I crush this tablet?" Which step helps you most to find the real need?</a:t>
             </a:r>
           </a:p>
         </p:txBody>
@@ -12914,8 +13446,8 @@
         </p:nvSpPr>
         <p:spPr>
           <a:xfrm>
-            <a:off x="548640" y="2606040"/>
-            <a:ext cx="11094415" cy="548640"/>
+            <a:off x="548640" y="2697480"/>
+            <a:ext cx="11094415" cy="640080"/>
           </a:xfrm>
           <a:prstGeom prst="roundRect">
             <a:avLst>
@@ -12923,7 +13455,7 @@
             </a:avLst>
           </a:prstGeom>
           <a:solidFill>
-            <a:srgbClr val="2F6F7A"/>
+            <a:srgbClr val="FAF4F2"/>
           </a:solidFill>
           <a:ln>
             <a:noFill/>
@@ -12960,14 +13492,14 @@
         </p:nvSpPr>
         <p:spPr>
           <a:xfrm>
-            <a:off x="713232" y="2670048"/>
+            <a:off x="713232" y="2807208"/>
             <a:ext cx="420624" cy="420624"/>
           </a:xfrm>
           <a:prstGeom prst="ellipse">
             <a:avLst/>
           </a:prstGeom>
           <a:solidFill>
-            <a:srgbClr val="FFFFFF"/>
+            <a:srgbClr val="A4472B"/>
           </a:solidFill>
           <a:ln>
             <a:noFill/>
@@ -12996,7 +13528,7 @@
             <a:r>
               <a:rPr sz="1500" i="0" b="1">
                 <a:solidFill>
-                  <a:srgbClr val="2F6F7A"/>
+                  <a:srgbClr val="FFFFFF"/>
                 </a:solidFill>
                 <a:latin typeface="Calibri"/>
               </a:rPr>
@@ -13013,8 +13545,8 @@
         </p:nvSpPr>
         <p:spPr>
           <a:xfrm>
-            <a:off x="1371600" y="2606040"/>
-            <a:ext cx="10088575" cy="548640"/>
+            <a:off x="1371600" y="2697480"/>
+            <a:ext cx="10088575" cy="640080"/>
           </a:xfrm>
           <a:prstGeom prst="rect">
             <a:avLst/>
@@ -13028,13 +13560,13 @@
           <a:lstStyle/>
           <a:p>
             <a:r>
-              <a:rPr sz="1900" i="0" b="1">
-                <a:solidFill>
-                  <a:srgbClr val="FFFFFF"/>
-                </a:solidFill>
-                <a:latin typeface="Calibri"/>
-              </a:rPr>
-              <a:t>It may be biased</a:t>
+              <a:rPr sz="1900" i="0" b="0">
+                <a:solidFill>
+                  <a:srgbClr val="2B211C"/>
+                </a:solidFill>
+                <a:latin typeface="Calibri"/>
+              </a:rPr>
+              <a:t>Classifying the question as a formulation question</a:t>
             </a:r>
           </a:p>
         </p:txBody>
@@ -13047,8 +13579,8 @@
         </p:nvSpPr>
         <p:spPr>
           <a:xfrm>
-            <a:off x="548640" y="3282696"/>
-            <a:ext cx="11094415" cy="548640"/>
+            <a:off x="548640" y="3465576"/>
+            <a:ext cx="11094415" cy="640080"/>
           </a:xfrm>
           <a:prstGeom prst="roundRect">
             <a:avLst>
@@ -13056,7 +13588,7 @@
             </a:avLst>
           </a:prstGeom>
           <a:solidFill>
-            <a:srgbClr val="F5F4F4"/>
+            <a:srgbClr val="FAF4F2"/>
           </a:solidFill>
           <a:ln>
             <a:noFill/>
@@ -13093,14 +13625,14 @@
         </p:nvSpPr>
         <p:spPr>
           <a:xfrm>
-            <a:off x="713232" y="3346703"/>
+            <a:off x="713232" y="3575304"/>
             <a:ext cx="420624" cy="420624"/>
           </a:xfrm>
           <a:prstGeom prst="ellipse">
             <a:avLst/>
           </a:prstGeom>
           <a:solidFill>
-            <a:srgbClr val="E2E0DE"/>
+            <a:srgbClr val="A4472B"/>
           </a:solidFill>
           <a:ln>
             <a:noFill/>
@@ -13129,7 +13661,7 @@
             <a:r>
               <a:rPr sz="1500" i="0" b="1">
                 <a:solidFill>
-                  <a:srgbClr val="6E625B"/>
+                  <a:srgbClr val="FFFFFF"/>
                 </a:solidFill>
                 <a:latin typeface="Calibri"/>
               </a:rPr>
@@ -13146,8 +13678,8 @@
         </p:nvSpPr>
         <p:spPr>
           <a:xfrm>
-            <a:off x="1371600" y="3282696"/>
-            <a:ext cx="10088575" cy="548640"/>
+            <a:off x="1371600" y="3465576"/>
+            <a:ext cx="10088575" cy="640080"/>
           </a:xfrm>
           <a:prstGeom prst="rect">
             <a:avLst/>
@@ -13163,11 +13695,11 @@
             <a:r>
               <a:rPr sz="1900" i="0" b="0">
                 <a:solidFill>
-                  <a:srgbClr val="6E625B"/>
-                </a:solidFill>
-                <a:latin typeface="Calibri"/>
-              </a:rPr>
-              <a:t>It is always out of date</a:t>
+                  <a:srgbClr val="2B211C"/>
+                </a:solidFill>
+                <a:latin typeface="Calibri"/>
+              </a:rPr>
+              <a:t>Searching the internet</a:t>
             </a:r>
           </a:p>
         </p:txBody>
@@ -13180,8 +13712,8 @@
         </p:nvSpPr>
         <p:spPr>
           <a:xfrm>
-            <a:off x="548640" y="3959352"/>
-            <a:ext cx="11094415" cy="548640"/>
+            <a:off x="548640" y="4233672"/>
+            <a:ext cx="11094415" cy="640080"/>
           </a:xfrm>
           <a:prstGeom prst="roundRect">
             <a:avLst>
@@ -13189,7 +13721,7 @@
             </a:avLst>
           </a:prstGeom>
           <a:solidFill>
-            <a:srgbClr val="F5F4F4"/>
+            <a:srgbClr val="FAF4F2"/>
           </a:solidFill>
           <a:ln>
             <a:noFill/>
@@ -13226,14 +13758,14 @@
         </p:nvSpPr>
         <p:spPr>
           <a:xfrm>
-            <a:off x="713232" y="4023360"/>
+            <a:off x="713232" y="4343400"/>
             <a:ext cx="420624" cy="420624"/>
           </a:xfrm>
           <a:prstGeom prst="ellipse">
             <a:avLst/>
           </a:prstGeom>
           <a:solidFill>
-            <a:srgbClr val="E2E0DE"/>
+            <a:srgbClr val="A4472B"/>
           </a:solidFill>
           <a:ln>
             <a:noFill/>
@@ -13262,7 +13794,7 @@
             <a:r>
               <a:rPr sz="1500" i="0" b="1">
                 <a:solidFill>
-                  <a:srgbClr val="6E625B"/>
+                  <a:srgbClr val="FFFFFF"/>
                 </a:solidFill>
                 <a:latin typeface="Calibri"/>
               </a:rPr>
@@ -13279,8 +13811,8 @@
         </p:nvSpPr>
         <p:spPr>
           <a:xfrm>
-            <a:off x="1371600" y="3959352"/>
-            <a:ext cx="10088575" cy="548640"/>
+            <a:off x="1371600" y="4233672"/>
+            <a:ext cx="10088575" cy="640080"/>
           </a:xfrm>
           <a:prstGeom prst="rect">
             <a:avLst/>
@@ -13296,11 +13828,11 @@
             <a:r>
               <a:rPr sz="1900" i="0" b="0">
                 <a:solidFill>
-                  <a:srgbClr val="6E625B"/>
-                </a:solidFill>
-                <a:latin typeface="Calibri"/>
-              </a:rPr>
-              <a:t>It is never referenced</a:t>
+                  <a:srgbClr val="2B211C"/>
+                </a:solidFill>
+                <a:latin typeface="Calibri"/>
+              </a:rPr>
+              <a:t>Asking why the tablet needs to be crushed</a:t>
             </a:r>
           </a:p>
         </p:txBody>
@@ -13313,8 +13845,8 @@
         </p:nvSpPr>
         <p:spPr>
           <a:xfrm>
-            <a:off x="548640" y="4636008"/>
-            <a:ext cx="11094415" cy="548640"/>
+            <a:off x="548640" y="5001768"/>
+            <a:ext cx="11094415" cy="640080"/>
           </a:xfrm>
           <a:prstGeom prst="roundRect">
             <a:avLst>
@@ -13322,7 +13854,7 @@
             </a:avLst>
           </a:prstGeom>
           <a:solidFill>
-            <a:srgbClr val="F5F4F4"/>
+            <a:srgbClr val="FAF4F2"/>
           </a:solidFill>
           <a:ln>
             <a:noFill/>
@@ -13359,14 +13891,14 @@
         </p:nvSpPr>
         <p:spPr>
           <a:xfrm>
-            <a:off x="713232" y="4700016"/>
+            <a:off x="713232" y="5111496"/>
             <a:ext cx="420624" cy="420624"/>
           </a:xfrm>
           <a:prstGeom prst="ellipse">
             <a:avLst/>
           </a:prstGeom>
           <a:solidFill>
-            <a:srgbClr val="E2E0DE"/>
+            <a:srgbClr val="A4472B"/>
           </a:solidFill>
           <a:ln>
             <a:noFill/>
@@ -13395,7 +13927,7 @@
             <a:r>
               <a:rPr sz="1500" i="0" b="1">
                 <a:solidFill>
-                  <a:srgbClr val="6E625B"/>
+                  <a:srgbClr val="FFFFFF"/>
                 </a:solidFill>
                 <a:latin typeface="Calibri"/>
               </a:rPr>
@@ -13412,8 +13944,8 @@
         </p:nvSpPr>
         <p:spPr>
           <a:xfrm>
-            <a:off x="1371600" y="4636008"/>
-            <a:ext cx="10088575" cy="548640"/>
+            <a:off x="1371600" y="5001768"/>
+            <a:ext cx="10088575" cy="640080"/>
           </a:xfrm>
           <a:prstGeom prst="rect">
             <a:avLst/>
@@ -13429,54 +13961,11 @@
             <a:r>
               <a:rPr sz="1900" i="0" b="0">
                 <a:solidFill>
-                  <a:srgbClr val="6E625B"/>
-                </a:solidFill>
-                <a:latin typeface="Calibri"/>
-              </a:rPr>
-              <a:t>It is too expensive</a:t>
-            </a:r>
-          </a:p>
-        </p:txBody>
-      </p:sp>
-      <p:sp>
-        <p:nvSpPr>
-          <p:cNvPr id="21" name="TextBox 20"/>
-          <p:cNvSpPr txBox="1"/>
-          <p:nvPr/>
-        </p:nvSpPr>
-        <p:spPr>
-          <a:xfrm>
-            <a:off x="548640" y="5358384"/>
-            <a:ext cx="11094415" cy="685800"/>
-          </a:xfrm>
-          <a:prstGeom prst="rect">
-            <a:avLst/>
-          </a:prstGeom>
-          <a:noFill/>
-        </p:spPr>
-        <p:txBody>
-          <a:bodyPr wrap="square" anchor="t" lIns="0" rIns="0" tIns="0" bIns="0">
-            <a:spAutoFit/>
-          </a:bodyPr>
-          <a:lstStyle/>
-          <a:p>
-            <a:r>
-              <a:rPr sz="1500" i="0" b="1">
-                <a:solidFill>
-                  <a:srgbClr val="2F6F7A"/>
-                </a:solidFill>
-                <a:latin typeface="Calibri"/>
-              </a:rPr>
-              <a:t>Why:  </a:t>
-            </a:r>
-            <a:r>
-              <a:rPr sz="1500" i="0" b="0">
-                <a:solidFill>
                   <a:srgbClr val="2B211C"/>
                 </a:solidFill>
                 <a:latin typeface="Calibri"/>
               </a:rPr>
-              <a:t>Companies promote their own products, so their information may be biased. B, C and D are not always true.</a:t>
+              <a:t>Documenting the request</a:t>
             </a:r>
           </a:p>
         </p:txBody>
@@ -13589,7 +14078,7 @@
                 </a:solidFill>
                 <a:latin typeface="Calibri"/>
               </a:rPr>
-              <a:t>SECTION 1  ·  QUESTION 4 OF 5</a:t>
+              <a:t>SECTION 1  ·  QUESTION 4 OF 5  ·  ANSWER</a:t>
             </a:r>
           </a:p>
         </p:txBody>
@@ -13623,7 +14112,7 @@
                 </a:solidFill>
                 <a:latin typeface="Cambria"/>
               </a:rPr>
-              <a:t>Your turn</a:t>
+              <a:t>Check your answer</a:t>
             </a:r>
           </a:p>
         </p:txBody>
@@ -13692,7 +14181,7 @@
                 </a:solidFill>
                 <a:latin typeface="Calibri"/>
               </a:rPr>
-              <a:t>21 / 26</a:t>
+              <a:t>21 / 25</a:t>
             </a:r>
           </a:p>
         </p:txBody>
@@ -13706,7 +14195,7 @@
           <p:nvPr/>
         </p:nvPicPr>
         <p:blipFill>
-          <a:blip r:embed="rId3"/>
+          <a:blip r:embed="rId2"/>
           <a:stretch>
             <a:fillRect/>
           </a:stretch>
@@ -13763,8 +14252,8 @@
         </p:nvSpPr>
         <p:spPr>
           <a:xfrm>
-            <a:off x="548640" y="2697480"/>
-            <a:ext cx="11094415" cy="640080"/>
+            <a:off x="548640" y="2606040"/>
+            <a:ext cx="11094415" cy="548640"/>
           </a:xfrm>
           <a:prstGeom prst="roundRect">
             <a:avLst>
@@ -13772,7 +14261,7 @@
             </a:avLst>
           </a:prstGeom>
           <a:solidFill>
-            <a:srgbClr val="FAF4F2"/>
+            <a:srgbClr val="F5F4F4"/>
           </a:solidFill>
           <a:ln>
             <a:noFill/>
@@ -13809,14 +14298,14 @@
         </p:nvSpPr>
         <p:spPr>
           <a:xfrm>
-            <a:off x="713232" y="2807208"/>
+            <a:off x="713232" y="2670048"/>
             <a:ext cx="420624" cy="420624"/>
           </a:xfrm>
           <a:prstGeom prst="ellipse">
             <a:avLst/>
           </a:prstGeom>
           <a:solidFill>
-            <a:srgbClr val="A4472B"/>
+            <a:srgbClr val="E2E0DE"/>
           </a:solidFill>
           <a:ln>
             <a:noFill/>
@@ -13845,7 +14334,7 @@
             <a:r>
               <a:rPr sz="1500" i="0" b="1">
                 <a:solidFill>
-                  <a:srgbClr val="FFFFFF"/>
+                  <a:srgbClr val="6E625B"/>
                 </a:solidFill>
                 <a:latin typeface="Calibri"/>
               </a:rPr>
@@ -13862,8 +14351,8 @@
         </p:nvSpPr>
         <p:spPr>
           <a:xfrm>
-            <a:off x="1371600" y="2697480"/>
-            <a:ext cx="10088575" cy="640080"/>
+            <a:off x="1371600" y="2606040"/>
+            <a:ext cx="10088575" cy="548640"/>
           </a:xfrm>
           <a:prstGeom prst="rect">
             <a:avLst/>
@@ -13879,7 +14368,7 @@
             <a:r>
               <a:rPr sz="1900" i="0" b="0">
                 <a:solidFill>
-                  <a:srgbClr val="2B211C"/>
+                  <a:srgbClr val="6E625B"/>
                 </a:solidFill>
                 <a:latin typeface="Calibri"/>
               </a:rPr>
@@ -13896,8 +14385,8 @@
         </p:nvSpPr>
         <p:spPr>
           <a:xfrm>
-            <a:off x="548640" y="3465576"/>
-            <a:ext cx="11094415" cy="640080"/>
+            <a:off x="548640" y="3282696"/>
+            <a:ext cx="11094415" cy="548640"/>
           </a:xfrm>
           <a:prstGeom prst="roundRect">
             <a:avLst>
@@ -13905,7 +14394,7 @@
             </a:avLst>
           </a:prstGeom>
           <a:solidFill>
-            <a:srgbClr val="FAF4F2"/>
+            <a:srgbClr val="F5F4F4"/>
           </a:solidFill>
           <a:ln>
             <a:noFill/>
@@ -13942,14 +14431,14 @@
         </p:nvSpPr>
         <p:spPr>
           <a:xfrm>
-            <a:off x="713232" y="3575304"/>
+            <a:off x="713232" y="3346703"/>
             <a:ext cx="420624" cy="420624"/>
           </a:xfrm>
           <a:prstGeom prst="ellipse">
             <a:avLst/>
           </a:prstGeom>
           <a:solidFill>
-            <a:srgbClr val="A4472B"/>
+            <a:srgbClr val="E2E0DE"/>
           </a:solidFill>
           <a:ln>
             <a:noFill/>
@@ -13978,7 +14467,7 @@
             <a:r>
               <a:rPr sz="1500" i="0" b="1">
                 <a:solidFill>
-                  <a:srgbClr val="FFFFFF"/>
+                  <a:srgbClr val="6E625B"/>
                 </a:solidFill>
                 <a:latin typeface="Calibri"/>
               </a:rPr>
@@ -13995,8 +14484,8 @@
         </p:nvSpPr>
         <p:spPr>
           <a:xfrm>
-            <a:off x="1371600" y="3465576"/>
-            <a:ext cx="10088575" cy="640080"/>
+            <a:off x="1371600" y="3282696"/>
+            <a:ext cx="10088575" cy="548640"/>
           </a:xfrm>
           <a:prstGeom prst="rect">
             <a:avLst/>
@@ -14012,7 +14501,7 @@
             <a:r>
               <a:rPr sz="1900" i="0" b="0">
                 <a:solidFill>
-                  <a:srgbClr val="2B211C"/>
+                  <a:srgbClr val="6E625B"/>
                 </a:solidFill>
                 <a:latin typeface="Calibri"/>
               </a:rPr>
@@ -14029,8 +14518,8 @@
         </p:nvSpPr>
         <p:spPr>
           <a:xfrm>
-            <a:off x="548640" y="4233672"/>
-            <a:ext cx="11094415" cy="640080"/>
+            <a:off x="548640" y="3959352"/>
+            <a:ext cx="11094415" cy="548640"/>
           </a:xfrm>
           <a:prstGeom prst="roundRect">
             <a:avLst>
@@ -14038,7 +14527,7 @@
             </a:avLst>
           </a:prstGeom>
           <a:solidFill>
-            <a:srgbClr val="FAF4F2"/>
+            <a:srgbClr val="2F6F7A"/>
           </a:solidFill>
           <a:ln>
             <a:noFill/>
@@ -14075,14 +14564,14 @@
         </p:nvSpPr>
         <p:spPr>
           <a:xfrm>
-            <a:off x="713232" y="4343400"/>
+            <a:off x="713232" y="4023360"/>
             <a:ext cx="420624" cy="420624"/>
           </a:xfrm>
           <a:prstGeom prst="ellipse">
             <a:avLst/>
           </a:prstGeom>
           <a:solidFill>
-            <a:srgbClr val="A4472B"/>
+            <a:srgbClr val="FFFFFF"/>
           </a:solidFill>
           <a:ln>
             <a:noFill/>
@@ -14111,7 +14600,7 @@
             <a:r>
               <a:rPr sz="1500" i="0" b="1">
                 <a:solidFill>
-                  <a:srgbClr val="FFFFFF"/>
+                  <a:srgbClr val="2F6F7A"/>
                 </a:solidFill>
                 <a:latin typeface="Calibri"/>
               </a:rPr>
@@ -14128,8 +14617,8 @@
         </p:nvSpPr>
         <p:spPr>
           <a:xfrm>
-            <a:off x="1371600" y="4233672"/>
-            <a:ext cx="10088575" cy="640080"/>
+            <a:off x="1371600" y="3959352"/>
+            <a:ext cx="10088575" cy="548640"/>
           </a:xfrm>
           <a:prstGeom prst="rect">
             <a:avLst/>
@@ -14143,9 +14632,9 @@
           <a:lstStyle/>
           <a:p>
             <a:r>
-              <a:rPr sz="1900" i="0" b="0">
-                <a:solidFill>
-                  <a:srgbClr val="2B211C"/>
+              <a:rPr sz="1900" i="0" b="1">
+                <a:solidFill>
+                  <a:srgbClr val="FFFFFF"/>
                 </a:solidFill>
                 <a:latin typeface="Calibri"/>
               </a:rPr>
@@ -14162,8 +14651,8 @@
         </p:nvSpPr>
         <p:spPr>
           <a:xfrm>
-            <a:off x="548640" y="5001768"/>
-            <a:ext cx="11094415" cy="640080"/>
+            <a:off x="548640" y="4636008"/>
+            <a:ext cx="11094415" cy="548640"/>
           </a:xfrm>
           <a:prstGeom prst="roundRect">
             <a:avLst>
@@ -14171,7 +14660,7 @@
             </a:avLst>
           </a:prstGeom>
           <a:solidFill>
-            <a:srgbClr val="FAF4F2"/>
+            <a:srgbClr val="F5F4F4"/>
           </a:solidFill>
           <a:ln>
             <a:noFill/>
@@ -14208,14 +14697,14 @@
         </p:nvSpPr>
         <p:spPr>
           <a:xfrm>
-            <a:off x="713232" y="5111496"/>
+            <a:off x="713232" y="4700016"/>
             <a:ext cx="420624" cy="420624"/>
           </a:xfrm>
           <a:prstGeom prst="ellipse">
             <a:avLst/>
           </a:prstGeom>
           <a:solidFill>
-            <a:srgbClr val="A4472B"/>
+            <a:srgbClr val="E2E0DE"/>
           </a:solidFill>
           <a:ln>
             <a:noFill/>
@@ -14244,7 +14733,7 @@
             <a:r>
               <a:rPr sz="1500" i="0" b="1">
                 <a:solidFill>
-                  <a:srgbClr val="FFFFFF"/>
+                  <a:srgbClr val="6E625B"/>
                 </a:solidFill>
                 <a:latin typeface="Calibri"/>
               </a:rPr>
@@ -14261,8 +14750,8 @@
         </p:nvSpPr>
         <p:spPr>
           <a:xfrm>
-            <a:off x="1371600" y="5001768"/>
-            <a:ext cx="10088575" cy="640080"/>
+            <a:off x="1371600" y="4636008"/>
+            <a:ext cx="10088575" cy="548640"/>
           </a:xfrm>
           <a:prstGeom prst="rect">
             <a:avLst/>
@@ -14278,11 +14767,54 @@
             <a:r>
               <a:rPr sz="1900" i="0" b="0">
                 <a:solidFill>
+                  <a:srgbClr val="6E625B"/>
+                </a:solidFill>
+                <a:latin typeface="Calibri"/>
+              </a:rPr>
+              <a:t>Documenting the request</a:t>
+            </a:r>
+          </a:p>
+        </p:txBody>
+      </p:sp>
+      <p:sp>
+        <p:nvSpPr>
+          <p:cNvPr id="21" name="TextBox 20"/>
+          <p:cNvSpPr txBox="1"/>
+          <p:nvPr/>
+        </p:nvSpPr>
+        <p:spPr>
+          <a:xfrm>
+            <a:off x="548640" y="5358384"/>
+            <a:ext cx="11094415" cy="685800"/>
+          </a:xfrm>
+          <a:prstGeom prst="rect">
+            <a:avLst/>
+          </a:prstGeom>
+          <a:noFill/>
+        </p:spPr>
+        <p:txBody>
+          <a:bodyPr wrap="square" anchor="t" lIns="0" rIns="0" tIns="0" bIns="0">
+            <a:spAutoFit/>
+          </a:bodyPr>
+          <a:lstStyle/>
+          <a:p>
+            <a:r>
+              <a:rPr sz="1500" i="0" b="1">
+                <a:solidFill>
+                  <a:srgbClr val="2F6F7A"/>
+                </a:solidFill>
+                <a:latin typeface="Calibri"/>
+              </a:rPr>
+              <a:t>Why:  </a:t>
+            </a:r>
+            <a:r>
+              <a:rPr sz="1500" i="0" b="0">
+                <a:solidFill>
                   <a:srgbClr val="2B211C"/>
                 </a:solidFill>
                 <a:latin typeface="Calibri"/>
               </a:rPr>
-              <a:t>Documenting the request</a:t>
+              <a:t>Asking why reveals the real problem, such as swallowing difficulty or a feeding tube. A, B and D come later.</a:t>
             </a:r>
           </a:p>
         </p:txBody>
@@ -14395,7 +14927,7 @@
                 </a:solidFill>
                 <a:latin typeface="Calibri"/>
               </a:rPr>
-              <a:t>SECTION 1  ·  QUESTION 4 OF 5  ·  ANSWER</a:t>
+              <a:t>SECTION 1  ·  QUESTION 5 OF 5</a:t>
             </a:r>
           </a:p>
         </p:txBody>
@@ -14429,7 +14961,7 @@
                 </a:solidFill>
                 <a:latin typeface="Cambria"/>
               </a:rPr>
-              <a:t>Check your answer</a:t>
+              <a:t>Your turn</a:t>
             </a:r>
           </a:p>
         </p:txBody>
@@ -14498,7 +15030,7 @@
                 </a:solidFill>
                 <a:latin typeface="Calibri"/>
               </a:rPr>
-              <a:t>22 / 26</a:t>
+              <a:t>22 / 25</a:t>
             </a:r>
           </a:p>
         </p:txBody>
@@ -14512,7 +15044,7 @@
           <p:nvPr/>
         </p:nvPicPr>
         <p:blipFill>
-          <a:blip r:embed="rId2"/>
+          <a:blip r:embed="rId3"/>
           <a:stretch>
             <a:fillRect/>
           </a:stretch>
@@ -14556,7 +15088,7 @@
                 </a:solidFill>
                 <a:latin typeface="Calibri"/>
               </a:rPr>
-              <a:t>A nurse asks, "Can I crush this tablet?" Which step helps you most to find the real need?</a:t>
+              <a:t>What is the last step of the systematic approach?</a:t>
             </a:r>
           </a:p>
         </p:txBody>
@@ -14569,8 +15101,8 @@
         </p:nvSpPr>
         <p:spPr>
           <a:xfrm>
-            <a:off x="548640" y="2606040"/>
-            <a:ext cx="11094415" cy="548640"/>
+            <a:off x="548640" y="2697480"/>
+            <a:ext cx="11094415" cy="640080"/>
           </a:xfrm>
           <a:prstGeom prst="roundRect">
             <a:avLst>
@@ -14578,7 +15110,7 @@
             </a:avLst>
           </a:prstGeom>
           <a:solidFill>
-            <a:srgbClr val="F5F4F4"/>
+            <a:srgbClr val="FAF4F2"/>
           </a:solidFill>
           <a:ln>
             <a:noFill/>
@@ -14615,14 +15147,14 @@
         </p:nvSpPr>
         <p:spPr>
           <a:xfrm>
-            <a:off x="713232" y="2670048"/>
+            <a:off x="713232" y="2807208"/>
             <a:ext cx="420624" cy="420624"/>
           </a:xfrm>
           <a:prstGeom prst="ellipse">
             <a:avLst/>
           </a:prstGeom>
           <a:solidFill>
-            <a:srgbClr val="E2E0DE"/>
+            <a:srgbClr val="A4472B"/>
           </a:solidFill>
           <a:ln>
             <a:noFill/>
@@ -14651,7 +15183,7 @@
             <a:r>
               <a:rPr sz="1500" i="0" b="1">
                 <a:solidFill>
-                  <a:srgbClr val="6E625B"/>
+                  <a:srgbClr val="FFFFFF"/>
                 </a:solidFill>
                 <a:latin typeface="Calibri"/>
               </a:rPr>
@@ -14668,8 +15200,8 @@
         </p:nvSpPr>
         <p:spPr>
           <a:xfrm>
-            <a:off x="1371600" y="2606040"/>
-            <a:ext cx="10088575" cy="548640"/>
+            <a:off x="1371600" y="2697480"/>
+            <a:ext cx="10088575" cy="640080"/>
           </a:xfrm>
           <a:prstGeom prst="rect">
             <a:avLst/>
@@ -14685,11 +15217,11 @@
             <a:r>
               <a:rPr sz="1900" i="0" b="0">
                 <a:solidFill>
-                  <a:srgbClr val="6E625B"/>
-                </a:solidFill>
-                <a:latin typeface="Calibri"/>
-              </a:rPr>
-              <a:t>Classifying the question as a formulation question</a:t>
+                  <a:srgbClr val="2B211C"/>
+                </a:solidFill>
+                <a:latin typeface="Calibri"/>
+              </a:rPr>
+              <a:t>Searching tertiary sources</a:t>
             </a:r>
           </a:p>
         </p:txBody>
@@ -14702,8 +15234,8 @@
         </p:nvSpPr>
         <p:spPr>
           <a:xfrm>
-            <a:off x="548640" y="3282696"/>
-            <a:ext cx="11094415" cy="548640"/>
+            <a:off x="548640" y="3465576"/>
+            <a:ext cx="11094415" cy="640080"/>
           </a:xfrm>
           <a:prstGeom prst="roundRect">
             <a:avLst>
@@ -14711,7 +15243,7 @@
             </a:avLst>
           </a:prstGeom>
           <a:solidFill>
-            <a:srgbClr val="F5F4F4"/>
+            <a:srgbClr val="FAF4F2"/>
           </a:solidFill>
           <a:ln>
             <a:noFill/>
@@ -14748,14 +15280,14 @@
         </p:nvSpPr>
         <p:spPr>
           <a:xfrm>
-            <a:off x="713232" y="3346703"/>
+            <a:off x="713232" y="3575304"/>
             <a:ext cx="420624" cy="420624"/>
           </a:xfrm>
           <a:prstGeom prst="ellipse">
             <a:avLst/>
           </a:prstGeom>
           <a:solidFill>
-            <a:srgbClr val="E2E0DE"/>
+            <a:srgbClr val="A4472B"/>
           </a:solidFill>
           <a:ln>
             <a:noFill/>
@@ -14784,7 +15316,7 @@
             <a:r>
               <a:rPr sz="1500" i="0" b="1">
                 <a:solidFill>
-                  <a:srgbClr val="6E625B"/>
+                  <a:srgbClr val="FFFFFF"/>
                 </a:solidFill>
                 <a:latin typeface="Calibri"/>
               </a:rPr>
@@ -14801,8 +15333,8 @@
         </p:nvSpPr>
         <p:spPr>
           <a:xfrm>
-            <a:off x="1371600" y="3282696"/>
-            <a:ext cx="10088575" cy="548640"/>
+            <a:off x="1371600" y="3465576"/>
+            <a:ext cx="10088575" cy="640080"/>
           </a:xfrm>
           <a:prstGeom prst="rect">
             <a:avLst/>
@@ -14818,11 +15350,11 @@
             <a:r>
               <a:rPr sz="1900" i="0" b="0">
                 <a:solidFill>
-                  <a:srgbClr val="6E625B"/>
-                </a:solidFill>
-                <a:latin typeface="Calibri"/>
-              </a:rPr>
-              <a:t>Searching the internet</a:t>
+                  <a:srgbClr val="2B211C"/>
+                </a:solidFill>
+                <a:latin typeface="Calibri"/>
+              </a:rPr>
+              <a:t>Collecting background</a:t>
             </a:r>
           </a:p>
         </p:txBody>
@@ -14835,8 +15367,8 @@
         </p:nvSpPr>
         <p:spPr>
           <a:xfrm>
-            <a:off x="548640" y="3959352"/>
-            <a:ext cx="11094415" cy="548640"/>
+            <a:off x="548640" y="4233672"/>
+            <a:ext cx="11094415" cy="640080"/>
           </a:xfrm>
           <a:prstGeom prst="roundRect">
             <a:avLst>
@@ -14844,7 +15376,7 @@
             </a:avLst>
           </a:prstGeom>
           <a:solidFill>
-            <a:srgbClr val="2F6F7A"/>
+            <a:srgbClr val="FAF4F2"/>
           </a:solidFill>
           <a:ln>
             <a:noFill/>
@@ -14881,14 +15413,14 @@
         </p:nvSpPr>
         <p:spPr>
           <a:xfrm>
-            <a:off x="713232" y="4023360"/>
+            <a:off x="713232" y="4343400"/>
             <a:ext cx="420624" cy="420624"/>
           </a:xfrm>
           <a:prstGeom prst="ellipse">
             <a:avLst/>
           </a:prstGeom>
           <a:solidFill>
-            <a:srgbClr val="FFFFFF"/>
+            <a:srgbClr val="A4472B"/>
           </a:solidFill>
           <a:ln>
             <a:noFill/>
@@ -14917,7 +15449,7 @@
             <a:r>
               <a:rPr sz="1500" i="0" b="1">
                 <a:solidFill>
-                  <a:srgbClr val="2F6F7A"/>
+                  <a:srgbClr val="FFFFFF"/>
                 </a:solidFill>
                 <a:latin typeface="Calibri"/>
               </a:rPr>
@@ -14934,8 +15466,8 @@
         </p:nvSpPr>
         <p:spPr>
           <a:xfrm>
-            <a:off x="1371600" y="3959352"/>
-            <a:ext cx="10088575" cy="548640"/>
+            <a:off x="1371600" y="4233672"/>
+            <a:ext cx="10088575" cy="640080"/>
           </a:xfrm>
           <a:prstGeom prst="rect">
             <a:avLst/>
@@ -14949,13 +15481,13 @@
           <a:lstStyle/>
           <a:p>
             <a:r>
-              <a:rPr sz="1900" i="0" b="1">
-                <a:solidFill>
-                  <a:srgbClr val="FFFFFF"/>
-                </a:solidFill>
-                <a:latin typeface="Calibri"/>
-              </a:rPr>
-              <a:t>Asking why the tablet needs to be crushed</a:t>
+              <a:rPr sz="1900" i="0" b="0">
+                <a:solidFill>
+                  <a:srgbClr val="2B211C"/>
+                </a:solidFill>
+                <a:latin typeface="Calibri"/>
+              </a:rPr>
+              <a:t>Classifying the question</a:t>
             </a:r>
           </a:p>
         </p:txBody>
@@ -14968,8 +15500,8 @@
         </p:nvSpPr>
         <p:spPr>
           <a:xfrm>
-            <a:off x="548640" y="4636008"/>
-            <a:ext cx="11094415" cy="548640"/>
+            <a:off x="548640" y="5001768"/>
+            <a:ext cx="11094415" cy="640080"/>
           </a:xfrm>
           <a:prstGeom prst="roundRect">
             <a:avLst>
@@ -14977,7 +15509,7 @@
             </a:avLst>
           </a:prstGeom>
           <a:solidFill>
-            <a:srgbClr val="F5F4F4"/>
+            <a:srgbClr val="FAF4F2"/>
           </a:solidFill>
           <a:ln>
             <a:noFill/>
@@ -15014,14 +15546,14 @@
         </p:nvSpPr>
         <p:spPr>
           <a:xfrm>
-            <a:off x="713232" y="4700016"/>
+            <a:off x="713232" y="5111496"/>
             <a:ext cx="420624" cy="420624"/>
           </a:xfrm>
           <a:prstGeom prst="ellipse">
             <a:avLst/>
           </a:prstGeom>
           <a:solidFill>
-            <a:srgbClr val="E2E0DE"/>
+            <a:srgbClr val="A4472B"/>
           </a:solidFill>
           <a:ln>
             <a:noFill/>
@@ -15050,7 +15582,7 @@
             <a:r>
               <a:rPr sz="1500" i="0" b="1">
                 <a:solidFill>
-                  <a:srgbClr val="6E625B"/>
+                  <a:srgbClr val="FFFFFF"/>
                 </a:solidFill>
                 <a:latin typeface="Calibri"/>
               </a:rPr>
@@ -15067,8 +15599,8 @@
         </p:nvSpPr>
         <p:spPr>
           <a:xfrm>
-            <a:off x="1371600" y="4636008"/>
-            <a:ext cx="10088575" cy="548640"/>
+            <a:off x="1371600" y="5001768"/>
+            <a:ext cx="10088575" cy="640080"/>
           </a:xfrm>
           <a:prstGeom prst="rect">
             <a:avLst/>
@@ -15084,54 +15616,11 @@
             <a:r>
               <a:rPr sz="1900" i="0" b="0">
                 <a:solidFill>
-                  <a:srgbClr val="6E625B"/>
-                </a:solidFill>
-                <a:latin typeface="Calibri"/>
-              </a:rPr>
-              <a:t>Documenting the request</a:t>
-            </a:r>
-          </a:p>
-        </p:txBody>
-      </p:sp>
-      <p:sp>
-        <p:nvSpPr>
-          <p:cNvPr id="21" name="TextBox 20"/>
-          <p:cNvSpPr txBox="1"/>
-          <p:nvPr/>
-        </p:nvSpPr>
-        <p:spPr>
-          <a:xfrm>
-            <a:off x="548640" y="5358384"/>
-            <a:ext cx="11094415" cy="685800"/>
-          </a:xfrm>
-          <a:prstGeom prst="rect">
-            <a:avLst/>
-          </a:prstGeom>
-          <a:noFill/>
-        </p:spPr>
-        <p:txBody>
-          <a:bodyPr wrap="square" anchor="t" lIns="0" rIns="0" tIns="0" bIns="0">
-            <a:spAutoFit/>
-          </a:bodyPr>
-          <a:lstStyle/>
-          <a:p>
-            <a:r>
-              <a:rPr sz="1500" i="0" b="1">
-                <a:solidFill>
-                  <a:srgbClr val="2F6F7A"/>
-                </a:solidFill>
-                <a:latin typeface="Calibri"/>
-              </a:rPr>
-              <a:t>Why:  </a:t>
-            </a:r>
-            <a:r>
-              <a:rPr sz="1500" i="0" b="0">
-                <a:solidFill>
                   <a:srgbClr val="2B211C"/>
                 </a:solidFill>
                 <a:latin typeface="Calibri"/>
               </a:rPr>
-              <a:t>Asking why reveals the real problem, such as swallowing difficulty or a feeding tube. A, B and D come later.</a:t>
+              <a:t>Follow up and documentation</a:t>
             </a:r>
           </a:p>
         </p:txBody>
@@ -15244,7 +15733,7 @@
                 </a:solidFill>
                 <a:latin typeface="Calibri"/>
               </a:rPr>
-              <a:t>SECTION 1  ·  QUESTION 5 OF 5</a:t>
+              <a:t>SECTION 1  ·  QUESTION 5 OF 5  ·  ANSWER</a:t>
             </a:r>
           </a:p>
         </p:txBody>
@@ -15278,7 +15767,7 @@
                 </a:solidFill>
                 <a:latin typeface="Cambria"/>
               </a:rPr>
-              <a:t>Your turn</a:t>
+              <a:t>Check your answer</a:t>
             </a:r>
           </a:p>
         </p:txBody>
@@ -15347,7 +15836,7 @@
                 </a:solidFill>
                 <a:latin typeface="Calibri"/>
               </a:rPr>
-              <a:t>23 / 26</a:t>
+              <a:t>23 / 25</a:t>
             </a:r>
           </a:p>
         </p:txBody>
@@ -15361,7 +15850,7 @@
           <p:nvPr/>
         </p:nvPicPr>
         <p:blipFill>
-          <a:blip r:embed="rId3"/>
+          <a:blip r:embed="rId2"/>
           <a:stretch>
             <a:fillRect/>
           </a:stretch>
@@ -15418,8 +15907,8 @@
         </p:nvSpPr>
         <p:spPr>
           <a:xfrm>
-            <a:off x="548640" y="2697480"/>
-            <a:ext cx="11094415" cy="640080"/>
+            <a:off x="548640" y="2606040"/>
+            <a:ext cx="11094415" cy="548640"/>
           </a:xfrm>
           <a:prstGeom prst="roundRect">
             <a:avLst>
@@ -15427,7 +15916,7 @@
             </a:avLst>
           </a:prstGeom>
           <a:solidFill>
-            <a:srgbClr val="FAF4F2"/>
+            <a:srgbClr val="F5F4F4"/>
           </a:solidFill>
           <a:ln>
             <a:noFill/>
@@ -15464,14 +15953,14 @@
         </p:nvSpPr>
         <p:spPr>
           <a:xfrm>
-            <a:off x="713232" y="2807208"/>
+            <a:off x="713232" y="2670048"/>
             <a:ext cx="420624" cy="420624"/>
           </a:xfrm>
           <a:prstGeom prst="ellipse">
             <a:avLst/>
           </a:prstGeom>
           <a:solidFill>
-            <a:srgbClr val="A4472B"/>
+            <a:srgbClr val="E2E0DE"/>
           </a:solidFill>
           <a:ln>
             <a:noFill/>
@@ -15500,7 +15989,7 @@
             <a:r>
               <a:rPr sz="1500" i="0" b="1">
                 <a:solidFill>
-                  <a:srgbClr val="FFFFFF"/>
+                  <a:srgbClr val="6E625B"/>
                 </a:solidFill>
                 <a:latin typeface="Calibri"/>
               </a:rPr>
@@ -15517,8 +16006,8 @@
         </p:nvSpPr>
         <p:spPr>
           <a:xfrm>
-            <a:off x="1371600" y="2697480"/>
-            <a:ext cx="10088575" cy="640080"/>
+            <a:off x="1371600" y="2606040"/>
+            <a:ext cx="10088575" cy="548640"/>
           </a:xfrm>
           <a:prstGeom prst="rect">
             <a:avLst/>
@@ -15534,7 +16023,7 @@
             <a:r>
               <a:rPr sz="1900" i="0" b="0">
                 <a:solidFill>
-                  <a:srgbClr val="2B211C"/>
+                  <a:srgbClr val="6E625B"/>
                 </a:solidFill>
                 <a:latin typeface="Calibri"/>
               </a:rPr>
@@ -15551,8 +16040,8 @@
         </p:nvSpPr>
         <p:spPr>
           <a:xfrm>
-            <a:off x="548640" y="3465576"/>
-            <a:ext cx="11094415" cy="640080"/>
+            <a:off x="548640" y="3282696"/>
+            <a:ext cx="11094415" cy="548640"/>
           </a:xfrm>
           <a:prstGeom prst="roundRect">
             <a:avLst>
@@ -15560,7 +16049,7 @@
             </a:avLst>
           </a:prstGeom>
           <a:solidFill>
-            <a:srgbClr val="FAF4F2"/>
+            <a:srgbClr val="F5F4F4"/>
           </a:solidFill>
           <a:ln>
             <a:noFill/>
@@ -15597,14 +16086,14 @@
         </p:nvSpPr>
         <p:spPr>
           <a:xfrm>
-            <a:off x="713232" y="3575304"/>
+            <a:off x="713232" y="3346703"/>
             <a:ext cx="420624" cy="420624"/>
           </a:xfrm>
           <a:prstGeom prst="ellipse">
             <a:avLst/>
           </a:prstGeom>
           <a:solidFill>
-            <a:srgbClr val="A4472B"/>
+            <a:srgbClr val="E2E0DE"/>
           </a:solidFill>
           <a:ln>
             <a:noFill/>
@@ -15633,7 +16122,7 @@
             <a:r>
               <a:rPr sz="1500" i="0" b="1">
                 <a:solidFill>
-                  <a:srgbClr val="FFFFFF"/>
+                  <a:srgbClr val="6E625B"/>
                 </a:solidFill>
                 <a:latin typeface="Calibri"/>
               </a:rPr>
@@ -15650,8 +16139,8 @@
         </p:nvSpPr>
         <p:spPr>
           <a:xfrm>
-            <a:off x="1371600" y="3465576"/>
-            <a:ext cx="10088575" cy="640080"/>
+            <a:off x="1371600" y="3282696"/>
+            <a:ext cx="10088575" cy="548640"/>
           </a:xfrm>
           <a:prstGeom prst="rect">
             <a:avLst/>
@@ -15667,7 +16156,7 @@
             <a:r>
               <a:rPr sz="1900" i="0" b="0">
                 <a:solidFill>
-                  <a:srgbClr val="2B211C"/>
+                  <a:srgbClr val="6E625B"/>
                 </a:solidFill>
                 <a:latin typeface="Calibri"/>
               </a:rPr>
@@ -15684,8 +16173,8 @@
         </p:nvSpPr>
         <p:spPr>
           <a:xfrm>
-            <a:off x="548640" y="4233672"/>
-            <a:ext cx="11094415" cy="640080"/>
+            <a:off x="548640" y="3959352"/>
+            <a:ext cx="11094415" cy="548640"/>
           </a:xfrm>
           <a:prstGeom prst="roundRect">
             <a:avLst>
@@ -15693,7 +16182,7 @@
             </a:avLst>
           </a:prstGeom>
           <a:solidFill>
-            <a:srgbClr val="FAF4F2"/>
+            <a:srgbClr val="F5F4F4"/>
           </a:solidFill>
           <a:ln>
             <a:noFill/>
@@ -15730,14 +16219,14 @@
         </p:nvSpPr>
         <p:spPr>
           <a:xfrm>
-            <a:off x="713232" y="4343400"/>
+            <a:off x="713232" y="4023360"/>
             <a:ext cx="420624" cy="420624"/>
           </a:xfrm>
           <a:prstGeom prst="ellipse">
             <a:avLst/>
           </a:prstGeom>
           <a:solidFill>
-            <a:srgbClr val="A4472B"/>
+            <a:srgbClr val="E2E0DE"/>
           </a:solidFill>
           <a:ln>
             <a:noFill/>
@@ -15766,7 +16255,7 @@
             <a:r>
               <a:rPr sz="1500" i="0" b="1">
                 <a:solidFill>
-                  <a:srgbClr val="FFFFFF"/>
+                  <a:srgbClr val="6E625B"/>
                 </a:solidFill>
                 <a:latin typeface="Calibri"/>
               </a:rPr>
@@ -15783,8 +16272,8 @@
         </p:nvSpPr>
         <p:spPr>
           <a:xfrm>
-            <a:off x="1371600" y="4233672"/>
-            <a:ext cx="10088575" cy="640080"/>
+            <a:off x="1371600" y="3959352"/>
+            <a:ext cx="10088575" cy="548640"/>
           </a:xfrm>
           <a:prstGeom prst="rect">
             <a:avLst/>
@@ -15800,7 +16289,7 @@
             <a:r>
               <a:rPr sz="1900" i="0" b="0">
                 <a:solidFill>
-                  <a:srgbClr val="2B211C"/>
+                  <a:srgbClr val="6E625B"/>
                 </a:solidFill>
                 <a:latin typeface="Calibri"/>
               </a:rPr>
@@ -15817,8 +16306,8 @@
         </p:nvSpPr>
         <p:spPr>
           <a:xfrm>
-            <a:off x="548640" y="5001768"/>
-            <a:ext cx="11094415" cy="640080"/>
+            <a:off x="548640" y="4636008"/>
+            <a:ext cx="11094415" cy="548640"/>
           </a:xfrm>
           <a:prstGeom prst="roundRect">
             <a:avLst>
@@ -15826,7 +16315,7 @@
             </a:avLst>
           </a:prstGeom>
           <a:solidFill>
-            <a:srgbClr val="FAF4F2"/>
+            <a:srgbClr val="2F6F7A"/>
           </a:solidFill>
           <a:ln>
             <a:noFill/>
@@ -15863,14 +16352,14 @@
         </p:nvSpPr>
         <p:spPr>
           <a:xfrm>
-            <a:off x="713232" y="5111496"/>
+            <a:off x="713232" y="4700016"/>
             <a:ext cx="420624" cy="420624"/>
           </a:xfrm>
           <a:prstGeom prst="ellipse">
             <a:avLst/>
           </a:prstGeom>
           <a:solidFill>
-            <a:srgbClr val="A4472B"/>
+            <a:srgbClr val="FFFFFF"/>
           </a:solidFill>
           <a:ln>
             <a:noFill/>
@@ -15899,7 +16388,7 @@
             <a:r>
               <a:rPr sz="1500" i="0" b="1">
                 <a:solidFill>
-                  <a:srgbClr val="FFFFFF"/>
+                  <a:srgbClr val="2F6F7A"/>
                 </a:solidFill>
                 <a:latin typeface="Calibri"/>
               </a:rPr>
@@ -15916,8 +16405,8 @@
         </p:nvSpPr>
         <p:spPr>
           <a:xfrm>
-            <a:off x="1371600" y="5001768"/>
-            <a:ext cx="10088575" cy="640080"/>
+            <a:off x="1371600" y="4636008"/>
+            <a:ext cx="10088575" cy="548640"/>
           </a:xfrm>
           <a:prstGeom prst="rect">
             <a:avLst/>
@@ -15931,13 +16420,56 @@
           <a:lstStyle/>
           <a:p>
             <a:r>
-              <a:rPr sz="1900" i="0" b="0">
+              <a:rPr sz="1900" i="0" b="1">
+                <a:solidFill>
+                  <a:srgbClr val="FFFFFF"/>
+                </a:solidFill>
+                <a:latin typeface="Calibri"/>
+              </a:rPr>
+              <a:t>Follow up and documentation</a:t>
+            </a:r>
+          </a:p>
+        </p:txBody>
+      </p:sp>
+      <p:sp>
+        <p:nvSpPr>
+          <p:cNvPr id="21" name="TextBox 20"/>
+          <p:cNvSpPr txBox="1"/>
+          <p:nvPr/>
+        </p:nvSpPr>
+        <p:spPr>
+          <a:xfrm>
+            <a:off x="548640" y="5358384"/>
+            <a:ext cx="11094415" cy="685800"/>
+          </a:xfrm>
+          <a:prstGeom prst="rect">
+            <a:avLst/>
+          </a:prstGeom>
+          <a:noFill/>
+        </p:spPr>
+        <p:txBody>
+          <a:bodyPr wrap="square" anchor="t" lIns="0" rIns="0" tIns="0" bIns="0">
+            <a:spAutoFit/>
+          </a:bodyPr>
+          <a:lstStyle/>
+          <a:p>
+            <a:r>
+              <a:rPr sz="1500" i="0" b="1">
+                <a:solidFill>
+                  <a:srgbClr val="2F6F7A"/>
+                </a:solidFill>
+                <a:latin typeface="Calibri"/>
+              </a:rPr>
+              <a:t>Why:  </a:t>
+            </a:r>
+            <a:r>
+              <a:rPr sz="1500" i="0" b="0">
                 <a:solidFill>
                   <a:srgbClr val="2B211C"/>
                 </a:solidFill>
                 <a:latin typeface="Calibri"/>
               </a:rPr>
-              <a:t>Follow up and documentation</a:t>
+              <a:t>The request ends with follow-up and documentation. A, B and C come earlier.</a:t>
             </a:r>
           </a:p>
         </p:txBody>
@@ -15970,20 +16502,20 @@
       <p:grpSpPr/>
       <p:sp>
         <p:nvSpPr>
-          <p:cNvPr id="2" name="Oval 1"/>
+          <p:cNvPr id="2" name="Rectangle 1"/>
           <p:cNvSpPr/>
           <p:nvPr/>
         </p:nvSpPr>
         <p:spPr>
           <a:xfrm>
-            <a:off x="548640" y="475488"/>
-            <a:ext cx="658368" cy="658368"/>
-          </a:xfrm>
-          <a:prstGeom prst="ellipse">
+            <a:off x="0" y="0"/>
+            <a:ext cx="3931920" cy="6858000"/>
+          </a:xfrm>
+          <a:prstGeom prst="rect">
             <a:avLst/>
           </a:prstGeom>
           <a:solidFill>
-            <a:srgbClr val="2F6F7A"/>
+            <a:srgbClr val="A4472B"/>
           </a:solidFill>
           <a:ln>
             <a:noFill/>
@@ -16005,19 +16537,10 @@
           </a:fontRef>
         </p:style>
         <p:txBody>
-          <a:bodyPr rtlCol="0" anchor="ctr" lIns="0" rIns="0" tIns="0" bIns="0"/>
+          <a:bodyPr rtlCol="0" anchor="ctr"/>
           <a:lstStyle/>
           <a:p>
             <a:pPr algn="ctr"/>
-            <a:r>
-              <a:rPr sz="1800" i="0" b="1">
-                <a:solidFill>
-                  <a:srgbClr val="FFFFFF"/>
-                </a:solidFill>
-                <a:latin typeface="Cambria"/>
-              </a:rPr>
-              <a:t>01</a:t>
-            </a:r>
           </a:p>
         </p:txBody>
       </p:sp>
@@ -16029,8 +16552,8 @@
         </p:nvSpPr>
         <p:spPr>
           <a:xfrm>
-            <a:off x="1417319" y="438912"/>
-            <a:ext cx="10180015" cy="292608"/>
+            <a:off x="548640" y="1188720"/>
+            <a:ext cx="2926080" cy="2377440"/>
           </a:xfrm>
           <a:prstGeom prst="rect">
             <a:avLst/>
@@ -16044,13 +16567,13 @@
           <a:lstStyle/>
           <a:p>
             <a:r>
-              <a:rPr sz="1200" i="0" b="1" spc="150">
-                <a:solidFill>
-                  <a:srgbClr val="2F6F7A"/>
-                </a:solidFill>
-                <a:latin typeface="Calibri"/>
-              </a:rPr>
-              <a:t>SECTION 1  ·  QUESTION 5 OF 5  ·  ANSWER</a:t>
+              <a:rPr sz="13000" i="0" b="1">
+                <a:solidFill>
+                  <a:srgbClr val="F1E3DF"/>
+                </a:solidFill>
+                <a:latin typeface="Cambria"/>
+              </a:rPr>
+              <a:t>?</a:t>
             </a:r>
           </a:p>
         </p:txBody>
@@ -16063,8 +16586,8 @@
         </p:nvSpPr>
         <p:spPr>
           <a:xfrm>
-            <a:off x="1417319" y="676656"/>
-            <a:ext cx="10180015" cy="640080"/>
+            <a:off x="548640" y="3977639"/>
+            <a:ext cx="3017520" cy="1280160"/>
           </a:xfrm>
           <a:prstGeom prst="rect">
             <a:avLst/>
@@ -16078,13 +16601,24 @@
           <a:lstStyle/>
           <a:p>
             <a:r>
-              <a:rPr sz="3200" i="0" b="1">
-                <a:solidFill>
-                  <a:srgbClr val="2B211C"/>
+              <a:rPr sz="3000" i="0" b="1">
+                <a:solidFill>
+                  <a:srgbClr val="FFFFFF"/>
                 </a:solidFill>
                 <a:latin typeface="Cambria"/>
               </a:rPr>
-              <a:t>Check your answer</a:t>
+              <a:t>Practice Case</a:t>
+            </a:r>
+          </a:p>
+          <a:p>
+            <a:r>
+              <a:rPr sz="1400" i="0" b="1" spc="150">
+                <a:solidFill>
+                  <a:srgbClr val="F1E3DF"/>
+                </a:solidFill>
+                <a:latin typeface="Calibri"/>
+              </a:rPr>
+              <a:t>Section 1</a:t>
             </a:r>
           </a:p>
         </p:txBody>
@@ -16097,7 +16631,41 @@
         </p:nvSpPr>
         <p:spPr>
           <a:xfrm>
-            <a:off x="548640" y="6419088"/>
+            <a:off x="4526280" y="822960"/>
+            <a:ext cx="7132320" cy="5120640"/>
+          </a:xfrm>
+          <a:prstGeom prst="rect">
+            <a:avLst/>
+          </a:prstGeom>
+          <a:noFill/>
+        </p:spPr>
+        <p:txBody>
+          <a:bodyPr wrap="square" anchor="ctr" lIns="0" rIns="0" tIns="0" bIns="0">
+            <a:spAutoFit/>
+          </a:bodyPr>
+          <a:lstStyle/>
+          <a:p>
+            <a:r>
+              <a:rPr sz="2200" i="0" b="0">
+                <a:solidFill>
+                  <a:srgbClr val="2B211C"/>
+                </a:solidFill>
+                <a:latin typeface="Calibri"/>
+              </a:rPr>
+              <a:t>A doctor phones the pharmacy: "Is metformin safe in my patient?" (a) Which background details do you need? (b) What might the real question be? (c) How do you finish the request?</a:t>
+            </a:r>
+          </a:p>
+        </p:txBody>
+      </p:sp>
+      <p:sp>
+        <p:nvSpPr>
+          <p:cNvPr id="6" name="TextBox 5"/>
+          <p:cNvSpPr txBox="1"/>
+          <p:nvPr/>
+        </p:nvSpPr>
+        <p:spPr>
+          <a:xfrm>
+            <a:off x="4526280" y="6419088"/>
             <a:ext cx="8229600" cy="274320"/>
           </a:xfrm>
           <a:prstGeom prst="rect">
@@ -16118,14 +16686,14 @@
                 </a:solidFill>
                 <a:latin typeface="Calibri"/>
               </a:rPr>
-              <a:t>Drug Information  ·  Section 1  ·  The Drug Information Centre</a:t>
-            </a:r>
-          </a:p>
-        </p:txBody>
-      </p:sp>
-      <p:sp>
-        <p:nvSpPr>
-          <p:cNvPr id="6" name="TextBox 5"/>
+              <a:t>Drug Information  ·  The Drug Information Centre</a:t>
+            </a:r>
+          </a:p>
+        </p:txBody>
+      </p:sp>
+      <p:sp>
+        <p:nvSpPr>
+          <p:cNvPr id="7" name="TextBox 6"/>
           <p:cNvSpPr txBox="1"/>
           <p:nvPr/>
         </p:nvSpPr>
@@ -16153,21 +16721,21 @@
                 </a:solidFill>
                 <a:latin typeface="Calibri"/>
               </a:rPr>
-              <a:t>24 / 26</a:t>
+              <a:t>24 / 25</a:t>
             </a:r>
           </a:p>
         </p:txBody>
       </p:sp>
       <p:pic>
         <p:nvPicPr>
-          <p:cNvPr id="7" name="Picture 6" descr="logo"/>
+          <p:cNvPr id="8" name="Picture 7" descr="logo"/>
           <p:cNvPicPr>
             <a:picLocks noChangeAspect="1"/>
           </p:cNvPicPr>
           <p:nvPr/>
         </p:nvPicPr>
         <p:blipFill>
-          <a:blip r:embed="rId2"/>
+          <a:blip r:embed="rId3"/>
           <a:stretch>
             <a:fillRect/>
           </a:stretch>
@@ -16182,615 +16750,6 @@
           </a:prstGeom>
         </p:spPr>
       </p:pic>
-      <p:sp>
-        <p:nvSpPr>
-          <p:cNvPr id="8" name="TextBox 7"/>
-          <p:cNvSpPr txBox="1"/>
-          <p:nvPr/>
-        </p:nvSpPr>
-        <p:spPr>
-          <a:xfrm>
-            <a:off x="548640" y="1554480"/>
-            <a:ext cx="11094415" cy="1005840"/>
-          </a:xfrm>
-          <a:prstGeom prst="rect">
-            <a:avLst/>
-          </a:prstGeom>
-          <a:noFill/>
-        </p:spPr>
-        <p:txBody>
-          <a:bodyPr wrap="square" anchor="t" lIns="0" rIns="0" tIns="0" bIns="0">
-            <a:spAutoFit/>
-          </a:bodyPr>
-          <a:lstStyle/>
-          <a:p>
-            <a:r>
-              <a:rPr sz="2400" i="0" b="1">
-                <a:solidFill>
-                  <a:srgbClr val="2B211C"/>
-                </a:solidFill>
-                <a:latin typeface="Calibri"/>
-              </a:rPr>
-              <a:t>What is the last step of the systematic approach?</a:t>
-            </a:r>
-          </a:p>
-        </p:txBody>
-      </p:sp>
-      <p:sp>
-        <p:nvSpPr>
-          <p:cNvPr id="9" name="Rounded Rectangle 8"/>
-          <p:cNvSpPr/>
-          <p:nvPr/>
-        </p:nvSpPr>
-        <p:spPr>
-          <a:xfrm>
-            <a:off x="548640" y="2606040"/>
-            <a:ext cx="11094415" cy="548640"/>
-          </a:xfrm>
-          <a:prstGeom prst="roundRect">
-            <a:avLst>
-              <a:gd name="adj" fmla="val 18000"/>
-            </a:avLst>
-          </a:prstGeom>
-          <a:solidFill>
-            <a:srgbClr val="F5F4F4"/>
-          </a:solidFill>
-          <a:ln>
-            <a:noFill/>
-          </a:ln>
-          <a:effectLst/>
-        </p:spPr>
-        <p:style>
-          <a:lnRef idx="1">
-            <a:schemeClr val="accent1"/>
-          </a:lnRef>
-          <a:fillRef idx="3">
-            <a:schemeClr val="accent1"/>
-          </a:fillRef>
-          <a:effectRef idx="2">
-            <a:schemeClr val="accent1"/>
-          </a:effectRef>
-          <a:fontRef idx="minor">
-            <a:schemeClr val="lt1"/>
-          </a:fontRef>
-        </p:style>
-        <p:txBody>
-          <a:bodyPr rtlCol="0" anchor="ctr"/>
-          <a:lstStyle/>
-          <a:p>
-            <a:pPr algn="ctr"/>
-          </a:p>
-        </p:txBody>
-      </p:sp>
-      <p:sp>
-        <p:nvSpPr>
-          <p:cNvPr id="10" name="Oval 9"/>
-          <p:cNvSpPr/>
-          <p:nvPr/>
-        </p:nvSpPr>
-        <p:spPr>
-          <a:xfrm>
-            <a:off x="713232" y="2670048"/>
-            <a:ext cx="420624" cy="420624"/>
-          </a:xfrm>
-          <a:prstGeom prst="ellipse">
-            <a:avLst/>
-          </a:prstGeom>
-          <a:solidFill>
-            <a:srgbClr val="E2E0DE"/>
-          </a:solidFill>
-          <a:ln>
-            <a:noFill/>
-          </a:ln>
-          <a:effectLst/>
-        </p:spPr>
-        <p:style>
-          <a:lnRef idx="1">
-            <a:schemeClr val="accent1"/>
-          </a:lnRef>
-          <a:fillRef idx="3">
-            <a:schemeClr val="accent1"/>
-          </a:fillRef>
-          <a:effectRef idx="2">
-            <a:schemeClr val="accent1"/>
-          </a:effectRef>
-          <a:fontRef idx="minor">
-            <a:schemeClr val="lt1"/>
-          </a:fontRef>
-        </p:style>
-        <p:txBody>
-          <a:bodyPr rtlCol="0" anchor="ctr" lIns="0" rIns="0" tIns="0" bIns="0"/>
-          <a:lstStyle/>
-          <a:p>
-            <a:pPr algn="ctr"/>
-            <a:r>
-              <a:rPr sz="1500" i="0" b="1">
-                <a:solidFill>
-                  <a:srgbClr val="6E625B"/>
-                </a:solidFill>
-                <a:latin typeface="Calibri"/>
-              </a:rPr>
-              <a:t>A</a:t>
-            </a:r>
-          </a:p>
-        </p:txBody>
-      </p:sp>
-      <p:sp>
-        <p:nvSpPr>
-          <p:cNvPr id="11" name="TextBox 10"/>
-          <p:cNvSpPr txBox="1"/>
-          <p:nvPr/>
-        </p:nvSpPr>
-        <p:spPr>
-          <a:xfrm>
-            <a:off x="1371600" y="2606040"/>
-            <a:ext cx="10088575" cy="548640"/>
-          </a:xfrm>
-          <a:prstGeom prst="rect">
-            <a:avLst/>
-          </a:prstGeom>
-          <a:noFill/>
-        </p:spPr>
-        <p:txBody>
-          <a:bodyPr wrap="square" anchor="ctr" lIns="0" rIns="0" tIns="0" bIns="0">
-            <a:spAutoFit/>
-          </a:bodyPr>
-          <a:lstStyle/>
-          <a:p>
-            <a:r>
-              <a:rPr sz="1900" i="0" b="0">
-                <a:solidFill>
-                  <a:srgbClr val="6E625B"/>
-                </a:solidFill>
-                <a:latin typeface="Calibri"/>
-              </a:rPr>
-              <a:t>Searching tertiary sources</a:t>
-            </a:r>
-          </a:p>
-        </p:txBody>
-      </p:sp>
-      <p:sp>
-        <p:nvSpPr>
-          <p:cNvPr id="12" name="Rounded Rectangle 11"/>
-          <p:cNvSpPr/>
-          <p:nvPr/>
-        </p:nvSpPr>
-        <p:spPr>
-          <a:xfrm>
-            <a:off x="548640" y="3282696"/>
-            <a:ext cx="11094415" cy="548640"/>
-          </a:xfrm>
-          <a:prstGeom prst="roundRect">
-            <a:avLst>
-              <a:gd name="adj" fmla="val 18000"/>
-            </a:avLst>
-          </a:prstGeom>
-          <a:solidFill>
-            <a:srgbClr val="F5F4F4"/>
-          </a:solidFill>
-          <a:ln>
-            <a:noFill/>
-          </a:ln>
-          <a:effectLst/>
-        </p:spPr>
-        <p:style>
-          <a:lnRef idx="1">
-            <a:schemeClr val="accent1"/>
-          </a:lnRef>
-          <a:fillRef idx="3">
-            <a:schemeClr val="accent1"/>
-          </a:fillRef>
-          <a:effectRef idx="2">
-            <a:schemeClr val="accent1"/>
-          </a:effectRef>
-          <a:fontRef idx="minor">
-            <a:schemeClr val="lt1"/>
-          </a:fontRef>
-        </p:style>
-        <p:txBody>
-          <a:bodyPr rtlCol="0" anchor="ctr"/>
-          <a:lstStyle/>
-          <a:p>
-            <a:pPr algn="ctr"/>
-          </a:p>
-        </p:txBody>
-      </p:sp>
-      <p:sp>
-        <p:nvSpPr>
-          <p:cNvPr id="13" name="Oval 12"/>
-          <p:cNvSpPr/>
-          <p:nvPr/>
-        </p:nvSpPr>
-        <p:spPr>
-          <a:xfrm>
-            <a:off x="713232" y="3346703"/>
-            <a:ext cx="420624" cy="420624"/>
-          </a:xfrm>
-          <a:prstGeom prst="ellipse">
-            <a:avLst/>
-          </a:prstGeom>
-          <a:solidFill>
-            <a:srgbClr val="E2E0DE"/>
-          </a:solidFill>
-          <a:ln>
-            <a:noFill/>
-          </a:ln>
-          <a:effectLst/>
-        </p:spPr>
-        <p:style>
-          <a:lnRef idx="1">
-            <a:schemeClr val="accent1"/>
-          </a:lnRef>
-          <a:fillRef idx="3">
-            <a:schemeClr val="accent1"/>
-          </a:fillRef>
-          <a:effectRef idx="2">
-            <a:schemeClr val="accent1"/>
-          </a:effectRef>
-          <a:fontRef idx="minor">
-            <a:schemeClr val="lt1"/>
-          </a:fontRef>
-        </p:style>
-        <p:txBody>
-          <a:bodyPr rtlCol="0" anchor="ctr" lIns="0" rIns="0" tIns="0" bIns="0"/>
-          <a:lstStyle/>
-          <a:p>
-            <a:pPr algn="ctr"/>
-            <a:r>
-              <a:rPr sz="1500" i="0" b="1">
-                <a:solidFill>
-                  <a:srgbClr val="6E625B"/>
-                </a:solidFill>
-                <a:latin typeface="Calibri"/>
-              </a:rPr>
-              <a:t>B</a:t>
-            </a:r>
-          </a:p>
-        </p:txBody>
-      </p:sp>
-      <p:sp>
-        <p:nvSpPr>
-          <p:cNvPr id="14" name="TextBox 13"/>
-          <p:cNvSpPr txBox="1"/>
-          <p:nvPr/>
-        </p:nvSpPr>
-        <p:spPr>
-          <a:xfrm>
-            <a:off x="1371600" y="3282696"/>
-            <a:ext cx="10088575" cy="548640"/>
-          </a:xfrm>
-          <a:prstGeom prst="rect">
-            <a:avLst/>
-          </a:prstGeom>
-          <a:noFill/>
-        </p:spPr>
-        <p:txBody>
-          <a:bodyPr wrap="square" anchor="ctr" lIns="0" rIns="0" tIns="0" bIns="0">
-            <a:spAutoFit/>
-          </a:bodyPr>
-          <a:lstStyle/>
-          <a:p>
-            <a:r>
-              <a:rPr sz="1900" i="0" b="0">
-                <a:solidFill>
-                  <a:srgbClr val="6E625B"/>
-                </a:solidFill>
-                <a:latin typeface="Calibri"/>
-              </a:rPr>
-              <a:t>Collecting background</a:t>
-            </a:r>
-          </a:p>
-        </p:txBody>
-      </p:sp>
-      <p:sp>
-        <p:nvSpPr>
-          <p:cNvPr id="15" name="Rounded Rectangle 14"/>
-          <p:cNvSpPr/>
-          <p:nvPr/>
-        </p:nvSpPr>
-        <p:spPr>
-          <a:xfrm>
-            <a:off x="548640" y="3959352"/>
-            <a:ext cx="11094415" cy="548640"/>
-          </a:xfrm>
-          <a:prstGeom prst="roundRect">
-            <a:avLst>
-              <a:gd name="adj" fmla="val 18000"/>
-            </a:avLst>
-          </a:prstGeom>
-          <a:solidFill>
-            <a:srgbClr val="F5F4F4"/>
-          </a:solidFill>
-          <a:ln>
-            <a:noFill/>
-          </a:ln>
-          <a:effectLst/>
-        </p:spPr>
-        <p:style>
-          <a:lnRef idx="1">
-            <a:schemeClr val="accent1"/>
-          </a:lnRef>
-          <a:fillRef idx="3">
-            <a:schemeClr val="accent1"/>
-          </a:fillRef>
-          <a:effectRef idx="2">
-            <a:schemeClr val="accent1"/>
-          </a:effectRef>
-          <a:fontRef idx="minor">
-            <a:schemeClr val="lt1"/>
-          </a:fontRef>
-        </p:style>
-        <p:txBody>
-          <a:bodyPr rtlCol="0" anchor="ctr"/>
-          <a:lstStyle/>
-          <a:p>
-            <a:pPr algn="ctr"/>
-          </a:p>
-        </p:txBody>
-      </p:sp>
-      <p:sp>
-        <p:nvSpPr>
-          <p:cNvPr id="16" name="Oval 15"/>
-          <p:cNvSpPr/>
-          <p:nvPr/>
-        </p:nvSpPr>
-        <p:spPr>
-          <a:xfrm>
-            <a:off x="713232" y="4023360"/>
-            <a:ext cx="420624" cy="420624"/>
-          </a:xfrm>
-          <a:prstGeom prst="ellipse">
-            <a:avLst/>
-          </a:prstGeom>
-          <a:solidFill>
-            <a:srgbClr val="E2E0DE"/>
-          </a:solidFill>
-          <a:ln>
-            <a:noFill/>
-          </a:ln>
-          <a:effectLst/>
-        </p:spPr>
-        <p:style>
-          <a:lnRef idx="1">
-            <a:schemeClr val="accent1"/>
-          </a:lnRef>
-          <a:fillRef idx="3">
-            <a:schemeClr val="accent1"/>
-          </a:fillRef>
-          <a:effectRef idx="2">
-            <a:schemeClr val="accent1"/>
-          </a:effectRef>
-          <a:fontRef idx="minor">
-            <a:schemeClr val="lt1"/>
-          </a:fontRef>
-        </p:style>
-        <p:txBody>
-          <a:bodyPr rtlCol="0" anchor="ctr" lIns="0" rIns="0" tIns="0" bIns="0"/>
-          <a:lstStyle/>
-          <a:p>
-            <a:pPr algn="ctr"/>
-            <a:r>
-              <a:rPr sz="1500" i="0" b="1">
-                <a:solidFill>
-                  <a:srgbClr val="6E625B"/>
-                </a:solidFill>
-                <a:latin typeface="Calibri"/>
-              </a:rPr>
-              <a:t>C</a:t>
-            </a:r>
-          </a:p>
-        </p:txBody>
-      </p:sp>
-      <p:sp>
-        <p:nvSpPr>
-          <p:cNvPr id="17" name="TextBox 16"/>
-          <p:cNvSpPr txBox="1"/>
-          <p:nvPr/>
-        </p:nvSpPr>
-        <p:spPr>
-          <a:xfrm>
-            <a:off x="1371600" y="3959352"/>
-            <a:ext cx="10088575" cy="548640"/>
-          </a:xfrm>
-          <a:prstGeom prst="rect">
-            <a:avLst/>
-          </a:prstGeom>
-          <a:noFill/>
-        </p:spPr>
-        <p:txBody>
-          <a:bodyPr wrap="square" anchor="ctr" lIns="0" rIns="0" tIns="0" bIns="0">
-            <a:spAutoFit/>
-          </a:bodyPr>
-          <a:lstStyle/>
-          <a:p>
-            <a:r>
-              <a:rPr sz="1900" i="0" b="0">
-                <a:solidFill>
-                  <a:srgbClr val="6E625B"/>
-                </a:solidFill>
-                <a:latin typeface="Calibri"/>
-              </a:rPr>
-              <a:t>Classifying the question</a:t>
-            </a:r>
-          </a:p>
-        </p:txBody>
-      </p:sp>
-      <p:sp>
-        <p:nvSpPr>
-          <p:cNvPr id="18" name="Rounded Rectangle 17"/>
-          <p:cNvSpPr/>
-          <p:nvPr/>
-        </p:nvSpPr>
-        <p:spPr>
-          <a:xfrm>
-            <a:off x="548640" y="4636008"/>
-            <a:ext cx="11094415" cy="548640"/>
-          </a:xfrm>
-          <a:prstGeom prst="roundRect">
-            <a:avLst>
-              <a:gd name="adj" fmla="val 18000"/>
-            </a:avLst>
-          </a:prstGeom>
-          <a:solidFill>
-            <a:srgbClr val="2F6F7A"/>
-          </a:solidFill>
-          <a:ln>
-            <a:noFill/>
-          </a:ln>
-          <a:effectLst/>
-        </p:spPr>
-        <p:style>
-          <a:lnRef idx="1">
-            <a:schemeClr val="accent1"/>
-          </a:lnRef>
-          <a:fillRef idx="3">
-            <a:schemeClr val="accent1"/>
-          </a:fillRef>
-          <a:effectRef idx="2">
-            <a:schemeClr val="accent1"/>
-          </a:effectRef>
-          <a:fontRef idx="minor">
-            <a:schemeClr val="lt1"/>
-          </a:fontRef>
-        </p:style>
-        <p:txBody>
-          <a:bodyPr rtlCol="0" anchor="ctr"/>
-          <a:lstStyle/>
-          <a:p>
-            <a:pPr algn="ctr"/>
-          </a:p>
-        </p:txBody>
-      </p:sp>
-      <p:sp>
-        <p:nvSpPr>
-          <p:cNvPr id="19" name="Oval 18"/>
-          <p:cNvSpPr/>
-          <p:nvPr/>
-        </p:nvSpPr>
-        <p:spPr>
-          <a:xfrm>
-            <a:off x="713232" y="4700016"/>
-            <a:ext cx="420624" cy="420624"/>
-          </a:xfrm>
-          <a:prstGeom prst="ellipse">
-            <a:avLst/>
-          </a:prstGeom>
-          <a:solidFill>
-            <a:srgbClr val="FFFFFF"/>
-          </a:solidFill>
-          <a:ln>
-            <a:noFill/>
-          </a:ln>
-          <a:effectLst/>
-        </p:spPr>
-        <p:style>
-          <a:lnRef idx="1">
-            <a:schemeClr val="accent1"/>
-          </a:lnRef>
-          <a:fillRef idx="3">
-            <a:schemeClr val="accent1"/>
-          </a:fillRef>
-          <a:effectRef idx="2">
-            <a:schemeClr val="accent1"/>
-          </a:effectRef>
-          <a:fontRef idx="minor">
-            <a:schemeClr val="lt1"/>
-          </a:fontRef>
-        </p:style>
-        <p:txBody>
-          <a:bodyPr rtlCol="0" anchor="ctr" lIns="0" rIns="0" tIns="0" bIns="0"/>
-          <a:lstStyle/>
-          <a:p>
-            <a:pPr algn="ctr"/>
-            <a:r>
-              <a:rPr sz="1500" i="0" b="1">
-                <a:solidFill>
-                  <a:srgbClr val="2F6F7A"/>
-                </a:solidFill>
-                <a:latin typeface="Calibri"/>
-              </a:rPr>
-              <a:t>D</a:t>
-            </a:r>
-          </a:p>
-        </p:txBody>
-      </p:sp>
-      <p:sp>
-        <p:nvSpPr>
-          <p:cNvPr id="20" name="TextBox 19"/>
-          <p:cNvSpPr txBox="1"/>
-          <p:nvPr/>
-        </p:nvSpPr>
-        <p:spPr>
-          <a:xfrm>
-            <a:off x="1371600" y="4636008"/>
-            <a:ext cx="10088575" cy="548640"/>
-          </a:xfrm>
-          <a:prstGeom prst="rect">
-            <a:avLst/>
-          </a:prstGeom>
-          <a:noFill/>
-        </p:spPr>
-        <p:txBody>
-          <a:bodyPr wrap="square" anchor="ctr" lIns="0" rIns="0" tIns="0" bIns="0">
-            <a:spAutoFit/>
-          </a:bodyPr>
-          <a:lstStyle/>
-          <a:p>
-            <a:r>
-              <a:rPr sz="1900" i="0" b="1">
-                <a:solidFill>
-                  <a:srgbClr val="FFFFFF"/>
-                </a:solidFill>
-                <a:latin typeface="Calibri"/>
-              </a:rPr>
-              <a:t>Follow up and documentation</a:t>
-            </a:r>
-          </a:p>
-        </p:txBody>
-      </p:sp>
-      <p:sp>
-        <p:nvSpPr>
-          <p:cNvPr id="21" name="TextBox 20"/>
-          <p:cNvSpPr txBox="1"/>
-          <p:nvPr/>
-        </p:nvSpPr>
-        <p:spPr>
-          <a:xfrm>
-            <a:off x="548640" y="5358384"/>
-            <a:ext cx="11094415" cy="685800"/>
-          </a:xfrm>
-          <a:prstGeom prst="rect">
-            <a:avLst/>
-          </a:prstGeom>
-          <a:noFill/>
-        </p:spPr>
-        <p:txBody>
-          <a:bodyPr wrap="square" anchor="t" lIns="0" rIns="0" tIns="0" bIns="0">
-            <a:spAutoFit/>
-          </a:bodyPr>
-          <a:lstStyle/>
-          <a:p>
-            <a:r>
-              <a:rPr sz="1500" i="0" b="1">
-                <a:solidFill>
-                  <a:srgbClr val="2F6F7A"/>
-                </a:solidFill>
-                <a:latin typeface="Calibri"/>
-              </a:rPr>
-              <a:t>Why:  </a:t>
-            </a:r>
-            <a:r>
-              <a:rPr sz="1500" i="0" b="0">
-                <a:solidFill>
-                  <a:srgbClr val="2B211C"/>
-                </a:solidFill>
-                <a:latin typeface="Calibri"/>
-              </a:rPr>
-              <a:t>The request ends with follow-up and documentation. A, B and C come earlier.</a:t>
-            </a:r>
-          </a:p>
-        </p:txBody>
-      </p:sp>
     </p:spTree>
   </p:cSld>
   <p:clrMapOvr>
@@ -16800,282 +16759,6 @@
 </file>
 
 <file path=ppt/slides/slide25.xml><?xml version="1.0" encoding="utf-8"?>
-<p:sld xmlns:a="http://schemas.openxmlformats.org/drawingml/2006/main" xmlns:p="http://schemas.openxmlformats.org/presentationml/2006/main" xmlns:r="http://schemas.openxmlformats.org/officeDocument/2006/relationships">
-  <p:cSld>
-    <p:bg>
-      <p:bgPr>
-        <a:solidFill>
-          <a:srgbClr val="FFFFFF"/>
-        </a:solidFill>
-        <a:effectLst/>
-      </p:bgPr>
-    </p:bg>
-    <p:spTree>
-      <p:nvGrpSpPr>
-        <p:cNvPr id="1" name=""/>
-        <p:cNvGrpSpPr/>
-        <p:nvPr/>
-      </p:nvGrpSpPr>
-      <p:grpSpPr/>
-      <p:sp>
-        <p:nvSpPr>
-          <p:cNvPr id="2" name="Rectangle 1"/>
-          <p:cNvSpPr/>
-          <p:nvPr/>
-        </p:nvSpPr>
-        <p:spPr>
-          <a:xfrm>
-            <a:off x="0" y="0"/>
-            <a:ext cx="3931920" cy="6858000"/>
-          </a:xfrm>
-          <a:prstGeom prst="rect">
-            <a:avLst/>
-          </a:prstGeom>
-          <a:solidFill>
-            <a:srgbClr val="A4472B"/>
-          </a:solidFill>
-          <a:ln>
-            <a:noFill/>
-          </a:ln>
-          <a:effectLst/>
-        </p:spPr>
-        <p:style>
-          <a:lnRef idx="1">
-            <a:schemeClr val="accent1"/>
-          </a:lnRef>
-          <a:fillRef idx="3">
-            <a:schemeClr val="accent1"/>
-          </a:fillRef>
-          <a:effectRef idx="2">
-            <a:schemeClr val="accent1"/>
-          </a:effectRef>
-          <a:fontRef idx="minor">
-            <a:schemeClr val="lt1"/>
-          </a:fontRef>
-        </p:style>
-        <p:txBody>
-          <a:bodyPr rtlCol="0" anchor="ctr"/>
-          <a:lstStyle/>
-          <a:p>
-            <a:pPr algn="ctr"/>
-          </a:p>
-        </p:txBody>
-      </p:sp>
-      <p:sp>
-        <p:nvSpPr>
-          <p:cNvPr id="3" name="TextBox 2"/>
-          <p:cNvSpPr txBox="1"/>
-          <p:nvPr/>
-        </p:nvSpPr>
-        <p:spPr>
-          <a:xfrm>
-            <a:off x="548640" y="1188720"/>
-            <a:ext cx="2926080" cy="2377440"/>
-          </a:xfrm>
-          <a:prstGeom prst="rect">
-            <a:avLst/>
-          </a:prstGeom>
-          <a:noFill/>
-        </p:spPr>
-        <p:txBody>
-          <a:bodyPr wrap="square" anchor="t" lIns="0" rIns="0" tIns="0" bIns="0">
-            <a:spAutoFit/>
-          </a:bodyPr>
-          <a:lstStyle/>
-          <a:p>
-            <a:r>
-              <a:rPr sz="13000" i="0" b="1">
-                <a:solidFill>
-                  <a:srgbClr val="F1E3DF"/>
-                </a:solidFill>
-                <a:latin typeface="Cambria"/>
-              </a:rPr>
-              <a:t>?</a:t>
-            </a:r>
-          </a:p>
-        </p:txBody>
-      </p:sp>
-      <p:sp>
-        <p:nvSpPr>
-          <p:cNvPr id="4" name="TextBox 3"/>
-          <p:cNvSpPr txBox="1"/>
-          <p:nvPr/>
-        </p:nvSpPr>
-        <p:spPr>
-          <a:xfrm>
-            <a:off x="548640" y="3977639"/>
-            <a:ext cx="3017520" cy="1280160"/>
-          </a:xfrm>
-          <a:prstGeom prst="rect">
-            <a:avLst/>
-          </a:prstGeom>
-          <a:noFill/>
-        </p:spPr>
-        <p:txBody>
-          <a:bodyPr wrap="square" anchor="t" lIns="0" rIns="0" tIns="0" bIns="0">
-            <a:spAutoFit/>
-          </a:bodyPr>
-          <a:lstStyle/>
-          <a:p>
-            <a:r>
-              <a:rPr sz="3000" i="0" b="1">
-                <a:solidFill>
-                  <a:srgbClr val="FFFFFF"/>
-                </a:solidFill>
-                <a:latin typeface="Cambria"/>
-              </a:rPr>
-              <a:t>Practice Case</a:t>
-            </a:r>
-          </a:p>
-          <a:p>
-            <a:r>
-              <a:rPr sz="1400" i="0" b="1" spc="150">
-                <a:solidFill>
-                  <a:srgbClr val="F1E3DF"/>
-                </a:solidFill>
-                <a:latin typeface="Calibri"/>
-              </a:rPr>
-              <a:t>Section 1</a:t>
-            </a:r>
-          </a:p>
-        </p:txBody>
-      </p:sp>
-      <p:sp>
-        <p:nvSpPr>
-          <p:cNvPr id="5" name="TextBox 4"/>
-          <p:cNvSpPr txBox="1"/>
-          <p:nvPr/>
-        </p:nvSpPr>
-        <p:spPr>
-          <a:xfrm>
-            <a:off x="4526280" y="822960"/>
-            <a:ext cx="7132320" cy="5120640"/>
-          </a:xfrm>
-          <a:prstGeom prst="rect">
-            <a:avLst/>
-          </a:prstGeom>
-          <a:noFill/>
-        </p:spPr>
-        <p:txBody>
-          <a:bodyPr wrap="square" anchor="ctr" lIns="0" rIns="0" tIns="0" bIns="0">
-            <a:spAutoFit/>
-          </a:bodyPr>
-          <a:lstStyle/>
-          <a:p>
-            <a:r>
-              <a:rPr sz="2200" i="0" b="0">
-                <a:solidFill>
-                  <a:srgbClr val="2B211C"/>
-                </a:solidFill>
-                <a:latin typeface="Calibri"/>
-              </a:rPr>
-              <a:t>A doctor phones the pharmacy: "Is metformin safe in my patient?" (a) Which background details do you need? (b) What might the real question be? (c) How do you finish the request?</a:t>
-            </a:r>
-          </a:p>
-        </p:txBody>
-      </p:sp>
-      <p:sp>
-        <p:nvSpPr>
-          <p:cNvPr id="6" name="TextBox 5"/>
-          <p:cNvSpPr txBox="1"/>
-          <p:nvPr/>
-        </p:nvSpPr>
-        <p:spPr>
-          <a:xfrm>
-            <a:off x="4526280" y="6419088"/>
-            <a:ext cx="8229600" cy="274320"/>
-          </a:xfrm>
-          <a:prstGeom prst="rect">
-            <a:avLst/>
-          </a:prstGeom>
-          <a:noFill/>
-        </p:spPr>
-        <p:txBody>
-          <a:bodyPr wrap="square" anchor="t" lIns="0" rIns="0" tIns="0" bIns="0">
-            <a:spAutoFit/>
-          </a:bodyPr>
-          <a:lstStyle/>
-          <a:p>
-            <a:r>
-              <a:rPr sz="1200" i="0" b="0">
-                <a:solidFill>
-                  <a:srgbClr val="6E625B"/>
-                </a:solidFill>
-                <a:latin typeface="Calibri"/>
-              </a:rPr>
-              <a:t>Drug Information  ·  The Drug Information Centre</a:t>
-            </a:r>
-          </a:p>
-        </p:txBody>
-      </p:sp>
-      <p:sp>
-        <p:nvSpPr>
-          <p:cNvPr id="7" name="TextBox 6"/>
-          <p:cNvSpPr txBox="1"/>
-          <p:nvPr/>
-        </p:nvSpPr>
-        <p:spPr>
-          <a:xfrm>
-            <a:off x="10058400" y="6419088"/>
-            <a:ext cx="1097280" cy="274320"/>
-          </a:xfrm>
-          <a:prstGeom prst="rect">
-            <a:avLst/>
-          </a:prstGeom>
-          <a:noFill/>
-        </p:spPr>
-        <p:txBody>
-          <a:bodyPr wrap="square" anchor="t" lIns="0" rIns="0" tIns="0" bIns="0">
-            <a:spAutoFit/>
-          </a:bodyPr>
-          <a:lstStyle/>
-          <a:p>
-            <a:pPr algn="r"/>
-            <a:r>
-              <a:rPr sz="1200" i="0" b="1">
-                <a:solidFill>
-                  <a:srgbClr val="6E625B"/>
-                </a:solidFill>
-                <a:latin typeface="Calibri"/>
-              </a:rPr>
-              <a:t>25 / 26</a:t>
-            </a:r>
-          </a:p>
-        </p:txBody>
-      </p:sp>
-      <p:pic>
-        <p:nvPicPr>
-          <p:cNvPr id="8" name="Picture 7" descr="logo"/>
-          <p:cNvPicPr>
-            <a:picLocks noChangeAspect="1"/>
-          </p:cNvPicPr>
-          <p:nvPr/>
-        </p:nvPicPr>
-        <p:blipFill>
-          <a:blip r:embed="rId3"/>
-          <a:stretch>
-            <a:fillRect/>
-          </a:stretch>
-        </p:blipFill>
-        <p:spPr>
-          <a:xfrm>
-            <a:off x="11247120" y="6309360"/>
-            <a:ext cx="384048" cy="384048"/>
-          </a:xfrm>
-          <a:prstGeom prst="rect">
-            <a:avLst/>
-          </a:prstGeom>
-        </p:spPr>
-      </p:pic>
-    </p:spTree>
-  </p:cSld>
-  <p:clrMapOvr>
-    <a:masterClrMapping/>
-  </p:clrMapOvr>
-</p:sld>
-</file>
-
-<file path=ppt/slides/slide26.xml><?xml version="1.0" encoding="utf-8"?>
 <p:sld xmlns:a="http://schemas.openxmlformats.org/drawingml/2006/main" xmlns:p="http://schemas.openxmlformats.org/presentationml/2006/main" xmlns:r="http://schemas.openxmlformats.org/officeDocument/2006/relationships">
   <p:cSld>
     <p:bg>
@@ -17855,7 +17538,7 @@
                 </a:solidFill>
                 <a:latin typeface="Calibri"/>
               </a:rPr>
-              <a:t>03 / 26</a:t>
+              <a:t>03 / 25</a:t>
             </a:r>
           </a:p>
         </p:txBody>
@@ -18443,7 +18126,7 @@
                 </a:solidFill>
                 <a:latin typeface="Calibri"/>
               </a:rPr>
-              <a:t>04 / 26</a:t>
+              <a:t>04 / 25</a:t>
             </a:r>
           </a:p>
         </p:txBody>
@@ -18971,7 +18654,7 @@
                 </a:solidFill>
                 <a:latin typeface="Calibri"/>
               </a:rPr>
-              <a:t>05 / 26</a:t>
+              <a:t>05 / 25</a:t>
             </a:r>
           </a:p>
         </p:txBody>
@@ -19524,7 +19207,7 @@
                 </a:solidFill>
                 <a:latin typeface="Calibri"/>
               </a:rPr>
-              <a:t>06 / 26</a:t>
+              <a:t>06 / 25</a:t>
             </a:r>
           </a:p>
         </p:txBody>
@@ -20066,7 +19749,7 @@
                 </a:solidFill>
                 <a:latin typeface="Calibri"/>
               </a:rPr>
-              <a:t>07 / 26</a:t>
+              <a:t>07 / 25</a:t>
             </a:r>
           </a:p>
         </p:txBody>
@@ -20690,7 +20373,7 @@
                 </a:solidFill>
                 <a:latin typeface="Calibri"/>
               </a:rPr>
-              <a:t>08 / 26</a:t>
+              <a:t>08 / 25</a:t>
             </a:r>
           </a:p>
         </p:txBody>
@@ -21264,7 +20947,7 @@
                 </a:solidFill>
                 <a:latin typeface="Calibri"/>
               </a:rPr>
-              <a:t>09 / 26</a:t>
+              <a:t>09 / 25</a:t>
             </a:r>
           </a:p>
         </p:txBody>

--- a/projects/drug-information-practical/slides/ch01-drug-information-centre.pptx
+++ b/projects/drug-information-practical/slides/ch01-drug-information-centre.pptx
@@ -5564,7 +5564,7 @@
     <p:bg>
       <p:bgPr>
         <a:solidFill>
-          <a:srgbClr val="FFFFFF"/>
+          <a:srgbClr val="F5EDE3"/>
         </a:solidFill>
         <a:effectLst/>
       </p:bgPr>
@@ -5902,7 +5902,7 @@
     <p:bg>
       <p:bgPr>
         <a:solidFill>
-          <a:srgbClr val="FFFFFF"/>
+          <a:srgbClr val="F5EDE3"/>
         </a:solidFill>
         <a:effectLst/>
       </p:bgPr>
@@ -6752,7 +6752,7 @@
     <p:bg>
       <p:bgPr>
         <a:solidFill>
-          <a:srgbClr val="FFFFFF"/>
+          <a:srgbClr val="F5EDE3"/>
         </a:solidFill>
         <a:effectLst/>
       </p:bgPr>
@@ -7127,7 +7127,7 @@
     <p:bg>
       <p:bgPr>
         <a:solidFill>
-          <a:srgbClr val="FFFFFF"/>
+          <a:srgbClr val="F5EDE3"/>
         </a:solidFill>
         <a:effectLst/>
       </p:bgPr>
@@ -7475,7 +7475,7 @@
     <p:bg>
       <p:bgPr>
         <a:solidFill>
-          <a:srgbClr val="FFFFFF"/>
+          <a:srgbClr val="F5EDE3"/>
         </a:solidFill>
         <a:effectLst/>
       </p:bgPr>
@@ -8281,7 +8281,7 @@
     <p:bg>
       <p:bgPr>
         <a:solidFill>
-          <a:srgbClr val="FFFFFF"/>
+          <a:srgbClr val="F5EDE3"/>
         </a:solidFill>
         <a:effectLst/>
       </p:bgPr>
@@ -9130,7 +9130,7 @@
     <p:bg>
       <p:bgPr>
         <a:solidFill>
-          <a:srgbClr val="FFFFFF"/>
+          <a:srgbClr val="F5EDE3"/>
         </a:solidFill>
         <a:effectLst/>
       </p:bgPr>
@@ -9936,7 +9936,7 @@
     <p:bg>
       <p:bgPr>
         <a:solidFill>
-          <a:srgbClr val="FFFFFF"/>
+          <a:srgbClr val="F5EDE3"/>
         </a:solidFill>
         <a:effectLst/>
       </p:bgPr>
@@ -10785,7 +10785,7 @@
     <p:bg>
       <p:bgPr>
         <a:solidFill>
-          <a:srgbClr val="FFFFFF"/>
+          <a:srgbClr val="F5EDE3"/>
         </a:solidFill>
         <a:effectLst/>
       </p:bgPr>
@@ -11591,7 +11591,7 @@
     <p:bg>
       <p:bgPr>
         <a:solidFill>
-          <a:srgbClr val="FFFFFF"/>
+          <a:srgbClr val="F5EDE3"/>
         </a:solidFill>
         <a:effectLst/>
       </p:bgPr>
@@ -12440,7 +12440,7 @@
     <p:bg>
       <p:bgPr>
         <a:solidFill>
-          <a:srgbClr val="FFFFFF"/>
+          <a:srgbClr val="F5EDE3"/>
         </a:solidFill>
         <a:effectLst/>
       </p:bgPr>
@@ -13178,7 +13178,7 @@
     <p:bg>
       <p:bgPr>
         <a:solidFill>
-          <a:srgbClr val="FFFFFF"/>
+          <a:srgbClr val="F5EDE3"/>
         </a:solidFill>
         <a:effectLst/>
       </p:bgPr>
@@ -13984,7 +13984,7 @@
     <p:bg>
       <p:bgPr>
         <a:solidFill>
-          <a:srgbClr val="FFFFFF"/>
+          <a:srgbClr val="F5EDE3"/>
         </a:solidFill>
         <a:effectLst/>
       </p:bgPr>
@@ -14833,7 +14833,7 @@
     <p:bg>
       <p:bgPr>
         <a:solidFill>
-          <a:srgbClr val="FFFFFF"/>
+          <a:srgbClr val="F5EDE3"/>
         </a:solidFill>
         <a:effectLst/>
       </p:bgPr>
@@ -15639,7 +15639,7 @@
     <p:bg>
       <p:bgPr>
         <a:solidFill>
-          <a:srgbClr val="FFFFFF"/>
+          <a:srgbClr val="F5EDE3"/>
         </a:solidFill>
         <a:effectLst/>
       </p:bgPr>
@@ -16488,7 +16488,7 @@
     <p:bg>
       <p:bgPr>
         <a:solidFill>
-          <a:srgbClr val="FFFFFF"/>
+          <a:srgbClr val="F5EDE3"/>
         </a:solidFill>
         <a:effectLst/>
       </p:bgPr>
@@ -17341,7 +17341,7 @@
     <p:bg>
       <p:bgPr>
         <a:solidFill>
-          <a:srgbClr val="FFFFFF"/>
+          <a:srgbClr val="F5EDE3"/>
         </a:solidFill>
         <a:effectLst/>
       </p:bgPr>
@@ -17929,7 +17929,7 @@
     <p:bg>
       <p:bgPr>
         <a:solidFill>
-          <a:srgbClr val="FFFFFF"/>
+          <a:srgbClr val="F5EDE3"/>
         </a:solidFill>
         <a:effectLst/>
       </p:bgPr>
@@ -18457,7 +18457,7 @@
     <p:bg>
       <p:bgPr>
         <a:solidFill>
-          <a:srgbClr val="FFFFFF"/>
+          <a:srgbClr val="F5EDE3"/>
         </a:solidFill>
         <a:effectLst/>
       </p:bgPr>
@@ -19010,7 +19010,7 @@
     <p:bg>
       <p:bgPr>
         <a:solidFill>
-          <a:srgbClr val="FFFFFF"/>
+          <a:srgbClr val="F5EDE3"/>
         </a:solidFill>
         <a:effectLst/>
       </p:bgPr>
@@ -19552,7 +19552,7 @@
     <p:bg>
       <p:bgPr>
         <a:solidFill>
-          <a:srgbClr val="FFFFFF"/>
+          <a:srgbClr val="F5EDE3"/>
         </a:solidFill>
         <a:effectLst/>
       </p:bgPr>
@@ -20176,7 +20176,7 @@
     <p:bg>
       <p:bgPr>
         <a:solidFill>
-          <a:srgbClr val="FFFFFF"/>
+          <a:srgbClr val="F5EDE3"/>
         </a:solidFill>
         <a:effectLst/>
       </p:bgPr>
@@ -20750,7 +20750,7 @@
     <p:bg>
       <p:bgPr>
         <a:solidFill>
-          <a:srgbClr val="FFFFFF"/>
+          <a:srgbClr val="F5EDE3"/>
         </a:solidFill>
         <a:effectLst/>
       </p:bgPr>
